--- a/w4_Perceptron_Regression.pptx
+++ b/w4_Perceptron_Regression.pptx
@@ -5,10 +5,10 @@
     <p:sldMasterId id="2147483660" r:id="rId1"/>
   </p:sldMasterIdLst>
   <p:notesMasterIdLst>
-    <p:notesMasterId r:id="rId39"/>
+    <p:notesMasterId r:id="rId42"/>
   </p:notesMasterIdLst>
   <p:handoutMasterIdLst>
-    <p:handoutMasterId r:id="rId40"/>
+    <p:handoutMasterId r:id="rId43"/>
   </p:handoutMasterIdLst>
   <p:sldIdLst>
     <p:sldId id="256" r:id="rId2"/>
@@ -45,9 +45,12 @@
     <p:sldId id="883" r:id="rId33"/>
     <p:sldId id="882" r:id="rId34"/>
     <p:sldId id="884" r:id="rId35"/>
-    <p:sldId id="886" r:id="rId36"/>
-    <p:sldId id="887" r:id="rId37"/>
-    <p:sldId id="885" r:id="rId38"/>
+    <p:sldId id="919" r:id="rId36"/>
+    <p:sldId id="886" r:id="rId37"/>
+    <p:sldId id="887" r:id="rId38"/>
+    <p:sldId id="885" r:id="rId39"/>
+    <p:sldId id="285" r:id="rId40"/>
+    <p:sldId id="284" r:id="rId41"/>
   </p:sldIdLst>
   <p:sldSz cx="12192000" cy="6858000"/>
   <p:notesSz cx="6858000" cy="9144000"/>
@@ -189,9 +192,12 @@
             <p14:sldId id="883"/>
             <p14:sldId id="882"/>
             <p14:sldId id="884"/>
+            <p14:sldId id="919"/>
             <p14:sldId id="886"/>
             <p14:sldId id="887"/>
             <p14:sldId id="885"/>
+            <p14:sldId id="285"/>
+            <p14:sldId id="284"/>
           </p14:sldIdLst>
         </p14:section>
         <p14:section name="자세한 정보" id="{2CC34DB2-6590-42C0-AD4B-A04C6060184E}">
@@ -991,6 +997,242 @@
     <p:extLst>
       <p:ext uri="{BB962C8B-B14F-4D97-AF65-F5344CB8AC3E}">
         <p14:creationId xmlns:p14="http://schemas.microsoft.com/office/powerpoint/2010/main" val="2355199924"/>
+      </p:ext>
+    </p:extLst>
+  </p:cSld>
+  <p:clrMapOvr>
+    <a:masterClrMapping/>
+  </p:clrMapOvr>
+</p:notes>
+</file>
+
+<file path=ppt/notesSlides/notesSlide11.xml><?xml version="1.0" encoding="utf-8"?>
+<p:notes xmlns:a="http://schemas.openxmlformats.org/drawingml/2006/main" xmlns:r="http://schemas.openxmlformats.org/officeDocument/2006/relationships" xmlns:p="http://schemas.openxmlformats.org/presentationml/2006/main">
+  <p:cSld>
+    <p:spTree>
+      <p:nvGrpSpPr>
+        <p:cNvPr id="1" name="">
+          <a:extLst>
+            <a:ext uri="{FF2B5EF4-FFF2-40B4-BE49-F238E27FC236}">
+              <a16:creationId xmlns:a16="http://schemas.microsoft.com/office/drawing/2014/main" id="{BDD1476B-976D-3B9C-929C-0E6C2ECCD32F}"/>
+            </a:ext>
+          </a:extLst>
+        </p:cNvPr>
+        <p:cNvGrpSpPr/>
+        <p:nvPr/>
+      </p:nvGrpSpPr>
+      <p:grpSpPr>
+        <a:xfrm>
+          <a:off x="0" y="0"/>
+          <a:ext cx="0" cy="0"/>
+          <a:chOff x="0" y="0"/>
+          <a:chExt cx="0" cy="0"/>
+        </a:xfrm>
+      </p:grpSpPr>
+      <p:sp>
+        <p:nvSpPr>
+          <p:cNvPr id="2" name="슬라이드 이미지 개체 틀 1">
+            <a:extLst>
+              <a:ext uri="{FF2B5EF4-FFF2-40B4-BE49-F238E27FC236}">
+                <a16:creationId xmlns:a16="http://schemas.microsoft.com/office/drawing/2014/main" id="{3F018413-B452-869B-093F-7FCD8E11BAE0}"/>
+              </a:ext>
+            </a:extLst>
+          </p:cNvPr>
+          <p:cNvSpPr>
+            <a:spLocks noGrp="1" noRot="1" noChangeAspect="1"/>
+          </p:cNvSpPr>
+          <p:nvPr>
+            <p:ph type="sldImg"/>
+          </p:nvPr>
+        </p:nvSpPr>
+        <p:spPr/>
+      </p:sp>
+      <p:sp>
+        <p:nvSpPr>
+          <p:cNvPr id="3" name="슬라이드 노트 개체 틀 2">
+            <a:extLst>
+              <a:ext uri="{FF2B5EF4-FFF2-40B4-BE49-F238E27FC236}">
+                <a16:creationId xmlns:a16="http://schemas.microsoft.com/office/drawing/2014/main" id="{C138A77C-E7F5-2598-FF2B-1405B870E152}"/>
+              </a:ext>
+            </a:extLst>
+          </p:cNvPr>
+          <p:cNvSpPr>
+            <a:spLocks noGrp="1"/>
+          </p:cNvSpPr>
+          <p:nvPr>
+            <p:ph type="body" idx="1"/>
+          </p:nvPr>
+        </p:nvSpPr>
+        <p:spPr/>
+        <p:txBody>
+          <a:bodyPr/>
+          <a:lstStyle/>
+          <a:p>
+            <a:endParaRPr lang="ko-KR" altLang="en-US">
+              <a:latin typeface="맑은 고딕" panose="020B0503020000020004" pitchFamily="50" charset="-127"/>
+              <a:ea typeface="맑은 고딕" panose="020B0503020000020004" pitchFamily="50" charset="-127"/>
+            </a:endParaRPr>
+          </a:p>
+        </p:txBody>
+      </p:sp>
+      <p:sp>
+        <p:nvSpPr>
+          <p:cNvPr id="4" name="슬라이드 번호 개체 틀 3">
+            <a:extLst>
+              <a:ext uri="{FF2B5EF4-FFF2-40B4-BE49-F238E27FC236}">
+                <a16:creationId xmlns:a16="http://schemas.microsoft.com/office/drawing/2014/main" id="{4D1E6329-4B53-5B91-7ED8-0902822AE2F8}"/>
+              </a:ext>
+            </a:extLst>
+          </p:cNvPr>
+          <p:cNvSpPr>
+            <a:spLocks noGrp="1"/>
+          </p:cNvSpPr>
+          <p:nvPr>
+            <p:ph type="sldNum" sz="quarter" idx="5"/>
+          </p:nvPr>
+        </p:nvSpPr>
+        <p:spPr/>
+        <p:txBody>
+          <a:bodyPr/>
+          <a:lstStyle/>
+          <a:p>
+            <a:pPr rtl="0"/>
+            <a:fld id="{DF61EA0F-A667-4B49-8422-0062BC55E249}" type="slidenum">
+              <a:rPr lang="en-US" altLang="ko-KR" smtClean="0">
+                <a:latin typeface="맑은 고딕" panose="020B0503020000020004" pitchFamily="50" charset="-127"/>
+                <a:ea typeface="맑은 고딕" panose="020B0503020000020004" pitchFamily="50" charset="-127"/>
+              </a:rPr>
+              <a:t>39</a:t>
+            </a:fld>
+            <a:endParaRPr lang="ko-KR" altLang="en-US">
+              <a:latin typeface="맑은 고딕" panose="020B0503020000020004" pitchFamily="50" charset="-127"/>
+              <a:ea typeface="맑은 고딕" panose="020B0503020000020004" pitchFamily="50" charset="-127"/>
+            </a:endParaRPr>
+          </a:p>
+        </p:txBody>
+      </p:sp>
+    </p:spTree>
+    <p:extLst>
+      <p:ext uri="{BB962C8B-B14F-4D97-AF65-F5344CB8AC3E}">
+        <p14:creationId xmlns:p14="http://schemas.microsoft.com/office/powerpoint/2010/main" val="4111568415"/>
+      </p:ext>
+    </p:extLst>
+  </p:cSld>
+  <p:clrMapOvr>
+    <a:masterClrMapping/>
+  </p:clrMapOvr>
+</p:notes>
+</file>
+
+<file path=ppt/notesSlides/notesSlide12.xml><?xml version="1.0" encoding="utf-8"?>
+<p:notes xmlns:a="http://schemas.openxmlformats.org/drawingml/2006/main" xmlns:r="http://schemas.openxmlformats.org/officeDocument/2006/relationships" xmlns:p="http://schemas.openxmlformats.org/presentationml/2006/main">
+  <p:cSld>
+    <p:spTree>
+      <p:nvGrpSpPr>
+        <p:cNvPr id="1" name="">
+          <a:extLst>
+            <a:ext uri="{FF2B5EF4-FFF2-40B4-BE49-F238E27FC236}">
+              <a16:creationId xmlns:a16="http://schemas.microsoft.com/office/drawing/2014/main" id="{EC90030A-8C46-08A6-BE42-6D086947E21C}"/>
+            </a:ext>
+          </a:extLst>
+        </p:cNvPr>
+        <p:cNvGrpSpPr/>
+        <p:nvPr/>
+      </p:nvGrpSpPr>
+      <p:grpSpPr>
+        <a:xfrm>
+          <a:off x="0" y="0"/>
+          <a:ext cx="0" cy="0"/>
+          <a:chOff x="0" y="0"/>
+          <a:chExt cx="0" cy="0"/>
+        </a:xfrm>
+      </p:grpSpPr>
+      <p:sp>
+        <p:nvSpPr>
+          <p:cNvPr id="2" name="슬라이드 이미지 개체 틀 1">
+            <a:extLst>
+              <a:ext uri="{FF2B5EF4-FFF2-40B4-BE49-F238E27FC236}">
+                <a16:creationId xmlns:a16="http://schemas.microsoft.com/office/drawing/2014/main" id="{82E5C43A-AB99-1868-ABC5-33973A29D695}"/>
+              </a:ext>
+            </a:extLst>
+          </p:cNvPr>
+          <p:cNvSpPr>
+            <a:spLocks noGrp="1" noRot="1" noChangeAspect="1"/>
+          </p:cNvSpPr>
+          <p:nvPr>
+            <p:ph type="sldImg"/>
+          </p:nvPr>
+        </p:nvSpPr>
+        <p:spPr/>
+      </p:sp>
+      <p:sp>
+        <p:nvSpPr>
+          <p:cNvPr id="3" name="슬라이드 노트 개체 틀 2">
+            <a:extLst>
+              <a:ext uri="{FF2B5EF4-FFF2-40B4-BE49-F238E27FC236}">
+                <a16:creationId xmlns:a16="http://schemas.microsoft.com/office/drawing/2014/main" id="{64CBDB5B-08D5-C381-267F-2F7F812F969F}"/>
+              </a:ext>
+            </a:extLst>
+          </p:cNvPr>
+          <p:cNvSpPr>
+            <a:spLocks noGrp="1"/>
+          </p:cNvSpPr>
+          <p:nvPr>
+            <p:ph type="body" idx="1"/>
+          </p:nvPr>
+        </p:nvSpPr>
+        <p:spPr/>
+        <p:txBody>
+          <a:bodyPr/>
+          <a:lstStyle/>
+          <a:p>
+            <a:endParaRPr lang="ko-KR" altLang="en-US">
+              <a:latin typeface="맑은 고딕" panose="020B0503020000020004" pitchFamily="50" charset="-127"/>
+              <a:ea typeface="맑은 고딕" panose="020B0503020000020004" pitchFamily="50" charset="-127"/>
+            </a:endParaRPr>
+          </a:p>
+        </p:txBody>
+      </p:sp>
+      <p:sp>
+        <p:nvSpPr>
+          <p:cNvPr id="4" name="슬라이드 번호 개체 틀 3">
+            <a:extLst>
+              <a:ext uri="{FF2B5EF4-FFF2-40B4-BE49-F238E27FC236}">
+                <a16:creationId xmlns:a16="http://schemas.microsoft.com/office/drawing/2014/main" id="{F8722BDE-E4A5-6756-345E-02C31D4A2DC8}"/>
+              </a:ext>
+            </a:extLst>
+          </p:cNvPr>
+          <p:cNvSpPr>
+            <a:spLocks noGrp="1"/>
+          </p:cNvSpPr>
+          <p:nvPr>
+            <p:ph type="sldNum" sz="quarter" idx="5"/>
+          </p:nvPr>
+        </p:nvSpPr>
+        <p:spPr/>
+        <p:txBody>
+          <a:bodyPr/>
+          <a:lstStyle/>
+          <a:p>
+            <a:pPr rtl="0"/>
+            <a:fld id="{DF61EA0F-A667-4B49-8422-0062BC55E249}" type="slidenum">
+              <a:rPr lang="en-US" altLang="ko-KR" smtClean="0">
+                <a:latin typeface="맑은 고딕" panose="020B0503020000020004" pitchFamily="50" charset="-127"/>
+                <a:ea typeface="맑은 고딕" panose="020B0503020000020004" pitchFamily="50" charset="-127"/>
+              </a:rPr>
+              <a:t>40</a:t>
+            </a:fld>
+            <a:endParaRPr lang="ko-KR" altLang="en-US">
+              <a:latin typeface="맑은 고딕" panose="020B0503020000020004" pitchFamily="50" charset="-127"/>
+              <a:ea typeface="맑은 고딕" panose="020B0503020000020004" pitchFamily="50" charset="-127"/>
+            </a:endParaRPr>
+          </a:p>
+        </p:txBody>
+      </p:sp>
+    </p:spTree>
+    <p:extLst>
+      <p:ext uri="{BB962C8B-B14F-4D97-AF65-F5344CB8AC3E}">
+        <p14:creationId xmlns:p14="http://schemas.microsoft.com/office/powerpoint/2010/main" val="4291149556"/>
       </p:ext>
     </p:extLst>
   </p:cSld>
@@ -10595,8 +10837,8 @@
           </a:extLst>
         </p:spPr>
       </p:pic>
-      <mc:AlternateContent xmlns:mc="http://schemas.openxmlformats.org/markup-compatibility/2006">
-        <mc:Choice xmlns:a14="http://schemas.microsoft.com/office/drawing/2010/main" Requires="a14">
+      <mc:AlternateContent xmlns:mc="http://schemas.openxmlformats.org/markup-compatibility/2006" xmlns:a14="http://schemas.microsoft.com/office/drawing/2010/main">
+        <mc:Choice Requires="a14">
           <p:sp>
             <p:nvSpPr>
               <p:cNvPr id="5" name="내용 개체 틀 2">
@@ -10808,7 +11050,7 @@
             </p:txBody>
           </p:sp>
         </mc:Choice>
-        <mc:Fallback>
+        <mc:Fallback xmlns="">
           <p:sp>
             <p:nvSpPr>
               <p:cNvPr id="5" name="내용 개체 틀 2">
@@ -11307,8 +11549,8 @@
           </a:p>
         </p:txBody>
       </p:sp>
-      <mc:AlternateContent xmlns:mc="http://schemas.openxmlformats.org/markup-compatibility/2006">
-        <mc:Choice xmlns:a14="http://schemas.microsoft.com/office/drawing/2010/main" Requires="a14">
+      <mc:AlternateContent xmlns:mc="http://schemas.openxmlformats.org/markup-compatibility/2006" xmlns:a14="http://schemas.microsoft.com/office/drawing/2010/main">
+        <mc:Choice Requires="a14">
           <p:sp>
             <p:nvSpPr>
               <p:cNvPr id="5" name="내용 개체 틀 2">
@@ -11536,7 +11778,7 @@
             </p:txBody>
           </p:sp>
         </mc:Choice>
-        <mc:Fallback>
+        <mc:Fallback xmlns="">
           <p:sp>
             <p:nvSpPr>
               <p:cNvPr id="5" name="내용 개체 틀 2">
@@ -14084,8 +14326,8 @@
           </a:p>
         </p:txBody>
       </p:sp>
-      <mc:AlternateContent xmlns:mc="http://schemas.openxmlformats.org/markup-compatibility/2006">
-        <mc:Choice xmlns:a14="http://schemas.microsoft.com/office/drawing/2010/main" Requires="a14">
+      <mc:AlternateContent xmlns:mc="http://schemas.openxmlformats.org/markup-compatibility/2006" xmlns:a14="http://schemas.microsoft.com/office/drawing/2010/main">
+        <mc:Choice Requires="a14">
           <p:sp>
             <p:nvSpPr>
               <p:cNvPr id="5" name="내용 개체 틀 2">
@@ -14297,7 +14539,7 @@
             </p:txBody>
           </p:sp>
         </mc:Choice>
-        <mc:Fallback>
+        <mc:Fallback xmlns="">
           <p:sp>
             <p:nvSpPr>
               <p:cNvPr id="5" name="내용 개체 틀 2">
@@ -14432,8 +14674,8 @@
           </a:p>
         </p:txBody>
       </p:sp>
-      <mc:AlternateContent xmlns:mc="http://schemas.openxmlformats.org/markup-compatibility/2006">
-        <mc:Choice xmlns:a14="http://schemas.microsoft.com/office/drawing/2010/main" Requires="a14">
+      <mc:AlternateContent xmlns:mc="http://schemas.openxmlformats.org/markup-compatibility/2006" xmlns:a14="http://schemas.microsoft.com/office/drawing/2010/main">
+        <mc:Choice Requires="a14">
           <p:sp>
             <p:nvSpPr>
               <p:cNvPr id="16" name="TextBox 15">
@@ -14516,7 +14758,7 @@
             </p:txBody>
           </p:sp>
         </mc:Choice>
-        <mc:Fallback>
+        <mc:Fallback xmlns="">
           <p:sp>
             <p:nvSpPr>
               <p:cNvPr id="16" name="TextBox 15">
@@ -14608,8 +14850,8 @@
           </a:extLst>
         </p:spPr>
       </p:pic>
-      <mc:AlternateContent xmlns:mc="http://schemas.openxmlformats.org/markup-compatibility/2006">
-        <mc:Choice xmlns:a14="http://schemas.microsoft.com/office/drawing/2010/main" Requires="a14">
+      <mc:AlternateContent xmlns:mc="http://schemas.openxmlformats.org/markup-compatibility/2006" xmlns:a14="http://schemas.microsoft.com/office/drawing/2010/main">
+        <mc:Choice Requires="a14">
           <p:sp>
             <p:nvSpPr>
               <p:cNvPr id="18" name="TextBox 17">
@@ -14668,7 +14910,7 @@
             </p:txBody>
           </p:sp>
         </mc:Choice>
-        <mc:Fallback>
+        <mc:Fallback xmlns="">
           <p:sp>
             <p:nvSpPr>
               <p:cNvPr id="18" name="TextBox 17">
@@ -21702,6 +21944,1009 @@
         <p:cNvPr id="1" name="">
           <a:extLst>
             <a:ext uri="{FF2B5EF4-FFF2-40B4-BE49-F238E27FC236}">
+              <a16:creationId xmlns:a16="http://schemas.microsoft.com/office/drawing/2014/main" id="{7A56E815-8EE0-6D4F-49BA-C6278346B4B0}"/>
+            </a:ext>
+          </a:extLst>
+        </p:cNvPr>
+        <p:cNvGrpSpPr/>
+        <p:nvPr/>
+      </p:nvGrpSpPr>
+      <p:grpSpPr>
+        <a:xfrm>
+          <a:off x="0" y="0"/>
+          <a:ext cx="0" cy="0"/>
+          <a:chOff x="0" y="0"/>
+          <a:chExt cx="0" cy="0"/>
+        </a:xfrm>
+      </p:grpSpPr>
+      <p:pic>
+        <p:nvPicPr>
+          <p:cNvPr id="6146" name="Picture 2" descr="Machine learning diagram">
+            <a:extLst>
+              <a:ext uri="{FF2B5EF4-FFF2-40B4-BE49-F238E27FC236}">
+                <a16:creationId xmlns:a16="http://schemas.microsoft.com/office/drawing/2014/main" id="{31270F37-CD94-038F-97E6-AE82E6BD2C5F}"/>
+              </a:ext>
+            </a:extLst>
+          </p:cNvPr>
+          <p:cNvPicPr>
+            <a:picLocks noChangeAspect="1" noChangeArrowheads="1"/>
+          </p:cNvPicPr>
+          <p:nvPr/>
+        </p:nvPicPr>
+        <p:blipFill>
+          <a:blip r:embed="rId2">
+            <a:extLst>
+              <a:ext uri="{28A0092B-C50C-407E-A947-70E740481C1C}">
+                <a14:useLocalDpi xmlns:a14="http://schemas.microsoft.com/office/drawing/2010/main" val="0"/>
+              </a:ext>
+            </a:extLst>
+          </a:blip>
+          <a:srcRect/>
+          <a:stretch>
+            <a:fillRect/>
+          </a:stretch>
+        </p:blipFill>
+        <p:spPr bwMode="auto">
+          <a:xfrm>
+            <a:off x="2164214" y="2509570"/>
+            <a:ext cx="7863572" cy="4048750"/>
+          </a:xfrm>
+          <a:prstGeom prst="rect">
+            <a:avLst/>
+          </a:prstGeom>
+          <a:noFill/>
+          <a:extLst>
+            <a:ext uri="{909E8E84-426E-40DD-AFC4-6F175D3DCCD1}">
+              <a14:hiddenFill xmlns:a14="http://schemas.microsoft.com/office/drawing/2010/main">
+                <a:solidFill>
+                  <a:srgbClr val="FFFFFF"/>
+                </a:solidFill>
+              </a14:hiddenFill>
+            </a:ext>
+          </a:extLst>
+        </p:spPr>
+      </p:pic>
+      <p:sp>
+        <p:nvSpPr>
+          <p:cNvPr id="16" name="슬라이드 번호 개체 틀 3">
+            <a:extLst>
+              <a:ext uri="{FF2B5EF4-FFF2-40B4-BE49-F238E27FC236}">
+                <a16:creationId xmlns:a16="http://schemas.microsoft.com/office/drawing/2014/main" id="{4DB45C27-D83E-EE3E-E745-CF19291C4EF9}"/>
+              </a:ext>
+            </a:extLst>
+          </p:cNvPr>
+          <p:cNvSpPr>
+            <a:spLocks noGrp="1"/>
+          </p:cNvSpPr>
+          <p:nvPr>
+            <p:ph type="sldNum" sz="quarter" idx="12"/>
+          </p:nvPr>
+        </p:nvSpPr>
+        <p:spPr>
+          <a:xfrm>
+            <a:off x="10884337" y="6273707"/>
+            <a:ext cx="753349" cy="365030"/>
+          </a:xfrm>
+        </p:spPr>
+        <p:txBody>
+          <a:bodyPr/>
+          <a:lstStyle/>
+          <a:p>
+            <a:fld id="{D57F1E4F-1CFF-5643-939E-217C01CDF565}" type="slidenum">
+              <a:rPr lang="en-US" sz="2000" smtClean="0"/>
+              <a:pPr/>
+              <a:t>35</a:t>
+            </a:fld>
+            <a:endParaRPr lang="en-US" sz="2000" dirty="0"/>
+          </a:p>
+        </p:txBody>
+      </p:sp>
+      <p:sp>
+        <p:nvSpPr>
+          <p:cNvPr id="30" name="TextBox 29">
+            <a:extLst>
+              <a:ext uri="{FF2B5EF4-FFF2-40B4-BE49-F238E27FC236}">
+                <a16:creationId xmlns:a16="http://schemas.microsoft.com/office/drawing/2014/main" id="{F1F2B967-4D3A-6B9F-38C9-F2A6A2228496}"/>
+              </a:ext>
+            </a:extLst>
+          </p:cNvPr>
+          <p:cNvSpPr txBox="1"/>
+          <p:nvPr/>
+        </p:nvSpPr>
+        <p:spPr>
+          <a:xfrm>
+            <a:off x="900982" y="1358354"/>
+            <a:ext cx="8814518" cy="646331"/>
+          </a:xfrm>
+          <a:prstGeom prst="rect">
+            <a:avLst/>
+          </a:prstGeom>
+          <a:noFill/>
+        </p:spPr>
+        <p:txBody>
+          <a:bodyPr wrap="square">
+            <a:spAutoFit/>
+          </a:bodyPr>
+          <a:lstStyle/>
+          <a:p>
+            <a:pPr marL="285750" indent="-285750">
+              <a:buFont typeface="Wingdings" panose="05000000000000000000" pitchFamily="2" charset="2"/>
+              <a:buChar char="§"/>
+            </a:pPr>
+            <a:r>
+              <a:rPr lang="ko-KR" altLang="en-US" dirty="0">
+                <a:latin typeface="맑은 고딕 Semilight" panose="020B0502040204020203" pitchFamily="50" charset="-127"/>
+                <a:ea typeface="맑은 고딕 Semilight" panose="020B0502040204020203" pitchFamily="50" charset="-127"/>
+                <a:cs typeface="맑은 고딕 Semilight" panose="020B0502040204020203" pitchFamily="50" charset="-127"/>
+              </a:rPr>
+              <a:t>아래</a:t>
+            </a:r>
+            <a:r>
+              <a:rPr lang="en-US" altLang="ko-KR" dirty="0">
+                <a:latin typeface="맑은 고딕 Semilight" panose="020B0502040204020203" pitchFamily="50" charset="-127"/>
+                <a:ea typeface="맑은 고딕 Semilight" panose="020B0502040204020203" pitchFamily="50" charset="-127"/>
+                <a:cs typeface="맑은 고딕 Semilight" panose="020B0502040204020203" pitchFamily="50" charset="-127"/>
+              </a:rPr>
+              <a:t> </a:t>
+            </a:r>
+            <a:r>
+              <a:rPr lang="ko-KR" altLang="en-US" dirty="0">
+                <a:latin typeface="맑은 고딕 Semilight" panose="020B0502040204020203" pitchFamily="50" charset="-127"/>
+                <a:ea typeface="맑은 고딕 Semilight" panose="020B0502040204020203" pitchFamily="50" charset="-127"/>
+                <a:cs typeface="맑은 고딕 Semilight" panose="020B0502040204020203" pitchFamily="50" charset="-127"/>
+              </a:rPr>
+              <a:t>그림의</a:t>
+            </a:r>
+            <a:r>
+              <a:rPr lang="en-US" altLang="ko-KR" dirty="0">
+                <a:latin typeface="맑은 고딕 Semilight" panose="020B0502040204020203" pitchFamily="50" charset="-127"/>
+                <a:ea typeface="맑은 고딕 Semilight" panose="020B0502040204020203" pitchFamily="50" charset="-127"/>
+                <a:cs typeface="맑은 고딕 Semilight" panose="020B0502040204020203" pitchFamily="50" charset="-127"/>
+              </a:rPr>
+              <a:t> </a:t>
+            </a:r>
+            <a:r>
+              <a:rPr lang="ko-KR" altLang="en-US" dirty="0">
+                <a:latin typeface="맑은 고딕 Semilight" panose="020B0502040204020203" pitchFamily="50" charset="-127"/>
+                <a:ea typeface="맑은 고딕 Semilight" panose="020B0502040204020203" pitchFamily="50" charset="-127"/>
+                <a:cs typeface="맑은 고딕 Semilight" panose="020B0502040204020203" pitchFamily="50" charset="-127"/>
+              </a:rPr>
+              <a:t>인공지능망을</a:t>
+            </a:r>
+            <a:r>
+              <a:rPr lang="en-US" altLang="ko-KR" dirty="0">
+                <a:latin typeface="맑은 고딕 Semilight" panose="020B0502040204020203" pitchFamily="50" charset="-127"/>
+                <a:ea typeface="맑은 고딕 Semilight" panose="020B0502040204020203" pitchFamily="50" charset="-127"/>
+                <a:cs typeface="맑은 고딕 Semilight" panose="020B0502040204020203" pitchFamily="50" charset="-127"/>
+              </a:rPr>
+              <a:t> </a:t>
+            </a:r>
+            <a:r>
+              <a:rPr lang="ko-KR" altLang="en-US" dirty="0">
+                <a:latin typeface="맑은 고딕 Semilight" panose="020B0502040204020203" pitchFamily="50" charset="-127"/>
+                <a:ea typeface="맑은 고딕 Semilight" panose="020B0502040204020203" pitchFamily="50" charset="-127"/>
+                <a:cs typeface="맑은 고딕 Semilight" panose="020B0502040204020203" pitchFamily="50" charset="-127"/>
+              </a:rPr>
+              <a:t>행렬과</a:t>
+            </a:r>
+            <a:r>
+              <a:rPr lang="en-US" altLang="ko-KR" dirty="0">
+                <a:latin typeface="맑은 고딕 Semilight" panose="020B0502040204020203" pitchFamily="50" charset="-127"/>
+                <a:ea typeface="맑은 고딕 Semilight" panose="020B0502040204020203" pitchFamily="50" charset="-127"/>
+                <a:cs typeface="맑은 고딕 Semilight" panose="020B0502040204020203" pitchFamily="50" charset="-127"/>
+              </a:rPr>
+              <a:t> </a:t>
+            </a:r>
+            <a:r>
+              <a:rPr lang="ko-KR" altLang="en-US" dirty="0">
+                <a:latin typeface="맑은 고딕 Semilight" panose="020B0502040204020203" pitchFamily="50" charset="-127"/>
+                <a:ea typeface="맑은 고딕 Semilight" panose="020B0502040204020203" pitchFamily="50" charset="-127"/>
+                <a:cs typeface="맑은 고딕 Semilight" panose="020B0502040204020203" pitchFamily="50" charset="-127"/>
+              </a:rPr>
+              <a:t>벡터의</a:t>
+            </a:r>
+            <a:r>
+              <a:rPr lang="en-US" altLang="ko-KR" dirty="0">
+                <a:latin typeface="맑은 고딕 Semilight" panose="020B0502040204020203" pitchFamily="50" charset="-127"/>
+                <a:ea typeface="맑은 고딕 Semilight" panose="020B0502040204020203" pitchFamily="50" charset="-127"/>
+                <a:cs typeface="맑은 고딕 Semilight" panose="020B0502040204020203" pitchFamily="50" charset="-127"/>
+              </a:rPr>
+              <a:t> shape</a:t>
+            </a:r>
+            <a:r>
+              <a:rPr lang="ko-KR" altLang="en-US" dirty="0">
+                <a:latin typeface="맑은 고딕 Semilight" panose="020B0502040204020203" pitchFamily="50" charset="-127"/>
+                <a:ea typeface="맑은 고딕 Semilight" panose="020B0502040204020203" pitchFamily="50" charset="-127"/>
+                <a:cs typeface="맑은 고딕 Semilight" panose="020B0502040204020203" pitchFamily="50" charset="-127"/>
+              </a:rPr>
+              <a:t>과 내적으로</a:t>
+            </a:r>
+            <a:r>
+              <a:rPr lang="en-US" altLang="ko-KR" dirty="0">
+                <a:latin typeface="맑은 고딕 Semilight" panose="020B0502040204020203" pitchFamily="50" charset="-127"/>
+                <a:ea typeface="맑은 고딕 Semilight" panose="020B0502040204020203" pitchFamily="50" charset="-127"/>
+                <a:cs typeface="맑은 고딕 Semilight" panose="020B0502040204020203" pitchFamily="50" charset="-127"/>
+              </a:rPr>
+              <a:t> </a:t>
+            </a:r>
+            <a:r>
+              <a:rPr lang="ko-KR" altLang="en-US" dirty="0">
+                <a:latin typeface="맑은 고딕 Semilight" panose="020B0502040204020203" pitchFamily="50" charset="-127"/>
+                <a:ea typeface="맑은 고딕 Semilight" panose="020B0502040204020203" pitchFamily="50" charset="-127"/>
+                <a:cs typeface="맑은 고딕 Semilight" panose="020B0502040204020203" pitchFamily="50" charset="-127"/>
+              </a:rPr>
+              <a:t>표현하라</a:t>
+            </a:r>
+            <a:r>
+              <a:rPr lang="en-US" altLang="ko-KR" dirty="0">
+                <a:latin typeface="맑은 고딕 Semilight" panose="020B0502040204020203" pitchFamily="50" charset="-127"/>
+                <a:ea typeface="맑은 고딕 Semilight" panose="020B0502040204020203" pitchFamily="50" charset="-127"/>
+                <a:cs typeface="맑은 고딕 Semilight" panose="020B0502040204020203" pitchFamily="50" charset="-127"/>
+              </a:rPr>
+              <a:t> </a:t>
+            </a:r>
+          </a:p>
+          <a:p>
+            <a:pPr marL="285750" indent="-285750">
+              <a:buFont typeface="Wingdings" panose="05000000000000000000" pitchFamily="2" charset="2"/>
+              <a:buChar char="§"/>
+            </a:pPr>
+            <a:r>
+              <a:rPr lang="ko-KR" altLang="en-US" dirty="0">
+                <a:latin typeface="맑은 고딕 Semilight" panose="020B0502040204020203" pitchFamily="50" charset="-127"/>
+                <a:ea typeface="맑은 고딕 Semilight" panose="020B0502040204020203" pitchFamily="50" charset="-127"/>
+                <a:cs typeface="맑은 고딕 Semilight" panose="020B0502040204020203" pitchFamily="50" charset="-127"/>
+              </a:rPr>
+              <a:t>행렬 </a:t>
+            </a:r>
+            <a:r>
+              <a:rPr lang="ko-KR" altLang="en-US" dirty="0" err="1">
+                <a:latin typeface="맑은 고딕 Semilight" panose="020B0502040204020203" pitchFamily="50" charset="-127"/>
+                <a:ea typeface="맑은 고딕 Semilight" panose="020B0502040204020203" pitchFamily="50" charset="-127"/>
+                <a:cs typeface="맑은 고딕 Semilight" panose="020B0502040204020203" pitchFamily="50" charset="-127"/>
+              </a:rPr>
+              <a:t>재변환</a:t>
+            </a:r>
+            <a:r>
+              <a:rPr lang="en-US" altLang="ko-KR" dirty="0">
+                <a:latin typeface="맑은 고딕 Semilight" panose="020B0502040204020203" pitchFamily="50" charset="-127"/>
+                <a:ea typeface="맑은 고딕 Semilight" panose="020B0502040204020203" pitchFamily="50" charset="-127"/>
+                <a:cs typeface="맑은 고딕 Semilight" panose="020B0502040204020203" pitchFamily="50" charset="-127"/>
+              </a:rPr>
+              <a:t> </a:t>
+            </a:r>
+            <a:r>
+              <a:rPr lang="ko-KR" altLang="en-US" dirty="0">
+                <a:latin typeface="맑은 고딕 Semilight" panose="020B0502040204020203" pitchFamily="50" charset="-127"/>
+                <a:ea typeface="맑은 고딕 Semilight" panose="020B0502040204020203" pitchFamily="50" charset="-127"/>
+                <a:cs typeface="맑은 고딕 Semilight" panose="020B0502040204020203" pitchFamily="50" charset="-127"/>
+              </a:rPr>
+              <a:t>형태 </a:t>
+            </a:r>
+            <a:r>
+              <a:rPr lang="en-US" altLang="ko-KR" dirty="0">
+                <a:latin typeface="맑은 고딕 Semilight" panose="020B0502040204020203" pitchFamily="50" charset="-127"/>
+                <a:ea typeface="맑은 고딕 Semilight" panose="020B0502040204020203" pitchFamily="50" charset="-127"/>
+                <a:cs typeface="맑은 고딕 Semilight" panose="020B0502040204020203" pitchFamily="50" charset="-127"/>
+              </a:rPr>
+              <a:t>(Representation of Matrix Form)</a:t>
+            </a:r>
+          </a:p>
+        </p:txBody>
+      </p:sp>
+      <mc:AlternateContent xmlns:mc="http://schemas.openxmlformats.org/markup-compatibility/2006">
+        <mc:Choice xmlns:a14="http://schemas.microsoft.com/office/drawing/2010/main" Requires="a14">
+          <p:sp>
+            <p:nvSpPr>
+              <p:cNvPr id="32" name="TextBox 31">
+                <a:extLst>
+                  <a:ext uri="{FF2B5EF4-FFF2-40B4-BE49-F238E27FC236}">
+                    <a16:creationId xmlns:a16="http://schemas.microsoft.com/office/drawing/2014/main" id="{3F57AEF1-25C0-B3CE-02E0-5D8B8A57783D}"/>
+                  </a:ext>
+                </a:extLst>
+              </p:cNvPr>
+              <p:cNvSpPr txBox="1"/>
+              <p:nvPr/>
+            </p:nvSpPr>
+            <p:spPr>
+              <a:xfrm>
+                <a:off x="8146350" y="2128510"/>
+                <a:ext cx="1062533" cy="400110"/>
+              </a:xfrm>
+              <a:prstGeom prst="rect">
+                <a:avLst/>
+              </a:prstGeom>
+              <a:solidFill>
+                <a:schemeClr val="bg2">
+                  <a:lumMod val="20000"/>
+                  <a:lumOff val="80000"/>
+                </a:schemeClr>
+              </a:solidFill>
+            </p:spPr>
+            <p:txBody>
+              <a:bodyPr wrap="square">
+                <a:spAutoFit/>
+              </a:bodyPr>
+              <a:lstStyle/>
+              <a:p>
+                <a:pPr/>
+                <a14:m>
+                  <m:oMathPara xmlns:m="http://schemas.openxmlformats.org/officeDocument/2006/math">
+                    <m:oMathParaPr>
+                      <m:jc m:val="centerGroup"/>
+                    </m:oMathParaPr>
+                    <m:oMath xmlns:m="http://schemas.openxmlformats.org/officeDocument/2006/math">
+                      <m:r>
+                        <a:rPr lang="en-US" altLang="ko-KR" sz="2000" i="1" smtClean="0">
+                          <a:latin typeface="Cambria Math" panose="02040503050406030204" pitchFamily="18" charset="0"/>
+                        </a:rPr>
+                        <m:t>𝑦</m:t>
+                      </m:r>
+                      <m:r>
+                        <a:rPr lang="en-US" altLang="ko-KR" sz="2000" i="1" smtClean="0">
+                          <a:latin typeface="Cambria Math" panose="02040503050406030204" pitchFamily="18" charset="0"/>
+                        </a:rPr>
+                        <m:t>=</m:t>
+                      </m:r>
+                      <m:r>
+                        <a:rPr lang="en-US" altLang="ko-KR" sz="2000" i="1" smtClean="0">
+                          <a:latin typeface="Cambria Math" panose="02040503050406030204" pitchFamily="18" charset="0"/>
+                        </a:rPr>
+                        <m:t>𝐴𝑘</m:t>
+                      </m:r>
+                    </m:oMath>
+                  </m:oMathPara>
+                </a14:m>
+                <a:endParaRPr lang="ko-KR" altLang="en-US" sz="2000" i="1" dirty="0"/>
+              </a:p>
+            </p:txBody>
+          </p:sp>
+        </mc:Choice>
+        <mc:Fallback>
+          <p:sp>
+            <p:nvSpPr>
+              <p:cNvPr id="32" name="TextBox 31">
+                <a:extLst>
+                  <a:ext uri="{FF2B5EF4-FFF2-40B4-BE49-F238E27FC236}">
+                    <a16:creationId xmlns:a16="http://schemas.microsoft.com/office/drawing/2014/main" id="{3F57AEF1-25C0-B3CE-02E0-5D8B8A57783D}"/>
+                  </a:ext>
+                </a:extLst>
+              </p:cNvPr>
+              <p:cNvSpPr txBox="1">
+                <a:spLocks noRot="1" noChangeAspect="1" noMove="1" noResize="1" noEditPoints="1" noAdjustHandles="1" noChangeArrowheads="1" noChangeShapeType="1" noTextEdit="1"/>
+              </p:cNvSpPr>
+              <p:nvPr/>
+            </p:nvSpPr>
+            <p:spPr>
+              <a:xfrm>
+                <a:off x="8146350" y="2128510"/>
+                <a:ext cx="1062533" cy="400110"/>
+              </a:xfrm>
+              <a:prstGeom prst="rect">
+                <a:avLst/>
+              </a:prstGeom>
+              <a:blipFill>
+                <a:blip r:embed="rId3"/>
+                <a:stretch>
+                  <a:fillRect b="-10606"/>
+                </a:stretch>
+              </a:blipFill>
+            </p:spPr>
+            <p:txBody>
+              <a:bodyPr/>
+              <a:lstStyle/>
+              <a:p>
+                <a:r>
+                  <a:rPr lang="ko-KR" altLang="en-US">
+                    <a:noFill/>
+                  </a:rPr>
+                  <a:t> </a:t>
+                </a:r>
+              </a:p>
+            </p:txBody>
+          </p:sp>
+        </mc:Fallback>
+      </mc:AlternateContent>
+      <p:sp>
+        <p:nvSpPr>
+          <p:cNvPr id="2" name="제목 1">
+            <a:extLst>
+              <a:ext uri="{FF2B5EF4-FFF2-40B4-BE49-F238E27FC236}">
+                <a16:creationId xmlns:a16="http://schemas.microsoft.com/office/drawing/2014/main" id="{01B753E0-A9F7-C1CD-878C-99AD89CDA285}"/>
+              </a:ext>
+            </a:extLst>
+          </p:cNvPr>
+          <p:cNvSpPr>
+            <a:spLocks noGrp="1"/>
+          </p:cNvSpPr>
+          <p:nvPr>
+            <p:ph type="title"/>
+          </p:nvPr>
+        </p:nvSpPr>
+        <p:spPr>
+          <a:xfrm>
+            <a:off x="885198" y="566397"/>
+            <a:ext cx="10364451" cy="514958"/>
+          </a:xfrm>
+        </p:spPr>
+        <p:txBody>
+          <a:bodyPr>
+            <a:normAutofit fontScale="90000"/>
+          </a:bodyPr>
+          <a:lstStyle/>
+          <a:p>
+            <a:pPr algn="ctr"/>
+            <a:r>
+              <a:rPr lang="en-US" altLang="ko-KR" cap="none" dirty="0"/>
+              <a:t>Deep learning </a:t>
+            </a:r>
+            <a:endParaRPr lang="ko-KR" altLang="en-US" cap="none" dirty="0"/>
+          </a:p>
+        </p:txBody>
+      </p:sp>
+      <mc:AlternateContent xmlns:mc="http://schemas.openxmlformats.org/markup-compatibility/2006">
+        <mc:Choice xmlns:a14="http://schemas.microsoft.com/office/drawing/2010/main" Requires="a14">
+          <p:sp>
+            <p:nvSpPr>
+              <p:cNvPr id="3" name="TextBox 2">
+                <a:extLst>
+                  <a:ext uri="{FF2B5EF4-FFF2-40B4-BE49-F238E27FC236}">
+                    <a16:creationId xmlns:a16="http://schemas.microsoft.com/office/drawing/2014/main" id="{8C74F41C-ACA8-BC68-D537-75F1A153ECFB}"/>
+                  </a:ext>
+                </a:extLst>
+              </p:cNvPr>
+              <p:cNvSpPr txBox="1"/>
+              <p:nvPr/>
+            </p:nvSpPr>
+            <p:spPr>
+              <a:xfrm>
+                <a:off x="6292628" y="2128510"/>
+                <a:ext cx="1130064" cy="400110"/>
+              </a:xfrm>
+              <a:prstGeom prst="rect">
+                <a:avLst/>
+              </a:prstGeom>
+              <a:solidFill>
+                <a:schemeClr val="bg2">
+                  <a:lumMod val="20000"/>
+                  <a:lumOff val="80000"/>
+                </a:schemeClr>
+              </a:solidFill>
+            </p:spPr>
+            <p:txBody>
+              <a:bodyPr wrap="square">
+                <a:spAutoFit/>
+              </a:bodyPr>
+              <a:lstStyle/>
+              <a:p>
+                <a:pPr/>
+                <a14:m>
+                  <m:oMathPara xmlns:m="http://schemas.openxmlformats.org/officeDocument/2006/math">
+                    <m:oMathParaPr>
+                      <m:jc m:val="centerGroup"/>
+                    </m:oMathParaPr>
+                    <m:oMath xmlns:m="http://schemas.openxmlformats.org/officeDocument/2006/math">
+                      <m:r>
+                        <a:rPr lang="en-US" altLang="ko-KR" sz="2000" i="1">
+                          <a:latin typeface="Cambria Math" panose="02040503050406030204" pitchFamily="18" charset="0"/>
+                        </a:rPr>
+                        <m:t>𝑘</m:t>
+                      </m:r>
+                      <m:r>
+                        <a:rPr lang="en-US" altLang="ko-KR" sz="2000" i="1" smtClean="0">
+                          <a:latin typeface="Cambria Math" panose="02040503050406030204" pitchFamily="18" charset="0"/>
+                        </a:rPr>
+                        <m:t>=</m:t>
+                      </m:r>
+                      <m:r>
+                        <a:rPr lang="en-US" altLang="ko-KR" sz="2000" b="0" i="1" smtClean="0">
+                          <a:latin typeface="Cambria Math" panose="02040503050406030204" pitchFamily="18" charset="0"/>
+                        </a:rPr>
+                        <m:t>𝐵𝑧</m:t>
+                      </m:r>
+                    </m:oMath>
+                  </m:oMathPara>
+                </a14:m>
+                <a:endParaRPr lang="ko-KR" altLang="en-US" sz="2000" i="1" dirty="0"/>
+              </a:p>
+            </p:txBody>
+          </p:sp>
+        </mc:Choice>
+        <mc:Fallback>
+          <p:sp>
+            <p:nvSpPr>
+              <p:cNvPr id="3" name="TextBox 2">
+                <a:extLst>
+                  <a:ext uri="{FF2B5EF4-FFF2-40B4-BE49-F238E27FC236}">
+                    <a16:creationId xmlns:a16="http://schemas.microsoft.com/office/drawing/2014/main" id="{8C74F41C-ACA8-BC68-D537-75F1A153ECFB}"/>
+                  </a:ext>
+                </a:extLst>
+              </p:cNvPr>
+              <p:cNvSpPr txBox="1">
+                <a:spLocks noRot="1" noChangeAspect="1" noMove="1" noResize="1" noEditPoints="1" noAdjustHandles="1" noChangeArrowheads="1" noChangeShapeType="1" noTextEdit="1"/>
+              </p:cNvSpPr>
+              <p:nvPr/>
+            </p:nvSpPr>
+            <p:spPr>
+              <a:xfrm>
+                <a:off x="6292628" y="2128510"/>
+                <a:ext cx="1130064" cy="400110"/>
+              </a:xfrm>
+              <a:prstGeom prst="rect">
+                <a:avLst/>
+              </a:prstGeom>
+              <a:blipFill>
+                <a:blip r:embed="rId4"/>
+                <a:stretch>
+                  <a:fillRect/>
+                </a:stretch>
+              </a:blipFill>
+            </p:spPr>
+            <p:txBody>
+              <a:bodyPr/>
+              <a:lstStyle/>
+              <a:p>
+                <a:r>
+                  <a:rPr lang="ko-KR" altLang="en-US">
+                    <a:noFill/>
+                  </a:rPr>
+                  <a:t> </a:t>
+                </a:r>
+              </a:p>
+            </p:txBody>
+          </p:sp>
+        </mc:Fallback>
+      </mc:AlternateContent>
+      <mc:AlternateContent xmlns:mc="http://schemas.openxmlformats.org/markup-compatibility/2006">
+        <mc:Choice xmlns:a14="http://schemas.microsoft.com/office/drawing/2010/main" Requires="a14">
+          <p:sp>
+            <p:nvSpPr>
+              <p:cNvPr id="6" name="TextBox 5">
+                <a:extLst>
+                  <a:ext uri="{FF2B5EF4-FFF2-40B4-BE49-F238E27FC236}">
+                    <a16:creationId xmlns:a16="http://schemas.microsoft.com/office/drawing/2014/main" id="{FF60FEA2-D7E8-7C24-AE89-3CF0ED6080C8}"/>
+                  </a:ext>
+                </a:extLst>
+              </p:cNvPr>
+              <p:cNvSpPr txBox="1"/>
+              <p:nvPr/>
+            </p:nvSpPr>
+            <p:spPr>
+              <a:xfrm>
+                <a:off x="2664307" y="2128510"/>
+                <a:ext cx="796075" cy="400110"/>
+              </a:xfrm>
+              <a:prstGeom prst="rect">
+                <a:avLst/>
+              </a:prstGeom>
+              <a:solidFill>
+                <a:schemeClr val="bg2">
+                  <a:lumMod val="20000"/>
+                  <a:lumOff val="80000"/>
+                </a:schemeClr>
+              </a:solidFill>
+            </p:spPr>
+            <p:txBody>
+              <a:bodyPr wrap="square">
+                <a:spAutoFit/>
+              </a:bodyPr>
+              <a:lstStyle/>
+              <a:p>
+                <a:pPr/>
+                <a14:m>
+                  <m:oMathPara xmlns:m="http://schemas.openxmlformats.org/officeDocument/2006/math">
+                    <m:oMathParaPr>
+                      <m:jc m:val="centerGroup"/>
+                    </m:oMathParaPr>
+                    <m:oMath xmlns:m="http://schemas.openxmlformats.org/officeDocument/2006/math">
+                      <m:r>
+                        <a:rPr lang="en-US" altLang="ko-KR" sz="2000" smtClean="0">
+                          <a:latin typeface="Cambria Math" panose="02040503050406030204" pitchFamily="18" charset="0"/>
+                        </a:rPr>
+                        <m:t>𝑥</m:t>
+                      </m:r>
+                    </m:oMath>
+                  </m:oMathPara>
+                </a14:m>
+                <a:endParaRPr lang="ko-KR" altLang="en-US" sz="2000" dirty="0"/>
+              </a:p>
+            </p:txBody>
+          </p:sp>
+        </mc:Choice>
+        <mc:Fallback>
+          <p:sp>
+            <p:nvSpPr>
+              <p:cNvPr id="6" name="TextBox 5">
+                <a:extLst>
+                  <a:ext uri="{FF2B5EF4-FFF2-40B4-BE49-F238E27FC236}">
+                    <a16:creationId xmlns:a16="http://schemas.microsoft.com/office/drawing/2014/main" id="{FF60FEA2-D7E8-7C24-AE89-3CF0ED6080C8}"/>
+                  </a:ext>
+                </a:extLst>
+              </p:cNvPr>
+              <p:cNvSpPr txBox="1">
+                <a:spLocks noRot="1" noChangeAspect="1" noMove="1" noResize="1" noEditPoints="1" noAdjustHandles="1" noChangeArrowheads="1" noChangeShapeType="1" noTextEdit="1"/>
+              </p:cNvSpPr>
+              <p:nvPr/>
+            </p:nvSpPr>
+            <p:spPr>
+              <a:xfrm>
+                <a:off x="2664307" y="2128510"/>
+                <a:ext cx="796075" cy="400110"/>
+              </a:xfrm>
+              <a:prstGeom prst="rect">
+                <a:avLst/>
+              </a:prstGeom>
+              <a:blipFill>
+                <a:blip r:embed="rId5"/>
+                <a:stretch>
+                  <a:fillRect/>
+                </a:stretch>
+              </a:blipFill>
+            </p:spPr>
+            <p:txBody>
+              <a:bodyPr/>
+              <a:lstStyle/>
+              <a:p>
+                <a:r>
+                  <a:rPr lang="ko-KR" altLang="en-US">
+                    <a:noFill/>
+                  </a:rPr>
+                  <a:t> </a:t>
+                </a:r>
+              </a:p>
+            </p:txBody>
+          </p:sp>
+        </mc:Fallback>
+      </mc:AlternateContent>
+      <mc:AlternateContent xmlns:mc="http://schemas.openxmlformats.org/markup-compatibility/2006">
+        <mc:Choice xmlns:a14="http://schemas.microsoft.com/office/drawing/2010/main" Requires="a14">
+          <p:sp>
+            <p:nvSpPr>
+              <p:cNvPr id="7" name="TextBox 6">
+                <a:extLst>
+                  <a:ext uri="{FF2B5EF4-FFF2-40B4-BE49-F238E27FC236}">
+                    <a16:creationId xmlns:a16="http://schemas.microsoft.com/office/drawing/2014/main" id="{8FE7DBA2-42ED-882B-39DC-76331AFEBB83}"/>
+                  </a:ext>
+                </a:extLst>
+              </p:cNvPr>
+              <p:cNvSpPr txBox="1"/>
+              <p:nvPr/>
+            </p:nvSpPr>
+            <p:spPr>
+              <a:xfrm>
+                <a:off x="4438905" y="2128510"/>
+                <a:ext cx="1130064" cy="400110"/>
+              </a:xfrm>
+              <a:prstGeom prst="rect">
+                <a:avLst/>
+              </a:prstGeom>
+              <a:solidFill>
+                <a:schemeClr val="bg2">
+                  <a:lumMod val="20000"/>
+                  <a:lumOff val="80000"/>
+                </a:schemeClr>
+              </a:solidFill>
+            </p:spPr>
+            <p:txBody>
+              <a:bodyPr wrap="square">
+                <a:spAutoFit/>
+              </a:bodyPr>
+              <a:lstStyle/>
+              <a:p>
+                <a:pPr/>
+                <a14:m>
+                  <m:oMathPara xmlns:m="http://schemas.openxmlformats.org/officeDocument/2006/math">
+                    <m:oMathParaPr>
+                      <m:jc m:val="centerGroup"/>
+                    </m:oMathParaPr>
+                    <m:oMath xmlns:m="http://schemas.openxmlformats.org/officeDocument/2006/math">
+                      <m:r>
+                        <a:rPr lang="en-US" altLang="ko-KR" sz="2000" b="0" i="1" smtClean="0">
+                          <a:latin typeface="Cambria Math" panose="02040503050406030204" pitchFamily="18" charset="0"/>
+                        </a:rPr>
+                        <m:t>𝑧</m:t>
+                      </m:r>
+                      <m:r>
+                        <a:rPr lang="en-US" altLang="ko-KR" sz="2000" i="1" smtClean="0">
+                          <a:latin typeface="Cambria Math" panose="02040503050406030204" pitchFamily="18" charset="0"/>
+                        </a:rPr>
+                        <m:t>=</m:t>
+                      </m:r>
+                      <m:r>
+                        <a:rPr lang="en-US" altLang="ko-KR" sz="2000" b="0" i="1" smtClean="0">
+                          <a:latin typeface="Cambria Math" panose="02040503050406030204" pitchFamily="18" charset="0"/>
+                        </a:rPr>
+                        <m:t>𝐶</m:t>
+                      </m:r>
+                      <m:r>
+                        <a:rPr lang="en-US" altLang="ko-KR" sz="2000" i="1" smtClean="0">
+                          <a:latin typeface="Cambria Math" panose="02040503050406030204" pitchFamily="18" charset="0"/>
+                        </a:rPr>
+                        <m:t>𝑥</m:t>
+                      </m:r>
+                    </m:oMath>
+                  </m:oMathPara>
+                </a14:m>
+                <a:endParaRPr lang="ko-KR" altLang="en-US" sz="2000" i="1" dirty="0"/>
+              </a:p>
+            </p:txBody>
+          </p:sp>
+        </mc:Choice>
+        <mc:Fallback>
+          <p:sp>
+            <p:nvSpPr>
+              <p:cNvPr id="7" name="TextBox 6">
+                <a:extLst>
+                  <a:ext uri="{FF2B5EF4-FFF2-40B4-BE49-F238E27FC236}">
+                    <a16:creationId xmlns:a16="http://schemas.microsoft.com/office/drawing/2014/main" id="{8FE7DBA2-42ED-882B-39DC-76331AFEBB83}"/>
+                  </a:ext>
+                </a:extLst>
+              </p:cNvPr>
+              <p:cNvSpPr txBox="1">
+                <a:spLocks noRot="1" noChangeAspect="1" noMove="1" noResize="1" noEditPoints="1" noAdjustHandles="1" noChangeArrowheads="1" noChangeShapeType="1" noTextEdit="1"/>
+              </p:cNvSpPr>
+              <p:nvPr/>
+            </p:nvSpPr>
+            <p:spPr>
+              <a:xfrm>
+                <a:off x="4438905" y="2128510"/>
+                <a:ext cx="1130064" cy="400110"/>
+              </a:xfrm>
+              <a:prstGeom prst="rect">
+                <a:avLst/>
+              </a:prstGeom>
+              <a:blipFill>
+                <a:blip r:embed="rId6"/>
+                <a:stretch>
+                  <a:fillRect/>
+                </a:stretch>
+              </a:blipFill>
+            </p:spPr>
+            <p:txBody>
+              <a:bodyPr/>
+              <a:lstStyle/>
+              <a:p>
+                <a:r>
+                  <a:rPr lang="ko-KR" altLang="en-US">
+                    <a:noFill/>
+                  </a:rPr>
+                  <a:t> </a:t>
+                </a:r>
+              </a:p>
+            </p:txBody>
+          </p:sp>
+        </mc:Fallback>
+      </mc:AlternateContent>
+      <p:pic>
+        <p:nvPicPr>
+          <p:cNvPr id="4" name="Picture 2" descr="한 여자가 노트북 컴퓨터에 타이핑을 하고 있다">
+            <a:extLst>
+              <a:ext uri="{FF2B5EF4-FFF2-40B4-BE49-F238E27FC236}">
+                <a16:creationId xmlns:a16="http://schemas.microsoft.com/office/drawing/2014/main" id="{2A50C10B-59E2-9EBB-D19C-0BBDE76D4F02}"/>
+              </a:ext>
+            </a:extLst>
+          </p:cNvPr>
+          <p:cNvPicPr>
+            <a:picLocks noChangeAspect="1" noChangeArrowheads="1"/>
+          </p:cNvPicPr>
+          <p:nvPr/>
+        </p:nvPicPr>
+        <p:blipFill>
+          <a:blip r:embed="rId7">
+            <a:extLst>
+              <a:ext uri="{28A0092B-C50C-407E-A947-70E740481C1C}">
+                <a14:useLocalDpi xmlns:a14="http://schemas.microsoft.com/office/drawing/2010/main" val="0"/>
+              </a:ext>
+            </a:extLst>
+          </a:blip>
+          <a:srcRect/>
+          <a:stretch>
+            <a:fillRect/>
+          </a:stretch>
+        </p:blipFill>
+        <p:spPr bwMode="auto">
+          <a:xfrm>
+            <a:off x="9867901" y="66675"/>
+            <a:ext cx="2152650" cy="1424329"/>
+          </a:xfrm>
+          <a:prstGeom prst="rect">
+            <a:avLst/>
+          </a:prstGeom>
+          <a:noFill/>
+          <a:extLst>
+            <a:ext uri="{909E8E84-426E-40DD-AFC4-6F175D3DCCD1}">
+              <a14:hiddenFill xmlns:a14="http://schemas.microsoft.com/office/drawing/2010/main">
+                <a:solidFill>
+                  <a:srgbClr val="FFFFFF"/>
+                </a:solidFill>
+              </a14:hiddenFill>
+            </a:ext>
+          </a:extLst>
+        </p:spPr>
+      </p:pic>
+    </p:spTree>
+    <p:extLst>
+      <p:ext uri="{BB962C8B-B14F-4D97-AF65-F5344CB8AC3E}">
+        <p14:creationId xmlns:p14="http://schemas.microsoft.com/office/powerpoint/2010/main" val="2812903331"/>
+      </p:ext>
+    </p:extLst>
+  </p:cSld>
+  <p:clrMapOvr>
+    <a:masterClrMapping/>
+  </p:clrMapOvr>
+  <p:timing>
+    <p:tnLst>
+      <p:par>
+        <p:cTn id="1" dur="indefinite" restart="never" nodeType="tmRoot">
+          <p:childTnLst>
+            <p:seq concurrent="1" nextAc="seek">
+              <p:cTn id="2" dur="indefinite" nodeType="mainSeq">
+                <p:childTnLst>
+                  <p:par>
+                    <p:cTn id="3" fill="hold">
+                      <p:stCondLst>
+                        <p:cond delay="indefinite"/>
+                      </p:stCondLst>
+                      <p:childTnLst>
+                        <p:par>
+                          <p:cTn id="4" fill="hold">
+                            <p:stCondLst>
+                              <p:cond delay="0"/>
+                            </p:stCondLst>
+                            <p:childTnLst>
+                              <p:par>
+                                <p:cTn id="5" presetID="1" presetClass="entr" presetSubtype="0" fill="hold" grpId="0" nodeType="clickEffect">
+                                  <p:stCondLst>
+                                    <p:cond delay="0"/>
+                                  </p:stCondLst>
+                                  <p:childTnLst>
+                                    <p:set>
+                                      <p:cBhvr>
+                                        <p:cTn id="6" dur="1" fill="hold">
+                                          <p:stCondLst>
+                                            <p:cond delay="0"/>
+                                          </p:stCondLst>
+                                        </p:cTn>
+                                        <p:tgtEl>
+                                          <p:spTgt spid="6"/>
+                                        </p:tgtEl>
+                                        <p:attrNameLst>
+                                          <p:attrName>style.visibility</p:attrName>
+                                        </p:attrNameLst>
+                                      </p:cBhvr>
+                                      <p:to>
+                                        <p:strVal val="visible"/>
+                                      </p:to>
+                                    </p:set>
+                                  </p:childTnLst>
+                                </p:cTn>
+                              </p:par>
+                              <p:par>
+                                <p:cTn id="7" presetID="1" presetClass="entr" presetSubtype="0" fill="hold" grpId="0" nodeType="withEffect">
+                                  <p:stCondLst>
+                                    <p:cond delay="0"/>
+                                  </p:stCondLst>
+                                  <p:childTnLst>
+                                    <p:set>
+                                      <p:cBhvr>
+                                        <p:cTn id="8" dur="1" fill="hold">
+                                          <p:stCondLst>
+                                            <p:cond delay="0"/>
+                                          </p:stCondLst>
+                                        </p:cTn>
+                                        <p:tgtEl>
+                                          <p:spTgt spid="7"/>
+                                        </p:tgtEl>
+                                        <p:attrNameLst>
+                                          <p:attrName>style.visibility</p:attrName>
+                                        </p:attrNameLst>
+                                      </p:cBhvr>
+                                      <p:to>
+                                        <p:strVal val="visible"/>
+                                      </p:to>
+                                    </p:set>
+                                  </p:childTnLst>
+                                </p:cTn>
+                              </p:par>
+                              <p:par>
+                                <p:cTn id="9" presetID="1" presetClass="entr" presetSubtype="0" fill="hold" grpId="0" nodeType="withEffect">
+                                  <p:stCondLst>
+                                    <p:cond delay="0"/>
+                                  </p:stCondLst>
+                                  <p:childTnLst>
+                                    <p:set>
+                                      <p:cBhvr>
+                                        <p:cTn id="10" dur="1" fill="hold">
+                                          <p:stCondLst>
+                                            <p:cond delay="0"/>
+                                          </p:stCondLst>
+                                        </p:cTn>
+                                        <p:tgtEl>
+                                          <p:spTgt spid="3"/>
+                                        </p:tgtEl>
+                                        <p:attrNameLst>
+                                          <p:attrName>style.visibility</p:attrName>
+                                        </p:attrNameLst>
+                                      </p:cBhvr>
+                                      <p:to>
+                                        <p:strVal val="visible"/>
+                                      </p:to>
+                                    </p:set>
+                                  </p:childTnLst>
+                                </p:cTn>
+                              </p:par>
+                              <p:par>
+                                <p:cTn id="11" presetID="1" presetClass="entr" presetSubtype="0" fill="hold" grpId="0" nodeType="withEffect">
+                                  <p:stCondLst>
+                                    <p:cond delay="0"/>
+                                  </p:stCondLst>
+                                  <p:childTnLst>
+                                    <p:set>
+                                      <p:cBhvr>
+                                        <p:cTn id="12" dur="1" fill="hold">
+                                          <p:stCondLst>
+                                            <p:cond delay="0"/>
+                                          </p:stCondLst>
+                                        </p:cTn>
+                                        <p:tgtEl>
+                                          <p:spTgt spid="32"/>
+                                        </p:tgtEl>
+                                        <p:attrNameLst>
+                                          <p:attrName>style.visibility</p:attrName>
+                                        </p:attrNameLst>
+                                      </p:cBhvr>
+                                      <p:to>
+                                        <p:strVal val="visible"/>
+                                      </p:to>
+                                    </p:set>
+                                  </p:childTnLst>
+                                </p:cTn>
+                              </p:par>
+                            </p:childTnLst>
+                          </p:cTn>
+                        </p:par>
+                      </p:childTnLst>
+                    </p:cTn>
+                  </p:par>
+                </p:childTnLst>
+              </p:cTn>
+              <p:prevCondLst>
+                <p:cond evt="onPrev" delay="0">
+                  <p:tgtEl>
+                    <p:sldTgt/>
+                  </p:tgtEl>
+                </p:cond>
+              </p:prevCondLst>
+              <p:nextCondLst>
+                <p:cond evt="onNext" delay="0">
+                  <p:tgtEl>
+                    <p:sldTgt/>
+                  </p:tgtEl>
+                </p:cond>
+              </p:nextCondLst>
+            </p:seq>
+          </p:childTnLst>
+        </p:cTn>
+      </p:par>
+    </p:tnLst>
+    <p:bldLst>
+      <p:bldP spid="32" grpId="0" animBg="1"/>
+      <p:bldP spid="3" grpId="0" animBg="1"/>
+      <p:bldP spid="6" grpId="0" animBg="1"/>
+      <p:bldP spid="7" grpId="0" animBg="1"/>
+    </p:bldLst>
+  </p:timing>
+</p:sld>
+</file>
+
+<file path=ppt/slides/slide36.xml><?xml version="1.0" encoding="utf-8"?>
+<p:sld xmlns:a="http://schemas.openxmlformats.org/drawingml/2006/main" xmlns:r="http://schemas.openxmlformats.org/officeDocument/2006/relationships" xmlns:p="http://schemas.openxmlformats.org/presentationml/2006/main">
+  <p:cSld>
+    <p:spTree>
+      <p:nvGrpSpPr>
+        <p:cNvPr id="1" name="">
+          <a:extLst>
+            <a:ext uri="{FF2B5EF4-FFF2-40B4-BE49-F238E27FC236}">
               <a16:creationId xmlns:a16="http://schemas.microsoft.com/office/drawing/2014/main" id="{5FC33545-2B0E-A249-D80C-9F7679C59FC9}"/>
             </a:ext>
           </a:extLst>
@@ -21854,7 +23099,7 @@
             <a:fld id="{D57F1E4F-1CFF-5643-939E-217C01CDF565}" type="slidenum">
               <a:rPr lang="en-US" smtClean="0"/>
               <a:pPr/>
-              <a:t>35</a:t>
+              <a:t>36</a:t>
             </a:fld>
             <a:endParaRPr lang="en-US" dirty="0"/>
           </a:p>
@@ -24369,7 +25614,7 @@
 </p:sld>
 </file>
 
-<file path=ppt/slides/slide36.xml><?xml version="1.0" encoding="utf-8"?>
+<file path=ppt/slides/slide37.xml><?xml version="1.0" encoding="utf-8"?>
 <p:sld xmlns:a="http://schemas.openxmlformats.org/drawingml/2006/main" xmlns:r="http://schemas.openxmlformats.org/officeDocument/2006/relationships" xmlns:p="http://schemas.openxmlformats.org/presentationml/2006/main">
   <p:cSld>
     <p:spTree>
@@ -24421,7 +25666,7 @@
             <a:fld id="{D57F1E4F-1CFF-5643-939E-217C01CDF565}" type="slidenum">
               <a:rPr lang="en-US" smtClean="0"/>
               <a:pPr/>
-              <a:t>36</a:t>
+              <a:t>37</a:t>
             </a:fld>
             <a:endParaRPr lang="en-US" dirty="0"/>
           </a:p>
@@ -24780,7 +26025,7 @@
 </p:sld>
 </file>
 
-<file path=ppt/slides/slide37.xml><?xml version="1.0" encoding="utf-8"?>
+<file path=ppt/slides/slide38.xml><?xml version="1.0" encoding="utf-8"?>
 <p:sld xmlns:a="http://schemas.openxmlformats.org/drawingml/2006/main" xmlns:r="http://schemas.openxmlformats.org/officeDocument/2006/relationships" xmlns:p="http://schemas.openxmlformats.org/presentationml/2006/main">
   <p:cSld>
     <p:spTree>
@@ -24832,7 +26077,7 @@
             <a:fld id="{D57F1E4F-1CFF-5643-939E-217C01CDF565}" type="slidenum">
               <a:rPr lang="en-US" smtClean="0"/>
               <a:pPr/>
-              <a:t>37</a:t>
+              <a:t>38</a:t>
             </a:fld>
             <a:endParaRPr lang="en-US" dirty="0"/>
           </a:p>
@@ -25150,6 +26395,231 @@
 </p:sld>
 </file>
 
+<file path=ppt/slides/slide39.xml><?xml version="1.0" encoding="utf-8"?>
+<p:sld xmlns:a="http://schemas.openxmlformats.org/drawingml/2006/main" xmlns:r="http://schemas.openxmlformats.org/officeDocument/2006/relationships" xmlns:p="http://schemas.openxmlformats.org/presentationml/2006/main">
+  <p:cSld>
+    <p:spTree>
+      <p:nvGrpSpPr>
+        <p:cNvPr id="1" name="">
+          <a:extLst>
+            <a:ext uri="{FF2B5EF4-FFF2-40B4-BE49-F238E27FC236}">
+              <a16:creationId xmlns:a16="http://schemas.microsoft.com/office/drawing/2014/main" id="{7DAF2C86-DA16-D101-F00A-B2C9BD452FF9}"/>
+            </a:ext>
+          </a:extLst>
+        </p:cNvPr>
+        <p:cNvGrpSpPr/>
+        <p:nvPr/>
+      </p:nvGrpSpPr>
+      <p:grpSpPr>
+        <a:xfrm>
+          <a:off x="0" y="0"/>
+          <a:ext cx="0" cy="0"/>
+          <a:chOff x="0" y="0"/>
+          <a:chExt cx="0" cy="0"/>
+        </a:xfrm>
+      </p:grpSpPr>
+      <p:sp>
+        <p:nvSpPr>
+          <p:cNvPr id="8" name="제목 7">
+            <a:extLst>
+              <a:ext uri="{FF2B5EF4-FFF2-40B4-BE49-F238E27FC236}">
+                <a16:creationId xmlns:a16="http://schemas.microsoft.com/office/drawing/2014/main" id="{31C3CD4D-CFE1-3FF5-FA51-F72D7FE59076}"/>
+              </a:ext>
+            </a:extLst>
+          </p:cNvPr>
+          <p:cNvSpPr>
+            <a:spLocks noGrp="1"/>
+          </p:cNvSpPr>
+          <p:nvPr>
+            <p:ph type="title"/>
+          </p:nvPr>
+        </p:nvSpPr>
+        <p:spPr>
+          <a:xfrm>
+            <a:off x="521207" y="448056"/>
+            <a:ext cx="8135613" cy="640080"/>
+          </a:xfrm>
+        </p:spPr>
+        <p:txBody>
+          <a:bodyPr rtlCol="0">
+            <a:noAutofit/>
+          </a:bodyPr>
+          <a:lstStyle/>
+          <a:p>
+            <a:pPr rtl="0"/>
+            <a:r>
+              <a:rPr lang="en-US" altLang="ko-KR" dirty="0">
+                <a:cs typeface="Segoe UI Light" panose="020B0502040204020203" pitchFamily="34" charset="0"/>
+              </a:rPr>
+              <a:t>Neural</a:t>
+            </a:r>
+            <a:r>
+              <a:rPr lang="ko-KR" altLang="en-US" dirty="0">
+                <a:cs typeface="Segoe UI Light" panose="020B0502040204020203" pitchFamily="34" charset="0"/>
+              </a:rPr>
+              <a:t> </a:t>
+            </a:r>
+            <a:r>
+              <a:rPr lang="en-US" altLang="ko-KR" dirty="0">
+                <a:cs typeface="Segoe UI Light" panose="020B0502040204020203" pitchFamily="34" charset="0"/>
+              </a:rPr>
+              <a:t>Networks</a:t>
+            </a:r>
+            <a:r>
+              <a:rPr lang="ko-KR" altLang="en-US" dirty="0">
+                <a:cs typeface="Segoe UI Light" panose="020B0502040204020203" pitchFamily="34" charset="0"/>
+              </a:rPr>
+              <a:t> </a:t>
+            </a:r>
+            <a:r>
+              <a:rPr lang="en-US" altLang="ko-KR" dirty="0">
+                <a:cs typeface="Segoe UI Light" panose="020B0502040204020203" pitchFamily="34" charset="0"/>
+              </a:rPr>
+              <a:t>–</a:t>
+            </a:r>
+            <a:r>
+              <a:rPr lang="ko-KR" altLang="en-US" dirty="0">
+                <a:cs typeface="Segoe UI Light" panose="020B0502040204020203" pitchFamily="34" charset="0"/>
+              </a:rPr>
+              <a:t> </a:t>
+            </a:r>
+            <a:r>
+              <a:rPr lang="en-US" altLang="ko-KR" dirty="0">
+                <a:cs typeface="Segoe UI Light" panose="020B0502040204020203" pitchFamily="34" charset="0"/>
+              </a:rPr>
+              <a:t>text recognition</a:t>
+            </a:r>
+            <a:endParaRPr lang="ko-KR" altLang="en-US" dirty="0">
+              <a:cs typeface="Segoe UI Light" panose="020B0502040204020203" pitchFamily="34" charset="0"/>
+            </a:endParaRPr>
+          </a:p>
+        </p:txBody>
+      </p:sp>
+      <p:sp>
+        <p:nvSpPr>
+          <p:cNvPr id="12" name="슬라이드 번호 개체 틀 11">
+            <a:extLst>
+              <a:ext uri="{FF2B5EF4-FFF2-40B4-BE49-F238E27FC236}">
+                <a16:creationId xmlns:a16="http://schemas.microsoft.com/office/drawing/2014/main" id="{AD16E9F8-1A59-5EE7-D461-0839167D519A}"/>
+              </a:ext>
+            </a:extLst>
+          </p:cNvPr>
+          <p:cNvSpPr>
+            <a:spLocks noGrp="1"/>
+          </p:cNvSpPr>
+          <p:nvPr>
+            <p:ph type="sldNum" sz="quarter" idx="4"/>
+          </p:nvPr>
+        </p:nvSpPr>
+        <p:spPr/>
+        <p:txBody>
+          <a:bodyPr/>
+          <a:lstStyle/>
+          <a:p>
+            <a:fld id="{9860EDB8-5305-433F-BE41-D7A86D811DB3}" type="slidenum">
+              <a:rPr lang="en-US" altLang="ko-KR" noProof="0" smtClean="0"/>
+              <a:pPr/>
+              <a:t>39</a:t>
+            </a:fld>
+            <a:endParaRPr lang="ko-KR" altLang="en-US" noProof="0"/>
+          </a:p>
+        </p:txBody>
+      </p:sp>
+      <p:sp>
+        <p:nvSpPr>
+          <p:cNvPr id="2" name="TextBox 1">
+            <a:extLst>
+              <a:ext uri="{FF2B5EF4-FFF2-40B4-BE49-F238E27FC236}">
+                <a16:creationId xmlns:a16="http://schemas.microsoft.com/office/drawing/2014/main" id="{88C4D521-46EF-3D1F-71D0-5ACCE5859CDC}"/>
+              </a:ext>
+            </a:extLst>
+          </p:cNvPr>
+          <p:cNvSpPr txBox="1"/>
+          <p:nvPr/>
+        </p:nvSpPr>
+        <p:spPr>
+          <a:xfrm>
+            <a:off x="521207" y="1533236"/>
+            <a:ext cx="1862433" cy="307777"/>
+          </a:xfrm>
+          <a:prstGeom prst="rect">
+            <a:avLst/>
+          </a:prstGeom>
+          <a:noFill/>
+        </p:spPr>
+        <p:txBody>
+          <a:bodyPr wrap="none" rtlCol="0">
+            <a:spAutoFit/>
+          </a:bodyPr>
+          <a:lstStyle/>
+          <a:p>
+            <a:r>
+              <a:rPr lang="en-US" altLang="ko-KR" sz="1400" dirty="0">
+                <a:hlinkClick r:id="rId3">
+                  <a:extLst>
+                    <a:ext uri="{A12FA001-AC4F-418D-AE19-62706E023703}">
+                      <ahyp:hlinkClr xmlns:ahyp="http://schemas.microsoft.com/office/drawing/2018/hyperlinkcolor" val="tx"/>
+                    </a:ext>
+                  </a:extLst>
+                </a:hlinkClick>
+              </a:rPr>
+              <a:t>Embedding projector</a:t>
+            </a:r>
+            <a:endParaRPr lang="ko-KR" altLang="en-US" sz="1400" dirty="0"/>
+          </a:p>
+        </p:txBody>
+      </p:sp>
+      <p:pic>
+        <p:nvPicPr>
+          <p:cNvPr id="4" name="그림 3">
+            <a:extLst>
+              <a:ext uri="{FF2B5EF4-FFF2-40B4-BE49-F238E27FC236}">
+                <a16:creationId xmlns:a16="http://schemas.microsoft.com/office/drawing/2014/main" id="{BB8671C2-8C43-29BF-55CE-D04C955A118B}"/>
+              </a:ext>
+            </a:extLst>
+          </p:cNvPr>
+          <p:cNvPicPr>
+            <a:picLocks noChangeAspect="1"/>
+          </p:cNvPicPr>
+          <p:nvPr/>
+        </p:nvPicPr>
+        <p:blipFill>
+          <a:blip r:embed="rId4"/>
+          <a:stretch>
+            <a:fillRect/>
+          </a:stretch>
+        </p:blipFill>
+        <p:spPr>
+          <a:xfrm>
+            <a:off x="2761672" y="1687124"/>
+            <a:ext cx="6066299" cy="4320532"/>
+          </a:xfrm>
+          <a:prstGeom prst="rect">
+            <a:avLst/>
+          </a:prstGeom>
+        </p:spPr>
+      </p:pic>
+    </p:spTree>
+    <p:extLst>
+      <p:ext uri="{BB962C8B-B14F-4D97-AF65-F5344CB8AC3E}">
+        <p14:creationId xmlns:p14="http://schemas.microsoft.com/office/powerpoint/2010/main" val="1393186953"/>
+      </p:ext>
+    </p:extLst>
+  </p:cSld>
+  <p:clrMapOvr>
+    <a:masterClrMapping/>
+  </p:clrMapOvr>
+  <mc:AlternateContent xmlns:mc="http://schemas.openxmlformats.org/markup-compatibility/2006" xmlns:p14="http://schemas.microsoft.com/office/powerpoint/2010/main">
+    <mc:Choice Requires="p14">
+      <p:transition p14:dur="10"/>
+    </mc:Choice>
+    <mc:Fallback xmlns="">
+      <p:transition/>
+    </mc:Fallback>
+  </mc:AlternateContent>
+</p:sld>
+</file>
+
 <file path=ppt/slides/slide4.xml><?xml version="1.0" encoding="utf-8"?>
 <p:sld xmlns:a="http://schemas.openxmlformats.org/drawingml/2006/main" xmlns:r="http://schemas.openxmlformats.org/officeDocument/2006/relationships" xmlns:p="http://schemas.openxmlformats.org/presentationml/2006/main">
   <p:cSld>
@@ -25757,6 +27227,284 @@
     <p:extLst>
       <p:ext uri="{BB962C8B-B14F-4D97-AF65-F5344CB8AC3E}">
         <p14:creationId xmlns:p14="http://schemas.microsoft.com/office/powerpoint/2010/main" val="1779693934"/>
+      </p:ext>
+    </p:extLst>
+  </p:cSld>
+  <p:clrMapOvr>
+    <a:masterClrMapping/>
+  </p:clrMapOvr>
+  <mc:AlternateContent xmlns:mc="http://schemas.openxmlformats.org/markup-compatibility/2006" xmlns:p14="http://schemas.microsoft.com/office/powerpoint/2010/main">
+    <mc:Choice Requires="p14">
+      <p:transition p14:dur="10"/>
+    </mc:Choice>
+    <mc:Fallback xmlns="">
+      <p:transition/>
+    </mc:Fallback>
+  </mc:AlternateContent>
+</p:sld>
+</file>
+
+<file path=ppt/slides/slide40.xml><?xml version="1.0" encoding="utf-8"?>
+<p:sld xmlns:a="http://schemas.openxmlformats.org/drawingml/2006/main" xmlns:r="http://schemas.openxmlformats.org/officeDocument/2006/relationships" xmlns:p="http://schemas.openxmlformats.org/presentationml/2006/main">
+  <p:cSld>
+    <p:spTree>
+      <p:nvGrpSpPr>
+        <p:cNvPr id="1" name="">
+          <a:extLst>
+            <a:ext uri="{FF2B5EF4-FFF2-40B4-BE49-F238E27FC236}">
+              <a16:creationId xmlns:a16="http://schemas.microsoft.com/office/drawing/2014/main" id="{FBE41D2F-EAB1-4A92-8867-6B4C4AEFA646}"/>
+            </a:ext>
+          </a:extLst>
+        </p:cNvPr>
+        <p:cNvGrpSpPr/>
+        <p:nvPr/>
+      </p:nvGrpSpPr>
+      <p:grpSpPr>
+        <a:xfrm>
+          <a:off x="0" y="0"/>
+          <a:ext cx="0" cy="0"/>
+          <a:chOff x="0" y="0"/>
+          <a:chExt cx="0" cy="0"/>
+        </a:xfrm>
+      </p:grpSpPr>
+      <p:sp>
+        <p:nvSpPr>
+          <p:cNvPr id="8" name="제목 7">
+            <a:extLst>
+              <a:ext uri="{FF2B5EF4-FFF2-40B4-BE49-F238E27FC236}">
+                <a16:creationId xmlns:a16="http://schemas.microsoft.com/office/drawing/2014/main" id="{33E49DB6-DAB3-D953-28ED-408E2277F6EA}"/>
+              </a:ext>
+            </a:extLst>
+          </p:cNvPr>
+          <p:cNvSpPr>
+            <a:spLocks noGrp="1"/>
+          </p:cNvSpPr>
+          <p:nvPr>
+            <p:ph type="title"/>
+          </p:nvPr>
+        </p:nvSpPr>
+        <p:spPr>
+          <a:xfrm>
+            <a:off x="521207" y="448056"/>
+            <a:ext cx="8135613" cy="640080"/>
+          </a:xfrm>
+        </p:spPr>
+        <p:txBody>
+          <a:bodyPr rtlCol="0">
+            <a:noAutofit/>
+          </a:bodyPr>
+          <a:lstStyle/>
+          <a:p>
+            <a:pPr rtl="0"/>
+            <a:r>
+              <a:rPr lang="en-US" altLang="ko-KR" dirty="0">
+                <a:cs typeface="Segoe UI Light" panose="020B0502040204020203" pitchFamily="34" charset="0"/>
+              </a:rPr>
+              <a:t>Neural</a:t>
+            </a:r>
+            <a:r>
+              <a:rPr lang="ko-KR" altLang="en-US" dirty="0">
+                <a:cs typeface="Segoe UI Light" panose="020B0502040204020203" pitchFamily="34" charset="0"/>
+              </a:rPr>
+              <a:t> </a:t>
+            </a:r>
+            <a:r>
+              <a:rPr lang="en-US" altLang="ko-KR" dirty="0">
+                <a:cs typeface="Segoe UI Light" panose="020B0502040204020203" pitchFamily="34" charset="0"/>
+              </a:rPr>
+              <a:t>Networks</a:t>
+            </a:r>
+            <a:r>
+              <a:rPr lang="ko-KR" altLang="en-US" dirty="0">
+                <a:cs typeface="Segoe UI Light" panose="020B0502040204020203" pitchFamily="34" charset="0"/>
+              </a:rPr>
+              <a:t> </a:t>
+            </a:r>
+            <a:r>
+              <a:rPr lang="en-US" altLang="ko-KR" dirty="0">
+                <a:cs typeface="Segoe UI Light" panose="020B0502040204020203" pitchFamily="34" charset="0"/>
+              </a:rPr>
+              <a:t>–</a:t>
+            </a:r>
+            <a:r>
+              <a:rPr lang="ko-KR" altLang="en-US" dirty="0">
+                <a:cs typeface="Segoe UI Light" panose="020B0502040204020203" pitchFamily="34" charset="0"/>
+              </a:rPr>
+              <a:t> </a:t>
+            </a:r>
+            <a:r>
+              <a:rPr lang="en-US" altLang="ko-KR" dirty="0" err="1">
+                <a:cs typeface="Segoe UI Light" panose="020B0502040204020203" pitchFamily="34" charset="0"/>
+              </a:rPr>
+              <a:t>tensorflow</a:t>
+            </a:r>
+            <a:r>
+              <a:rPr lang="en-US" altLang="ko-KR" dirty="0">
+                <a:cs typeface="Segoe UI Light" panose="020B0502040204020203" pitchFamily="34" charset="0"/>
+              </a:rPr>
+              <a:t> playground</a:t>
+            </a:r>
+            <a:endParaRPr lang="ko-KR" altLang="en-US" dirty="0">
+              <a:cs typeface="Segoe UI Light" panose="020B0502040204020203" pitchFamily="34" charset="0"/>
+            </a:endParaRPr>
+          </a:p>
+        </p:txBody>
+      </p:sp>
+      <p:sp>
+        <p:nvSpPr>
+          <p:cNvPr id="12" name="슬라이드 번호 개체 틀 11">
+            <a:extLst>
+              <a:ext uri="{FF2B5EF4-FFF2-40B4-BE49-F238E27FC236}">
+                <a16:creationId xmlns:a16="http://schemas.microsoft.com/office/drawing/2014/main" id="{CDC4E536-A3F9-1C9F-45A5-4E8F7C6145F0}"/>
+              </a:ext>
+            </a:extLst>
+          </p:cNvPr>
+          <p:cNvSpPr>
+            <a:spLocks noGrp="1"/>
+          </p:cNvSpPr>
+          <p:nvPr>
+            <p:ph type="sldNum" sz="quarter" idx="4"/>
+          </p:nvPr>
+        </p:nvSpPr>
+        <p:spPr/>
+        <p:txBody>
+          <a:bodyPr/>
+          <a:lstStyle/>
+          <a:p>
+            <a:fld id="{9860EDB8-5305-433F-BE41-D7A86D811DB3}" type="slidenum">
+              <a:rPr lang="en-US" altLang="ko-KR" noProof="0" smtClean="0"/>
+              <a:pPr/>
+              <a:t>40</a:t>
+            </a:fld>
+            <a:endParaRPr lang="ko-KR" altLang="en-US" noProof="0"/>
+          </a:p>
+        </p:txBody>
+      </p:sp>
+      <p:sp>
+        <p:nvSpPr>
+          <p:cNvPr id="2" name="TextBox 1">
+            <a:extLst>
+              <a:ext uri="{FF2B5EF4-FFF2-40B4-BE49-F238E27FC236}">
+                <a16:creationId xmlns:a16="http://schemas.microsoft.com/office/drawing/2014/main" id="{610B5905-966B-98B8-0663-09744EF741D6}"/>
+              </a:ext>
+            </a:extLst>
+          </p:cNvPr>
+          <p:cNvSpPr txBox="1"/>
+          <p:nvPr/>
+        </p:nvSpPr>
+        <p:spPr>
+          <a:xfrm>
+            <a:off x="521207" y="1533236"/>
+            <a:ext cx="2315377" cy="307777"/>
+          </a:xfrm>
+          <a:prstGeom prst="rect">
+            <a:avLst/>
+          </a:prstGeom>
+          <a:noFill/>
+        </p:spPr>
+        <p:txBody>
+          <a:bodyPr wrap="none" rtlCol="0">
+            <a:spAutoFit/>
+          </a:bodyPr>
+          <a:lstStyle/>
+          <a:p>
+            <a:r>
+              <a:rPr lang="en-US" altLang="ko-KR" sz="1400" dirty="0">
+                <a:hlinkClick r:id="rId3">
+                  <a:extLst>
+                    <a:ext uri="{A12FA001-AC4F-418D-AE19-62706E023703}">
+                      <ahyp:hlinkClr xmlns:ahyp="http://schemas.microsoft.com/office/drawing/2018/hyperlinkcolor" val="tx"/>
+                    </a:ext>
+                  </a:extLst>
+                </a:hlinkClick>
+              </a:rPr>
+              <a:t>Neural Network in Browser</a:t>
+            </a:r>
+            <a:endParaRPr lang="ko-KR" altLang="en-US" sz="1400" dirty="0"/>
+          </a:p>
+        </p:txBody>
+      </p:sp>
+      <p:pic>
+        <p:nvPicPr>
+          <p:cNvPr id="4" name="그림 3">
+            <a:extLst>
+              <a:ext uri="{FF2B5EF4-FFF2-40B4-BE49-F238E27FC236}">
+                <a16:creationId xmlns:a16="http://schemas.microsoft.com/office/drawing/2014/main" id="{EDB5DEB5-B8CF-951A-D24C-641B270EF04B}"/>
+              </a:ext>
+            </a:extLst>
+          </p:cNvPr>
+          <p:cNvPicPr>
+            <a:picLocks noChangeAspect="1"/>
+          </p:cNvPicPr>
+          <p:nvPr/>
+        </p:nvPicPr>
+        <p:blipFill>
+          <a:blip r:embed="rId4"/>
+          <a:stretch>
+            <a:fillRect/>
+          </a:stretch>
+        </p:blipFill>
+        <p:spPr>
+          <a:xfrm>
+            <a:off x="2262909" y="2188345"/>
+            <a:ext cx="7666182" cy="3847647"/>
+          </a:xfrm>
+          <a:prstGeom prst="rect">
+            <a:avLst/>
+          </a:prstGeom>
+        </p:spPr>
+      </p:pic>
+      <p:pic>
+        <p:nvPicPr>
+          <p:cNvPr id="2052" name="Picture 4" descr="도자기 작업장. 성인과 어린이의 손이 도자기를 만들고 젖은 점토 근접 촬영으로 작업합니다. 더러운 손으로 바퀴에 점토로 그릇을 만드는 과정. 여름 공원의 수제 축제">
+            <a:extLst>
+              <a:ext uri="{FF2B5EF4-FFF2-40B4-BE49-F238E27FC236}">
+                <a16:creationId xmlns:a16="http://schemas.microsoft.com/office/drawing/2014/main" id="{76937F52-9FE7-AD4F-8080-9B9CDF694EF7}"/>
+              </a:ext>
+            </a:extLst>
+          </p:cNvPr>
+          <p:cNvPicPr>
+            <a:picLocks noChangeAspect="1" noChangeArrowheads="1"/>
+          </p:cNvPicPr>
+          <p:nvPr/>
+        </p:nvPicPr>
+        <p:blipFill>
+          <a:blip r:embed="rId5">
+            <a:extLst>
+              <a:ext uri="{28A0092B-C50C-407E-A947-70E740481C1C}">
+                <a14:useLocalDpi xmlns:a14="http://schemas.microsoft.com/office/drawing/2010/main" val="0"/>
+              </a:ext>
+            </a:extLst>
+          </a:blip>
+          <a:srcRect/>
+          <a:stretch>
+            <a:fillRect/>
+          </a:stretch>
+        </p:blipFill>
+        <p:spPr bwMode="auto">
+          <a:xfrm>
+            <a:off x="10502899" y="55419"/>
+            <a:ext cx="1633682" cy="1089121"/>
+          </a:xfrm>
+          <a:prstGeom prst="rect">
+            <a:avLst/>
+          </a:prstGeom>
+          <a:noFill/>
+          <a:extLst>
+            <a:ext uri="{909E8E84-426E-40DD-AFC4-6F175D3DCCD1}">
+              <a14:hiddenFill xmlns:a14="http://schemas.microsoft.com/office/drawing/2010/main">
+                <a:solidFill>
+                  <a:srgbClr val="FFFFFF"/>
+                </a:solidFill>
+              </a14:hiddenFill>
+            </a:ext>
+          </a:extLst>
+        </p:spPr>
+      </p:pic>
+    </p:spTree>
+    <p:extLst>
+      <p:ext uri="{BB962C8B-B14F-4D97-AF65-F5344CB8AC3E}">
+        <p14:creationId xmlns:p14="http://schemas.microsoft.com/office/powerpoint/2010/main" val="3574821195"/>
       </p:ext>
     </p:extLst>
   </p:cSld>
@@ -27482,8 +29230,8 @@
           </a:p>
         </p:txBody>
       </p:sp>
-      <mc:AlternateContent xmlns:mc="http://schemas.openxmlformats.org/markup-compatibility/2006">
-        <mc:Choice xmlns:a14="http://schemas.microsoft.com/office/drawing/2010/main" Requires="a14">
+      <mc:AlternateContent xmlns:mc="http://schemas.openxmlformats.org/markup-compatibility/2006" xmlns:a14="http://schemas.microsoft.com/office/drawing/2010/main">
+        <mc:Choice Requires="a14">
           <p:sp>
             <p:nvSpPr>
               <p:cNvPr id="39" name="TextBox 38">
@@ -27609,7 +29357,7 @@
             </p:txBody>
           </p:sp>
         </mc:Choice>
-        <mc:Fallback>
+        <mc:Fallback xmlns="">
           <p:sp>
             <p:nvSpPr>
               <p:cNvPr id="39" name="TextBox 38">

--- a/w4_Perceptron_Regression.pptx
+++ b/w4_Perceptron_Regression.pptx
@@ -5,10 +5,10 @@
     <p:sldMasterId id="2147483660" r:id="rId1"/>
   </p:sldMasterIdLst>
   <p:notesMasterIdLst>
-    <p:notesMasterId r:id="rId42"/>
+    <p:notesMasterId r:id="rId44"/>
   </p:notesMasterIdLst>
   <p:handoutMasterIdLst>
-    <p:handoutMasterId r:id="rId43"/>
+    <p:handoutMasterId r:id="rId45"/>
   </p:handoutMasterIdLst>
   <p:sldIdLst>
     <p:sldId id="256" r:id="rId2"/>
@@ -20,37 +20,39 @@
     <p:sldId id="334" r:id="rId8"/>
     <p:sldId id="870" r:id="rId9"/>
     <p:sldId id="335" r:id="rId10"/>
-    <p:sldId id="871" r:id="rId11"/>
-    <p:sldId id="848" r:id="rId12"/>
-    <p:sldId id="874" r:id="rId13"/>
-    <p:sldId id="872" r:id="rId14"/>
-    <p:sldId id="931" r:id="rId15"/>
-    <p:sldId id="936" r:id="rId16"/>
-    <p:sldId id="873" r:id="rId17"/>
-    <p:sldId id="907" r:id="rId18"/>
-    <p:sldId id="932" r:id="rId19"/>
-    <p:sldId id="908" r:id="rId20"/>
-    <p:sldId id="930" r:id="rId21"/>
-    <p:sldId id="928" r:id="rId22"/>
-    <p:sldId id="851" r:id="rId23"/>
-    <p:sldId id="852" r:id="rId24"/>
-    <p:sldId id="929" r:id="rId25"/>
-    <p:sldId id="846" r:id="rId26"/>
-    <p:sldId id="927" r:id="rId27"/>
-    <p:sldId id="937" r:id="rId28"/>
-    <p:sldId id="876" r:id="rId29"/>
-    <p:sldId id="879" r:id="rId30"/>
-    <p:sldId id="881" r:id="rId31"/>
-    <p:sldId id="880" r:id="rId32"/>
-    <p:sldId id="883" r:id="rId33"/>
-    <p:sldId id="882" r:id="rId34"/>
-    <p:sldId id="884" r:id="rId35"/>
-    <p:sldId id="919" r:id="rId36"/>
-    <p:sldId id="886" r:id="rId37"/>
-    <p:sldId id="887" r:id="rId38"/>
-    <p:sldId id="885" r:id="rId39"/>
-    <p:sldId id="285" r:id="rId40"/>
-    <p:sldId id="284" r:id="rId41"/>
+    <p:sldId id="938" r:id="rId11"/>
+    <p:sldId id="871" r:id="rId12"/>
+    <p:sldId id="848" r:id="rId13"/>
+    <p:sldId id="874" r:id="rId14"/>
+    <p:sldId id="872" r:id="rId15"/>
+    <p:sldId id="931" r:id="rId16"/>
+    <p:sldId id="936" r:id="rId17"/>
+    <p:sldId id="873" r:id="rId18"/>
+    <p:sldId id="907" r:id="rId19"/>
+    <p:sldId id="932" r:id="rId20"/>
+    <p:sldId id="939" r:id="rId21"/>
+    <p:sldId id="908" r:id="rId22"/>
+    <p:sldId id="930" r:id="rId23"/>
+    <p:sldId id="928" r:id="rId24"/>
+    <p:sldId id="851" r:id="rId25"/>
+    <p:sldId id="852" r:id="rId26"/>
+    <p:sldId id="929" r:id="rId27"/>
+    <p:sldId id="846" r:id="rId28"/>
+    <p:sldId id="927" r:id="rId29"/>
+    <p:sldId id="937" r:id="rId30"/>
+    <p:sldId id="876" r:id="rId31"/>
+    <p:sldId id="879" r:id="rId32"/>
+    <p:sldId id="881" r:id="rId33"/>
+    <p:sldId id="880" r:id="rId34"/>
+    <p:sldId id="883" r:id="rId35"/>
+    <p:sldId id="882" r:id="rId36"/>
+    <p:sldId id="884" r:id="rId37"/>
+    <p:sldId id="919" r:id="rId38"/>
+    <p:sldId id="886" r:id="rId39"/>
+    <p:sldId id="887" r:id="rId40"/>
+    <p:sldId id="885" r:id="rId41"/>
+    <p:sldId id="285" r:id="rId42"/>
+    <p:sldId id="284" r:id="rId43"/>
   </p:sldIdLst>
   <p:sldSz cx="12192000" cy="6858000"/>
   <p:notesSz cx="6858000" cy="9144000"/>
@@ -167,6 +169,7 @@
             <p14:sldId id="334"/>
             <p14:sldId id="870"/>
             <p14:sldId id="335"/>
+            <p14:sldId id="938"/>
             <p14:sldId id="871"/>
             <p14:sldId id="848"/>
             <p14:sldId id="874"/>
@@ -176,6 +179,7 @@
             <p14:sldId id="873"/>
             <p14:sldId id="907"/>
             <p14:sldId id="932"/>
+            <p14:sldId id="939"/>
             <p14:sldId id="908"/>
             <p14:sldId id="930"/>
             <p14:sldId id="928"/>
@@ -322,7 +326,7 @@
                 <a:latin typeface="맑은 고딕" panose="020B0503020000020004" pitchFamily="50" charset="-127"/>
                 <a:ea typeface="맑은 고딕" panose="020B0503020000020004" pitchFamily="50" charset="-127"/>
               </a:rPr>
-              <a:t>2026-04-11</a:t>
+              <a:t>2026-04-16</a:t>
             </a:fld>
             <a:endParaRPr lang="ko-KR" altLang="en-US">
               <a:latin typeface="맑은 고딕" panose="020B0503020000020004" pitchFamily="50" charset="-127"/>
@@ -508,7 +512,7 @@
           <a:p>
             <a:fld id="{43E1C3DD-4A19-441D-907C-380838DB51C4}" type="datetime1">
               <a:rPr lang="ko-KR" altLang="en-US" noProof="0" smtClean="0"/>
-              <a:t>2026-04-11</a:t>
+              <a:t>2026-04-16</a:t>
             </a:fld>
             <a:endParaRPr lang="ko-KR" altLang="en-US" noProof="0"/>
           </a:p>
@@ -984,7 +988,7 @@
                 <a:latin typeface="맑은 고딕" panose="020B0503020000020004" pitchFamily="50" charset="-127"/>
                 <a:ea typeface="맑은 고딕" panose="020B0503020000020004" pitchFamily="50" charset="-127"/>
               </a:rPr>
-              <a:t>27</a:t>
+              <a:t>29</a:t>
             </a:fld>
             <a:endParaRPr lang="ko-KR" altLang="en-US">
               <a:latin typeface="맑은 고딕" panose="020B0503020000020004" pitchFamily="50" charset="-127"/>
@@ -1102,7 +1106,7 @@
                 <a:latin typeface="맑은 고딕" panose="020B0503020000020004" pitchFamily="50" charset="-127"/>
                 <a:ea typeface="맑은 고딕" panose="020B0503020000020004" pitchFamily="50" charset="-127"/>
               </a:rPr>
-              <a:t>39</a:t>
+              <a:t>41</a:t>
             </a:fld>
             <a:endParaRPr lang="ko-KR" altLang="en-US">
               <a:latin typeface="맑은 고딕" panose="020B0503020000020004" pitchFamily="50" charset="-127"/>
@@ -1220,7 +1224,7 @@
                 <a:latin typeface="맑은 고딕" panose="020B0503020000020004" pitchFamily="50" charset="-127"/>
                 <a:ea typeface="맑은 고딕" panose="020B0503020000020004" pitchFamily="50" charset="-127"/>
               </a:rPr>
-              <a:t>40</a:t>
+              <a:t>42</a:t>
             </a:fld>
             <a:endParaRPr lang="ko-KR" altLang="en-US">
               <a:latin typeface="맑은 고딕" panose="020B0503020000020004" pitchFamily="50" charset="-127"/>
@@ -2046,7 +2050,7 @@
                 <a:latin typeface="맑은 고딕" panose="020B0503020000020004" pitchFamily="50" charset="-127"/>
                 <a:ea typeface="맑은 고딕" panose="020B0503020000020004" pitchFamily="50" charset="-127"/>
               </a:rPr>
-              <a:t>14</a:t>
+              <a:t>15</a:t>
             </a:fld>
             <a:endParaRPr lang="ko-KR" altLang="en-US">
               <a:latin typeface="맑은 고딕" panose="020B0503020000020004" pitchFamily="50" charset="-127"/>
@@ -2164,7 +2168,7 @@
                 <a:latin typeface="맑은 고딕" panose="020B0503020000020004" pitchFamily="50" charset="-127"/>
                 <a:ea typeface="맑은 고딕" panose="020B0503020000020004" pitchFamily="50" charset="-127"/>
               </a:rPr>
-              <a:t>20</a:t>
+              <a:t>22</a:t>
             </a:fld>
             <a:endParaRPr lang="ko-KR" altLang="en-US">
               <a:latin typeface="맑은 고딕" panose="020B0503020000020004" pitchFamily="50" charset="-127"/>
@@ -2654,7 +2658,7 @@
           <a:p>
             <a:fld id="{990475B5-67CA-4281-BDCA-DA943C3C8EB3}" type="datetime1">
               <a:rPr lang="ko-KR" altLang="en-US" noProof="0" smtClean="0"/>
-              <a:t>2026-04-11</a:t>
+              <a:t>2026-04-16</a:t>
             </a:fld>
             <a:endParaRPr lang="ko-KR" altLang="en-US" noProof="0"/>
           </a:p>
@@ -3308,7 +3312,7 @@
           <a:p>
             <a:fld id="{48A87A34-81AB-432B-8DAE-1953F412C126}" type="datetimeFigureOut">
               <a:rPr lang="en-US" smtClean="0"/>
-              <a:t>4/11/2026</a:t>
+              <a:t>4/16/2026</a:t>
             </a:fld>
             <a:endParaRPr lang="en-US" dirty="0"/>
           </a:p>
@@ -3541,7 +3545,7 @@
           <a:p>
             <a:fld id="{48A87A34-81AB-432B-8DAE-1953F412C126}" type="datetimeFigureOut">
               <a:rPr lang="en-US" smtClean="0"/>
-              <a:t>4/11/2026</a:t>
+              <a:t>4/16/2026</a:t>
             </a:fld>
             <a:endParaRPr lang="en-US" dirty="0"/>
           </a:p>
@@ -3809,7 +3813,7 @@
           <a:p>
             <a:fld id="{C655C81E-72E7-4D05-94B5-F45B321A525D}" type="datetime1">
               <a:rPr lang="ko-KR" altLang="en-US" noProof="0" smtClean="0"/>
-              <a:t>2026-04-11</a:t>
+              <a:t>2026-04-16</a:t>
             </a:fld>
             <a:endParaRPr lang="ko-KR" altLang="en-US" noProof="0" dirty="0">
               <a:latin typeface="맑은 고딕" panose="020B0503020000020004" pitchFamily="50" charset="-127"/>
@@ -4621,6 +4625,397 @@
         <p:cNvPr id="1" name="">
           <a:extLst>
             <a:ext uri="{FF2B5EF4-FFF2-40B4-BE49-F238E27FC236}">
+              <a16:creationId xmlns:a16="http://schemas.microsoft.com/office/drawing/2014/main" id="{C601FC14-9AB2-5C2C-C823-CB3077735592}"/>
+            </a:ext>
+          </a:extLst>
+        </p:cNvPr>
+        <p:cNvGrpSpPr/>
+        <p:nvPr/>
+      </p:nvGrpSpPr>
+      <p:grpSpPr>
+        <a:xfrm>
+          <a:off x="0" y="0"/>
+          <a:ext cx="0" cy="0"/>
+          <a:chOff x="0" y="0"/>
+          <a:chExt cx="0" cy="0"/>
+        </a:xfrm>
+      </p:grpSpPr>
+      <p:sp>
+        <p:nvSpPr>
+          <p:cNvPr id="2" name="제목 1">
+            <a:extLst>
+              <a:ext uri="{FF2B5EF4-FFF2-40B4-BE49-F238E27FC236}">
+                <a16:creationId xmlns:a16="http://schemas.microsoft.com/office/drawing/2014/main" id="{3B6A99E8-30D0-8408-F941-F453B2CBA3E9}"/>
+              </a:ext>
+            </a:extLst>
+          </p:cNvPr>
+          <p:cNvSpPr>
+            <a:spLocks noGrp="1"/>
+          </p:cNvSpPr>
+          <p:nvPr>
+            <p:ph type="title"/>
+          </p:nvPr>
+        </p:nvSpPr>
+        <p:spPr>
+          <a:xfrm>
+            <a:off x="523270" y="396258"/>
+            <a:ext cx="10353762" cy="766439"/>
+          </a:xfrm>
+        </p:spPr>
+        <p:txBody>
+          <a:bodyPr>
+            <a:normAutofit/>
+          </a:bodyPr>
+          <a:lstStyle/>
+          <a:p>
+            <a:r>
+              <a:rPr lang="en-US" altLang="ko-KR" sz="2800" dirty="0">
+                <a:solidFill>
+                  <a:schemeClr val="bg2">
+                    <a:lumMod val="25000"/>
+                  </a:schemeClr>
+                </a:solidFill>
+                <a:latin typeface="맑은 고딕" panose="020B0503020000020004" pitchFamily="50" charset="-127"/>
+                <a:ea typeface="맑은 고딕" panose="020B0503020000020004" pitchFamily="50" charset="-127"/>
+              </a:rPr>
+              <a:t>Matrix Formulation</a:t>
+            </a:r>
+            <a:endParaRPr lang="ko-KR" altLang="en-US" sz="2800" dirty="0">
+              <a:solidFill>
+                <a:schemeClr val="bg2">
+                  <a:lumMod val="25000"/>
+                </a:schemeClr>
+              </a:solidFill>
+              <a:latin typeface="맑은 고딕" panose="020B0503020000020004" pitchFamily="50" charset="-127"/>
+              <a:ea typeface="맑은 고딕" panose="020B0503020000020004" pitchFamily="50" charset="-127"/>
+            </a:endParaRPr>
+          </a:p>
+        </p:txBody>
+      </p:sp>
+      <p:sp>
+        <p:nvSpPr>
+          <p:cNvPr id="4" name="슬라이드 번호 개체 틀 3">
+            <a:extLst>
+              <a:ext uri="{FF2B5EF4-FFF2-40B4-BE49-F238E27FC236}">
+                <a16:creationId xmlns:a16="http://schemas.microsoft.com/office/drawing/2014/main" id="{739DBF7D-1F4C-F6E7-D9F8-E4267EC08F77}"/>
+              </a:ext>
+            </a:extLst>
+          </p:cNvPr>
+          <p:cNvSpPr>
+            <a:spLocks noGrp="1"/>
+          </p:cNvSpPr>
+          <p:nvPr>
+            <p:ph type="sldNum" sz="quarter" idx="12"/>
+          </p:nvPr>
+        </p:nvSpPr>
+        <p:spPr>
+          <a:xfrm>
+            <a:off x="10514011" y="6036261"/>
+            <a:ext cx="753545" cy="365125"/>
+          </a:xfrm>
+        </p:spPr>
+        <p:txBody>
+          <a:bodyPr/>
+          <a:lstStyle/>
+          <a:p>
+            <a:fld id="{D57F1E4F-1CFF-5643-939E-217C01CDF565}" type="slidenum">
+              <a:rPr lang="en-US" smtClean="0"/>
+              <a:pPr/>
+              <a:t>10</a:t>
+            </a:fld>
+            <a:endParaRPr lang="en-US" dirty="0"/>
+          </a:p>
+        </p:txBody>
+      </p:sp>
+      <p:pic>
+        <p:nvPicPr>
+          <p:cNvPr id="6" name="그림 5">
+            <a:extLst>
+              <a:ext uri="{FF2B5EF4-FFF2-40B4-BE49-F238E27FC236}">
+                <a16:creationId xmlns:a16="http://schemas.microsoft.com/office/drawing/2014/main" id="{3B8E1880-0EE2-7E95-B978-FFBA25E40A2A}"/>
+              </a:ext>
+            </a:extLst>
+          </p:cNvPr>
+          <p:cNvPicPr>
+            <a:picLocks noChangeAspect="1"/>
+          </p:cNvPicPr>
+          <p:nvPr/>
+        </p:nvPicPr>
+        <p:blipFill>
+          <a:blip r:embed="rId2"/>
+          <a:stretch>
+            <a:fillRect/>
+          </a:stretch>
+        </p:blipFill>
+        <p:spPr>
+          <a:xfrm>
+            <a:off x="913795" y="2291326"/>
+            <a:ext cx="6624926" cy="2101986"/>
+          </a:xfrm>
+          <a:prstGeom prst="rect">
+            <a:avLst/>
+          </a:prstGeom>
+        </p:spPr>
+      </p:pic>
+      <p:sp>
+        <p:nvSpPr>
+          <p:cNvPr id="8" name="TextBox 7">
+            <a:extLst>
+              <a:ext uri="{FF2B5EF4-FFF2-40B4-BE49-F238E27FC236}">
+                <a16:creationId xmlns:a16="http://schemas.microsoft.com/office/drawing/2014/main" id="{7808319F-6940-D88F-0A15-5533635BD384}"/>
+              </a:ext>
+            </a:extLst>
+          </p:cNvPr>
+          <p:cNvSpPr txBox="1"/>
+          <p:nvPr/>
+        </p:nvSpPr>
+        <p:spPr>
+          <a:xfrm>
+            <a:off x="7538721" y="2291326"/>
+            <a:ext cx="4348479" cy="2101986"/>
+          </a:xfrm>
+          <a:prstGeom prst="rect">
+            <a:avLst/>
+          </a:prstGeom>
+          <a:solidFill>
+            <a:schemeClr val="bg1"/>
+          </a:solidFill>
+        </p:spPr>
+        <p:txBody>
+          <a:bodyPr wrap="square">
+            <a:spAutoFit/>
+          </a:bodyPr>
+          <a:lstStyle/>
+          <a:p>
+            <a:pPr>
+              <a:lnSpc>
+                <a:spcPct val="200000"/>
+              </a:lnSpc>
+            </a:pPr>
+            <a:r>
+              <a:rPr lang="en-US" altLang="ko-KR" sz="1700" dirty="0">
+                <a:latin typeface="맑은 고딕 Semilight" panose="020B0502040204020203" pitchFamily="50" charset="-127"/>
+                <a:ea typeface="맑은 고딕 Semilight" panose="020B0502040204020203" pitchFamily="50" charset="-127"/>
+                <a:cs typeface="맑은 고딕 Semilight" panose="020B0502040204020203" pitchFamily="50" charset="-127"/>
+              </a:rPr>
+              <a:t>(n, 1) = (n, p) @ (p, 1) + (n, 1)</a:t>
+            </a:r>
+          </a:p>
+          <a:p>
+            <a:pPr>
+              <a:lnSpc>
+                <a:spcPct val="200000"/>
+              </a:lnSpc>
+            </a:pPr>
+            <a:r>
+              <a:rPr lang="en-US" altLang="ko-KR" sz="1700" dirty="0">
+                <a:latin typeface="맑은 고딕 Semilight" panose="020B0502040204020203" pitchFamily="50" charset="-127"/>
+                <a:ea typeface="맑은 고딕 Semilight" panose="020B0502040204020203" pitchFamily="50" charset="-127"/>
+                <a:cs typeface="맑은 고딕 Semilight" panose="020B0502040204020203" pitchFamily="50" charset="-127"/>
+              </a:rPr>
+              <a:t>(n, 1) = (n, p) @ (p, 1)</a:t>
+            </a:r>
+          </a:p>
+          <a:p>
+            <a:pPr>
+              <a:lnSpc>
+                <a:spcPct val="200000"/>
+              </a:lnSpc>
+            </a:pPr>
+            <a:r>
+              <a:rPr lang="en-US" altLang="ko-KR" sz="1700" dirty="0">
+                <a:latin typeface="맑은 고딕 Semilight" panose="020B0502040204020203" pitchFamily="50" charset="-127"/>
+                <a:ea typeface="맑은 고딕 Semilight" panose="020B0502040204020203" pitchFamily="50" charset="-127"/>
+                <a:cs typeface="맑은 고딕 Semilight" panose="020B0502040204020203" pitchFamily="50" charset="-127"/>
+              </a:rPr>
+              <a:t>(n, 1) = (n, 1) – (n, 1) = (n,1) - (n, p) @ (p, 1)</a:t>
+            </a:r>
+          </a:p>
+          <a:p>
+            <a:pPr>
+              <a:lnSpc>
+                <a:spcPct val="200000"/>
+              </a:lnSpc>
+            </a:pPr>
+            <a:r>
+              <a:rPr lang="en-US" altLang="ko-KR" sz="1700" dirty="0">
+                <a:latin typeface="맑은 고딕 Semilight" panose="020B0502040204020203" pitchFamily="50" charset="-127"/>
+                <a:ea typeface="맑은 고딕 Semilight" panose="020B0502040204020203" pitchFamily="50" charset="-127"/>
+                <a:cs typeface="맑은 고딕 Semilight" panose="020B0502040204020203" pitchFamily="50" charset="-127"/>
+              </a:rPr>
+              <a:t>(1, 1) = 1/n * (1, n)@(n, 1)</a:t>
+            </a:r>
+          </a:p>
+        </p:txBody>
+      </p:sp>
+      <p:sp>
+        <p:nvSpPr>
+          <p:cNvPr id="11" name="내용 개체 틀 2">
+            <a:extLst>
+              <a:ext uri="{FF2B5EF4-FFF2-40B4-BE49-F238E27FC236}">
+                <a16:creationId xmlns:a16="http://schemas.microsoft.com/office/drawing/2014/main" id="{1534F1F3-D829-72EE-41EC-A1C576D61F66}"/>
+              </a:ext>
+            </a:extLst>
+          </p:cNvPr>
+          <p:cNvSpPr>
+            <a:spLocks noGrp="1"/>
+          </p:cNvSpPr>
+          <p:nvPr>
+            <p:ph idx="1"/>
+          </p:nvPr>
+        </p:nvSpPr>
+        <p:spPr>
+          <a:xfrm>
+            <a:off x="913794" y="1308439"/>
+            <a:ext cx="10706705" cy="529886"/>
+          </a:xfrm>
+        </p:spPr>
+        <p:txBody>
+          <a:bodyPr>
+            <a:normAutofit/>
+          </a:bodyPr>
+          <a:lstStyle/>
+          <a:p>
+            <a:pPr marL="285750" indent="-285750">
+              <a:lnSpc>
+                <a:spcPct val="150000"/>
+              </a:lnSpc>
+              <a:buFont typeface="Wingdings" panose="05000000000000000000" pitchFamily="2" charset="2"/>
+              <a:buChar char="§"/>
+            </a:pPr>
+            <a:r>
+              <a:rPr lang="ko-KR" altLang="en-US" sz="1800" cap="none" dirty="0">
+                <a:effectLst/>
+                <a:latin typeface="맑은 고딕 Semilight" panose="020B0502040204020203" pitchFamily="50" charset="-127"/>
+                <a:ea typeface="맑은 고딕 Semilight" panose="020B0502040204020203" pitchFamily="50" charset="-127"/>
+                <a:cs typeface="맑은 고딕 Semilight" panose="020B0502040204020203" pitchFamily="50" charset="-127"/>
+              </a:rPr>
+              <a:t>선형회귀식</a:t>
+            </a:r>
+            <a:r>
+              <a:rPr lang="en-US" altLang="ko-KR" sz="1800" cap="none" dirty="0">
+                <a:effectLst/>
+                <a:latin typeface="맑은 고딕 Semilight" panose="020B0502040204020203" pitchFamily="50" charset="-127"/>
+                <a:ea typeface="맑은 고딕 Semilight" panose="020B0502040204020203" pitchFamily="50" charset="-127"/>
+                <a:cs typeface="맑은 고딕 Semilight" panose="020B0502040204020203" pitchFamily="50" charset="-127"/>
+              </a:rPr>
+              <a:t>(Linear regression)</a:t>
+            </a:r>
+            <a:r>
+              <a:rPr lang="ko-KR" altLang="en-US" sz="1800" cap="none" dirty="0">
+                <a:effectLst/>
+                <a:latin typeface="맑은 고딕 Semilight" panose="020B0502040204020203" pitchFamily="50" charset="-127"/>
+                <a:ea typeface="맑은 고딕 Semilight" panose="020B0502040204020203" pitchFamily="50" charset="-127"/>
+                <a:cs typeface="맑은 고딕 Semilight" panose="020B0502040204020203" pitchFamily="50" charset="-127"/>
+              </a:rPr>
+              <a:t>을 행렬</a:t>
+            </a:r>
+            <a:r>
+              <a:rPr lang="en-US" altLang="ko-KR" sz="1800" cap="none" dirty="0">
+                <a:effectLst/>
+                <a:latin typeface="맑은 고딕 Semilight" panose="020B0502040204020203" pitchFamily="50" charset="-127"/>
+                <a:ea typeface="맑은 고딕 Semilight" panose="020B0502040204020203" pitchFamily="50" charset="-127"/>
+                <a:cs typeface="맑은 고딕 Semilight" panose="020B0502040204020203" pitchFamily="50" charset="-127"/>
+              </a:rPr>
+              <a:t>, </a:t>
+            </a:r>
+            <a:r>
+              <a:rPr lang="ko-KR" altLang="en-US" sz="1800" cap="none" dirty="0">
+                <a:effectLst/>
+                <a:latin typeface="맑은 고딕 Semilight" panose="020B0502040204020203" pitchFamily="50" charset="-127"/>
+                <a:ea typeface="맑은 고딕 Semilight" panose="020B0502040204020203" pitchFamily="50" charset="-127"/>
+                <a:cs typeface="맑은 고딕 Semilight" panose="020B0502040204020203" pitchFamily="50" charset="-127"/>
+              </a:rPr>
+              <a:t>벡터</a:t>
+            </a:r>
+            <a:r>
+              <a:rPr lang="en-US" altLang="ko-KR" sz="1800" cap="none" dirty="0">
+                <a:effectLst/>
+                <a:latin typeface="맑은 고딕 Semilight" panose="020B0502040204020203" pitchFamily="50" charset="-127"/>
+                <a:ea typeface="맑은 고딕 Semilight" panose="020B0502040204020203" pitchFamily="50" charset="-127"/>
+                <a:cs typeface="맑은 고딕 Semilight" panose="020B0502040204020203" pitchFamily="50" charset="-127"/>
+              </a:rPr>
+              <a:t>, </a:t>
+            </a:r>
+            <a:r>
+              <a:rPr lang="ko-KR" altLang="en-US" sz="1800" cap="none" dirty="0">
+                <a:latin typeface="맑은 고딕 Semilight" panose="020B0502040204020203" pitchFamily="50" charset="-127"/>
+                <a:ea typeface="맑은 고딕 Semilight" panose="020B0502040204020203" pitchFamily="50" charset="-127"/>
+                <a:cs typeface="맑은 고딕 Semilight" panose="020B0502040204020203" pitchFamily="50" charset="-127"/>
+              </a:rPr>
+              <a:t>스칼라</a:t>
+            </a:r>
+            <a:r>
+              <a:rPr lang="en-US" altLang="ko-KR" sz="1800" cap="none" dirty="0">
+                <a:latin typeface="맑은 고딕 Semilight" panose="020B0502040204020203" pitchFamily="50" charset="-127"/>
+                <a:ea typeface="맑은 고딕 Semilight" panose="020B0502040204020203" pitchFamily="50" charset="-127"/>
+                <a:cs typeface="맑은 고딕 Semilight" panose="020B0502040204020203" pitchFamily="50" charset="-127"/>
+              </a:rPr>
+              <a:t> </a:t>
+            </a:r>
+            <a:r>
+              <a:rPr lang="ko-KR" altLang="en-US" sz="1800" cap="none" dirty="0">
+                <a:latin typeface="맑은 고딕 Semilight" panose="020B0502040204020203" pitchFamily="50" charset="-127"/>
+                <a:ea typeface="맑은 고딕 Semilight" panose="020B0502040204020203" pitchFamily="50" charset="-127"/>
+                <a:cs typeface="맑은 고딕 Semilight" panose="020B0502040204020203" pitchFamily="50" charset="-127"/>
+              </a:rPr>
+              <a:t>등의</a:t>
+            </a:r>
+            <a:r>
+              <a:rPr lang="en-US" altLang="ko-KR" sz="1800" cap="none" dirty="0">
+                <a:latin typeface="맑은 고딕 Semilight" panose="020B0502040204020203" pitchFamily="50" charset="-127"/>
+                <a:ea typeface="맑은 고딕 Semilight" panose="020B0502040204020203" pitchFamily="50" charset="-127"/>
+                <a:cs typeface="맑은 고딕 Semilight" panose="020B0502040204020203" pitchFamily="50" charset="-127"/>
+              </a:rPr>
+              <a:t> </a:t>
+            </a:r>
+            <a:r>
+              <a:rPr lang="ko-KR" altLang="en-US" sz="1800" cap="none" dirty="0">
+                <a:latin typeface="맑은 고딕 Semilight" panose="020B0502040204020203" pitchFamily="50" charset="-127"/>
+                <a:ea typeface="맑은 고딕 Semilight" panose="020B0502040204020203" pitchFamily="50" charset="-127"/>
+                <a:cs typeface="맑은 고딕 Semilight" panose="020B0502040204020203" pitchFamily="50" charset="-127"/>
+              </a:rPr>
+              <a:t>내적으로 </a:t>
+            </a:r>
+            <a:r>
+              <a:rPr lang="ko-KR" altLang="en-US" sz="1800" cap="none" dirty="0">
+                <a:effectLst/>
+                <a:latin typeface="맑은 고딕 Semilight" panose="020B0502040204020203" pitchFamily="50" charset="-127"/>
+                <a:ea typeface="맑은 고딕 Semilight" panose="020B0502040204020203" pitchFamily="50" charset="-127"/>
+                <a:cs typeface="맑은 고딕 Semilight" panose="020B0502040204020203" pitchFamily="50" charset="-127"/>
+              </a:rPr>
+              <a:t>표현</a:t>
+            </a:r>
+            <a:endParaRPr lang="en-US" altLang="ko-KR" sz="1800" cap="none" dirty="0">
+              <a:effectLst/>
+              <a:latin typeface="맑은 고딕 Semilight" panose="020B0502040204020203" pitchFamily="50" charset="-127"/>
+              <a:ea typeface="맑은 고딕 Semilight" panose="020B0502040204020203" pitchFamily="50" charset="-127"/>
+              <a:cs typeface="맑은 고딕 Semilight" panose="020B0502040204020203" pitchFamily="50" charset="-127"/>
+            </a:endParaRPr>
+          </a:p>
+        </p:txBody>
+      </p:sp>
+    </p:spTree>
+    <p:extLst>
+      <p:ext uri="{BB962C8B-B14F-4D97-AF65-F5344CB8AC3E}">
+        <p14:creationId xmlns:p14="http://schemas.microsoft.com/office/powerpoint/2010/main" val="2724989594"/>
+      </p:ext>
+    </p:extLst>
+  </p:cSld>
+  <p:clrMapOvr>
+    <a:masterClrMapping/>
+  </p:clrMapOvr>
+</p:sld>
+</file>
+
+<file path=ppt/slides/slide11.xml><?xml version="1.0" encoding="utf-8"?>
+<p:sld xmlns:a="http://schemas.openxmlformats.org/drawingml/2006/main" xmlns:r="http://schemas.openxmlformats.org/officeDocument/2006/relationships" xmlns:p="http://schemas.openxmlformats.org/presentationml/2006/main">
+  <p:cSld>
+    <p:spTree>
+      <p:nvGrpSpPr>
+        <p:cNvPr id="1" name="">
+          <a:extLst>
+            <a:ext uri="{FF2B5EF4-FFF2-40B4-BE49-F238E27FC236}">
               <a16:creationId xmlns:a16="http://schemas.microsoft.com/office/drawing/2014/main" id="{54D4D5C5-D1C0-2EAC-D146-0F2AC06291F3}"/>
             </a:ext>
           </a:extLst>
@@ -4673,8 +5068,15 @@
                 </a:solidFill>
                 <a:latin typeface="맑은 고딕" panose="020B0503020000020004" pitchFamily="50" charset="-127"/>
                 <a:ea typeface="맑은 고딕" panose="020B0503020000020004" pitchFamily="50" charset="-127"/>
-              </a:rPr>
-              <a:t>Matrix Formulation</a:t>
+                <a:hlinkClick r:id="rId2">
+                  <a:extLst>
+                    <a:ext uri="{A12FA001-AC4F-418D-AE19-62706E023703}">
+                      <ahyp:hlinkClr xmlns:ahyp="http://schemas.microsoft.com/office/drawing/2018/hyperlinkcolor" val="tx"/>
+                    </a:ext>
+                  </a:extLst>
+                </a:hlinkClick>
+              </a:rPr>
+              <a:t>Ordinary Least Squares</a:t>
             </a:r>
             <a:endParaRPr lang="ko-KR" altLang="en-US" sz="2800" dirty="0">
               <a:solidFill>
@@ -4717,7 +5119,7 @@
             <a:fld id="{D57F1E4F-1CFF-5643-939E-217C01CDF565}" type="slidenum">
               <a:rPr lang="en-US" smtClean="0"/>
               <a:pPr/>
-              <a:t>10</a:t>
+              <a:t>11</a:t>
             </a:fld>
             <a:endParaRPr lang="en-US" dirty="0"/>
           </a:p>
@@ -4725,10 +5127,10 @@
       </p:sp>
       <p:pic>
         <p:nvPicPr>
-          <p:cNvPr id="6" name="그림 5">
+          <p:cNvPr id="22" name="그림 21">
             <a:extLst>
               <a:ext uri="{FF2B5EF4-FFF2-40B4-BE49-F238E27FC236}">
-                <a16:creationId xmlns:a16="http://schemas.microsoft.com/office/drawing/2014/main" id="{6F1DC974-0213-762D-DA9B-996F89ADE8B3}"/>
+                <a16:creationId xmlns:a16="http://schemas.microsoft.com/office/drawing/2014/main" id="{DAAD9710-D665-4AB7-AAC7-B42291B09DE9}"/>
               </a:ext>
             </a:extLst>
           </p:cNvPr>
@@ -4738,265 +5140,661 @@
           <p:nvPr/>
         </p:nvPicPr>
         <p:blipFill>
-          <a:blip r:embed="rId2"/>
+          <a:blip r:embed="rId3"/>
           <a:stretch>
             <a:fillRect/>
           </a:stretch>
         </p:blipFill>
         <p:spPr>
           <a:xfrm>
-            <a:off x="913795" y="2291326"/>
-            <a:ext cx="6624926" cy="2101986"/>
+            <a:off x="6269303" y="3993215"/>
+            <a:ext cx="4244708" cy="723963"/>
           </a:xfrm>
           <a:prstGeom prst="rect">
             <a:avLst/>
           </a:prstGeom>
         </p:spPr>
       </p:pic>
-      <p:sp>
-        <p:nvSpPr>
-          <p:cNvPr id="8" name="TextBox 7">
+      <p:pic>
+        <p:nvPicPr>
+          <p:cNvPr id="24" name="그림 23">
             <a:extLst>
               <a:ext uri="{FF2B5EF4-FFF2-40B4-BE49-F238E27FC236}">
-                <a16:creationId xmlns:a16="http://schemas.microsoft.com/office/drawing/2014/main" id="{ABA7676C-C191-A8AC-AF32-140354371AD5}"/>
+                <a16:creationId xmlns:a16="http://schemas.microsoft.com/office/drawing/2014/main" id="{FCBAD8D0-6361-BF24-D5E1-21A8E9BE08C9}"/>
               </a:ext>
             </a:extLst>
           </p:cNvPr>
-          <p:cNvSpPr txBox="1"/>
+          <p:cNvPicPr>
+            <a:picLocks noChangeAspect="1"/>
+          </p:cNvPicPr>
           <p:nvPr/>
-        </p:nvSpPr>
+        </p:nvPicPr>
+        <p:blipFill>
+          <a:blip r:embed="rId4"/>
+          <a:stretch>
+            <a:fillRect/>
+          </a:stretch>
+        </p:blipFill>
         <p:spPr>
           <a:xfrm>
-            <a:off x="7538721" y="2291326"/>
-            <a:ext cx="4348479" cy="2101986"/>
+            <a:off x="7092263" y="2732785"/>
+            <a:ext cx="3696020" cy="480102"/>
           </a:xfrm>
           <a:prstGeom prst="rect">
             <a:avLst/>
           </a:prstGeom>
-          <a:solidFill>
-            <a:schemeClr val="bg1"/>
-          </a:solidFill>
         </p:spPr>
-        <p:txBody>
-          <a:bodyPr wrap="square">
-            <a:spAutoFit/>
-          </a:bodyPr>
-          <a:lstStyle/>
-          <a:p>
-            <a:pPr>
-              <a:lnSpc>
-                <a:spcPct val="200000"/>
-              </a:lnSpc>
-            </a:pPr>
-            <a:r>
-              <a:rPr lang="en-US" altLang="ko-KR" sz="1700" dirty="0">
-                <a:latin typeface="맑은 고딕 Semilight" panose="020B0502040204020203" pitchFamily="50" charset="-127"/>
-                <a:ea typeface="맑은 고딕 Semilight" panose="020B0502040204020203" pitchFamily="50" charset="-127"/>
-                <a:cs typeface="맑은 고딕 Semilight" panose="020B0502040204020203" pitchFamily="50" charset="-127"/>
-              </a:rPr>
-              <a:t>(n, 1) = (n, p) @ (p, 1) + (n, 1)</a:t>
-            </a:r>
-          </a:p>
-          <a:p>
-            <a:pPr>
-              <a:lnSpc>
-                <a:spcPct val="200000"/>
-              </a:lnSpc>
-            </a:pPr>
-            <a:r>
-              <a:rPr lang="en-US" altLang="ko-KR" sz="1700" dirty="0">
-                <a:latin typeface="맑은 고딕 Semilight" panose="020B0502040204020203" pitchFamily="50" charset="-127"/>
-                <a:ea typeface="맑은 고딕 Semilight" panose="020B0502040204020203" pitchFamily="50" charset="-127"/>
-                <a:cs typeface="맑은 고딕 Semilight" panose="020B0502040204020203" pitchFamily="50" charset="-127"/>
-              </a:rPr>
-              <a:t>(n, 1) = (n, p) @ (p, 1)</a:t>
-            </a:r>
-          </a:p>
-          <a:p>
-            <a:pPr>
-              <a:lnSpc>
-                <a:spcPct val="200000"/>
-              </a:lnSpc>
-            </a:pPr>
-            <a:r>
-              <a:rPr lang="en-US" altLang="ko-KR" sz="1700" dirty="0">
-                <a:latin typeface="맑은 고딕 Semilight" panose="020B0502040204020203" pitchFamily="50" charset="-127"/>
-                <a:ea typeface="맑은 고딕 Semilight" panose="020B0502040204020203" pitchFamily="50" charset="-127"/>
-                <a:cs typeface="맑은 고딕 Semilight" panose="020B0502040204020203" pitchFamily="50" charset="-127"/>
-              </a:rPr>
-              <a:t>(n, 1) = (n, 1) – (n, 1) = (n,1) - (n, p) @ (p, 1)</a:t>
-            </a:r>
-          </a:p>
-          <a:p>
-            <a:pPr>
-              <a:lnSpc>
-                <a:spcPct val="200000"/>
-              </a:lnSpc>
-            </a:pPr>
-            <a:r>
-              <a:rPr lang="en-US" altLang="ko-KR" sz="1700" dirty="0">
-                <a:latin typeface="맑은 고딕 Semilight" panose="020B0502040204020203" pitchFamily="50" charset="-127"/>
-                <a:ea typeface="맑은 고딕 Semilight" panose="020B0502040204020203" pitchFamily="50" charset="-127"/>
-                <a:cs typeface="맑은 고딕 Semilight" panose="020B0502040204020203" pitchFamily="50" charset="-127"/>
-              </a:rPr>
-              <a:t>(1, 1) = 1/n * (1, n)@(n, 1)</a:t>
-            </a:r>
-          </a:p>
-        </p:txBody>
-      </p:sp>
-      <p:sp>
-        <p:nvSpPr>
-          <p:cNvPr id="11" name="내용 개체 틀 2">
+      </p:pic>
+      <p:pic>
+        <p:nvPicPr>
+          <p:cNvPr id="26" name="그림 25">
             <a:extLst>
               <a:ext uri="{FF2B5EF4-FFF2-40B4-BE49-F238E27FC236}">
-                <a16:creationId xmlns:a16="http://schemas.microsoft.com/office/drawing/2014/main" id="{19B85837-F508-0C94-9CF0-8BC26C9BAE35}"/>
+                <a16:creationId xmlns:a16="http://schemas.microsoft.com/office/drawing/2014/main" id="{1F036219-1FCE-6D21-B20F-FF44D4B8FBB7}"/>
               </a:ext>
             </a:extLst>
           </p:cNvPr>
-          <p:cNvSpPr>
-            <a:spLocks noGrp="1"/>
-          </p:cNvSpPr>
-          <p:nvPr>
-            <p:ph idx="1"/>
-          </p:nvPr>
-        </p:nvSpPr>
+          <p:cNvPicPr>
+            <a:picLocks noChangeAspect="1"/>
+          </p:cNvPicPr>
+          <p:nvPr/>
+        </p:nvPicPr>
+        <p:blipFill>
+          <a:blip r:embed="rId5"/>
+          <a:stretch>
+            <a:fillRect/>
+          </a:stretch>
+        </p:blipFill>
         <p:spPr>
           <a:xfrm>
-            <a:off x="913794" y="1308439"/>
-            <a:ext cx="10706705" cy="529886"/>
+            <a:off x="523270" y="2732785"/>
+            <a:ext cx="5746033" cy="3257750"/>
           </a:xfrm>
+          <a:prstGeom prst="rect">
+            <a:avLst/>
+          </a:prstGeom>
         </p:spPr>
-        <p:txBody>
-          <a:bodyPr>
-            <a:normAutofit/>
-          </a:bodyPr>
-          <a:lstStyle/>
-          <a:p>
-            <a:pPr marL="285750" indent="-285750">
-              <a:lnSpc>
-                <a:spcPct val="150000"/>
-              </a:lnSpc>
-              <a:buFont typeface="Wingdings" panose="05000000000000000000" pitchFamily="2" charset="2"/>
-              <a:buChar char="§"/>
-            </a:pPr>
-            <a:r>
-              <a:rPr lang="ko-KR" altLang="en-US" sz="1800" cap="none" dirty="0">
-                <a:effectLst/>
-                <a:latin typeface="맑은 고딕 Semilight" panose="020B0502040204020203" pitchFamily="50" charset="-127"/>
-                <a:ea typeface="맑은 고딕 Semilight" panose="020B0502040204020203" pitchFamily="50" charset="-127"/>
-                <a:cs typeface="맑은 고딕 Semilight" panose="020B0502040204020203" pitchFamily="50" charset="-127"/>
-              </a:rPr>
-              <a:t>선형회귀식</a:t>
-            </a:r>
-            <a:r>
-              <a:rPr lang="en-US" altLang="ko-KR" sz="1800" cap="none" dirty="0">
-                <a:effectLst/>
-                <a:latin typeface="맑은 고딕 Semilight" panose="020B0502040204020203" pitchFamily="50" charset="-127"/>
-                <a:ea typeface="맑은 고딕 Semilight" panose="020B0502040204020203" pitchFamily="50" charset="-127"/>
-                <a:cs typeface="맑은 고딕 Semilight" panose="020B0502040204020203" pitchFamily="50" charset="-127"/>
-              </a:rPr>
-              <a:t>(Linear regression)</a:t>
-            </a:r>
-            <a:r>
-              <a:rPr lang="ko-KR" altLang="en-US" sz="1800" cap="none" dirty="0">
-                <a:effectLst/>
-                <a:latin typeface="맑은 고딕 Semilight" panose="020B0502040204020203" pitchFamily="50" charset="-127"/>
-                <a:ea typeface="맑은 고딕 Semilight" panose="020B0502040204020203" pitchFamily="50" charset="-127"/>
-                <a:cs typeface="맑은 고딕 Semilight" panose="020B0502040204020203" pitchFamily="50" charset="-127"/>
-              </a:rPr>
-              <a:t>을 행렬</a:t>
-            </a:r>
-            <a:r>
-              <a:rPr lang="en-US" altLang="ko-KR" sz="1800" cap="none" dirty="0">
-                <a:effectLst/>
-                <a:latin typeface="맑은 고딕 Semilight" panose="020B0502040204020203" pitchFamily="50" charset="-127"/>
-                <a:ea typeface="맑은 고딕 Semilight" panose="020B0502040204020203" pitchFamily="50" charset="-127"/>
-                <a:cs typeface="맑은 고딕 Semilight" panose="020B0502040204020203" pitchFamily="50" charset="-127"/>
-              </a:rPr>
-              <a:t>, </a:t>
-            </a:r>
-            <a:r>
-              <a:rPr lang="ko-KR" altLang="en-US" sz="1800" cap="none" dirty="0">
-                <a:effectLst/>
-                <a:latin typeface="맑은 고딕 Semilight" panose="020B0502040204020203" pitchFamily="50" charset="-127"/>
-                <a:ea typeface="맑은 고딕 Semilight" panose="020B0502040204020203" pitchFamily="50" charset="-127"/>
-                <a:cs typeface="맑은 고딕 Semilight" panose="020B0502040204020203" pitchFamily="50" charset="-127"/>
-              </a:rPr>
-              <a:t>벡터</a:t>
-            </a:r>
-            <a:r>
-              <a:rPr lang="en-US" altLang="ko-KR" sz="1800" cap="none" dirty="0">
-                <a:effectLst/>
-                <a:latin typeface="맑은 고딕 Semilight" panose="020B0502040204020203" pitchFamily="50" charset="-127"/>
-                <a:ea typeface="맑은 고딕 Semilight" panose="020B0502040204020203" pitchFamily="50" charset="-127"/>
-                <a:cs typeface="맑은 고딕 Semilight" panose="020B0502040204020203" pitchFamily="50" charset="-127"/>
-              </a:rPr>
-              <a:t>, </a:t>
-            </a:r>
-            <a:r>
-              <a:rPr lang="ko-KR" altLang="en-US" sz="1800" cap="none" dirty="0">
-                <a:latin typeface="맑은 고딕 Semilight" panose="020B0502040204020203" pitchFamily="50" charset="-127"/>
-                <a:ea typeface="맑은 고딕 Semilight" panose="020B0502040204020203" pitchFamily="50" charset="-127"/>
-                <a:cs typeface="맑은 고딕 Semilight" panose="020B0502040204020203" pitchFamily="50" charset="-127"/>
-              </a:rPr>
-              <a:t>스칼라</a:t>
-            </a:r>
-            <a:r>
-              <a:rPr lang="en-US" altLang="ko-KR" sz="1800" cap="none" dirty="0">
-                <a:latin typeface="맑은 고딕 Semilight" panose="020B0502040204020203" pitchFamily="50" charset="-127"/>
-                <a:ea typeface="맑은 고딕 Semilight" panose="020B0502040204020203" pitchFamily="50" charset="-127"/>
-                <a:cs typeface="맑은 고딕 Semilight" panose="020B0502040204020203" pitchFamily="50" charset="-127"/>
-              </a:rPr>
-              <a:t> </a:t>
-            </a:r>
-            <a:r>
-              <a:rPr lang="ko-KR" altLang="en-US" sz="1800" cap="none" dirty="0">
-                <a:latin typeface="맑은 고딕 Semilight" panose="020B0502040204020203" pitchFamily="50" charset="-127"/>
-                <a:ea typeface="맑은 고딕 Semilight" panose="020B0502040204020203" pitchFamily="50" charset="-127"/>
-                <a:cs typeface="맑은 고딕 Semilight" panose="020B0502040204020203" pitchFamily="50" charset="-127"/>
-              </a:rPr>
-              <a:t>등의</a:t>
-            </a:r>
-            <a:r>
-              <a:rPr lang="en-US" altLang="ko-KR" sz="1800" cap="none" dirty="0">
-                <a:latin typeface="맑은 고딕 Semilight" panose="020B0502040204020203" pitchFamily="50" charset="-127"/>
-                <a:ea typeface="맑은 고딕 Semilight" panose="020B0502040204020203" pitchFamily="50" charset="-127"/>
-                <a:cs typeface="맑은 고딕 Semilight" panose="020B0502040204020203" pitchFamily="50" charset="-127"/>
-              </a:rPr>
-              <a:t> </a:t>
-            </a:r>
-            <a:r>
-              <a:rPr lang="ko-KR" altLang="en-US" sz="1800" cap="none" dirty="0">
-                <a:effectLst/>
-                <a:latin typeface="맑은 고딕 Semilight" panose="020B0502040204020203" pitchFamily="50" charset="-127"/>
-                <a:ea typeface="맑은 고딕 Semilight" panose="020B0502040204020203" pitchFamily="50" charset="-127"/>
-                <a:cs typeface="맑은 고딕 Semilight" panose="020B0502040204020203" pitchFamily="50" charset="-127"/>
-              </a:rPr>
-              <a:t>수식 연산 표현</a:t>
-            </a:r>
-            <a:endParaRPr lang="en-US" altLang="ko-KR" sz="1800" cap="none" dirty="0">
-              <a:effectLst/>
-              <a:latin typeface="맑은 고딕 Semilight" panose="020B0502040204020203" pitchFamily="50" charset="-127"/>
-              <a:ea typeface="맑은 고딕 Semilight" panose="020B0502040204020203" pitchFamily="50" charset="-127"/>
-              <a:cs typeface="맑은 고딕 Semilight" panose="020B0502040204020203" pitchFamily="50" charset="-127"/>
-            </a:endParaRPr>
-          </a:p>
-        </p:txBody>
-      </p:sp>
+      </p:pic>
+      <p:pic>
+        <p:nvPicPr>
+          <p:cNvPr id="28" name="그림 27">
+            <a:extLst>
+              <a:ext uri="{FF2B5EF4-FFF2-40B4-BE49-F238E27FC236}">
+                <a16:creationId xmlns:a16="http://schemas.microsoft.com/office/drawing/2014/main" id="{C2C9A567-5A6E-3EF4-3586-C18A141C28F7}"/>
+              </a:ext>
+            </a:extLst>
+          </p:cNvPr>
+          <p:cNvPicPr>
+            <a:picLocks noChangeAspect="1"/>
+          </p:cNvPicPr>
+          <p:nvPr/>
+        </p:nvPicPr>
+        <p:blipFill>
+          <a:blip r:embed="rId6"/>
+          <a:stretch>
+            <a:fillRect/>
+          </a:stretch>
+        </p:blipFill>
+        <p:spPr>
+          <a:xfrm>
+            <a:off x="6269303" y="3267742"/>
+            <a:ext cx="5570703" cy="670618"/>
+          </a:xfrm>
+          <a:prstGeom prst="rect">
+            <a:avLst/>
+          </a:prstGeom>
+        </p:spPr>
+      </p:pic>
+      <mc:AlternateContent xmlns:mc="http://schemas.openxmlformats.org/markup-compatibility/2006">
+        <mc:Choice xmlns:a14="http://schemas.microsoft.com/office/drawing/2010/main" Requires="a14">
+          <p:sp>
+            <p:nvSpPr>
+              <p:cNvPr id="31" name="TextBox 30">
+                <a:extLst>
+                  <a:ext uri="{FF2B5EF4-FFF2-40B4-BE49-F238E27FC236}">
+                    <a16:creationId xmlns:a16="http://schemas.microsoft.com/office/drawing/2014/main" id="{B0174EE4-EFF9-A751-C20A-954270309BEB}"/>
+                  </a:ext>
+                </a:extLst>
+              </p:cNvPr>
+              <p:cNvSpPr txBox="1"/>
+              <p:nvPr/>
+            </p:nvSpPr>
+            <p:spPr>
+              <a:xfrm>
+                <a:off x="582447" y="1216852"/>
+                <a:ext cx="11009478" cy="870559"/>
+              </a:xfrm>
+              <a:prstGeom prst="rect">
+                <a:avLst/>
+              </a:prstGeom>
+              <a:noFill/>
+            </p:spPr>
+            <p:txBody>
+              <a:bodyPr wrap="square">
+                <a:spAutoFit/>
+              </a:bodyPr>
+              <a:lstStyle/>
+              <a:p>
+                <a:pPr>
+                  <a:lnSpc>
+                    <a:spcPct val="150000"/>
+                  </a:lnSpc>
+                </a:pPr>
+                <a:r>
+                  <a:rPr lang="ko-KR" altLang="en-US" dirty="0">
+                    <a:latin typeface="맑은 고딕 Semilight" panose="020B0502040204020203" pitchFamily="50" charset="-127"/>
+                    <a:ea typeface="맑은 고딕 Semilight" panose="020B0502040204020203" pitchFamily="50" charset="-127"/>
+                    <a:cs typeface="맑은 고딕 Semilight" panose="020B0502040204020203" pitchFamily="50" charset="-127"/>
+                  </a:rPr>
+                  <a:t>원 자료 </a:t>
+                </a:r>
+                <a14:m>
+                  <m:oMath xmlns:m="http://schemas.openxmlformats.org/officeDocument/2006/math">
+                    <m:r>
+                      <a:rPr lang="ko-KR" altLang="en-US" i="1" dirty="0">
+                        <a:latin typeface="Cambria Math" panose="02040503050406030204" pitchFamily="18" charset="0"/>
+                      </a:rPr>
+                      <m:t>𝑦</m:t>
+                    </m:r>
+                  </m:oMath>
+                </a14:m>
+                <a:r>
+                  <a:rPr lang="ko-KR" altLang="en-US" dirty="0">
+                    <a:latin typeface="맑은 고딕 Semilight" panose="020B0502040204020203" pitchFamily="50" charset="-127"/>
+                    <a:ea typeface="맑은 고딕 Semilight" panose="020B0502040204020203" pitchFamily="50" charset="-127"/>
+                    <a:cs typeface="맑은 고딕 Semilight" panose="020B0502040204020203" pitchFamily="50" charset="-127"/>
+                  </a:rPr>
+                  <a:t>가 선형식으로 이루어졌다고 모델 </a:t>
+                </a:r>
+                <a14:m>
+                  <m:oMath xmlns:m="http://schemas.openxmlformats.org/officeDocument/2006/math">
+                    <m:acc>
+                      <m:accPr>
+                        <m:chr m:val="̂"/>
+                        <m:ctrlPr>
+                          <a:rPr lang="ko-KR" altLang="en-US" i="1" dirty="0">
+                            <a:latin typeface="Cambria Math" panose="02040503050406030204" pitchFamily="18" charset="0"/>
+                          </a:rPr>
+                        </m:ctrlPr>
+                      </m:accPr>
+                      <m:e>
+                        <m:r>
+                          <a:rPr lang="ko-KR" altLang="en-US" i="1" dirty="0">
+                            <a:latin typeface="Cambria Math" panose="02040503050406030204" pitchFamily="18" charset="0"/>
+                          </a:rPr>
+                          <m:t>𝑦</m:t>
+                        </m:r>
+                      </m:e>
+                    </m:acc>
+                  </m:oMath>
+                </a14:m>
+                <a:r>
+                  <a:rPr lang="ko-KR" altLang="en-US" dirty="0">
+                    <a:latin typeface="맑은 고딕 Semilight" panose="020B0502040204020203" pitchFamily="50" charset="-127"/>
+                    <a:ea typeface="맑은 고딕 Semilight" panose="020B0502040204020203" pitchFamily="50" charset="-127"/>
+                    <a:cs typeface="맑은 고딕 Semilight" panose="020B0502040204020203" pitchFamily="50" charset="-127"/>
+                  </a:rPr>
+                  <a:t>를 설정하고 실제 값과 모델 </a:t>
+                </a:r>
+                <a:r>
+                  <a:rPr lang="ko-KR" altLang="en-US" dirty="0" err="1">
+                    <a:latin typeface="맑은 고딕 Semilight" panose="020B0502040204020203" pitchFamily="50" charset="-127"/>
+                    <a:ea typeface="맑은 고딕 Semilight" panose="020B0502040204020203" pitchFamily="50" charset="-127"/>
+                    <a:cs typeface="맑은 고딕 Semilight" panose="020B0502040204020203" pitchFamily="50" charset="-127"/>
+                  </a:rPr>
+                  <a:t>예측값의</a:t>
+                </a:r>
+                <a:r>
+                  <a:rPr lang="ko-KR" altLang="en-US" dirty="0">
+                    <a:latin typeface="맑은 고딕 Semilight" panose="020B0502040204020203" pitchFamily="50" charset="-127"/>
+                    <a:ea typeface="맑은 고딕 Semilight" panose="020B0502040204020203" pitchFamily="50" charset="-127"/>
+                    <a:cs typeface="맑은 고딕 Semilight" panose="020B0502040204020203" pitchFamily="50" charset="-127"/>
+                  </a:rPr>
+                  <a:t> 차이</a:t>
+                </a:r>
+                <a:r>
+                  <a:rPr lang="en-US" altLang="ko-KR" dirty="0">
+                    <a:latin typeface="맑은 고딕 Semilight" panose="020B0502040204020203" pitchFamily="50" charset="-127"/>
+                    <a:ea typeface="맑은 고딕 Semilight" panose="020B0502040204020203" pitchFamily="50" charset="-127"/>
+                    <a:cs typeface="맑은 고딕 Semilight" panose="020B0502040204020203" pitchFamily="50" charset="-127"/>
+                  </a:rPr>
+                  <a:t>(</a:t>
+                </a:r>
+                <a14:m>
+                  <m:oMath xmlns:m="http://schemas.openxmlformats.org/officeDocument/2006/math">
+                    <m:acc>
+                      <m:accPr>
+                        <m:chr m:val="̂"/>
+                        <m:ctrlPr>
+                          <a:rPr lang="ko-KR" altLang="en-US" i="1" dirty="0">
+                            <a:latin typeface="Cambria Math" panose="02040503050406030204" pitchFamily="18" charset="0"/>
+                          </a:rPr>
+                        </m:ctrlPr>
+                      </m:accPr>
+                      <m:e>
+                        <m:r>
+                          <a:rPr lang="ko-KR" altLang="en-US" i="1" dirty="0">
+                            <a:latin typeface="Cambria Math" panose="02040503050406030204" pitchFamily="18" charset="0"/>
+                          </a:rPr>
+                          <m:t>𝑦</m:t>
+                        </m:r>
+                      </m:e>
+                    </m:acc>
+                  </m:oMath>
+                </a14:m>
+                <a:r>
+                  <a:rPr lang="ko-KR" altLang="en-US" dirty="0">
+                    <a:latin typeface="맑은 고딕 Semilight" panose="020B0502040204020203" pitchFamily="50" charset="-127"/>
+                    <a:ea typeface="맑은 고딕 Semilight" panose="020B0502040204020203" pitchFamily="50" charset="-127"/>
+                    <a:cs typeface="맑은 고딕 Semilight" panose="020B0502040204020203" pitchFamily="50" charset="-127"/>
+                  </a:rPr>
+                  <a:t> </a:t>
+                </a:r>
+                <a:r>
+                  <a:rPr lang="en-US" altLang="ko-KR" dirty="0">
+                    <a:latin typeface="맑은 고딕 Semilight" panose="020B0502040204020203" pitchFamily="50" charset="-127"/>
+                    <a:ea typeface="맑은 고딕 Semilight" panose="020B0502040204020203" pitchFamily="50" charset="-127"/>
+                    <a:cs typeface="맑은 고딕 Semilight" panose="020B0502040204020203" pitchFamily="50" charset="-127"/>
+                  </a:rPr>
+                  <a:t>- </a:t>
+                </a:r>
+                <a14:m>
+                  <m:oMath xmlns:m="http://schemas.openxmlformats.org/officeDocument/2006/math">
+                    <m:r>
+                      <a:rPr lang="ko-KR" altLang="en-US" i="1" dirty="0">
+                        <a:latin typeface="Cambria Math" panose="02040503050406030204" pitchFamily="18" charset="0"/>
+                      </a:rPr>
+                      <m:t>𝑦</m:t>
+                    </m:r>
+                  </m:oMath>
+                </a14:m>
+                <a:r>
+                  <a:rPr lang="en-US" altLang="ko-KR" dirty="0">
+                    <a:latin typeface="맑은 고딕 Semilight" panose="020B0502040204020203" pitchFamily="50" charset="-127"/>
+                    <a:ea typeface="맑은 고딕 Semilight" panose="020B0502040204020203" pitchFamily="50" charset="-127"/>
+                    <a:cs typeface="맑은 고딕 Semilight" panose="020B0502040204020203" pitchFamily="50" charset="-127"/>
+                  </a:rPr>
+                  <a:t>)</a:t>
+                </a:r>
+                <a:r>
+                  <a:rPr lang="ko-KR" altLang="en-US" dirty="0">
+                    <a:latin typeface="맑은 고딕 Semilight" panose="020B0502040204020203" pitchFamily="50" charset="-127"/>
+                    <a:ea typeface="맑은 고딕 Semilight" panose="020B0502040204020203" pitchFamily="50" charset="-127"/>
+                    <a:cs typeface="맑은 고딕 Semilight" panose="020B0502040204020203" pitchFamily="50" charset="-127"/>
+                  </a:rPr>
+                  <a:t>인 </a:t>
+                </a:r>
+                <a14:m>
+                  <m:oMath xmlns:m="http://schemas.openxmlformats.org/officeDocument/2006/math">
+                    <m:r>
+                      <a:rPr lang="ko-KR" altLang="en-US" dirty="0">
+                        <a:latin typeface="Cambria Math" panose="02040503050406030204" pitchFamily="18" charset="0"/>
+                      </a:rPr>
+                      <m:t>∈</m:t>
+                    </m:r>
+                  </m:oMath>
+                </a14:m>
+                <a:r>
+                  <a:rPr lang="ko-KR" altLang="en-US" dirty="0">
+                    <a:latin typeface="맑은 고딕 Semilight" panose="020B0502040204020203" pitchFamily="50" charset="-127"/>
+                    <a:ea typeface="맑은 고딕 Semilight" panose="020B0502040204020203" pitchFamily="50" charset="-127"/>
+                    <a:cs typeface="맑은 고딕 Semilight" panose="020B0502040204020203" pitchFamily="50" charset="-127"/>
+                  </a:rPr>
+                  <a:t>를 최소화하는 과정으로 </a:t>
+                </a:r>
+                <a14:m>
+                  <m:oMath xmlns:m="http://schemas.openxmlformats.org/officeDocument/2006/math">
+                    <m:r>
+                      <a:rPr lang="ko-KR" altLang="en-US" dirty="0">
+                        <a:latin typeface="Cambria Math" panose="02040503050406030204" pitchFamily="18" charset="0"/>
+                      </a:rPr>
+                      <m:t>∈</m:t>
+                    </m:r>
+                  </m:oMath>
+                </a14:m>
+                <a:r>
+                  <a:rPr lang="ko-KR" altLang="en-US" dirty="0">
+                    <a:latin typeface="맑은 고딕 Semilight" panose="020B0502040204020203" pitchFamily="50" charset="-127"/>
+                    <a:ea typeface="맑은 고딕 Semilight" panose="020B0502040204020203" pitchFamily="50" charset="-127"/>
+                    <a:cs typeface="맑은 고딕 Semilight" panose="020B0502040204020203" pitchFamily="50" charset="-127"/>
+                  </a:rPr>
+                  <a:t>벡터 의 </a:t>
+                </a:r>
+                <a:r>
+                  <a:rPr lang="ko-KR" altLang="en-US" dirty="0" err="1">
+                    <a:latin typeface="맑은 고딕 Semilight" panose="020B0502040204020203" pitchFamily="50" charset="-127"/>
+                    <a:ea typeface="맑은 고딕 Semilight" panose="020B0502040204020203" pitchFamily="50" charset="-127"/>
+                    <a:cs typeface="맑은 고딕 Semilight" panose="020B0502040204020203" pitchFamily="50" charset="-127"/>
+                  </a:rPr>
+                  <a:t>Norm의</a:t>
+                </a:r>
+                <a:r>
+                  <a:rPr lang="ko-KR" altLang="en-US" dirty="0">
+                    <a:latin typeface="맑은 고딕 Semilight" panose="020B0502040204020203" pitchFamily="50" charset="-127"/>
+                    <a:ea typeface="맑은 고딕 Semilight" panose="020B0502040204020203" pitchFamily="50" charset="-127"/>
+                    <a:cs typeface="맑은 고딕 Semilight" panose="020B0502040204020203" pitchFamily="50" charset="-127"/>
+                  </a:rPr>
+                  <a:t> 제곱을 최소화하는 과정과 동일하다</a:t>
+                </a:r>
+                <a:r>
+                  <a:rPr lang="en-US" altLang="ko-KR" dirty="0">
+                    <a:latin typeface="맑은 고딕 Semilight" panose="020B0502040204020203" pitchFamily="50" charset="-127"/>
+                    <a:ea typeface="맑은 고딕 Semilight" panose="020B0502040204020203" pitchFamily="50" charset="-127"/>
+                    <a:cs typeface="맑은 고딕 Semilight" panose="020B0502040204020203" pitchFamily="50" charset="-127"/>
+                  </a:rPr>
+                  <a:t>.</a:t>
+                </a:r>
+                <a:r>
+                  <a:rPr lang="ko-KR" altLang="en-US" dirty="0">
+                    <a:latin typeface="맑은 고딕 Semilight" panose="020B0502040204020203" pitchFamily="50" charset="-127"/>
+                    <a:ea typeface="맑은 고딕 Semilight" panose="020B0502040204020203" pitchFamily="50" charset="-127"/>
+                    <a:cs typeface="맑은 고딕 Semilight" panose="020B0502040204020203" pitchFamily="50" charset="-127"/>
+                  </a:rPr>
+                  <a:t> </a:t>
+                </a:r>
+              </a:p>
+            </p:txBody>
+          </p:sp>
+        </mc:Choice>
+        <mc:Fallback>
+          <p:sp>
+            <p:nvSpPr>
+              <p:cNvPr id="31" name="TextBox 30">
+                <a:extLst>
+                  <a:ext uri="{FF2B5EF4-FFF2-40B4-BE49-F238E27FC236}">
+                    <a16:creationId xmlns:a16="http://schemas.microsoft.com/office/drawing/2014/main" id="{B0174EE4-EFF9-A751-C20A-954270309BEB}"/>
+                  </a:ext>
+                </a:extLst>
+              </p:cNvPr>
+              <p:cNvSpPr txBox="1">
+                <a:spLocks noRot="1" noChangeAspect="1" noMove="1" noResize="1" noEditPoints="1" noAdjustHandles="1" noChangeArrowheads="1" noChangeShapeType="1" noTextEdit="1"/>
+              </p:cNvSpPr>
+              <p:nvPr/>
+            </p:nvSpPr>
+            <p:spPr>
+              <a:xfrm>
+                <a:off x="582447" y="1216852"/>
+                <a:ext cx="11009478" cy="870559"/>
+              </a:xfrm>
+              <a:prstGeom prst="rect">
+                <a:avLst/>
+              </a:prstGeom>
+              <a:blipFill>
+                <a:blip r:embed="rId7"/>
+                <a:stretch>
+                  <a:fillRect l="-498" b="-10563"/>
+                </a:stretch>
+              </a:blipFill>
+            </p:spPr>
+            <p:txBody>
+              <a:bodyPr/>
+              <a:lstStyle/>
+              <a:p>
+                <a:r>
+                  <a:rPr lang="ko-KR" altLang="en-US">
+                    <a:noFill/>
+                  </a:rPr>
+                  <a:t> </a:t>
+                </a:r>
+              </a:p>
+            </p:txBody>
+          </p:sp>
+        </mc:Fallback>
+      </mc:AlternateContent>
+      <p:pic>
+        <p:nvPicPr>
+          <p:cNvPr id="33" name="그림 32">
+            <a:extLst>
+              <a:ext uri="{FF2B5EF4-FFF2-40B4-BE49-F238E27FC236}">
+                <a16:creationId xmlns:a16="http://schemas.microsoft.com/office/drawing/2014/main" id="{114A7820-73E5-7EBA-DFAA-C527A884B4F9}"/>
+              </a:ext>
+            </a:extLst>
+          </p:cNvPr>
+          <p:cNvPicPr>
+            <a:picLocks noChangeAspect="1"/>
+          </p:cNvPicPr>
+          <p:nvPr/>
+        </p:nvPicPr>
+        <p:blipFill>
+          <a:blip r:embed="rId8"/>
+          <a:stretch>
+            <a:fillRect/>
+          </a:stretch>
+        </p:blipFill>
+        <p:spPr>
+          <a:xfrm>
+            <a:off x="6269303" y="4772034"/>
+            <a:ext cx="5105842" cy="1204064"/>
+          </a:xfrm>
+          <a:prstGeom prst="rect">
+            <a:avLst/>
+          </a:prstGeom>
+        </p:spPr>
+      </p:pic>
     </p:spTree>
     <p:extLst>
       <p:ext uri="{BB962C8B-B14F-4D97-AF65-F5344CB8AC3E}">
-        <p14:creationId xmlns:p14="http://schemas.microsoft.com/office/powerpoint/2010/main" val="4208108702"/>
+        <p14:creationId xmlns:p14="http://schemas.microsoft.com/office/powerpoint/2010/main" val="1588408460"/>
       </p:ext>
     </p:extLst>
   </p:cSld>
   <p:clrMapOvr>
     <a:masterClrMapping/>
   </p:clrMapOvr>
+  <p:timing>
+    <p:tnLst>
+      <p:par>
+        <p:cTn id="1" dur="indefinite" restart="never" nodeType="tmRoot">
+          <p:childTnLst>
+            <p:seq concurrent="1" nextAc="seek">
+              <p:cTn id="2" dur="indefinite" nodeType="mainSeq">
+                <p:childTnLst>
+                  <p:par>
+                    <p:cTn id="3" fill="hold">
+                      <p:stCondLst>
+                        <p:cond delay="indefinite"/>
+                      </p:stCondLst>
+                      <p:childTnLst>
+                        <p:par>
+                          <p:cTn id="4" fill="hold">
+                            <p:stCondLst>
+                              <p:cond delay="0"/>
+                            </p:stCondLst>
+                            <p:childTnLst>
+                              <p:par>
+                                <p:cTn id="5" presetID="1" presetClass="entr" presetSubtype="0" fill="hold" nodeType="clickEffect">
+                                  <p:stCondLst>
+                                    <p:cond delay="0"/>
+                                  </p:stCondLst>
+                                  <p:childTnLst>
+                                    <p:set>
+                                      <p:cBhvr>
+                                        <p:cTn id="6" dur="1" fill="hold">
+                                          <p:stCondLst>
+                                            <p:cond delay="0"/>
+                                          </p:stCondLst>
+                                        </p:cTn>
+                                        <p:tgtEl>
+                                          <p:spTgt spid="28"/>
+                                        </p:tgtEl>
+                                        <p:attrNameLst>
+                                          <p:attrName>style.visibility</p:attrName>
+                                        </p:attrNameLst>
+                                      </p:cBhvr>
+                                      <p:to>
+                                        <p:strVal val="visible"/>
+                                      </p:to>
+                                    </p:set>
+                                  </p:childTnLst>
+                                </p:cTn>
+                              </p:par>
+                            </p:childTnLst>
+                          </p:cTn>
+                        </p:par>
+                      </p:childTnLst>
+                    </p:cTn>
+                  </p:par>
+                  <p:par>
+                    <p:cTn id="7" fill="hold">
+                      <p:stCondLst>
+                        <p:cond delay="indefinite"/>
+                      </p:stCondLst>
+                      <p:childTnLst>
+                        <p:par>
+                          <p:cTn id="8" fill="hold">
+                            <p:stCondLst>
+                              <p:cond delay="0"/>
+                            </p:stCondLst>
+                            <p:childTnLst>
+                              <p:par>
+                                <p:cTn id="9" presetID="1" presetClass="entr" presetSubtype="0" fill="hold" nodeType="clickEffect">
+                                  <p:stCondLst>
+                                    <p:cond delay="0"/>
+                                  </p:stCondLst>
+                                  <p:childTnLst>
+                                    <p:set>
+                                      <p:cBhvr>
+                                        <p:cTn id="10" dur="1" fill="hold">
+                                          <p:stCondLst>
+                                            <p:cond delay="0"/>
+                                          </p:stCondLst>
+                                        </p:cTn>
+                                        <p:tgtEl>
+                                          <p:spTgt spid="22"/>
+                                        </p:tgtEl>
+                                        <p:attrNameLst>
+                                          <p:attrName>style.visibility</p:attrName>
+                                        </p:attrNameLst>
+                                      </p:cBhvr>
+                                      <p:to>
+                                        <p:strVal val="visible"/>
+                                      </p:to>
+                                    </p:set>
+                                  </p:childTnLst>
+                                </p:cTn>
+                              </p:par>
+                            </p:childTnLst>
+                          </p:cTn>
+                        </p:par>
+                      </p:childTnLst>
+                    </p:cTn>
+                  </p:par>
+                  <p:par>
+                    <p:cTn id="11" fill="hold">
+                      <p:stCondLst>
+                        <p:cond delay="indefinite"/>
+                      </p:stCondLst>
+                      <p:childTnLst>
+                        <p:par>
+                          <p:cTn id="12" fill="hold">
+                            <p:stCondLst>
+                              <p:cond delay="0"/>
+                            </p:stCondLst>
+                            <p:childTnLst>
+                              <p:par>
+                                <p:cTn id="13" presetID="1" presetClass="entr" presetSubtype="0" fill="hold" nodeType="clickEffect">
+                                  <p:stCondLst>
+                                    <p:cond delay="0"/>
+                                  </p:stCondLst>
+                                  <p:childTnLst>
+                                    <p:set>
+                                      <p:cBhvr>
+                                        <p:cTn id="14" dur="1" fill="hold">
+                                          <p:stCondLst>
+                                            <p:cond delay="0"/>
+                                          </p:stCondLst>
+                                        </p:cTn>
+                                        <p:tgtEl>
+                                          <p:spTgt spid="33"/>
+                                        </p:tgtEl>
+                                        <p:attrNameLst>
+                                          <p:attrName>style.visibility</p:attrName>
+                                        </p:attrNameLst>
+                                      </p:cBhvr>
+                                      <p:to>
+                                        <p:strVal val="visible"/>
+                                      </p:to>
+                                    </p:set>
+                                  </p:childTnLst>
+                                </p:cTn>
+                              </p:par>
+                            </p:childTnLst>
+                          </p:cTn>
+                        </p:par>
+                      </p:childTnLst>
+                    </p:cTn>
+                  </p:par>
+                  <p:par>
+                    <p:cTn id="15" fill="hold">
+                      <p:stCondLst>
+                        <p:cond delay="indefinite"/>
+                      </p:stCondLst>
+                      <p:childTnLst>
+                        <p:par>
+                          <p:cTn id="16" fill="hold">
+                            <p:stCondLst>
+                              <p:cond delay="0"/>
+                            </p:stCondLst>
+                            <p:childTnLst>
+                              <p:par>
+                                <p:cTn id="17" presetID="1" presetClass="entr" presetSubtype="0" fill="hold" nodeType="clickEffect">
+                                  <p:stCondLst>
+                                    <p:cond delay="0"/>
+                                  </p:stCondLst>
+                                  <p:childTnLst>
+                                    <p:set>
+                                      <p:cBhvr>
+                                        <p:cTn id="18" dur="1" fill="hold">
+                                          <p:stCondLst>
+                                            <p:cond delay="0"/>
+                                          </p:stCondLst>
+                                        </p:cTn>
+                                        <p:tgtEl>
+                                          <p:spTgt spid="24"/>
+                                        </p:tgtEl>
+                                        <p:attrNameLst>
+                                          <p:attrName>style.visibility</p:attrName>
+                                        </p:attrNameLst>
+                                      </p:cBhvr>
+                                      <p:to>
+                                        <p:strVal val="visible"/>
+                                      </p:to>
+                                    </p:set>
+                                  </p:childTnLst>
+                                </p:cTn>
+                              </p:par>
+                            </p:childTnLst>
+                          </p:cTn>
+                        </p:par>
+                      </p:childTnLst>
+                    </p:cTn>
+                  </p:par>
+                </p:childTnLst>
+              </p:cTn>
+              <p:prevCondLst>
+                <p:cond evt="onPrev" delay="0">
+                  <p:tgtEl>
+                    <p:sldTgt/>
+                  </p:tgtEl>
+                </p:cond>
+              </p:prevCondLst>
+              <p:nextCondLst>
+                <p:cond evt="onNext" delay="0">
+                  <p:tgtEl>
+                    <p:sldTgt/>
+                  </p:tgtEl>
+                </p:cond>
+              </p:nextCondLst>
+            </p:seq>
+          </p:childTnLst>
+        </p:cTn>
+      </p:par>
+    </p:tnLst>
+  </p:timing>
 </p:sld>
 </file>
 
-<file path=ppt/slides/slide11.xml><?xml version="1.0" encoding="utf-8"?>
+<file path=ppt/slides/slide12.xml><?xml version="1.0" encoding="utf-8"?>
 <p:sld xmlns:a="http://schemas.openxmlformats.org/drawingml/2006/main" xmlns:r="http://schemas.openxmlformats.org/officeDocument/2006/relationships" xmlns:p="http://schemas.openxmlformats.org/presentationml/2006/main">
   <p:cSld>
     <p:spTree>
@@ -5048,7 +5846,7 @@
             <a:fld id="{D57F1E4F-1CFF-5643-939E-217C01CDF565}" type="slidenum">
               <a:rPr lang="en-US" smtClean="0"/>
               <a:pPr/>
-              <a:t>11</a:t>
+              <a:t>12</a:t>
             </a:fld>
             <a:endParaRPr lang="en-US" dirty="0"/>
           </a:p>
@@ -5344,14 +6142,6 @@
               <a:t>sse</a:t>
             </a:r>
             <a:r>
-              <a:rPr lang="ko-KR" altLang="en-US" sz="1800" cap="none" dirty="0">
-                <a:latin typeface="맑은 고딕 Semilight" panose="020B0502040204020203" pitchFamily="50" charset="-127"/>
-                <a:ea typeface="맑은 고딕 Semilight" panose="020B0502040204020203" pitchFamily="50" charset="-127"/>
-                <a:cs typeface="맑은 고딕 Semilight" panose="020B0502040204020203" pitchFamily="50" charset="-127"/>
-              </a:rPr>
-              <a:t> </a:t>
-            </a:r>
-            <a:r>
               <a:rPr lang="en-US" altLang="ko-KR" sz="1800" cap="none" dirty="0">
                 <a:latin typeface="맑은 고딕 Semilight" panose="020B0502040204020203" pitchFamily="50" charset="-127"/>
                 <a:ea typeface="맑은 고딕 Semilight" panose="020B0502040204020203" pitchFamily="50" charset="-127"/>
@@ -6101,7 +6891,7 @@
 </p:sld>
 </file>
 
-<file path=ppt/slides/slide12.xml><?xml version="1.0" encoding="utf-8"?>
+<file path=ppt/slides/slide13.xml><?xml version="1.0" encoding="utf-8"?>
 <p:sld xmlns:a="http://schemas.openxmlformats.org/drawingml/2006/main" xmlns:r="http://schemas.openxmlformats.org/officeDocument/2006/relationships" xmlns:p="http://schemas.openxmlformats.org/presentationml/2006/main">
   <p:cSld>
     <p:spTree>
@@ -6153,7 +6943,7 @@
             <a:fld id="{D57F1E4F-1CFF-5643-939E-217C01CDF565}" type="slidenum">
               <a:rPr lang="en-US" smtClean="0"/>
               <a:pPr/>
-              <a:t>12</a:t>
+              <a:t>13</a:t>
             </a:fld>
             <a:endParaRPr lang="en-US" dirty="0"/>
           </a:p>
@@ -6462,7 +7252,7 @@
 </p:sld>
 </file>
 
-<file path=ppt/slides/slide13.xml><?xml version="1.0" encoding="utf-8"?>
+<file path=ppt/slides/slide14.xml><?xml version="1.0" encoding="utf-8"?>
 <p:sld xmlns:a="http://schemas.openxmlformats.org/drawingml/2006/main" xmlns:r="http://schemas.openxmlformats.org/officeDocument/2006/relationships" xmlns:p="http://schemas.openxmlformats.org/presentationml/2006/main">
   <p:cSld>
     <p:spTree>
@@ -6514,7 +7304,7 @@
             <a:fld id="{D57F1E4F-1CFF-5643-939E-217C01CDF565}" type="slidenum">
               <a:rPr lang="en-US" smtClean="0"/>
               <a:pPr/>
-              <a:t>13</a:t>
+              <a:t>14</a:t>
             </a:fld>
             <a:endParaRPr lang="en-US" dirty="0"/>
           </a:p>
@@ -6682,7 +7472,7 @@
         </p:nvSpPr>
         <p:spPr>
           <a:xfrm>
-            <a:off x="709308" y="1419224"/>
+            <a:off x="709308" y="1590674"/>
             <a:ext cx="10034891" cy="4617037"/>
           </a:xfrm>
         </p:spPr>
@@ -7107,7 +7897,7 @@
 </p:sld>
 </file>
 
-<file path=ppt/slides/slide14.xml><?xml version="1.0" encoding="utf-8"?>
+<file path=ppt/slides/slide15.xml><?xml version="1.0" encoding="utf-8"?>
 <p:sld xmlns:a="http://schemas.openxmlformats.org/drawingml/2006/main" xmlns:r="http://schemas.openxmlformats.org/officeDocument/2006/relationships" xmlns:p="http://schemas.openxmlformats.org/presentationml/2006/main">
   <p:cSld>
     <p:spTree>
@@ -7249,7 +8039,7 @@
             <a:fld id="{9860EDB8-5305-433F-BE41-D7A86D811DB3}" type="slidenum">
               <a:rPr lang="en-US" altLang="ko-KR" noProof="0" smtClean="0"/>
               <a:pPr/>
-              <a:t>14</a:t>
+              <a:t>15</a:t>
             </a:fld>
             <a:endParaRPr lang="ko-KR" altLang="en-US" noProof="0"/>
           </a:p>
@@ -7353,7 +8143,7 @@
 </p:sld>
 </file>
 
-<file path=ppt/slides/slide15.xml><?xml version="1.0" encoding="utf-8"?>
+<file path=ppt/slides/slide16.xml><?xml version="1.0" encoding="utf-8"?>
 <p:sld xmlns:a="http://schemas.openxmlformats.org/drawingml/2006/main" xmlns:r="http://schemas.openxmlformats.org/officeDocument/2006/relationships" xmlns:p="http://schemas.openxmlformats.org/presentationml/2006/main">
   <p:cSld>
     <p:spTree>
@@ -7405,7 +8195,7 @@
             <a:fld id="{D57F1E4F-1CFF-5643-939E-217C01CDF565}" type="slidenum">
               <a:rPr lang="en-US" smtClean="0"/>
               <a:pPr/>
-              <a:t>15</a:t>
+              <a:t>16</a:t>
             </a:fld>
             <a:endParaRPr lang="en-US" dirty="0"/>
           </a:p>
@@ -8081,7 +8871,7 @@
 </p:sld>
 </file>
 
-<file path=ppt/slides/slide16.xml><?xml version="1.0" encoding="utf-8"?>
+<file path=ppt/slides/slide17.xml><?xml version="1.0" encoding="utf-8"?>
 <p:sld xmlns:a="http://schemas.openxmlformats.org/drawingml/2006/main" xmlns:r="http://schemas.openxmlformats.org/officeDocument/2006/relationships" xmlns:p="http://schemas.openxmlformats.org/presentationml/2006/main">
   <p:cSld>
     <p:spTree>
@@ -8133,7 +8923,7 @@
             <a:fld id="{D57F1E4F-1CFF-5643-939E-217C01CDF565}" type="slidenum">
               <a:rPr lang="en-US" smtClean="0"/>
               <a:pPr/>
-              <a:t>16</a:t>
+              <a:t>17</a:t>
             </a:fld>
             <a:endParaRPr lang="en-US" dirty="0"/>
           </a:p>
@@ -8757,7 +9547,7 @@
 </p:sld>
 </file>
 
-<file path=ppt/slides/slide17.xml><?xml version="1.0" encoding="utf-8"?>
+<file path=ppt/slides/slide18.xml><?xml version="1.0" encoding="utf-8"?>
 <p:sld xmlns:a="http://schemas.openxmlformats.org/drawingml/2006/main" xmlns:r="http://schemas.openxmlformats.org/officeDocument/2006/relationships" xmlns:p="http://schemas.openxmlformats.org/presentationml/2006/main">
   <p:cSld>
     <p:spTree>
@@ -8809,7 +9599,7 @@
             <a:fld id="{D57F1E4F-1CFF-5643-939E-217C01CDF565}" type="slidenum">
               <a:rPr lang="en-US" smtClean="0"/>
               <a:pPr/>
-              <a:t>17</a:t>
+              <a:t>18</a:t>
             </a:fld>
             <a:endParaRPr lang="en-US" dirty="0"/>
           </a:p>
@@ -9015,7 +9805,7 @@
 </p:sld>
 </file>
 
-<file path=ppt/slides/slide18.xml><?xml version="1.0" encoding="utf-8"?>
+<file path=ppt/slides/slide19.xml><?xml version="1.0" encoding="utf-8"?>
 <p:sld xmlns:a="http://schemas.openxmlformats.org/drawingml/2006/main" xmlns:r="http://schemas.openxmlformats.org/officeDocument/2006/relationships" xmlns:p="http://schemas.openxmlformats.org/presentationml/2006/main">
   <p:cSld>
     <p:spTree>
@@ -9067,7 +9857,7 @@
             <a:fld id="{D57F1E4F-1CFF-5643-939E-217C01CDF565}" type="slidenum">
               <a:rPr lang="en-US" smtClean="0"/>
               <a:pPr/>
-              <a:t>18</a:t>
+              <a:t>19</a:t>
             </a:fld>
             <a:endParaRPr lang="en-US" dirty="0"/>
           </a:p>
@@ -9091,8 +9881,8 @@
         </p:nvSpPr>
         <p:spPr>
           <a:xfrm>
-            <a:off x="1028095" y="1530349"/>
-            <a:ext cx="10868630" cy="1336676"/>
+            <a:off x="694720" y="1320799"/>
+            <a:ext cx="8744555" cy="1336676"/>
           </a:xfrm>
         </p:spPr>
         <p:txBody>
@@ -9102,19 +9892,47 @@
           <a:lstStyle/>
           <a:p>
             <a:pPr marL="285750" indent="-285750">
-              <a:lnSpc>
-                <a:spcPct val="150000"/>
-              </a:lnSpc>
               <a:buFont typeface="Wingdings" panose="05000000000000000000" pitchFamily="2" charset="2"/>
               <a:buChar char="§"/>
             </a:pPr>
             <a:r>
+              <a:rPr lang="en-US" altLang="ko-KR" sz="1800" dirty="0">
+                <a:latin typeface="맑은 고딕 Semilight" panose="020B0502040204020203" pitchFamily="50" charset="-127"/>
+                <a:ea typeface="맑은 고딕 Semilight" panose="020B0502040204020203" pitchFamily="50" charset="-127"/>
+                <a:cs typeface="맑은 고딕 Semilight" panose="020B0502040204020203" pitchFamily="50" charset="-127"/>
+                <a:hlinkClick r:id="rId2">
+                  <a:extLst>
+                    <a:ext uri="{A12FA001-AC4F-418D-AE19-62706E023703}">
+                      <ahyp:hlinkClr xmlns:ahyp="http://schemas.microsoft.com/office/drawing/2018/hyperlinkcolor" val="tx"/>
+                    </a:ext>
+                  </a:extLst>
+                </a:hlinkClick>
+              </a:rPr>
+              <a:t>Backpropagation</a:t>
+            </a:r>
+            <a:r>
+              <a:rPr lang="en-US" altLang="ko-KR" sz="1800" dirty="0">
+                <a:latin typeface="맑은 고딕 Semilight" panose="020B0502040204020203" pitchFamily="50" charset="-127"/>
+                <a:ea typeface="맑은 고딕 Semilight" panose="020B0502040204020203" pitchFamily="50" charset="-127"/>
+                <a:cs typeface="맑은 고딕 Semilight" panose="020B0502040204020203" pitchFamily="50" charset="-127"/>
+              </a:rPr>
+              <a:t> : </a:t>
+            </a:r>
+            <a:r>
+              <a:rPr lang="ko-KR" altLang="en-US" sz="1800" dirty="0">
+                <a:latin typeface="맑은 고딕 Semilight" panose="020B0502040204020203" pitchFamily="50" charset="-127"/>
+                <a:ea typeface="맑은 고딕 Semilight" panose="020B0502040204020203" pitchFamily="50" charset="-127"/>
+                <a:cs typeface="맑은 고딕 Semilight" panose="020B0502040204020203" pitchFamily="50" charset="-127"/>
+              </a:rPr>
+              <a:t>입</a:t>
+            </a:r>
+            <a:r>
               <a:rPr lang="ko-KR" altLang="en-US" sz="1800" cap="none" dirty="0">
                 <a:latin typeface="맑은 고딕 Semilight" panose="020B0502040204020203" pitchFamily="50" charset="-127"/>
                 <a:ea typeface="맑은 고딕 Semilight" panose="020B0502040204020203" pitchFamily="50" charset="-127"/>
                 <a:cs typeface="맑은 고딕 Semilight" panose="020B0502040204020203" pitchFamily="50" charset="-127"/>
               </a:rPr>
-              <a:t>입력변수가 </a:t>
+              <a:t>력변수가 </a:t>
             </a:r>
             <a:r>
               <a:rPr lang="en-US" altLang="ko-KR" sz="1800" cap="none" dirty="0">
@@ -9196,20 +10014,6 @@
               </a:rPr>
               <a:t>으로 구하라</a:t>
             </a:r>
-            <a:endParaRPr lang="en-US" altLang="ko-KR" sz="1800" cap="none" dirty="0">
-              <a:latin typeface="맑은 고딕 Semilight" panose="020B0502040204020203" pitchFamily="50" charset="-127"/>
-              <a:ea typeface="맑은 고딕 Semilight" panose="020B0502040204020203" pitchFamily="50" charset="-127"/>
-              <a:cs typeface="맑은 고딕 Semilight" panose="020B0502040204020203" pitchFamily="50" charset="-127"/>
-            </a:endParaRPr>
-          </a:p>
-          <a:p>
-            <a:pPr marL="285750" indent="-285750">
-              <a:lnSpc>
-                <a:spcPct val="150000"/>
-              </a:lnSpc>
-              <a:buFont typeface="Wingdings" panose="05000000000000000000" pitchFamily="2" charset="2"/>
-              <a:buChar char="§"/>
-            </a:pPr>
             <a:endParaRPr lang="en-US" altLang="ko-KR" sz="1800" cap="none" dirty="0">
               <a:latin typeface="맑은 고딕 Semilight" panose="020B0502040204020203" pitchFamily="50" charset="-127"/>
               <a:ea typeface="맑은 고딕 Semilight" panose="020B0502040204020203" pitchFamily="50" charset="-127"/>
@@ -9293,219 +10097,6 @@
           </a:p>
         </p:txBody>
       </p:sp>
-      <p:grpSp>
-        <p:nvGrpSpPr>
-          <p:cNvPr id="9" name="그룹 8">
-            <a:extLst>
-              <a:ext uri="{FF2B5EF4-FFF2-40B4-BE49-F238E27FC236}">
-                <a16:creationId xmlns:a16="http://schemas.microsoft.com/office/drawing/2014/main" id="{823BA1C6-278D-12C3-6549-782ACC6199C7}"/>
-              </a:ext>
-            </a:extLst>
-          </p:cNvPr>
-          <p:cNvGrpSpPr/>
-          <p:nvPr/>
-        </p:nvGrpSpPr>
-        <p:grpSpPr>
-          <a:xfrm>
-            <a:off x="1449579" y="2923303"/>
-            <a:ext cx="3284345" cy="2585323"/>
-            <a:chOff x="2383030" y="2885975"/>
-            <a:chExt cx="3725892" cy="2964901"/>
-          </a:xfrm>
-        </p:grpSpPr>
-        <p:pic>
-          <p:nvPicPr>
-            <p:cNvPr id="6" name="그림 5">
-              <a:extLst>
-                <a:ext uri="{FF2B5EF4-FFF2-40B4-BE49-F238E27FC236}">
-                  <a16:creationId xmlns:a16="http://schemas.microsoft.com/office/drawing/2014/main" id="{710CE7DA-3074-6AFC-EEDA-A141F7393A0B}"/>
-                </a:ext>
-              </a:extLst>
-            </p:cNvPr>
-            <p:cNvPicPr>
-              <a:picLocks noChangeAspect="1"/>
-            </p:cNvPicPr>
-            <p:nvPr/>
-          </p:nvPicPr>
-          <p:blipFill>
-            <a:blip r:embed="rId2"/>
-            <a:stretch>
-              <a:fillRect/>
-            </a:stretch>
-          </p:blipFill>
-          <p:spPr>
-            <a:xfrm>
-              <a:off x="2383030" y="2885975"/>
-              <a:ext cx="3725892" cy="2964901"/>
-            </a:xfrm>
-            <a:prstGeom prst="rect">
-              <a:avLst/>
-            </a:prstGeom>
-          </p:spPr>
-        </p:pic>
-        <p:pic>
-          <p:nvPicPr>
-            <p:cNvPr id="8" name="그림 7">
-              <a:extLst>
-                <a:ext uri="{FF2B5EF4-FFF2-40B4-BE49-F238E27FC236}">
-                  <a16:creationId xmlns:a16="http://schemas.microsoft.com/office/drawing/2014/main" id="{8AFDB8AF-ED88-9564-8F5F-FCE90C4664CA}"/>
-                </a:ext>
-              </a:extLst>
-            </p:cNvPr>
-            <p:cNvPicPr>
-              <a:picLocks noChangeAspect="1"/>
-            </p:cNvPicPr>
-            <p:nvPr/>
-          </p:nvPicPr>
-          <p:blipFill>
-            <a:blip r:embed="rId3"/>
-            <a:stretch>
-              <a:fillRect/>
-            </a:stretch>
-          </p:blipFill>
-          <p:spPr>
-            <a:xfrm flipH="1">
-              <a:off x="5743305" y="3817589"/>
-              <a:ext cx="358398" cy="925861"/>
-            </a:xfrm>
-            <a:prstGeom prst="rect">
-              <a:avLst/>
-            </a:prstGeom>
-          </p:spPr>
-        </p:pic>
-      </p:grpSp>
-      <p:sp>
-        <p:nvSpPr>
-          <p:cNvPr id="12" name="TextBox 11">
-            <a:extLst>
-              <a:ext uri="{FF2B5EF4-FFF2-40B4-BE49-F238E27FC236}">
-                <a16:creationId xmlns:a16="http://schemas.microsoft.com/office/drawing/2014/main" id="{5BE37ACC-2FC0-0549-4E18-391B6A893B24}"/>
-              </a:ext>
-            </a:extLst>
-          </p:cNvPr>
-          <p:cNvSpPr txBox="1"/>
-          <p:nvPr/>
-        </p:nvSpPr>
-        <p:spPr>
-          <a:xfrm>
-            <a:off x="5423677" y="2949574"/>
-            <a:ext cx="6096000" cy="2585323"/>
-          </a:xfrm>
-          <a:prstGeom prst="rect">
-            <a:avLst/>
-          </a:prstGeom>
-          <a:solidFill>
-            <a:schemeClr val="bg1">
-              <a:lumMod val="95000"/>
-            </a:schemeClr>
-          </a:solidFill>
-        </p:spPr>
-        <p:txBody>
-          <a:bodyPr wrap="square">
-            <a:spAutoFit/>
-          </a:bodyPr>
-          <a:lstStyle/>
-          <a:p>
-            <a:r>
-              <a:rPr lang="ko-KR" altLang="en-US" dirty="0"/>
-              <a:t>        X0 (=1, </a:t>
-            </a:r>
-            <a:r>
-              <a:rPr lang="ko-KR" altLang="en-US" dirty="0" err="1"/>
-              <a:t>bias</a:t>
-            </a:r>
-            <a:r>
-              <a:rPr lang="ko-KR" altLang="en-US" dirty="0"/>
-              <a:t>)</a:t>
-            </a:r>
-          </a:p>
-          <a:p>
-            <a:r>
-              <a:rPr lang="ko-KR" altLang="en-US" dirty="0"/>
-              <a:t>             │</a:t>
-            </a:r>
-          </a:p>
-          <a:p>
-            <a:r>
-              <a:rPr lang="ko-KR" altLang="en-US" dirty="0"/>
-              <a:t>             │ w0</a:t>
-            </a:r>
-          </a:p>
-          <a:p>
-            <a:r>
-              <a:rPr lang="ko-KR" altLang="en-US" dirty="0"/>
-              <a:t>             ▼</a:t>
-            </a:r>
-          </a:p>
-          <a:p>
-            <a:r>
-              <a:rPr lang="ko-KR" altLang="en-US" dirty="0"/>
-              <a:t>        ┌─────────┐</a:t>
-            </a:r>
-          </a:p>
-          <a:p>
-            <a:r>
-              <a:rPr lang="ko-KR" altLang="en-US" dirty="0"/>
-              <a:t>X1 ──w1▶│         │</a:t>
-            </a:r>
-          </a:p>
-          <a:p>
-            <a:r>
-              <a:rPr lang="ko-KR" altLang="en-US" dirty="0"/>
-              <a:t>        │             </a:t>
-            </a:r>
-            <a:r>
-              <a:rPr lang="ko-KR" altLang="en-US" dirty="0" err="1"/>
-              <a:t>Σ</a:t>
-            </a:r>
-            <a:r>
-              <a:rPr lang="ko-KR" altLang="en-US" dirty="0"/>
-              <a:t>    │───▶ </a:t>
-            </a:r>
-            <a:r>
-              <a:rPr lang="ko-KR" altLang="en-US" dirty="0" err="1"/>
-              <a:t>Activation</a:t>
-            </a:r>
-            <a:r>
-              <a:rPr lang="ko-KR" altLang="en-US" dirty="0"/>
-              <a:t> (</a:t>
-            </a:r>
-            <a:r>
-              <a:rPr lang="ko-KR" altLang="en-US" dirty="0" err="1"/>
-              <a:t>Step</a:t>
-            </a:r>
-            <a:r>
-              <a:rPr lang="ko-KR" altLang="en-US" dirty="0"/>
-              <a:t>) ───▶ </a:t>
-            </a:r>
-            <a:r>
-              <a:rPr lang="ko-KR" altLang="en-US" dirty="0" err="1"/>
-              <a:t>y</a:t>
-            </a:r>
-            <a:endParaRPr lang="ko-KR" altLang="en-US" dirty="0"/>
-          </a:p>
-          <a:p>
-            <a:r>
-              <a:rPr lang="ko-KR" altLang="en-US" dirty="0"/>
-              <a:t>X2 ──w2▶│ (</a:t>
-            </a:r>
-            <a:r>
-              <a:rPr lang="ko-KR" altLang="en-US" dirty="0" err="1"/>
-              <a:t>sum</a:t>
-            </a:r>
-            <a:r>
-              <a:rPr lang="ko-KR" altLang="en-US" dirty="0"/>
-              <a:t>) │</a:t>
-            </a:r>
-          </a:p>
-          <a:p>
-            <a:r>
-              <a:rPr lang="ko-KR" altLang="en-US" dirty="0"/>
-              <a:t>        └─────────┘</a:t>
-            </a:r>
-          </a:p>
-        </p:txBody>
-      </p:sp>
       <p:pic>
         <p:nvPicPr>
           <p:cNvPr id="14" name="Picture 2" descr="한 여자가 노트북 컴퓨터에 타이핑을 하고 있다">
@@ -9521,7 +10112,7 @@
           <p:nvPr/>
         </p:nvPicPr>
         <p:blipFill>
-          <a:blip r:embed="rId4">
+          <a:blip r:embed="rId3">
             <a:extLst>
               <a:ext uri="{28A0092B-C50C-407E-A947-70E740481C1C}">
                 <a14:useLocalDpi xmlns:a14="http://schemas.microsoft.com/office/drawing/2010/main" val="0"/>
@@ -9553,6 +10144,53 @@
           </a:extLst>
         </p:spPr>
       </p:pic>
+      <p:pic>
+        <p:nvPicPr>
+          <p:cNvPr id="2050" name="Picture 2">
+            <a:extLst>
+              <a:ext uri="{FF2B5EF4-FFF2-40B4-BE49-F238E27FC236}">
+                <a16:creationId xmlns:a16="http://schemas.microsoft.com/office/drawing/2014/main" id="{C6389EEB-3EE9-A340-DA7D-22ACB0D19414}"/>
+              </a:ext>
+            </a:extLst>
+          </p:cNvPr>
+          <p:cNvPicPr>
+            <a:picLocks noChangeAspect="1" noChangeArrowheads="1"/>
+          </p:cNvPicPr>
+          <p:nvPr/>
+        </p:nvPicPr>
+        <p:blipFill>
+          <a:blip r:embed="rId4">
+            <a:extLst>
+              <a:ext uri="{28A0092B-C50C-407E-A947-70E740481C1C}">
+                <a14:useLocalDpi xmlns:a14="http://schemas.microsoft.com/office/drawing/2010/main" val="0"/>
+              </a:ext>
+            </a:extLst>
+          </a:blip>
+          <a:srcRect/>
+          <a:stretch>
+            <a:fillRect/>
+          </a:stretch>
+        </p:blipFill>
+        <p:spPr bwMode="auto">
+          <a:xfrm>
+            <a:off x="3409950" y="2371725"/>
+            <a:ext cx="5778139" cy="4213226"/>
+          </a:xfrm>
+          <a:prstGeom prst="rect">
+            <a:avLst/>
+          </a:prstGeom>
+          <a:noFill/>
+          <a:extLst>
+            <a:ext uri="{909E8E84-426E-40DD-AFC4-6F175D3DCCD1}">
+              <a14:hiddenFill xmlns:a14="http://schemas.microsoft.com/office/drawing/2010/main">
+                <a:solidFill>
+                  <a:srgbClr val="FFFFFF"/>
+                </a:solidFill>
+              </a14:hiddenFill>
+            </a:ext>
+          </a:extLst>
+        </p:spPr>
+      </p:pic>
     </p:spTree>
     <p:extLst>
       <p:ext uri="{BB962C8B-B14F-4D97-AF65-F5344CB8AC3E}">
@@ -9566,7 +10204,1139 @@
 </p:sld>
 </file>
 
-<file path=ppt/slides/slide19.xml><?xml version="1.0" encoding="utf-8"?>
+<file path=ppt/slides/slide2.xml><?xml version="1.0" encoding="utf-8"?>
+<p:sld xmlns:a="http://schemas.openxmlformats.org/drawingml/2006/main" xmlns:r="http://schemas.openxmlformats.org/officeDocument/2006/relationships" xmlns:p="http://schemas.openxmlformats.org/presentationml/2006/main">
+  <p:cSld>
+    <p:spTree>
+      <p:nvGrpSpPr>
+        <p:cNvPr id="1" name="">
+          <a:extLst>
+            <a:ext uri="{FF2B5EF4-FFF2-40B4-BE49-F238E27FC236}">
+              <a16:creationId xmlns:a16="http://schemas.microsoft.com/office/drawing/2014/main" id="{14A2B8F4-50C0-3F8F-FAC9-DCF66BC6CAA4}"/>
+            </a:ext>
+          </a:extLst>
+        </p:cNvPr>
+        <p:cNvGrpSpPr/>
+        <p:nvPr/>
+      </p:nvGrpSpPr>
+      <p:grpSpPr>
+        <a:xfrm>
+          <a:off x="0" y="0"/>
+          <a:ext cx="0" cy="0"/>
+          <a:chOff x="0" y="0"/>
+          <a:chExt cx="0" cy="0"/>
+        </a:xfrm>
+      </p:grpSpPr>
+      <p:sp>
+        <p:nvSpPr>
+          <p:cNvPr id="3" name="직사각형 2">
+            <a:extLst>
+              <a:ext uri="{FF2B5EF4-FFF2-40B4-BE49-F238E27FC236}">
+                <a16:creationId xmlns:a16="http://schemas.microsoft.com/office/drawing/2014/main" id="{9F020723-0294-B282-4C97-3801608209F4}"/>
+              </a:ext>
+            </a:extLst>
+          </p:cNvPr>
+          <p:cNvSpPr/>
+          <p:nvPr/>
+        </p:nvSpPr>
+        <p:spPr>
+          <a:xfrm>
+            <a:off x="734002" y="1457931"/>
+            <a:ext cx="5948218" cy="548669"/>
+          </a:xfrm>
+          <a:prstGeom prst="rect">
+            <a:avLst/>
+          </a:prstGeom>
+          <a:solidFill>
+            <a:schemeClr val="bg1">
+              <a:lumMod val="85000"/>
+            </a:schemeClr>
+          </a:solidFill>
+          <a:ln>
+            <a:noFill/>
+          </a:ln>
+        </p:spPr>
+        <p:style>
+          <a:lnRef idx="2">
+            <a:schemeClr val="accent1">
+              <a:shade val="15000"/>
+            </a:schemeClr>
+          </a:lnRef>
+          <a:fillRef idx="1">
+            <a:schemeClr val="accent1"/>
+          </a:fillRef>
+          <a:effectRef idx="0">
+            <a:schemeClr val="accent1"/>
+          </a:effectRef>
+          <a:fontRef idx="minor">
+            <a:schemeClr val="lt1"/>
+          </a:fontRef>
+        </p:style>
+        <p:txBody>
+          <a:bodyPr rtlCol="0" anchor="ctr"/>
+          <a:lstStyle/>
+          <a:p>
+            <a:pPr algn="ctr"/>
+            <a:endParaRPr lang="ko-KR" altLang="en-US" dirty="0"/>
+          </a:p>
+        </p:txBody>
+      </p:sp>
+      <p:sp>
+        <p:nvSpPr>
+          <p:cNvPr id="8" name="제목 7">
+            <a:extLst>
+              <a:ext uri="{FF2B5EF4-FFF2-40B4-BE49-F238E27FC236}">
+                <a16:creationId xmlns:a16="http://schemas.microsoft.com/office/drawing/2014/main" id="{07CDC162-148D-2721-5DAE-5FEEB0F9ADA8}"/>
+              </a:ext>
+            </a:extLst>
+          </p:cNvPr>
+          <p:cNvSpPr>
+            <a:spLocks noGrp="1"/>
+          </p:cNvSpPr>
+          <p:nvPr>
+            <p:ph type="title"/>
+          </p:nvPr>
+        </p:nvSpPr>
+        <p:spPr>
+          <a:xfrm>
+            <a:off x="521207" y="448056"/>
+            <a:ext cx="8135613" cy="640080"/>
+          </a:xfrm>
+        </p:spPr>
+        <p:txBody>
+          <a:bodyPr rtlCol="0">
+            <a:noAutofit/>
+          </a:bodyPr>
+          <a:lstStyle/>
+          <a:p>
+            <a:pPr rtl="0"/>
+            <a:r>
+              <a:rPr lang="en-US" altLang="ko-KR" dirty="0">
+                <a:cs typeface="Segoe UI Light" panose="020B0502040204020203" pitchFamily="34" charset="0"/>
+              </a:rPr>
+              <a:t>Contents</a:t>
+            </a:r>
+            <a:endParaRPr lang="ko-KR" altLang="en-US" dirty="0">
+              <a:cs typeface="Segoe UI Light" panose="020B0502040204020203" pitchFamily="34" charset="0"/>
+            </a:endParaRPr>
+          </a:p>
+        </p:txBody>
+      </p:sp>
+      <p:sp>
+        <p:nvSpPr>
+          <p:cNvPr id="12" name="슬라이드 번호 개체 틀 11">
+            <a:extLst>
+              <a:ext uri="{FF2B5EF4-FFF2-40B4-BE49-F238E27FC236}">
+                <a16:creationId xmlns:a16="http://schemas.microsoft.com/office/drawing/2014/main" id="{83C7BADB-0A8C-CFB0-F75C-10F2A8FE4161}"/>
+              </a:ext>
+            </a:extLst>
+          </p:cNvPr>
+          <p:cNvSpPr>
+            <a:spLocks noGrp="1"/>
+          </p:cNvSpPr>
+          <p:nvPr>
+            <p:ph type="sldNum" sz="quarter" idx="4"/>
+          </p:nvPr>
+        </p:nvSpPr>
+        <p:spPr/>
+        <p:txBody>
+          <a:bodyPr/>
+          <a:lstStyle/>
+          <a:p>
+            <a:fld id="{9860EDB8-5305-433F-BE41-D7A86D811DB3}" type="slidenum">
+              <a:rPr lang="en-US" altLang="ko-KR" noProof="0" smtClean="0"/>
+              <a:pPr/>
+              <a:t>2</a:t>
+            </a:fld>
+            <a:endParaRPr lang="ko-KR" altLang="en-US" noProof="0"/>
+          </a:p>
+        </p:txBody>
+      </p:sp>
+      <p:sp>
+        <p:nvSpPr>
+          <p:cNvPr id="2" name="TextBox 1">
+            <a:extLst>
+              <a:ext uri="{FF2B5EF4-FFF2-40B4-BE49-F238E27FC236}">
+                <a16:creationId xmlns:a16="http://schemas.microsoft.com/office/drawing/2014/main" id="{C71433E4-C192-2433-A2E9-B5BCAFC7FA01}"/>
+              </a:ext>
+            </a:extLst>
+          </p:cNvPr>
+          <p:cNvSpPr txBox="1"/>
+          <p:nvPr/>
+        </p:nvSpPr>
+        <p:spPr>
+          <a:xfrm>
+            <a:off x="1764145" y="1384043"/>
+            <a:ext cx="7250546" cy="2236959"/>
+          </a:xfrm>
+          <a:prstGeom prst="rect">
+            <a:avLst/>
+          </a:prstGeom>
+          <a:noFill/>
+        </p:spPr>
+        <p:txBody>
+          <a:bodyPr wrap="square" rtlCol="0">
+            <a:spAutoFit/>
+          </a:bodyPr>
+          <a:lstStyle/>
+          <a:p>
+            <a:pPr marL="514350" indent="-514350">
+              <a:lnSpc>
+                <a:spcPct val="150000"/>
+              </a:lnSpc>
+              <a:buAutoNum type="arabicPeriod"/>
+            </a:pPr>
+            <a:r>
+              <a:rPr lang="en-US" altLang="ko-KR" sz="2400" b="1" dirty="0">
+                <a:latin typeface="맑은 고딕 Semilight" panose="020B0502040204020203" pitchFamily="50" charset="-127"/>
+                <a:ea typeface="맑은 고딕 Semilight" panose="020B0502040204020203" pitchFamily="50" charset="-127"/>
+                <a:cs typeface="맑은 고딕 Semilight" panose="020B0502040204020203" pitchFamily="50" charset="-127"/>
+              </a:rPr>
+              <a:t>Linear regression</a:t>
+            </a:r>
+          </a:p>
+          <a:p>
+            <a:pPr marL="514350" indent="-514350">
+              <a:lnSpc>
+                <a:spcPct val="150000"/>
+              </a:lnSpc>
+              <a:buAutoNum type="arabicPeriod"/>
+            </a:pPr>
+            <a:r>
+              <a:rPr lang="en-US" altLang="ko-KR" sz="2400" b="1" dirty="0">
+                <a:latin typeface="맑은 고딕 Semilight" panose="020B0502040204020203" pitchFamily="50" charset="-127"/>
+                <a:ea typeface="맑은 고딕 Semilight" panose="020B0502040204020203" pitchFamily="50" charset="-127"/>
+                <a:cs typeface="맑은 고딕 Semilight" panose="020B0502040204020203" pitchFamily="50" charset="-127"/>
+              </a:rPr>
+              <a:t>Stochastic Gradient Descent</a:t>
+            </a:r>
+          </a:p>
+          <a:p>
+            <a:pPr marL="514350" indent="-514350">
+              <a:lnSpc>
+                <a:spcPct val="150000"/>
+              </a:lnSpc>
+              <a:buAutoNum type="arabicPeriod"/>
+            </a:pPr>
+            <a:r>
+              <a:rPr lang="en-US" altLang="ko-KR" sz="2400" b="1" dirty="0">
+                <a:latin typeface="맑은 고딕 Semilight" panose="020B0502040204020203" pitchFamily="50" charset="-127"/>
+                <a:ea typeface="맑은 고딕 Semilight" panose="020B0502040204020203" pitchFamily="50" charset="-127"/>
+                <a:cs typeface="맑은 고딕 Semilight" panose="020B0502040204020203" pitchFamily="50" charset="-127"/>
+              </a:rPr>
+              <a:t>Perceptron</a:t>
+            </a:r>
+          </a:p>
+          <a:p>
+            <a:pPr marL="514350" indent="-514350">
+              <a:lnSpc>
+                <a:spcPct val="150000"/>
+              </a:lnSpc>
+              <a:buAutoNum type="arabicPeriod"/>
+            </a:pPr>
+            <a:r>
+              <a:rPr lang="en-US" altLang="ko-KR" sz="2400" b="1" dirty="0">
+                <a:latin typeface="맑은 고딕 Semilight" panose="020B0502040204020203" pitchFamily="50" charset="-127"/>
+                <a:ea typeface="맑은 고딕 Semilight" panose="020B0502040204020203" pitchFamily="50" charset="-127"/>
+                <a:cs typeface="맑은 고딕 Semilight" panose="020B0502040204020203" pitchFamily="50" charset="-127"/>
+              </a:rPr>
+              <a:t>Neural Network Architecture</a:t>
+            </a:r>
+          </a:p>
+        </p:txBody>
+      </p:sp>
+    </p:spTree>
+    <p:extLst>
+      <p:ext uri="{BB962C8B-B14F-4D97-AF65-F5344CB8AC3E}">
+        <p14:creationId xmlns:p14="http://schemas.microsoft.com/office/powerpoint/2010/main" val="3551042808"/>
+      </p:ext>
+    </p:extLst>
+  </p:cSld>
+  <p:clrMapOvr>
+    <a:masterClrMapping/>
+  </p:clrMapOvr>
+  <mc:AlternateContent xmlns:mc="http://schemas.openxmlformats.org/markup-compatibility/2006" xmlns:p14="http://schemas.microsoft.com/office/powerpoint/2010/main">
+    <mc:Choice Requires="p14">
+      <p:transition p14:dur="10"/>
+    </mc:Choice>
+    <mc:Fallback xmlns="">
+      <p:transition/>
+    </mc:Fallback>
+  </mc:AlternateContent>
+</p:sld>
+</file>
+
+<file path=ppt/slides/slide20.xml><?xml version="1.0" encoding="utf-8"?>
+<p:sld xmlns:a="http://schemas.openxmlformats.org/drawingml/2006/main" xmlns:r="http://schemas.openxmlformats.org/officeDocument/2006/relationships" xmlns:p="http://schemas.openxmlformats.org/presentationml/2006/main">
+  <p:cSld>
+    <p:spTree>
+      <p:nvGrpSpPr>
+        <p:cNvPr id="1" name="">
+          <a:extLst>
+            <a:ext uri="{FF2B5EF4-FFF2-40B4-BE49-F238E27FC236}">
+              <a16:creationId xmlns:a16="http://schemas.microsoft.com/office/drawing/2014/main" id="{1C89A151-7373-CD39-9538-1D8CF01BD70B}"/>
+            </a:ext>
+          </a:extLst>
+        </p:cNvPr>
+        <p:cNvGrpSpPr/>
+        <p:nvPr/>
+      </p:nvGrpSpPr>
+      <p:grpSpPr>
+        <a:xfrm>
+          <a:off x="0" y="0"/>
+          <a:ext cx="0" cy="0"/>
+          <a:chOff x="0" y="0"/>
+          <a:chExt cx="0" cy="0"/>
+        </a:xfrm>
+      </p:grpSpPr>
+      <p:sp>
+        <p:nvSpPr>
+          <p:cNvPr id="4" name="슬라이드 번호 개체 틀 3">
+            <a:extLst>
+              <a:ext uri="{FF2B5EF4-FFF2-40B4-BE49-F238E27FC236}">
+                <a16:creationId xmlns:a16="http://schemas.microsoft.com/office/drawing/2014/main" id="{6CDA3A58-9B6C-C122-F65E-F4C87A6A2544}"/>
+              </a:ext>
+            </a:extLst>
+          </p:cNvPr>
+          <p:cNvSpPr>
+            <a:spLocks noGrp="1"/>
+          </p:cNvSpPr>
+          <p:nvPr>
+            <p:ph type="sldNum" sz="quarter" idx="12"/>
+          </p:nvPr>
+        </p:nvSpPr>
+        <p:spPr>
+          <a:xfrm>
+            <a:off x="10514011" y="6036261"/>
+            <a:ext cx="753545" cy="365125"/>
+          </a:xfrm>
+        </p:spPr>
+        <p:txBody>
+          <a:bodyPr/>
+          <a:lstStyle/>
+          <a:p>
+            <a:fld id="{D57F1E4F-1CFF-5643-939E-217C01CDF565}" type="slidenum">
+              <a:rPr lang="en-US" smtClean="0"/>
+              <a:pPr/>
+              <a:t>20</a:t>
+            </a:fld>
+            <a:endParaRPr lang="en-US" dirty="0"/>
+          </a:p>
+        </p:txBody>
+      </p:sp>
+      <mc:AlternateContent xmlns:mc="http://schemas.openxmlformats.org/markup-compatibility/2006">
+        <mc:Choice xmlns:a14="http://schemas.microsoft.com/office/drawing/2010/main" Requires="a14">
+          <p:sp>
+            <p:nvSpPr>
+              <p:cNvPr id="2" name="내용 개체 틀 2">
+                <a:extLst>
+                  <a:ext uri="{FF2B5EF4-FFF2-40B4-BE49-F238E27FC236}">
+                    <a16:creationId xmlns:a16="http://schemas.microsoft.com/office/drawing/2014/main" id="{C987CD9F-DDA2-E059-B7FD-CEDE34F0F3AD}"/>
+                  </a:ext>
+                </a:extLst>
+              </p:cNvPr>
+              <p:cNvSpPr>
+                <a:spLocks noGrp="1"/>
+              </p:cNvSpPr>
+              <p:nvPr>
+                <p:ph idx="1"/>
+              </p:nvPr>
+            </p:nvSpPr>
+            <p:spPr>
+              <a:xfrm>
+                <a:off x="651047" y="1349373"/>
+                <a:ext cx="11245678" cy="1990725"/>
+              </a:xfrm>
+            </p:spPr>
+            <p:txBody>
+              <a:bodyPr>
+                <a:normAutofit/>
+              </a:bodyPr>
+              <a:lstStyle/>
+              <a:p>
+                <a:pPr marL="285750" indent="-285750">
+                  <a:lnSpc>
+                    <a:spcPct val="110000"/>
+                  </a:lnSpc>
+                  <a:buFont typeface="Wingdings" panose="05000000000000000000" pitchFamily="2" charset="2"/>
+                  <a:buChar char="§"/>
+                </a:pPr>
+                <a:r>
+                  <a:rPr lang="ko-KR" altLang="en-US" sz="1800" cap="none" dirty="0">
+                    <a:latin typeface="맑은 고딕 Semilight" panose="020B0502040204020203" pitchFamily="50" charset="-127"/>
+                    <a:ea typeface="맑은 고딕 Semilight" panose="020B0502040204020203" pitchFamily="50" charset="-127"/>
+                    <a:cs typeface="맑은 고딕 Semilight" panose="020B0502040204020203" pitchFamily="50" charset="-127"/>
+                  </a:rPr>
+                  <a:t>입력변수가 </a:t>
+                </a:r>
+                <a:r>
+                  <a:rPr lang="en-US" altLang="ko-KR" sz="1800" cap="none" dirty="0">
+                    <a:latin typeface="맑은 고딕 Semilight" panose="020B0502040204020203" pitchFamily="50" charset="-127"/>
+                    <a:ea typeface="맑은 고딕 Semilight" panose="020B0502040204020203" pitchFamily="50" charset="-127"/>
+                    <a:cs typeface="맑은 고딕 Semilight" panose="020B0502040204020203" pitchFamily="50" charset="-127"/>
+                  </a:rPr>
+                  <a:t>2</a:t>
+                </a:r>
+                <a:r>
+                  <a:rPr lang="ko-KR" altLang="en-US" sz="1800" cap="none" dirty="0">
+                    <a:latin typeface="맑은 고딕 Semilight" panose="020B0502040204020203" pitchFamily="50" charset="-127"/>
+                    <a:ea typeface="맑은 고딕 Semilight" panose="020B0502040204020203" pitchFamily="50" charset="-127"/>
+                    <a:cs typeface="맑은 고딕 Semilight" panose="020B0502040204020203" pitchFamily="50" charset="-127"/>
+                  </a:rPr>
+                  <a:t>개인 </a:t>
+                </a:r>
+                <a:r>
+                  <a:rPr lang="en-US" altLang="ko-KR" sz="1800" cap="none" dirty="0">
+                    <a:latin typeface="맑은 고딕 Semilight" panose="020B0502040204020203" pitchFamily="50" charset="-127"/>
+                    <a:ea typeface="맑은 고딕 Semilight" panose="020B0502040204020203" pitchFamily="50" charset="-127"/>
+                    <a:cs typeface="맑은 고딕 Semilight" panose="020B0502040204020203" pitchFamily="50" charset="-127"/>
+                  </a:rPr>
+                  <a:t>XOR </a:t>
+                </a:r>
+                <a:r>
+                  <a:rPr lang="ko-KR" altLang="en-US" sz="1800" cap="none" dirty="0">
+                    <a:latin typeface="맑은 고딕 Semilight" panose="020B0502040204020203" pitchFamily="50" charset="-127"/>
+                    <a:ea typeface="맑은 고딕 Semilight" panose="020B0502040204020203" pitchFamily="50" charset="-127"/>
+                    <a:cs typeface="맑은 고딕 Semilight" panose="020B0502040204020203" pitchFamily="50" charset="-127"/>
+                  </a:rPr>
+                  <a:t>문제를 </a:t>
+                </a:r>
+                <a:r>
+                  <a:rPr lang="en-US" altLang="ko-KR" sz="1800" cap="none" dirty="0">
+                    <a:latin typeface="맑은 고딕 Semilight" panose="020B0502040204020203" pitchFamily="50" charset="-127"/>
+                    <a:ea typeface="맑은 고딕 Semilight" panose="020B0502040204020203" pitchFamily="50" charset="-127"/>
+                    <a:cs typeface="맑은 고딕 Semilight" panose="020B0502040204020203" pitchFamily="50" charset="-127"/>
+                  </a:rPr>
+                  <a:t>perceptron</a:t>
+                </a:r>
+                <a:r>
+                  <a:rPr lang="ko-KR" altLang="en-US" sz="1800" cap="none" dirty="0">
+                    <a:latin typeface="맑은 고딕 Semilight" panose="020B0502040204020203" pitchFamily="50" charset="-127"/>
+                    <a:ea typeface="맑은 고딕 Semilight" panose="020B0502040204020203" pitchFamily="50" charset="-127"/>
+                    <a:cs typeface="맑은 고딕 Semilight" panose="020B0502040204020203" pitchFamily="50" charset="-127"/>
+                  </a:rPr>
+                  <a:t> 단층구조 네트워크로 만들고 엑셀로</a:t>
+                </a:r>
+                <a:r>
+                  <a:rPr lang="en-US" altLang="ko-KR" sz="1800" cap="none" dirty="0">
+                    <a:latin typeface="맑은 고딕 Semilight" panose="020B0502040204020203" pitchFamily="50" charset="-127"/>
+                    <a:ea typeface="맑은 고딕 Semilight" panose="020B0502040204020203" pitchFamily="50" charset="-127"/>
+                    <a:cs typeface="맑은 고딕 Semilight" panose="020B0502040204020203" pitchFamily="50" charset="-127"/>
+                  </a:rPr>
+                  <a:t> parameter</a:t>
+                </a:r>
+                <a:r>
+                  <a:rPr lang="ko-KR" altLang="en-US" sz="1800" cap="none" dirty="0">
+                    <a:latin typeface="맑은 고딕 Semilight" panose="020B0502040204020203" pitchFamily="50" charset="-127"/>
+                    <a:ea typeface="맑은 고딕 Semilight" panose="020B0502040204020203" pitchFamily="50" charset="-127"/>
+                    <a:cs typeface="맑은 고딕 Semilight" panose="020B0502040204020203" pitchFamily="50" charset="-127"/>
+                  </a:rPr>
+                  <a:t>를 </a:t>
+                </a:r>
+                <a:r>
+                  <a:rPr lang="en-US" altLang="ko-KR" sz="1800" cap="none" dirty="0">
+                    <a:latin typeface="맑은 고딕 Semilight" panose="020B0502040204020203" pitchFamily="50" charset="-127"/>
+                    <a:ea typeface="맑은 고딕 Semilight" panose="020B0502040204020203" pitchFamily="50" charset="-127"/>
+                    <a:cs typeface="맑은 고딕 Semilight" panose="020B0502040204020203" pitchFamily="50" charset="-127"/>
+                  </a:rPr>
+                  <a:t>back propagation</a:t>
+                </a:r>
+                <a:r>
+                  <a:rPr lang="ko-KR" altLang="en-US" sz="1800" cap="none" dirty="0">
+                    <a:latin typeface="맑은 고딕 Semilight" panose="020B0502040204020203" pitchFamily="50" charset="-127"/>
+                    <a:ea typeface="맑은 고딕 Semilight" panose="020B0502040204020203" pitchFamily="50" charset="-127"/>
+                    <a:cs typeface="맑은 고딕 Semilight" panose="020B0502040204020203" pitchFamily="50" charset="-127"/>
+                  </a:rPr>
+                  <a:t>으로 구하라</a:t>
+                </a:r>
+                <a:endParaRPr lang="en-US" altLang="ko-KR" sz="1800" cap="none" dirty="0">
+                  <a:latin typeface="맑은 고딕 Semilight" panose="020B0502040204020203" pitchFamily="50" charset="-127"/>
+                  <a:ea typeface="맑은 고딕 Semilight" panose="020B0502040204020203" pitchFamily="50" charset="-127"/>
+                  <a:cs typeface="맑은 고딕 Semilight" panose="020B0502040204020203" pitchFamily="50" charset="-127"/>
+                </a:endParaRPr>
+              </a:p>
+              <a:p>
+                <a:pPr marL="514350" lvl="1" indent="-285750">
+                  <a:lnSpc>
+                    <a:spcPct val="110000"/>
+                  </a:lnSpc>
+                  <a:buFont typeface="Wingdings" panose="05000000000000000000" pitchFamily="2" charset="2"/>
+                  <a:buChar char="§"/>
+                </a:pPr>
+                <a:r>
+                  <a:rPr lang="ko-KR" altLang="en-US" sz="1600" b="1" dirty="0">
+                    <a:latin typeface="맑은 고딕 Semilight" panose="020B0502040204020203" pitchFamily="50" charset="-127"/>
+                    <a:ea typeface="맑은 고딕 Semilight" panose="020B0502040204020203" pitchFamily="50" charset="-127"/>
+                    <a:cs typeface="맑은 고딕 Semilight" panose="020B0502040204020203" pitchFamily="50" charset="-127"/>
+                  </a:rPr>
+                  <a:t>회귀분석 모델의 최적화 과정과 동일한 알고리즘</a:t>
+                </a:r>
+                <a:r>
+                  <a:rPr lang="ko-KR" altLang="en-US" sz="1600" dirty="0">
+                    <a:latin typeface="맑은 고딕 Semilight" panose="020B0502040204020203" pitchFamily="50" charset="-127"/>
+                    <a:ea typeface="맑은 고딕 Semilight" panose="020B0502040204020203" pitchFamily="50" charset="-127"/>
+                    <a:cs typeface="맑은 고딕 Semilight" panose="020B0502040204020203" pitchFamily="50" charset="-127"/>
+                  </a:rPr>
+                  <a:t> </a:t>
+                </a:r>
+                <a:r>
+                  <a:rPr lang="en-US" altLang="ko-KR" sz="1600" dirty="0">
+                    <a:latin typeface="맑은 고딕 Semilight" panose="020B0502040204020203" pitchFamily="50" charset="-127"/>
+                    <a:ea typeface="맑은 고딕 Semilight" panose="020B0502040204020203" pitchFamily="50" charset="-127"/>
+                    <a:cs typeface="맑은 고딕 Semilight" panose="020B0502040204020203" pitchFamily="50" charset="-127"/>
+                  </a:rPr>
+                  <a:t>: </a:t>
+                </a:r>
+                <a:r>
+                  <a:rPr lang="ko-KR" altLang="en-US" sz="1600" dirty="0">
+                    <a:latin typeface="맑은 고딕 Semilight" panose="020B0502040204020203" pitchFamily="50" charset="-127"/>
+                    <a:ea typeface="맑은 고딕 Semilight" panose="020B0502040204020203" pitchFamily="50" charset="-127"/>
+                    <a:cs typeface="맑은 고딕 Semilight" panose="020B0502040204020203" pitchFamily="50" charset="-127"/>
+                  </a:rPr>
+                  <a:t>원 자료 </a:t>
+                </a:r>
+                <a14:m>
+                  <m:oMath xmlns:m="http://schemas.openxmlformats.org/officeDocument/2006/math">
+                    <m:r>
+                      <a:rPr lang="ko-KR" altLang="en-US" sz="1600" i="1" dirty="0">
+                        <a:latin typeface="Cambria Math" panose="02040503050406030204" pitchFamily="18" charset="0"/>
+                      </a:rPr>
+                      <m:t>𝑦</m:t>
+                    </m:r>
+                  </m:oMath>
+                </a14:m>
+                <a:r>
+                  <a:rPr lang="ko-KR" altLang="en-US" sz="1600" dirty="0">
+                    <a:latin typeface="맑은 고딕 Semilight" panose="020B0502040204020203" pitchFamily="50" charset="-127"/>
+                    <a:ea typeface="맑은 고딕 Semilight" panose="020B0502040204020203" pitchFamily="50" charset="-127"/>
+                    <a:cs typeface="맑은 고딕 Semilight" panose="020B0502040204020203" pitchFamily="50" charset="-127"/>
+                  </a:rPr>
+                  <a:t>가 선형식으로 이루어졌다고 모델 </a:t>
+                </a:r>
+                <a14:m>
+                  <m:oMath xmlns:m="http://schemas.openxmlformats.org/officeDocument/2006/math">
+                    <m:acc>
+                      <m:accPr>
+                        <m:chr m:val="̂"/>
+                        <m:ctrlPr>
+                          <a:rPr lang="ko-KR" altLang="en-US" sz="1600" i="1" dirty="0">
+                            <a:latin typeface="Cambria Math" panose="02040503050406030204" pitchFamily="18" charset="0"/>
+                          </a:rPr>
+                        </m:ctrlPr>
+                      </m:accPr>
+                      <m:e>
+                        <m:r>
+                          <a:rPr lang="ko-KR" altLang="en-US" sz="1600" i="1" dirty="0">
+                            <a:latin typeface="Cambria Math" panose="02040503050406030204" pitchFamily="18" charset="0"/>
+                          </a:rPr>
+                          <m:t>𝑦</m:t>
+                        </m:r>
+                      </m:e>
+                    </m:acc>
+                  </m:oMath>
+                </a14:m>
+                <a:r>
+                  <a:rPr lang="ko-KR" altLang="en-US" sz="1600" dirty="0">
+                    <a:latin typeface="맑은 고딕 Semilight" panose="020B0502040204020203" pitchFamily="50" charset="-127"/>
+                    <a:ea typeface="맑은 고딕 Semilight" panose="020B0502040204020203" pitchFamily="50" charset="-127"/>
+                    <a:cs typeface="맑은 고딕 Semilight" panose="020B0502040204020203" pitchFamily="50" charset="-127"/>
+                  </a:rPr>
+                  <a:t>를 설정하고 실제 값과 모델 예측 값의 차이</a:t>
+                </a:r>
+                <a:r>
+                  <a:rPr lang="en-US" altLang="ko-KR" sz="1600" dirty="0">
+                    <a:latin typeface="맑은 고딕 Semilight" panose="020B0502040204020203" pitchFamily="50" charset="-127"/>
+                    <a:ea typeface="맑은 고딕 Semilight" panose="020B0502040204020203" pitchFamily="50" charset="-127"/>
+                    <a:cs typeface="맑은 고딕 Semilight" panose="020B0502040204020203" pitchFamily="50" charset="-127"/>
+                  </a:rPr>
+                  <a:t>(</a:t>
+                </a:r>
+                <a14:m>
+                  <m:oMath xmlns:m="http://schemas.openxmlformats.org/officeDocument/2006/math">
+                    <m:acc>
+                      <m:accPr>
+                        <m:chr m:val="̂"/>
+                        <m:ctrlPr>
+                          <a:rPr lang="ko-KR" altLang="en-US" sz="1600" i="1" dirty="0">
+                            <a:latin typeface="Cambria Math" panose="02040503050406030204" pitchFamily="18" charset="0"/>
+                          </a:rPr>
+                        </m:ctrlPr>
+                      </m:accPr>
+                      <m:e>
+                        <m:r>
+                          <a:rPr lang="ko-KR" altLang="en-US" sz="1600" i="1" dirty="0">
+                            <a:latin typeface="Cambria Math" panose="02040503050406030204" pitchFamily="18" charset="0"/>
+                          </a:rPr>
+                          <m:t>𝑦</m:t>
+                        </m:r>
+                      </m:e>
+                    </m:acc>
+                  </m:oMath>
+                </a14:m>
+                <a:r>
+                  <a:rPr lang="ko-KR" altLang="en-US" sz="1600" dirty="0">
+                    <a:latin typeface="맑은 고딕 Semilight" panose="020B0502040204020203" pitchFamily="50" charset="-127"/>
+                    <a:ea typeface="맑은 고딕 Semilight" panose="020B0502040204020203" pitchFamily="50" charset="-127"/>
+                    <a:cs typeface="맑은 고딕 Semilight" panose="020B0502040204020203" pitchFamily="50" charset="-127"/>
+                  </a:rPr>
+                  <a:t> </a:t>
+                </a:r>
+                <a:r>
+                  <a:rPr lang="en-US" altLang="ko-KR" sz="1600" dirty="0">
+                    <a:latin typeface="맑은 고딕 Semilight" panose="020B0502040204020203" pitchFamily="50" charset="-127"/>
+                    <a:ea typeface="맑은 고딕 Semilight" panose="020B0502040204020203" pitchFamily="50" charset="-127"/>
+                    <a:cs typeface="맑은 고딕 Semilight" panose="020B0502040204020203" pitchFamily="50" charset="-127"/>
+                  </a:rPr>
+                  <a:t>- </a:t>
+                </a:r>
+                <a14:m>
+                  <m:oMath xmlns:m="http://schemas.openxmlformats.org/officeDocument/2006/math">
+                    <m:r>
+                      <a:rPr lang="ko-KR" altLang="en-US" sz="1600" i="1" dirty="0">
+                        <a:latin typeface="Cambria Math" panose="02040503050406030204" pitchFamily="18" charset="0"/>
+                      </a:rPr>
+                      <m:t>𝑦</m:t>
+                    </m:r>
+                  </m:oMath>
+                </a14:m>
+                <a:r>
+                  <a:rPr lang="en-US" altLang="ko-KR" sz="1600" dirty="0">
+                    <a:latin typeface="맑은 고딕 Semilight" panose="020B0502040204020203" pitchFamily="50" charset="-127"/>
+                    <a:ea typeface="맑은 고딕 Semilight" panose="020B0502040204020203" pitchFamily="50" charset="-127"/>
+                    <a:cs typeface="맑은 고딕 Semilight" panose="020B0502040204020203" pitchFamily="50" charset="-127"/>
+                  </a:rPr>
+                  <a:t>)</a:t>
+                </a:r>
+                <a:r>
+                  <a:rPr lang="ko-KR" altLang="en-US" sz="1600" dirty="0">
+                    <a:latin typeface="맑은 고딕 Semilight" panose="020B0502040204020203" pitchFamily="50" charset="-127"/>
+                    <a:ea typeface="맑은 고딕 Semilight" panose="020B0502040204020203" pitchFamily="50" charset="-127"/>
+                    <a:cs typeface="맑은 고딕 Semilight" panose="020B0502040204020203" pitchFamily="50" charset="-127"/>
+                  </a:rPr>
+                  <a:t>인 </a:t>
+                </a:r>
+                <a14:m>
+                  <m:oMath xmlns:m="http://schemas.openxmlformats.org/officeDocument/2006/math">
+                    <m:r>
+                      <a:rPr lang="ko-KR" altLang="en-US" sz="1600" dirty="0">
+                        <a:latin typeface="Cambria Math" panose="02040503050406030204" pitchFamily="18" charset="0"/>
+                      </a:rPr>
+                      <m:t>∈</m:t>
+                    </m:r>
+                  </m:oMath>
+                </a14:m>
+                <a:r>
+                  <a:rPr lang="ko-KR" altLang="en-US" sz="1600" dirty="0">
+                    <a:latin typeface="맑은 고딕 Semilight" panose="020B0502040204020203" pitchFamily="50" charset="-127"/>
+                    <a:ea typeface="맑은 고딕 Semilight" panose="020B0502040204020203" pitchFamily="50" charset="-127"/>
+                    <a:cs typeface="맑은 고딕 Semilight" panose="020B0502040204020203" pitchFamily="50" charset="-127"/>
+                  </a:rPr>
+                  <a:t>를 최소화하는 과정으로 </a:t>
+                </a:r>
+                <a14:m>
+                  <m:oMath xmlns:m="http://schemas.openxmlformats.org/officeDocument/2006/math">
+                    <m:r>
+                      <a:rPr lang="ko-KR" altLang="en-US" sz="1600" dirty="0">
+                        <a:latin typeface="Cambria Math" panose="02040503050406030204" pitchFamily="18" charset="0"/>
+                      </a:rPr>
+                      <m:t>∈</m:t>
+                    </m:r>
+                  </m:oMath>
+                </a14:m>
+                <a:r>
+                  <a:rPr lang="ko-KR" altLang="en-US" sz="1600" dirty="0">
+                    <a:latin typeface="맑은 고딕 Semilight" panose="020B0502040204020203" pitchFamily="50" charset="-127"/>
+                    <a:ea typeface="맑은 고딕 Semilight" panose="020B0502040204020203" pitchFamily="50" charset="-127"/>
+                    <a:cs typeface="맑은 고딕 Semilight" panose="020B0502040204020203" pitchFamily="50" charset="-127"/>
+                  </a:rPr>
+                  <a:t>벡터 의 </a:t>
+                </a:r>
+                <a:r>
+                  <a:rPr lang="ko-KR" altLang="en-US" sz="1600" dirty="0" err="1">
+                    <a:latin typeface="맑은 고딕 Semilight" panose="020B0502040204020203" pitchFamily="50" charset="-127"/>
+                    <a:ea typeface="맑은 고딕 Semilight" panose="020B0502040204020203" pitchFamily="50" charset="-127"/>
+                    <a:cs typeface="맑은 고딕 Semilight" panose="020B0502040204020203" pitchFamily="50" charset="-127"/>
+                  </a:rPr>
+                  <a:t>Norm의</a:t>
+                </a:r>
+                <a:r>
+                  <a:rPr lang="ko-KR" altLang="en-US" sz="1600" dirty="0">
+                    <a:latin typeface="맑은 고딕 Semilight" panose="020B0502040204020203" pitchFamily="50" charset="-127"/>
+                    <a:ea typeface="맑은 고딕 Semilight" panose="020B0502040204020203" pitchFamily="50" charset="-127"/>
+                    <a:cs typeface="맑은 고딕 Semilight" panose="020B0502040204020203" pitchFamily="50" charset="-127"/>
+                  </a:rPr>
+                  <a:t> 제곱을 최소화하는 과정과 동일하다</a:t>
+                </a:r>
+                <a:r>
+                  <a:rPr lang="en-US" altLang="ko-KR" sz="1600" dirty="0">
+                    <a:latin typeface="맑은 고딕 Semilight" panose="020B0502040204020203" pitchFamily="50" charset="-127"/>
+                    <a:ea typeface="맑은 고딕 Semilight" panose="020B0502040204020203" pitchFamily="50" charset="-127"/>
+                    <a:cs typeface="맑은 고딕 Semilight" panose="020B0502040204020203" pitchFamily="50" charset="-127"/>
+                  </a:rPr>
+                  <a:t>.</a:t>
+                </a:r>
+                <a:r>
+                  <a:rPr lang="ko-KR" altLang="en-US" sz="1600" dirty="0">
+                    <a:latin typeface="맑은 고딕 Semilight" panose="020B0502040204020203" pitchFamily="50" charset="-127"/>
+                    <a:ea typeface="맑은 고딕 Semilight" panose="020B0502040204020203" pitchFamily="50" charset="-127"/>
+                    <a:cs typeface="맑은 고딕 Semilight" panose="020B0502040204020203" pitchFamily="50" charset="-127"/>
+                  </a:rPr>
+                  <a:t> </a:t>
+                </a:r>
+                <a:endParaRPr lang="en-US" altLang="ko-KR" sz="1600" cap="none" dirty="0">
+                  <a:latin typeface="맑은 고딕 Semilight" panose="020B0502040204020203" pitchFamily="50" charset="-127"/>
+                  <a:ea typeface="맑은 고딕 Semilight" panose="020B0502040204020203" pitchFamily="50" charset="-127"/>
+                  <a:cs typeface="맑은 고딕 Semilight" panose="020B0502040204020203" pitchFamily="50" charset="-127"/>
+                </a:endParaRPr>
+              </a:p>
+              <a:p>
+                <a:pPr marL="285750" indent="-285750">
+                  <a:lnSpc>
+                    <a:spcPct val="110000"/>
+                  </a:lnSpc>
+                  <a:buFont typeface="Wingdings" panose="05000000000000000000" pitchFamily="2" charset="2"/>
+                  <a:buChar char="§"/>
+                </a:pPr>
+                <a:endParaRPr lang="en-US" altLang="ko-KR" sz="1800" cap="none" dirty="0">
+                  <a:latin typeface="맑은 고딕 Semilight" panose="020B0502040204020203" pitchFamily="50" charset="-127"/>
+                  <a:ea typeface="맑은 고딕 Semilight" panose="020B0502040204020203" pitchFamily="50" charset="-127"/>
+                  <a:cs typeface="맑은 고딕 Semilight" panose="020B0502040204020203" pitchFamily="50" charset="-127"/>
+                </a:endParaRPr>
+              </a:p>
+            </p:txBody>
+          </p:sp>
+        </mc:Choice>
+        <mc:Fallback>
+          <p:sp>
+            <p:nvSpPr>
+              <p:cNvPr id="2" name="내용 개체 틀 2">
+                <a:extLst>
+                  <a:ext uri="{FF2B5EF4-FFF2-40B4-BE49-F238E27FC236}">
+                    <a16:creationId xmlns:a16="http://schemas.microsoft.com/office/drawing/2014/main" id="{C987CD9F-DDA2-E059-B7FD-CEDE34F0F3AD}"/>
+                  </a:ext>
+                </a:extLst>
+              </p:cNvPr>
+              <p:cNvSpPr>
+                <a:spLocks noGrp="1" noRot="1" noChangeAspect="1" noMove="1" noResize="1" noEditPoints="1" noAdjustHandles="1" noChangeArrowheads="1" noChangeShapeType="1" noTextEdit="1"/>
+              </p:cNvSpPr>
+              <p:nvPr>
+                <p:ph idx="1"/>
+              </p:nvPr>
+            </p:nvSpPr>
+            <p:spPr>
+              <a:xfrm>
+                <a:off x="651047" y="1349373"/>
+                <a:ext cx="11245678" cy="1990725"/>
+              </a:xfrm>
+              <a:blipFill>
+                <a:blip r:embed="rId2"/>
+                <a:stretch>
+                  <a:fillRect l="-379" t="-1529" r="-108"/>
+                </a:stretch>
+              </a:blipFill>
+            </p:spPr>
+            <p:txBody>
+              <a:bodyPr/>
+              <a:lstStyle/>
+              <a:p>
+                <a:r>
+                  <a:rPr lang="ko-KR" altLang="en-US">
+                    <a:noFill/>
+                  </a:rPr>
+                  <a:t> </a:t>
+                </a:r>
+              </a:p>
+            </p:txBody>
+          </p:sp>
+        </mc:Fallback>
+      </mc:AlternateContent>
+      <p:sp>
+        <p:nvSpPr>
+          <p:cNvPr id="3" name="제목 1">
+            <a:extLst>
+              <a:ext uri="{FF2B5EF4-FFF2-40B4-BE49-F238E27FC236}">
+                <a16:creationId xmlns:a16="http://schemas.microsoft.com/office/drawing/2014/main" id="{E635AD1D-E5B1-9BEC-AE88-F51A1441585F}"/>
+              </a:ext>
+            </a:extLst>
+          </p:cNvPr>
+          <p:cNvSpPr txBox="1">
+            <a:spLocks/>
+          </p:cNvSpPr>
+          <p:nvPr/>
+        </p:nvSpPr>
+        <p:spPr>
+          <a:xfrm>
+            <a:off x="475645" y="481983"/>
+            <a:ext cx="10353762" cy="766439"/>
+          </a:xfrm>
+          <a:prstGeom prst="rect">
+            <a:avLst/>
+          </a:prstGeom>
+        </p:spPr>
+        <p:txBody>
+          <a:bodyPr vert="horz" lIns="91440" tIns="45720" rIns="91440" bIns="45720" rtlCol="0" anchor="ctr">
+            <a:normAutofit/>
+          </a:bodyPr>
+          <a:lstStyle>
+            <a:lvl1pPr algn="ctr" defTabSz="914400" rtl="0" eaLnBrk="1" latinLnBrk="1" hangingPunct="1">
+              <a:lnSpc>
+                <a:spcPct val="90000"/>
+              </a:lnSpc>
+              <a:spcBef>
+                <a:spcPct val="0"/>
+              </a:spcBef>
+              <a:buNone/>
+              <a:defRPr sz="3200" kern="1200" cap="all" baseline="0">
+                <a:solidFill>
+                  <a:schemeClr val="tx1"/>
+                </a:solidFill>
+                <a:effectLst/>
+                <a:latin typeface="Batang" panose="02030600000101010101" pitchFamily="18" charset="-127"/>
+                <a:ea typeface="Batang" panose="02030600000101010101" pitchFamily="18" charset="-127"/>
+                <a:cs typeface="+mj-cs"/>
+              </a:defRPr>
+            </a:lvl1pPr>
+          </a:lstStyle>
+          <a:p>
+            <a:pPr algn="l"/>
+            <a:r>
+              <a:rPr lang="en-US" altLang="ko-KR" sz="2800" cap="none" dirty="0">
+                <a:solidFill>
+                  <a:schemeClr val="bg2">
+                    <a:lumMod val="25000"/>
+                  </a:schemeClr>
+                </a:solidFill>
+                <a:latin typeface="맑은 고딕" panose="020B0503020000020004" pitchFamily="50" charset="-127"/>
+                <a:ea typeface="맑은 고딕" panose="020B0503020000020004" pitchFamily="50" charset="-127"/>
+                <a:cs typeface="Segoe UI Light" panose="020B0502040204020203" pitchFamily="34" charset="0"/>
+              </a:rPr>
+              <a:t>Backpropagation</a:t>
+            </a:r>
+            <a:endParaRPr lang="ko-KR" altLang="en-US" sz="2800" cap="none" dirty="0">
+              <a:solidFill>
+                <a:schemeClr val="bg2">
+                  <a:lumMod val="25000"/>
+                </a:schemeClr>
+              </a:solidFill>
+              <a:latin typeface="맑은 고딕" panose="020B0503020000020004" pitchFamily="50" charset="-127"/>
+              <a:ea typeface="맑은 고딕" panose="020B0503020000020004" pitchFamily="50" charset="-127"/>
+              <a:cs typeface="Segoe UI Light" panose="020B0502040204020203" pitchFamily="34" charset="0"/>
+            </a:endParaRPr>
+          </a:p>
+        </p:txBody>
+      </p:sp>
+      <p:grpSp>
+        <p:nvGrpSpPr>
+          <p:cNvPr id="9" name="그룹 8">
+            <a:extLst>
+              <a:ext uri="{FF2B5EF4-FFF2-40B4-BE49-F238E27FC236}">
+                <a16:creationId xmlns:a16="http://schemas.microsoft.com/office/drawing/2014/main" id="{00A9C883-3E2B-C8E8-B453-F0D11ADDAB96}"/>
+              </a:ext>
+            </a:extLst>
+          </p:cNvPr>
+          <p:cNvGrpSpPr/>
+          <p:nvPr/>
+        </p:nvGrpSpPr>
+        <p:grpSpPr>
+          <a:xfrm>
+            <a:off x="1449579" y="3313828"/>
+            <a:ext cx="3284345" cy="2585323"/>
+            <a:chOff x="2383030" y="2885975"/>
+            <a:chExt cx="3725892" cy="2964901"/>
+          </a:xfrm>
+        </p:grpSpPr>
+        <p:pic>
+          <p:nvPicPr>
+            <p:cNvPr id="6" name="그림 5">
+              <a:extLst>
+                <a:ext uri="{FF2B5EF4-FFF2-40B4-BE49-F238E27FC236}">
+                  <a16:creationId xmlns:a16="http://schemas.microsoft.com/office/drawing/2014/main" id="{2DDC744F-2E30-CC4C-1850-61EAD6366A9F}"/>
+                </a:ext>
+              </a:extLst>
+            </p:cNvPr>
+            <p:cNvPicPr>
+              <a:picLocks noChangeAspect="1"/>
+            </p:cNvPicPr>
+            <p:nvPr/>
+          </p:nvPicPr>
+          <p:blipFill>
+            <a:blip r:embed="rId3"/>
+            <a:stretch>
+              <a:fillRect/>
+            </a:stretch>
+          </p:blipFill>
+          <p:spPr>
+            <a:xfrm>
+              <a:off x="2383030" y="2885975"/>
+              <a:ext cx="3725892" cy="2964901"/>
+            </a:xfrm>
+            <a:prstGeom prst="rect">
+              <a:avLst/>
+            </a:prstGeom>
+          </p:spPr>
+        </p:pic>
+        <p:pic>
+          <p:nvPicPr>
+            <p:cNvPr id="8" name="그림 7">
+              <a:extLst>
+                <a:ext uri="{FF2B5EF4-FFF2-40B4-BE49-F238E27FC236}">
+                  <a16:creationId xmlns:a16="http://schemas.microsoft.com/office/drawing/2014/main" id="{4620CE9F-ECAC-8FB5-7FDC-CA819B737281}"/>
+                </a:ext>
+              </a:extLst>
+            </p:cNvPr>
+            <p:cNvPicPr>
+              <a:picLocks noChangeAspect="1"/>
+            </p:cNvPicPr>
+            <p:nvPr/>
+          </p:nvPicPr>
+          <p:blipFill>
+            <a:blip r:embed="rId4"/>
+            <a:stretch>
+              <a:fillRect/>
+            </a:stretch>
+          </p:blipFill>
+          <p:spPr>
+            <a:xfrm flipH="1">
+              <a:off x="5743305" y="3817589"/>
+              <a:ext cx="358398" cy="925861"/>
+            </a:xfrm>
+            <a:prstGeom prst="rect">
+              <a:avLst/>
+            </a:prstGeom>
+          </p:spPr>
+        </p:pic>
+      </p:grpSp>
+      <p:sp>
+        <p:nvSpPr>
+          <p:cNvPr id="12" name="TextBox 11">
+            <a:extLst>
+              <a:ext uri="{FF2B5EF4-FFF2-40B4-BE49-F238E27FC236}">
+                <a16:creationId xmlns:a16="http://schemas.microsoft.com/office/drawing/2014/main" id="{6C865416-24DB-97B1-FEBE-E254A6F0D7FF}"/>
+              </a:ext>
+            </a:extLst>
+          </p:cNvPr>
+          <p:cNvSpPr txBox="1"/>
+          <p:nvPr/>
+        </p:nvSpPr>
+        <p:spPr>
+          <a:xfrm>
+            <a:off x="5423677" y="3340099"/>
+            <a:ext cx="6096000" cy="2585323"/>
+          </a:xfrm>
+          <a:prstGeom prst="rect">
+            <a:avLst/>
+          </a:prstGeom>
+          <a:solidFill>
+            <a:schemeClr val="bg1">
+              <a:lumMod val="95000"/>
+            </a:schemeClr>
+          </a:solidFill>
+        </p:spPr>
+        <p:txBody>
+          <a:bodyPr wrap="square">
+            <a:spAutoFit/>
+          </a:bodyPr>
+          <a:lstStyle/>
+          <a:p>
+            <a:r>
+              <a:rPr lang="ko-KR" altLang="en-US" dirty="0"/>
+              <a:t>        X0 (=1, </a:t>
+            </a:r>
+            <a:r>
+              <a:rPr lang="ko-KR" altLang="en-US" dirty="0" err="1"/>
+              <a:t>bias</a:t>
+            </a:r>
+            <a:r>
+              <a:rPr lang="ko-KR" altLang="en-US" dirty="0"/>
+              <a:t>)</a:t>
+            </a:r>
+          </a:p>
+          <a:p>
+            <a:r>
+              <a:rPr lang="ko-KR" altLang="en-US" dirty="0"/>
+              <a:t>             │</a:t>
+            </a:r>
+          </a:p>
+          <a:p>
+            <a:r>
+              <a:rPr lang="ko-KR" altLang="en-US" dirty="0"/>
+              <a:t>             │ w0</a:t>
+            </a:r>
+          </a:p>
+          <a:p>
+            <a:r>
+              <a:rPr lang="ko-KR" altLang="en-US" dirty="0"/>
+              <a:t>             ▼</a:t>
+            </a:r>
+          </a:p>
+          <a:p>
+            <a:r>
+              <a:rPr lang="ko-KR" altLang="en-US" dirty="0"/>
+              <a:t>        ┌─────────┐</a:t>
+            </a:r>
+          </a:p>
+          <a:p>
+            <a:r>
+              <a:rPr lang="ko-KR" altLang="en-US" dirty="0"/>
+              <a:t>X1 ──w1▶│         │</a:t>
+            </a:r>
+          </a:p>
+          <a:p>
+            <a:r>
+              <a:rPr lang="ko-KR" altLang="en-US" dirty="0"/>
+              <a:t>        │             </a:t>
+            </a:r>
+            <a:r>
+              <a:rPr lang="ko-KR" altLang="en-US" dirty="0" err="1"/>
+              <a:t>Σ</a:t>
+            </a:r>
+            <a:r>
+              <a:rPr lang="ko-KR" altLang="en-US" dirty="0"/>
+              <a:t>    │───▶ </a:t>
+            </a:r>
+            <a:r>
+              <a:rPr lang="ko-KR" altLang="en-US" dirty="0" err="1"/>
+              <a:t>Activation</a:t>
+            </a:r>
+            <a:r>
+              <a:rPr lang="ko-KR" altLang="en-US" dirty="0"/>
+              <a:t> (</a:t>
+            </a:r>
+            <a:r>
+              <a:rPr lang="ko-KR" altLang="en-US" dirty="0" err="1"/>
+              <a:t>Step</a:t>
+            </a:r>
+            <a:r>
+              <a:rPr lang="ko-KR" altLang="en-US" dirty="0"/>
+              <a:t>) ───▶ </a:t>
+            </a:r>
+            <a:r>
+              <a:rPr lang="ko-KR" altLang="en-US" dirty="0" err="1"/>
+              <a:t>y</a:t>
+            </a:r>
+            <a:endParaRPr lang="ko-KR" altLang="en-US" dirty="0"/>
+          </a:p>
+          <a:p>
+            <a:r>
+              <a:rPr lang="ko-KR" altLang="en-US" dirty="0"/>
+              <a:t>X2 ──w2▶│ (</a:t>
+            </a:r>
+            <a:r>
+              <a:rPr lang="ko-KR" altLang="en-US" dirty="0" err="1"/>
+              <a:t>sum</a:t>
+            </a:r>
+            <a:r>
+              <a:rPr lang="ko-KR" altLang="en-US" dirty="0"/>
+              <a:t>) │</a:t>
+            </a:r>
+          </a:p>
+          <a:p>
+            <a:r>
+              <a:rPr lang="ko-KR" altLang="en-US" dirty="0"/>
+              <a:t>        └─────────┘</a:t>
+            </a:r>
+          </a:p>
+        </p:txBody>
+      </p:sp>
+      <p:pic>
+        <p:nvPicPr>
+          <p:cNvPr id="14" name="Picture 2" descr="한 여자가 노트북 컴퓨터에 타이핑을 하고 있다">
+            <a:extLst>
+              <a:ext uri="{FF2B5EF4-FFF2-40B4-BE49-F238E27FC236}">
+                <a16:creationId xmlns:a16="http://schemas.microsoft.com/office/drawing/2014/main" id="{6221B50A-AF02-6A2D-14CA-B23A30635C54}"/>
+              </a:ext>
+            </a:extLst>
+          </p:cNvPr>
+          <p:cNvPicPr>
+            <a:picLocks noChangeAspect="1" noChangeArrowheads="1"/>
+          </p:cNvPicPr>
+          <p:nvPr/>
+        </p:nvPicPr>
+        <p:blipFill>
+          <a:blip r:embed="rId5">
+            <a:extLst>
+              <a:ext uri="{28A0092B-C50C-407E-A947-70E740481C1C}">
+                <a14:useLocalDpi xmlns:a14="http://schemas.microsoft.com/office/drawing/2010/main" val="0"/>
+              </a:ext>
+            </a:extLst>
+          </a:blip>
+          <a:srcRect/>
+          <a:stretch>
+            <a:fillRect/>
+          </a:stretch>
+        </p:blipFill>
+        <p:spPr bwMode="auto">
+          <a:xfrm>
+            <a:off x="10134599" y="66676"/>
+            <a:ext cx="1885951" cy="1247864"/>
+          </a:xfrm>
+          <a:prstGeom prst="rect">
+            <a:avLst/>
+          </a:prstGeom>
+          <a:noFill/>
+          <a:extLst>
+            <a:ext uri="{909E8E84-426E-40DD-AFC4-6F175D3DCCD1}">
+              <a14:hiddenFill xmlns:a14="http://schemas.microsoft.com/office/drawing/2010/main">
+                <a:solidFill>
+                  <a:srgbClr val="FFFFFF"/>
+                </a:solidFill>
+              </a14:hiddenFill>
+            </a:ext>
+          </a:extLst>
+        </p:spPr>
+      </p:pic>
+      <p:pic>
+        <p:nvPicPr>
+          <p:cNvPr id="10" name="그림 9">
+            <a:extLst>
+              <a:ext uri="{FF2B5EF4-FFF2-40B4-BE49-F238E27FC236}">
+                <a16:creationId xmlns:a16="http://schemas.microsoft.com/office/drawing/2014/main" id="{FAB6474F-AEA9-3CBE-E181-AE95CE6D6B2E}"/>
+              </a:ext>
+            </a:extLst>
+          </p:cNvPr>
+          <p:cNvPicPr>
+            <a:picLocks noChangeAspect="1"/>
+          </p:cNvPicPr>
+          <p:nvPr/>
+        </p:nvPicPr>
+        <p:blipFill>
+          <a:blip r:embed="rId6">
+            <a:duotone>
+              <a:prstClr val="black"/>
+              <a:schemeClr val="accent3">
+                <a:tint val="45000"/>
+                <a:satMod val="400000"/>
+              </a:schemeClr>
+            </a:duotone>
+          </a:blip>
+          <a:stretch>
+            <a:fillRect/>
+          </a:stretch>
+        </p:blipFill>
+        <p:spPr>
+          <a:xfrm>
+            <a:off x="9572408" y="2848227"/>
+            <a:ext cx="1610979" cy="465601"/>
+          </a:xfrm>
+          <a:prstGeom prst="rect">
+            <a:avLst/>
+          </a:prstGeom>
+        </p:spPr>
+      </p:pic>
+    </p:spTree>
+    <p:extLst>
+      <p:ext uri="{BB962C8B-B14F-4D97-AF65-F5344CB8AC3E}">
+        <p14:creationId xmlns:p14="http://schemas.microsoft.com/office/powerpoint/2010/main" val="2154173198"/>
+      </p:ext>
+    </p:extLst>
+  </p:cSld>
+  <p:clrMapOvr>
+    <a:masterClrMapping/>
+  </p:clrMapOvr>
+</p:sld>
+</file>
+
+<file path=ppt/slides/slide21.xml><?xml version="1.0" encoding="utf-8"?>
 <p:sld xmlns:a="http://schemas.openxmlformats.org/drawingml/2006/main" xmlns:r="http://schemas.openxmlformats.org/officeDocument/2006/relationships" xmlns:p="http://schemas.openxmlformats.org/presentationml/2006/main">
   <p:cSld>
     <p:spTree>
@@ -9618,7 +11388,7 @@
             <a:fld id="{D57F1E4F-1CFF-5643-939E-217C01CDF565}" type="slidenum">
               <a:rPr lang="en-US" smtClean="0"/>
               <a:pPr/>
-              <a:t>19</a:t>
+              <a:t>21</a:t>
             </a:fld>
             <a:endParaRPr lang="en-US" dirty="0"/>
           </a:p>
@@ -9939,269 +11709,7 @@
 </p:sld>
 </file>
 
-<file path=ppt/slides/slide2.xml><?xml version="1.0" encoding="utf-8"?>
-<p:sld xmlns:a="http://schemas.openxmlformats.org/drawingml/2006/main" xmlns:r="http://schemas.openxmlformats.org/officeDocument/2006/relationships" xmlns:p="http://schemas.openxmlformats.org/presentationml/2006/main">
-  <p:cSld>
-    <p:spTree>
-      <p:nvGrpSpPr>
-        <p:cNvPr id="1" name="">
-          <a:extLst>
-            <a:ext uri="{FF2B5EF4-FFF2-40B4-BE49-F238E27FC236}">
-              <a16:creationId xmlns:a16="http://schemas.microsoft.com/office/drawing/2014/main" id="{14A2B8F4-50C0-3F8F-FAC9-DCF66BC6CAA4}"/>
-            </a:ext>
-          </a:extLst>
-        </p:cNvPr>
-        <p:cNvGrpSpPr/>
-        <p:nvPr/>
-      </p:nvGrpSpPr>
-      <p:grpSpPr>
-        <a:xfrm>
-          <a:off x="0" y="0"/>
-          <a:ext cx="0" cy="0"/>
-          <a:chOff x="0" y="0"/>
-          <a:chExt cx="0" cy="0"/>
-        </a:xfrm>
-      </p:grpSpPr>
-      <p:sp>
-        <p:nvSpPr>
-          <p:cNvPr id="3" name="직사각형 2">
-            <a:extLst>
-              <a:ext uri="{FF2B5EF4-FFF2-40B4-BE49-F238E27FC236}">
-                <a16:creationId xmlns:a16="http://schemas.microsoft.com/office/drawing/2014/main" id="{9F020723-0294-B282-4C97-3801608209F4}"/>
-              </a:ext>
-            </a:extLst>
-          </p:cNvPr>
-          <p:cNvSpPr/>
-          <p:nvPr/>
-        </p:nvSpPr>
-        <p:spPr>
-          <a:xfrm>
-            <a:off x="734002" y="1457931"/>
-            <a:ext cx="5948218" cy="548669"/>
-          </a:xfrm>
-          <a:prstGeom prst="rect">
-            <a:avLst/>
-          </a:prstGeom>
-          <a:solidFill>
-            <a:schemeClr val="bg1">
-              <a:lumMod val="85000"/>
-            </a:schemeClr>
-          </a:solidFill>
-          <a:ln>
-            <a:noFill/>
-          </a:ln>
-        </p:spPr>
-        <p:style>
-          <a:lnRef idx="2">
-            <a:schemeClr val="accent1">
-              <a:shade val="15000"/>
-            </a:schemeClr>
-          </a:lnRef>
-          <a:fillRef idx="1">
-            <a:schemeClr val="accent1"/>
-          </a:fillRef>
-          <a:effectRef idx="0">
-            <a:schemeClr val="accent1"/>
-          </a:effectRef>
-          <a:fontRef idx="minor">
-            <a:schemeClr val="lt1"/>
-          </a:fontRef>
-        </p:style>
-        <p:txBody>
-          <a:bodyPr rtlCol="0" anchor="ctr"/>
-          <a:lstStyle/>
-          <a:p>
-            <a:pPr algn="ctr"/>
-            <a:endParaRPr lang="ko-KR" altLang="en-US" dirty="0"/>
-          </a:p>
-        </p:txBody>
-      </p:sp>
-      <p:sp>
-        <p:nvSpPr>
-          <p:cNvPr id="8" name="제목 7">
-            <a:extLst>
-              <a:ext uri="{FF2B5EF4-FFF2-40B4-BE49-F238E27FC236}">
-                <a16:creationId xmlns:a16="http://schemas.microsoft.com/office/drawing/2014/main" id="{07CDC162-148D-2721-5DAE-5FEEB0F9ADA8}"/>
-              </a:ext>
-            </a:extLst>
-          </p:cNvPr>
-          <p:cNvSpPr>
-            <a:spLocks noGrp="1"/>
-          </p:cNvSpPr>
-          <p:nvPr>
-            <p:ph type="title"/>
-          </p:nvPr>
-        </p:nvSpPr>
-        <p:spPr>
-          <a:xfrm>
-            <a:off x="521207" y="448056"/>
-            <a:ext cx="8135613" cy="640080"/>
-          </a:xfrm>
-        </p:spPr>
-        <p:txBody>
-          <a:bodyPr rtlCol="0">
-            <a:noAutofit/>
-          </a:bodyPr>
-          <a:lstStyle/>
-          <a:p>
-            <a:pPr rtl="0"/>
-            <a:r>
-              <a:rPr lang="en-US" altLang="ko-KR" dirty="0">
-                <a:cs typeface="Segoe UI Light" panose="020B0502040204020203" pitchFamily="34" charset="0"/>
-              </a:rPr>
-              <a:t>Contents</a:t>
-            </a:r>
-            <a:endParaRPr lang="ko-KR" altLang="en-US" dirty="0">
-              <a:cs typeface="Segoe UI Light" panose="020B0502040204020203" pitchFamily="34" charset="0"/>
-            </a:endParaRPr>
-          </a:p>
-        </p:txBody>
-      </p:sp>
-      <p:sp>
-        <p:nvSpPr>
-          <p:cNvPr id="12" name="슬라이드 번호 개체 틀 11">
-            <a:extLst>
-              <a:ext uri="{FF2B5EF4-FFF2-40B4-BE49-F238E27FC236}">
-                <a16:creationId xmlns:a16="http://schemas.microsoft.com/office/drawing/2014/main" id="{83C7BADB-0A8C-CFB0-F75C-10F2A8FE4161}"/>
-              </a:ext>
-            </a:extLst>
-          </p:cNvPr>
-          <p:cNvSpPr>
-            <a:spLocks noGrp="1"/>
-          </p:cNvSpPr>
-          <p:nvPr>
-            <p:ph type="sldNum" sz="quarter" idx="4"/>
-          </p:nvPr>
-        </p:nvSpPr>
-        <p:spPr/>
-        <p:txBody>
-          <a:bodyPr/>
-          <a:lstStyle/>
-          <a:p>
-            <a:fld id="{9860EDB8-5305-433F-BE41-D7A86D811DB3}" type="slidenum">
-              <a:rPr lang="en-US" altLang="ko-KR" noProof="0" smtClean="0"/>
-              <a:pPr/>
-              <a:t>2</a:t>
-            </a:fld>
-            <a:endParaRPr lang="ko-KR" altLang="en-US" noProof="0"/>
-          </a:p>
-        </p:txBody>
-      </p:sp>
-      <p:sp>
-        <p:nvSpPr>
-          <p:cNvPr id="2" name="TextBox 1">
-            <a:extLst>
-              <a:ext uri="{FF2B5EF4-FFF2-40B4-BE49-F238E27FC236}">
-                <a16:creationId xmlns:a16="http://schemas.microsoft.com/office/drawing/2014/main" id="{C71433E4-C192-2433-A2E9-B5BCAFC7FA01}"/>
-              </a:ext>
-            </a:extLst>
-          </p:cNvPr>
-          <p:cNvSpPr txBox="1"/>
-          <p:nvPr/>
-        </p:nvSpPr>
-        <p:spPr>
-          <a:xfrm>
-            <a:off x="1764145" y="1384043"/>
-            <a:ext cx="7250546" cy="2236959"/>
-          </a:xfrm>
-          <a:prstGeom prst="rect">
-            <a:avLst/>
-          </a:prstGeom>
-          <a:noFill/>
-        </p:spPr>
-        <p:txBody>
-          <a:bodyPr wrap="square" rtlCol="0">
-            <a:spAutoFit/>
-          </a:bodyPr>
-          <a:lstStyle/>
-          <a:p>
-            <a:pPr marL="514350" indent="-514350">
-              <a:lnSpc>
-                <a:spcPct val="150000"/>
-              </a:lnSpc>
-              <a:buAutoNum type="arabicPeriod"/>
-            </a:pPr>
-            <a:r>
-              <a:rPr lang="en-US" altLang="ko-KR" sz="2400" b="1" dirty="0">
-                <a:latin typeface="맑은 고딕 Semilight" panose="020B0502040204020203" pitchFamily="50" charset="-127"/>
-                <a:ea typeface="맑은 고딕 Semilight" panose="020B0502040204020203" pitchFamily="50" charset="-127"/>
-                <a:cs typeface="맑은 고딕 Semilight" panose="020B0502040204020203" pitchFamily="50" charset="-127"/>
-              </a:rPr>
-              <a:t>Linear regression</a:t>
-            </a:r>
-          </a:p>
-          <a:p>
-            <a:pPr marL="514350" indent="-514350">
-              <a:lnSpc>
-                <a:spcPct val="150000"/>
-              </a:lnSpc>
-              <a:buAutoNum type="arabicPeriod"/>
-            </a:pPr>
-            <a:r>
-              <a:rPr lang="en-US" altLang="ko-KR" sz="2400" b="1" dirty="0">
-                <a:latin typeface="맑은 고딕 Semilight" panose="020B0502040204020203" pitchFamily="50" charset="-127"/>
-                <a:ea typeface="맑은 고딕 Semilight" panose="020B0502040204020203" pitchFamily="50" charset="-127"/>
-                <a:cs typeface="맑은 고딕 Semilight" panose="020B0502040204020203" pitchFamily="50" charset="-127"/>
-              </a:rPr>
-              <a:t>Stochastic Gradient Descent</a:t>
-            </a:r>
-          </a:p>
-          <a:p>
-            <a:pPr marL="514350" indent="-514350">
-              <a:lnSpc>
-                <a:spcPct val="150000"/>
-              </a:lnSpc>
-              <a:buAutoNum type="arabicPeriod"/>
-            </a:pPr>
-            <a:r>
-              <a:rPr lang="en-US" altLang="ko-KR" sz="2400" b="1" dirty="0">
-                <a:latin typeface="맑은 고딕 Semilight" panose="020B0502040204020203" pitchFamily="50" charset="-127"/>
-                <a:ea typeface="맑은 고딕 Semilight" panose="020B0502040204020203" pitchFamily="50" charset="-127"/>
-                <a:cs typeface="맑은 고딕 Semilight" panose="020B0502040204020203" pitchFamily="50" charset="-127"/>
-              </a:rPr>
-              <a:t>Perceptron</a:t>
-            </a:r>
-          </a:p>
-          <a:p>
-            <a:pPr marL="514350" indent="-514350">
-              <a:lnSpc>
-                <a:spcPct val="150000"/>
-              </a:lnSpc>
-              <a:buAutoNum type="arabicPeriod"/>
-            </a:pPr>
-            <a:r>
-              <a:rPr lang="en-US" altLang="ko-KR" sz="2400" b="1" dirty="0">
-                <a:latin typeface="맑은 고딕 Semilight" panose="020B0502040204020203" pitchFamily="50" charset="-127"/>
-                <a:ea typeface="맑은 고딕 Semilight" panose="020B0502040204020203" pitchFamily="50" charset="-127"/>
-                <a:cs typeface="맑은 고딕 Semilight" panose="020B0502040204020203" pitchFamily="50" charset="-127"/>
-              </a:rPr>
-              <a:t>Neural Network Architecture</a:t>
-            </a:r>
-          </a:p>
-        </p:txBody>
-      </p:sp>
-    </p:spTree>
-    <p:extLst>
-      <p:ext uri="{BB962C8B-B14F-4D97-AF65-F5344CB8AC3E}">
-        <p14:creationId xmlns:p14="http://schemas.microsoft.com/office/powerpoint/2010/main" val="3551042808"/>
-      </p:ext>
-    </p:extLst>
-  </p:cSld>
-  <p:clrMapOvr>
-    <a:masterClrMapping/>
-  </p:clrMapOvr>
-  <mc:AlternateContent xmlns:mc="http://schemas.openxmlformats.org/markup-compatibility/2006" xmlns:p14="http://schemas.microsoft.com/office/powerpoint/2010/main">
-    <mc:Choice Requires="p14">
-      <p:transition p14:dur="10"/>
-    </mc:Choice>
-    <mc:Fallback xmlns="">
-      <p:transition/>
-    </mc:Fallback>
-  </mc:AlternateContent>
-</p:sld>
-</file>
-
-<file path=ppt/slides/slide20.xml><?xml version="1.0" encoding="utf-8"?>
+<file path=ppt/slides/slide22.xml><?xml version="1.0" encoding="utf-8"?>
 <p:sld xmlns:a="http://schemas.openxmlformats.org/drawingml/2006/main" xmlns:r="http://schemas.openxmlformats.org/officeDocument/2006/relationships" xmlns:p="http://schemas.openxmlformats.org/presentationml/2006/main">
   <p:cSld>
     <p:spTree>
@@ -10343,7 +11851,7 @@
             <a:fld id="{9860EDB8-5305-433F-BE41-D7A86D811DB3}" type="slidenum">
               <a:rPr lang="en-US" altLang="ko-KR" noProof="0" smtClean="0"/>
               <a:pPr/>
-              <a:t>20</a:t>
+              <a:t>22</a:t>
             </a:fld>
             <a:endParaRPr lang="ko-KR" altLang="en-US" noProof="0"/>
           </a:p>
@@ -10447,7 +11955,7 @@
 </p:sld>
 </file>
 
-<file path=ppt/slides/slide21.xml><?xml version="1.0" encoding="utf-8"?>
+<file path=ppt/slides/slide23.xml><?xml version="1.0" encoding="utf-8"?>
 <p:sld xmlns:a="http://schemas.openxmlformats.org/drawingml/2006/main" xmlns:r="http://schemas.openxmlformats.org/officeDocument/2006/relationships" xmlns:p="http://schemas.openxmlformats.org/presentationml/2006/main">
   <p:cSld>
     <p:spTree>
@@ -10499,7 +12007,7 @@
             <a:fld id="{D57F1E4F-1CFF-5643-939E-217C01CDF565}" type="slidenum">
               <a:rPr lang="en-US" sz="2000" smtClean="0"/>
               <a:pPr/>
-              <a:t>21</a:t>
+              <a:t>23</a:t>
             </a:fld>
             <a:endParaRPr lang="en-US" sz="2000" dirty="0"/>
           </a:p>
@@ -10659,7 +12167,7 @@
 </p:sld>
 </file>
 
-<file path=ppt/slides/slide22.xml><?xml version="1.0" encoding="utf-8"?>
+<file path=ppt/slides/slide24.xml><?xml version="1.0" encoding="utf-8"?>
 <p:sld xmlns:a="http://schemas.openxmlformats.org/drawingml/2006/main" xmlns:r="http://schemas.openxmlformats.org/officeDocument/2006/relationships" xmlns:p="http://schemas.openxmlformats.org/presentationml/2006/main">
   <p:cSld>
     <p:spTree>
@@ -10711,7 +12219,7 @@
             <a:fld id="{D57F1E4F-1CFF-5643-939E-217C01CDF565}" type="slidenum">
               <a:rPr lang="en-US" smtClean="0"/>
               <a:pPr/>
-              <a:t>22</a:t>
+              <a:t>24</a:t>
             </a:fld>
             <a:endParaRPr lang="en-US" dirty="0"/>
           </a:p>
@@ -11428,7 +12936,7 @@
 </p:sld>
 </file>
 
-<file path=ppt/slides/slide23.xml><?xml version="1.0" encoding="utf-8"?>
+<file path=ppt/slides/slide25.xml><?xml version="1.0" encoding="utf-8"?>
 <p:sld xmlns:a="http://schemas.openxmlformats.org/drawingml/2006/main" xmlns:r="http://schemas.openxmlformats.org/officeDocument/2006/relationships" xmlns:p="http://schemas.openxmlformats.org/presentationml/2006/main">
   <p:cSld>
     <p:spTree>
@@ -11480,7 +12988,7 @@
             <a:fld id="{D57F1E4F-1CFF-5643-939E-217C01CDF565}" type="slidenum">
               <a:rPr lang="en-US" smtClean="0"/>
               <a:pPr/>
-              <a:t>23</a:t>
+              <a:t>25</a:t>
             </a:fld>
             <a:endParaRPr lang="en-US" dirty="0"/>
           </a:p>
@@ -12117,7 +13625,7 @@
 </p:sld>
 </file>
 
-<file path=ppt/slides/slide24.xml><?xml version="1.0" encoding="utf-8"?>
+<file path=ppt/slides/slide26.xml><?xml version="1.0" encoding="utf-8"?>
 <p:sld xmlns:a="http://schemas.openxmlformats.org/drawingml/2006/main" xmlns:r="http://schemas.openxmlformats.org/officeDocument/2006/relationships" xmlns:p="http://schemas.openxmlformats.org/presentationml/2006/main">
   <p:cSld>
     <p:spTree>
@@ -12629,7 +14137,7 @@
 </p:sld>
 </file>
 
-<file path=ppt/slides/slide25.xml><?xml version="1.0" encoding="utf-8"?>
+<file path=ppt/slides/slide27.xml><?xml version="1.0" encoding="utf-8"?>
 <p:sld xmlns:a="http://schemas.openxmlformats.org/drawingml/2006/main" xmlns:r="http://schemas.openxmlformats.org/officeDocument/2006/relationships" xmlns:p="http://schemas.openxmlformats.org/presentationml/2006/main">
   <p:cSld>
     <p:spTree>
@@ -12681,7 +14189,7 @@
             <a:fld id="{D57F1E4F-1CFF-5643-939E-217C01CDF565}" type="slidenum">
               <a:rPr lang="en-US" smtClean="0"/>
               <a:pPr/>
-              <a:t>25</a:t>
+              <a:t>27</a:t>
             </a:fld>
             <a:endParaRPr lang="en-US" dirty="0"/>
           </a:p>
@@ -13152,7 +14660,7 @@
 </p:sld>
 </file>
 
-<file path=ppt/slides/slide26.xml><?xml version="1.0" encoding="utf-8"?>
+<file path=ppt/slides/slide28.xml><?xml version="1.0" encoding="utf-8"?>
 <p:sld xmlns:a="http://schemas.openxmlformats.org/drawingml/2006/main" xmlns:r="http://schemas.openxmlformats.org/officeDocument/2006/relationships" xmlns:p="http://schemas.openxmlformats.org/presentationml/2006/main">
   <p:cSld>
     <p:spTree>
@@ -13204,7 +14712,7 @@
             <a:fld id="{D57F1E4F-1CFF-5643-939E-217C01CDF565}" type="slidenum">
               <a:rPr lang="en-US" sz="2000" smtClean="0"/>
               <a:pPr/>
-              <a:t>26</a:t>
+              <a:t>28</a:t>
             </a:fld>
             <a:endParaRPr lang="en-US" sz="2000" dirty="0"/>
           </a:p>
@@ -13536,7 +15044,7 @@
 </p:sld>
 </file>
 
-<file path=ppt/slides/slide27.xml><?xml version="1.0" encoding="utf-8"?>
+<file path=ppt/slides/slide29.xml><?xml version="1.0" encoding="utf-8"?>
 <p:sld xmlns:a="http://schemas.openxmlformats.org/drawingml/2006/main" xmlns:r="http://schemas.openxmlformats.org/officeDocument/2006/relationships" xmlns:p="http://schemas.openxmlformats.org/presentationml/2006/main">
   <p:cSld>
     <p:spTree>
@@ -13678,7 +15186,7 @@
             <a:fld id="{9860EDB8-5305-433F-BE41-D7A86D811DB3}" type="slidenum">
               <a:rPr lang="en-US" altLang="ko-KR" noProof="0" smtClean="0"/>
               <a:pPr/>
-              <a:t>27</a:t>
+              <a:t>29</a:t>
             </a:fld>
             <a:endParaRPr lang="ko-KR" altLang="en-US" noProof="0"/>
           </a:p>
@@ -13798,7 +15306,947 @@
 </p:sld>
 </file>
 
-<file path=ppt/slides/slide28.xml><?xml version="1.0" encoding="utf-8"?>
+<file path=ppt/slides/slide3.xml><?xml version="1.0" encoding="utf-8"?>
+<p:sld xmlns:a="http://schemas.openxmlformats.org/drawingml/2006/main" xmlns:r="http://schemas.openxmlformats.org/officeDocument/2006/relationships" xmlns:p="http://schemas.openxmlformats.org/presentationml/2006/main">
+  <p:cSld>
+    <p:spTree>
+      <p:nvGrpSpPr>
+        <p:cNvPr id="1" name="">
+          <a:extLst>
+            <a:ext uri="{FF2B5EF4-FFF2-40B4-BE49-F238E27FC236}">
+              <a16:creationId xmlns:a16="http://schemas.microsoft.com/office/drawing/2014/main" id="{64D93EA5-99CC-6B44-83F5-540BF3A62E19}"/>
+            </a:ext>
+          </a:extLst>
+        </p:cNvPr>
+        <p:cNvGrpSpPr/>
+        <p:nvPr/>
+      </p:nvGrpSpPr>
+      <p:grpSpPr>
+        <a:xfrm>
+          <a:off x="0" y="0"/>
+          <a:ext cx="0" cy="0"/>
+          <a:chOff x="0" y="0"/>
+          <a:chExt cx="0" cy="0"/>
+        </a:xfrm>
+      </p:grpSpPr>
+      <p:sp>
+        <p:nvSpPr>
+          <p:cNvPr id="4" name="슬라이드 번호 개체 틀 3">
+            <a:extLst>
+              <a:ext uri="{FF2B5EF4-FFF2-40B4-BE49-F238E27FC236}">
+                <a16:creationId xmlns:a16="http://schemas.microsoft.com/office/drawing/2014/main" id="{1EC4210D-B484-A19F-8777-CF1AE1FF57E7}"/>
+              </a:ext>
+            </a:extLst>
+          </p:cNvPr>
+          <p:cNvSpPr>
+            <a:spLocks noGrp="1"/>
+          </p:cNvSpPr>
+          <p:nvPr>
+            <p:ph type="sldNum" sz="quarter" idx="12"/>
+          </p:nvPr>
+        </p:nvSpPr>
+        <p:spPr>
+          <a:xfrm>
+            <a:off x="10514011" y="6036261"/>
+            <a:ext cx="753545" cy="365125"/>
+          </a:xfrm>
+        </p:spPr>
+        <p:txBody>
+          <a:bodyPr/>
+          <a:lstStyle/>
+          <a:p>
+            <a:fld id="{D57F1E4F-1CFF-5643-939E-217C01CDF565}" type="slidenum">
+              <a:rPr lang="en-US" smtClean="0"/>
+              <a:pPr/>
+              <a:t>3</a:t>
+            </a:fld>
+            <a:endParaRPr lang="en-US" dirty="0"/>
+          </a:p>
+        </p:txBody>
+      </p:sp>
+      <p:sp>
+        <p:nvSpPr>
+          <p:cNvPr id="3" name="내용 개체 틀 2">
+            <a:extLst>
+              <a:ext uri="{FF2B5EF4-FFF2-40B4-BE49-F238E27FC236}">
+                <a16:creationId xmlns:a16="http://schemas.microsoft.com/office/drawing/2014/main" id="{0922F308-10D7-76DC-330D-AFCF4C314DBC}"/>
+              </a:ext>
+            </a:extLst>
+          </p:cNvPr>
+          <p:cNvSpPr>
+            <a:spLocks noGrp="1"/>
+          </p:cNvSpPr>
+          <p:nvPr>
+            <p:ph idx="1"/>
+          </p:nvPr>
+        </p:nvSpPr>
+        <p:spPr>
+          <a:xfrm>
+            <a:off x="589945" y="1887499"/>
+            <a:ext cx="4797395" cy="4225586"/>
+          </a:xfrm>
+        </p:spPr>
+        <p:txBody>
+          <a:bodyPr>
+            <a:normAutofit/>
+          </a:bodyPr>
+          <a:lstStyle/>
+          <a:p>
+            <a:pPr>
+              <a:lnSpc>
+                <a:spcPct val="150000"/>
+              </a:lnSpc>
+            </a:pPr>
+            <a:r>
+              <a:rPr lang="ko-KR" altLang="en-US" sz="1600" cap="none" dirty="0">
+                <a:effectLst/>
+                <a:latin typeface="맑은 고딕 Semilight" panose="020B0502040204020203" pitchFamily="50" charset="-127"/>
+                <a:ea typeface="맑은 고딕 Semilight" panose="020B0502040204020203" pitchFamily="50" charset="-127"/>
+                <a:cs typeface="맑은 고딕 Semilight" panose="020B0502040204020203" pitchFamily="50" charset="-127"/>
+              </a:rPr>
+              <a:t>알고리즘</a:t>
+            </a:r>
+            <a:r>
+              <a:rPr lang="en-US" altLang="ko-KR" sz="1600" cap="none" dirty="0">
+                <a:effectLst/>
+                <a:latin typeface="맑은 고딕 Semilight" panose="020B0502040204020203" pitchFamily="50" charset="-127"/>
+                <a:ea typeface="맑은 고딕 Semilight" panose="020B0502040204020203" pitchFamily="50" charset="-127"/>
+                <a:cs typeface="맑은 고딕 Semilight" panose="020B0502040204020203" pitchFamily="50" charset="-127"/>
+              </a:rPr>
+              <a:t>(</a:t>
+            </a:r>
+            <a:r>
+              <a:rPr lang="ko-KR" altLang="en-US" sz="1600" cap="none" dirty="0">
+                <a:effectLst/>
+                <a:latin typeface="맑은 고딕 Semilight" panose="020B0502040204020203" pitchFamily="50" charset="-127"/>
+                <a:ea typeface="맑은 고딕 Semilight" panose="020B0502040204020203" pitchFamily="50" charset="-127"/>
+                <a:cs typeface="맑은 고딕 Semilight" panose="020B0502040204020203" pitchFamily="50" charset="-127"/>
+              </a:rPr>
+              <a:t>함수</a:t>
+            </a:r>
+            <a:r>
+              <a:rPr lang="en-US" altLang="ko-KR" sz="1600" cap="none" dirty="0">
+                <a:effectLst/>
+                <a:latin typeface="맑은 고딕 Semilight" panose="020B0502040204020203" pitchFamily="50" charset="-127"/>
+                <a:ea typeface="맑은 고딕 Semilight" panose="020B0502040204020203" pitchFamily="50" charset="-127"/>
+                <a:cs typeface="맑은 고딕 Semilight" panose="020B0502040204020203" pitchFamily="50" charset="-127"/>
+              </a:rPr>
+              <a:t>)</a:t>
+            </a:r>
+          </a:p>
+          <a:p>
+            <a:pPr lvl="1">
+              <a:lnSpc>
+                <a:spcPct val="150000"/>
+              </a:lnSpc>
+              <a:buFont typeface="Wingdings" panose="05000000000000000000" pitchFamily="2" charset="2"/>
+              <a:buChar char="§"/>
+            </a:pPr>
+            <a:r>
+              <a:rPr lang="ko-KR" altLang="en-US" sz="1600" cap="none" dirty="0">
+                <a:latin typeface="맑은 고딕 Semilight" panose="020B0502040204020203" pitchFamily="50" charset="-127"/>
+                <a:ea typeface="맑은 고딕 Semilight" panose="020B0502040204020203" pitchFamily="50" charset="-127"/>
+                <a:cs typeface="맑은 고딕 Semilight" panose="020B0502040204020203" pitchFamily="50" charset="-127"/>
+              </a:rPr>
+              <a:t>실제 데이터와 선형회귀식의 예측 값과의 차이</a:t>
+            </a:r>
+            <a:r>
+              <a:rPr lang="en-US" altLang="ko-KR" sz="1600" cap="none" dirty="0">
+                <a:latin typeface="맑은 고딕 Semilight" panose="020B0502040204020203" pitchFamily="50" charset="-127"/>
+                <a:ea typeface="맑은 고딕 Semilight" panose="020B0502040204020203" pitchFamily="50" charset="-127"/>
+                <a:cs typeface="맑은 고딕 Semilight" panose="020B0502040204020203" pitchFamily="50" charset="-127"/>
+              </a:rPr>
+              <a:t>(Error)</a:t>
+            </a:r>
+            <a:r>
+              <a:rPr lang="ko-KR" altLang="en-US" sz="1600" cap="none" dirty="0">
+                <a:latin typeface="맑은 고딕 Semilight" panose="020B0502040204020203" pitchFamily="50" charset="-127"/>
+                <a:ea typeface="맑은 고딕 Semilight" panose="020B0502040204020203" pitchFamily="50" charset="-127"/>
+                <a:cs typeface="맑은 고딕 Semilight" panose="020B0502040204020203" pitchFamily="50" charset="-127"/>
+              </a:rPr>
+              <a:t>를 구하고，</a:t>
+            </a:r>
+            <a:endParaRPr lang="en-US" altLang="ko-KR" sz="1600" cap="none" dirty="0">
+              <a:latin typeface="맑은 고딕 Semilight" panose="020B0502040204020203" pitchFamily="50" charset="-127"/>
+              <a:ea typeface="맑은 고딕 Semilight" panose="020B0502040204020203" pitchFamily="50" charset="-127"/>
+              <a:cs typeface="맑은 고딕 Semilight" panose="020B0502040204020203" pitchFamily="50" charset="-127"/>
+            </a:endParaRPr>
+          </a:p>
+          <a:p>
+            <a:pPr lvl="1">
+              <a:lnSpc>
+                <a:spcPct val="150000"/>
+              </a:lnSpc>
+              <a:buFont typeface="Wingdings" panose="05000000000000000000" pitchFamily="2" charset="2"/>
+              <a:buChar char="§"/>
+            </a:pPr>
+            <a:r>
+              <a:rPr lang="ko-KR" altLang="en-US" sz="1600" cap="none" dirty="0">
+                <a:latin typeface="맑은 고딕 Semilight" panose="020B0502040204020203" pitchFamily="50" charset="-127"/>
+                <a:ea typeface="맑은 고딕 Semilight" panose="020B0502040204020203" pitchFamily="50" charset="-127"/>
+                <a:cs typeface="맑은 고딕 Semilight" panose="020B0502040204020203" pitchFamily="50" charset="-127"/>
+              </a:rPr>
+              <a:t>차이</a:t>
+            </a:r>
+            <a:r>
+              <a:rPr lang="en-US" altLang="ko-KR" sz="1600" cap="none" dirty="0">
+                <a:latin typeface="맑은 고딕 Semilight" panose="020B0502040204020203" pitchFamily="50" charset="-127"/>
+                <a:ea typeface="맑은 고딕 Semilight" panose="020B0502040204020203" pitchFamily="50" charset="-127"/>
+                <a:cs typeface="맑은 고딕 Semilight" panose="020B0502040204020203" pitchFamily="50" charset="-127"/>
+              </a:rPr>
+              <a:t>(Error)</a:t>
+            </a:r>
+            <a:r>
+              <a:rPr lang="ko-KR" altLang="en-US" sz="1600" cap="none" dirty="0">
+                <a:latin typeface="맑은 고딕 Semilight" panose="020B0502040204020203" pitchFamily="50" charset="-127"/>
+                <a:ea typeface="맑은 고딕 Semilight" panose="020B0502040204020203" pitchFamily="50" charset="-127"/>
+                <a:cs typeface="맑은 고딕 Semilight" panose="020B0502040204020203" pitchFamily="50" charset="-127"/>
+              </a:rPr>
+              <a:t>의</a:t>
+            </a:r>
+            <a:r>
+              <a:rPr lang="en-US" altLang="ko-KR" sz="1600" cap="none" dirty="0">
+                <a:latin typeface="맑은 고딕 Semilight" panose="020B0502040204020203" pitchFamily="50" charset="-127"/>
+                <a:ea typeface="맑은 고딕 Semilight" panose="020B0502040204020203" pitchFamily="50" charset="-127"/>
+                <a:cs typeface="맑은 고딕 Semilight" panose="020B0502040204020203" pitchFamily="50" charset="-127"/>
+              </a:rPr>
+              <a:t> </a:t>
+            </a:r>
+            <a:r>
+              <a:rPr lang="ko-KR" altLang="en-US" sz="1600" cap="none" dirty="0">
+                <a:latin typeface="맑은 고딕 Semilight" panose="020B0502040204020203" pitchFamily="50" charset="-127"/>
+                <a:ea typeface="맑은 고딕 Semilight" panose="020B0502040204020203" pitchFamily="50" charset="-127"/>
+                <a:cs typeface="맑은 고딕 Semilight" panose="020B0502040204020203" pitchFamily="50" charset="-127"/>
+              </a:rPr>
+              <a:t>제곱의 모든 합이 최소</a:t>
+            </a:r>
+            <a:r>
+              <a:rPr lang="en-US" altLang="ko-KR" sz="1600" cap="none" dirty="0">
+                <a:latin typeface="맑은 고딕 Semilight" panose="020B0502040204020203" pitchFamily="50" charset="-127"/>
+                <a:ea typeface="맑은 고딕 Semilight" panose="020B0502040204020203" pitchFamily="50" charset="-127"/>
+                <a:cs typeface="맑은 고딕 Semilight" panose="020B0502040204020203" pitchFamily="50" charset="-127"/>
+              </a:rPr>
+              <a:t>(Minimization)</a:t>
+            </a:r>
+            <a:r>
+              <a:rPr lang="ko-KR" altLang="en-US" sz="1600" cap="none" dirty="0">
+                <a:latin typeface="맑은 고딕 Semilight" panose="020B0502040204020203" pitchFamily="50" charset="-127"/>
+                <a:ea typeface="맑은 고딕 Semilight" panose="020B0502040204020203" pitchFamily="50" charset="-127"/>
+                <a:cs typeface="맑은 고딕 Semilight" panose="020B0502040204020203" pitchFamily="50" charset="-127"/>
+              </a:rPr>
+              <a:t>가 되는</a:t>
+            </a:r>
+            <a:endParaRPr lang="en-US" altLang="ko-KR" sz="1600" cap="none" dirty="0">
+              <a:latin typeface="맑은 고딕 Semilight" panose="020B0502040204020203" pitchFamily="50" charset="-127"/>
+              <a:ea typeface="맑은 고딕 Semilight" panose="020B0502040204020203" pitchFamily="50" charset="-127"/>
+              <a:cs typeface="맑은 고딕 Semilight" panose="020B0502040204020203" pitchFamily="50" charset="-127"/>
+            </a:endParaRPr>
+          </a:p>
+          <a:p>
+            <a:pPr lvl="1">
+              <a:lnSpc>
+                <a:spcPct val="150000"/>
+              </a:lnSpc>
+              <a:buFont typeface="Wingdings" panose="05000000000000000000" pitchFamily="2" charset="2"/>
+              <a:buChar char="§"/>
+            </a:pPr>
+            <a:r>
+              <a:rPr lang="ko-KR" altLang="en-US" sz="1600" cap="none" dirty="0">
+                <a:latin typeface="맑은 고딕 Semilight" panose="020B0502040204020203" pitchFamily="50" charset="-127"/>
+                <a:ea typeface="맑은 고딕 Semilight" panose="020B0502040204020203" pitchFamily="50" charset="-127"/>
+                <a:cs typeface="맑은 고딕 Semilight" panose="020B0502040204020203" pitchFamily="50" charset="-127"/>
+              </a:rPr>
+              <a:t>선형회귀식의 파라미터</a:t>
+            </a:r>
+            <a:r>
+              <a:rPr lang="en-US" altLang="ko-KR" sz="1600" cap="none" dirty="0">
+                <a:latin typeface="맑은 고딕 Semilight" panose="020B0502040204020203" pitchFamily="50" charset="-127"/>
+                <a:ea typeface="맑은 고딕 Semilight" panose="020B0502040204020203" pitchFamily="50" charset="-127"/>
+                <a:cs typeface="맑은 고딕 Semilight" panose="020B0502040204020203" pitchFamily="50" charset="-127"/>
+              </a:rPr>
+              <a:t>(Parameter), </a:t>
+            </a:r>
+            <a:r>
+              <a:rPr lang="ko-KR" altLang="en-US" sz="1600" cap="none" dirty="0">
+                <a:latin typeface="맑은 고딕 Semilight" panose="020B0502040204020203" pitchFamily="50" charset="-127"/>
+                <a:ea typeface="맑은 고딕 Semilight" panose="020B0502040204020203" pitchFamily="50" charset="-127"/>
+                <a:cs typeface="맑은 고딕 Semilight" panose="020B0502040204020203" pitchFamily="50" charset="-127"/>
+              </a:rPr>
+              <a:t>계수</a:t>
+            </a:r>
+            <a:r>
+              <a:rPr lang="en-US" altLang="ko-KR" sz="1600" cap="none" dirty="0">
+                <a:latin typeface="맑은 고딕 Semilight" panose="020B0502040204020203" pitchFamily="50" charset="-127"/>
+                <a:ea typeface="맑은 고딕 Semilight" panose="020B0502040204020203" pitchFamily="50" charset="-127"/>
+                <a:cs typeface="맑은 고딕 Semilight" panose="020B0502040204020203" pitchFamily="50" charset="-127"/>
+              </a:rPr>
+              <a:t>(coefficients)</a:t>
+            </a:r>
+            <a:r>
+              <a:rPr lang="ko-KR" altLang="en-US" sz="1600" cap="none" dirty="0">
+                <a:latin typeface="맑은 고딕 Semilight" panose="020B0502040204020203" pitchFamily="50" charset="-127"/>
+                <a:ea typeface="맑은 고딕 Semilight" panose="020B0502040204020203" pitchFamily="50" charset="-127"/>
+                <a:cs typeface="맑은 고딕 Semilight" panose="020B0502040204020203" pitchFamily="50" charset="-127"/>
+              </a:rPr>
+              <a:t>를 찾는 최적화 과정</a:t>
+            </a:r>
+            <a:endParaRPr lang="en-US" altLang="ko-KR" sz="1600" cap="none" dirty="0">
+              <a:latin typeface="맑은 고딕 Semilight" panose="020B0502040204020203" pitchFamily="50" charset="-127"/>
+              <a:ea typeface="맑은 고딕 Semilight" panose="020B0502040204020203" pitchFamily="50" charset="-127"/>
+              <a:cs typeface="맑은 고딕 Semilight" panose="020B0502040204020203" pitchFamily="50" charset="-127"/>
+            </a:endParaRPr>
+          </a:p>
+          <a:p>
+            <a:pPr lvl="1">
+              <a:lnSpc>
+                <a:spcPct val="150000"/>
+              </a:lnSpc>
+              <a:buFont typeface="Wingdings" panose="05000000000000000000" pitchFamily="2" charset="2"/>
+              <a:buChar char="§"/>
+            </a:pPr>
+            <a:r>
+              <a:rPr lang="ko-KR" altLang="en-US" sz="1600" cap="none" dirty="0">
+                <a:latin typeface="맑은 고딕 Semilight" panose="020B0502040204020203" pitchFamily="50" charset="-127"/>
+                <a:ea typeface="맑은 고딕 Semilight" panose="020B0502040204020203" pitchFamily="50" charset="-127"/>
+                <a:cs typeface="맑은 고딕 Semilight" panose="020B0502040204020203" pitchFamily="50" charset="-127"/>
+              </a:rPr>
+              <a:t>평균에 회귀하는 수식함수라 이상치에 민감</a:t>
+            </a:r>
+            <a:endParaRPr lang="en-US" altLang="ko-KR" sz="1600" cap="none" dirty="0">
+              <a:latin typeface="맑은 고딕 Semilight" panose="020B0502040204020203" pitchFamily="50" charset="-127"/>
+              <a:ea typeface="맑은 고딕 Semilight" panose="020B0502040204020203" pitchFamily="50" charset="-127"/>
+              <a:cs typeface="맑은 고딕 Semilight" panose="020B0502040204020203" pitchFamily="50" charset="-127"/>
+            </a:endParaRPr>
+          </a:p>
+        </p:txBody>
+      </p:sp>
+      <p:sp>
+        <p:nvSpPr>
+          <p:cNvPr id="8" name="TextBox 7">
+            <a:extLst>
+              <a:ext uri="{FF2B5EF4-FFF2-40B4-BE49-F238E27FC236}">
+                <a16:creationId xmlns:a16="http://schemas.microsoft.com/office/drawing/2014/main" id="{4E938662-2B68-DDB0-D5D4-BF2ADA739A97}"/>
+              </a:ext>
+            </a:extLst>
+          </p:cNvPr>
+          <p:cNvSpPr txBox="1"/>
+          <p:nvPr/>
+        </p:nvSpPr>
+        <p:spPr>
+          <a:xfrm>
+            <a:off x="5676900" y="6093649"/>
+            <a:ext cx="3629025" cy="276999"/>
+          </a:xfrm>
+          <a:prstGeom prst="rect">
+            <a:avLst/>
+          </a:prstGeom>
+          <a:noFill/>
+        </p:spPr>
+        <p:txBody>
+          <a:bodyPr wrap="square">
+            <a:spAutoFit/>
+          </a:bodyPr>
+          <a:lstStyle/>
+          <a:p>
+            <a:r>
+              <a:rPr lang="ko-KR" altLang="en-US" sz="1200" dirty="0">
+                <a:hlinkClick r:id="rId2">
+                  <a:extLst>
+                    <a:ext uri="{A12FA001-AC4F-418D-AE19-62706E023703}">
+                      <ahyp:hlinkClr xmlns:ahyp="http://schemas.microsoft.com/office/drawing/2018/hyperlinkcolor" val="tx"/>
+                    </a:ext>
+                  </a:extLst>
+                </a:hlinkClick>
+              </a:rPr>
+              <a:t>https://analytics17.blogspot.com/2017/08/2-1.html</a:t>
+            </a:r>
+            <a:r>
+              <a:rPr lang="ko-KR" altLang="en-US" sz="1200" dirty="0"/>
+              <a:t> </a:t>
+            </a:r>
+          </a:p>
+        </p:txBody>
+      </p:sp>
+      <p:grpSp>
+        <p:nvGrpSpPr>
+          <p:cNvPr id="7" name="그룹 6">
+            <a:extLst>
+              <a:ext uri="{FF2B5EF4-FFF2-40B4-BE49-F238E27FC236}">
+                <a16:creationId xmlns:a16="http://schemas.microsoft.com/office/drawing/2014/main" id="{E7A5554C-B588-F8E2-39C1-0661AA1724C3}"/>
+              </a:ext>
+            </a:extLst>
+          </p:cNvPr>
+          <p:cNvGrpSpPr/>
+          <p:nvPr/>
+        </p:nvGrpSpPr>
+        <p:grpSpPr>
+          <a:xfrm>
+            <a:off x="5781673" y="1924050"/>
+            <a:ext cx="5404487" cy="4112211"/>
+            <a:chOff x="5781673" y="1924050"/>
+            <a:chExt cx="5065245" cy="3762753"/>
+          </a:xfrm>
+        </p:grpSpPr>
+        <p:pic>
+          <p:nvPicPr>
+            <p:cNvPr id="5122" name="Picture 2">
+              <a:extLst>
+                <a:ext uri="{FF2B5EF4-FFF2-40B4-BE49-F238E27FC236}">
+                  <a16:creationId xmlns:a16="http://schemas.microsoft.com/office/drawing/2014/main" id="{77DF77E8-48D8-1C11-E742-2FF576CE1ED9}"/>
+                </a:ext>
+              </a:extLst>
+            </p:cNvPr>
+            <p:cNvPicPr>
+              <a:picLocks noChangeAspect="1" noChangeArrowheads="1"/>
+            </p:cNvPicPr>
+            <p:nvPr/>
+          </p:nvPicPr>
+          <p:blipFill>
+            <a:blip r:embed="rId3">
+              <a:extLst>
+                <a:ext uri="{28A0092B-C50C-407E-A947-70E740481C1C}">
+                  <a14:useLocalDpi xmlns:a14="http://schemas.microsoft.com/office/drawing/2010/main" val="0"/>
+                </a:ext>
+              </a:extLst>
+            </a:blip>
+            <a:srcRect/>
+            <a:stretch>
+              <a:fillRect/>
+            </a:stretch>
+          </p:blipFill>
+          <p:spPr bwMode="auto">
+            <a:xfrm>
+              <a:off x="5781673" y="1924050"/>
+              <a:ext cx="5065245" cy="3762753"/>
+            </a:xfrm>
+            <a:prstGeom prst="rect">
+              <a:avLst/>
+            </a:prstGeom>
+            <a:noFill/>
+            <a:extLst>
+              <a:ext uri="{909E8E84-426E-40DD-AFC4-6F175D3DCCD1}">
+                <a14:hiddenFill xmlns:a14="http://schemas.microsoft.com/office/drawing/2010/main">
+                  <a:solidFill>
+                    <a:srgbClr val="FFFFFF"/>
+                  </a:solidFill>
+                </a14:hiddenFill>
+              </a:ext>
+            </a:extLst>
+          </p:spPr>
+        </p:pic>
+        <p:sp>
+          <p:nvSpPr>
+            <p:cNvPr id="12" name="직사각형 11">
+              <a:extLst>
+                <a:ext uri="{FF2B5EF4-FFF2-40B4-BE49-F238E27FC236}">
+                  <a16:creationId xmlns:a16="http://schemas.microsoft.com/office/drawing/2014/main" id="{C4B76198-7BDB-2635-FFAD-9401FE5555EA}"/>
+                </a:ext>
+              </a:extLst>
+            </p:cNvPr>
+            <p:cNvSpPr/>
+            <p:nvPr/>
+          </p:nvSpPr>
+          <p:spPr>
+            <a:xfrm>
+              <a:off x="9305925" y="2638199"/>
+              <a:ext cx="386715" cy="344974"/>
+            </a:xfrm>
+            <a:prstGeom prst="rect">
+              <a:avLst/>
+            </a:prstGeom>
+            <a:solidFill>
+              <a:srgbClr val="FF0000"/>
+            </a:solidFill>
+            <a:ln>
+              <a:noFill/>
+            </a:ln>
+          </p:spPr>
+          <p:style>
+            <a:lnRef idx="2">
+              <a:schemeClr val="accent1">
+                <a:shade val="15000"/>
+              </a:schemeClr>
+            </a:lnRef>
+            <a:fillRef idx="1">
+              <a:schemeClr val="accent1"/>
+            </a:fillRef>
+            <a:effectRef idx="0">
+              <a:schemeClr val="accent1"/>
+            </a:effectRef>
+            <a:fontRef idx="minor">
+              <a:schemeClr val="lt1"/>
+            </a:fontRef>
+          </p:style>
+          <p:txBody>
+            <a:bodyPr rtlCol="0" anchor="ctr"/>
+            <a:lstStyle/>
+            <a:p>
+              <a:pPr algn="ctr"/>
+              <a:endParaRPr lang="ko-KR" altLang="en-US"/>
+            </a:p>
+          </p:txBody>
+        </p:sp>
+        <p:sp>
+          <p:nvSpPr>
+            <p:cNvPr id="16" name="직사각형 15">
+              <a:extLst>
+                <a:ext uri="{FF2B5EF4-FFF2-40B4-BE49-F238E27FC236}">
+                  <a16:creationId xmlns:a16="http://schemas.microsoft.com/office/drawing/2014/main" id="{67AC9867-39BD-55A1-3ED2-5B9D6DA02C32}"/>
+                </a:ext>
+              </a:extLst>
+            </p:cNvPr>
+            <p:cNvSpPr/>
+            <p:nvPr/>
+          </p:nvSpPr>
+          <p:spPr>
+            <a:xfrm>
+              <a:off x="8475345" y="3467390"/>
+              <a:ext cx="361315" cy="356461"/>
+            </a:xfrm>
+            <a:prstGeom prst="rect">
+              <a:avLst/>
+            </a:prstGeom>
+            <a:solidFill>
+              <a:srgbClr val="FF0000"/>
+            </a:solidFill>
+            <a:ln>
+              <a:noFill/>
+            </a:ln>
+          </p:spPr>
+          <p:style>
+            <a:lnRef idx="2">
+              <a:schemeClr val="accent1">
+                <a:shade val="15000"/>
+              </a:schemeClr>
+            </a:lnRef>
+            <a:fillRef idx="1">
+              <a:schemeClr val="accent1"/>
+            </a:fillRef>
+            <a:effectRef idx="0">
+              <a:schemeClr val="accent1"/>
+            </a:effectRef>
+            <a:fontRef idx="minor">
+              <a:schemeClr val="lt1"/>
+            </a:fontRef>
+          </p:style>
+          <p:txBody>
+            <a:bodyPr rtlCol="0" anchor="ctr"/>
+            <a:lstStyle/>
+            <a:p>
+              <a:pPr algn="ctr"/>
+              <a:endParaRPr lang="ko-KR" altLang="en-US"/>
+            </a:p>
+          </p:txBody>
+        </p:sp>
+        <p:sp>
+          <p:nvSpPr>
+            <p:cNvPr id="17" name="직사각형 16">
+              <a:extLst>
+                <a:ext uri="{FF2B5EF4-FFF2-40B4-BE49-F238E27FC236}">
+                  <a16:creationId xmlns:a16="http://schemas.microsoft.com/office/drawing/2014/main" id="{CA6954AB-B213-A17D-3C1F-85D7A5234449}"/>
+                </a:ext>
+              </a:extLst>
+            </p:cNvPr>
+            <p:cNvSpPr/>
+            <p:nvPr/>
+          </p:nvSpPr>
+          <p:spPr>
+            <a:xfrm>
+              <a:off x="7310754" y="3658405"/>
+              <a:ext cx="446406" cy="425915"/>
+            </a:xfrm>
+            <a:prstGeom prst="rect">
+              <a:avLst/>
+            </a:prstGeom>
+            <a:solidFill>
+              <a:srgbClr val="FF0000"/>
+            </a:solidFill>
+            <a:ln>
+              <a:noFill/>
+            </a:ln>
+          </p:spPr>
+          <p:style>
+            <a:lnRef idx="2">
+              <a:schemeClr val="accent1">
+                <a:shade val="15000"/>
+              </a:schemeClr>
+            </a:lnRef>
+            <a:fillRef idx="1">
+              <a:schemeClr val="accent1"/>
+            </a:fillRef>
+            <a:effectRef idx="0">
+              <a:schemeClr val="accent1"/>
+            </a:effectRef>
+            <a:fontRef idx="minor">
+              <a:schemeClr val="lt1"/>
+            </a:fontRef>
+          </p:style>
+          <p:txBody>
+            <a:bodyPr rtlCol="0" anchor="ctr"/>
+            <a:lstStyle/>
+            <a:p>
+              <a:pPr algn="ctr"/>
+              <a:endParaRPr lang="ko-KR" altLang="en-US"/>
+            </a:p>
+          </p:txBody>
+        </p:sp>
+      </p:grpSp>
+      <p:sp>
+        <p:nvSpPr>
+          <p:cNvPr id="5" name="TextBox 4">
+            <a:extLst>
+              <a:ext uri="{FF2B5EF4-FFF2-40B4-BE49-F238E27FC236}">
+                <a16:creationId xmlns:a16="http://schemas.microsoft.com/office/drawing/2014/main" id="{87B081DE-6B68-1E55-7B58-0C8FA896077E}"/>
+              </a:ext>
+            </a:extLst>
+          </p:cNvPr>
+          <p:cNvSpPr txBox="1"/>
+          <p:nvPr/>
+        </p:nvSpPr>
+        <p:spPr>
+          <a:xfrm>
+            <a:off x="6474470" y="1411845"/>
+            <a:ext cx="3586238" cy="369332"/>
+          </a:xfrm>
+          <a:prstGeom prst="rect">
+            <a:avLst/>
+          </a:prstGeom>
+          <a:noFill/>
+        </p:spPr>
+        <p:txBody>
+          <a:bodyPr wrap="none" rtlCol="0">
+            <a:spAutoFit/>
+          </a:bodyPr>
+          <a:lstStyle/>
+          <a:p>
+            <a:r>
+              <a:rPr lang="en-US" altLang="ko-KR" dirty="0">
+                <a:solidFill>
+                  <a:schemeClr val="accent1"/>
+                </a:solidFill>
+                <a:hlinkClick r:id="rId4">
+                  <a:extLst>
+                    <a:ext uri="{A12FA001-AC4F-418D-AE19-62706E023703}">
+                      <ahyp:hlinkClr xmlns:ahyp="http://schemas.microsoft.com/office/drawing/2018/hyperlinkcolor" val="tx"/>
+                    </a:ext>
+                  </a:extLst>
+                </a:hlinkClick>
+              </a:rPr>
+              <a:t>Understanding of linear-regression/</a:t>
+            </a:r>
+            <a:endParaRPr lang="ko-KR" altLang="en-US" dirty="0">
+              <a:solidFill>
+                <a:schemeClr val="accent1"/>
+              </a:solidFill>
+            </a:endParaRPr>
+          </a:p>
+        </p:txBody>
+      </p:sp>
+      <mc:AlternateContent xmlns:mc="http://schemas.openxmlformats.org/markup-compatibility/2006" xmlns:a14="http://schemas.microsoft.com/office/drawing/2010/main">
+        <mc:Choice Requires="a14">
+          <p:sp>
+            <p:nvSpPr>
+              <p:cNvPr id="6" name="TextBox 5">
+                <a:extLst>
+                  <a:ext uri="{FF2B5EF4-FFF2-40B4-BE49-F238E27FC236}">
+                    <a16:creationId xmlns:a16="http://schemas.microsoft.com/office/drawing/2014/main" id="{40CE937F-706C-6F21-F5A8-22B3129A5FE0}"/>
+                  </a:ext>
+                </a:extLst>
+              </p:cNvPr>
+              <p:cNvSpPr txBox="1"/>
+              <p:nvPr/>
+            </p:nvSpPr>
+            <p:spPr>
+              <a:xfrm>
+                <a:off x="8588426" y="4902855"/>
+                <a:ext cx="2308174" cy="461665"/>
+              </a:xfrm>
+              <a:prstGeom prst="rect">
+                <a:avLst/>
+              </a:prstGeom>
+              <a:solidFill>
+                <a:schemeClr val="bg1"/>
+              </a:solidFill>
+            </p:spPr>
+            <p:txBody>
+              <a:bodyPr wrap="square">
+                <a:spAutoFit/>
+              </a:bodyPr>
+              <a:lstStyle/>
+              <a:p>
+                <a:pPr/>
+                <a14:m>
+                  <m:oMathPara xmlns:m="http://schemas.openxmlformats.org/officeDocument/2006/math">
+                    <m:oMathParaPr>
+                      <m:jc m:val="centerGroup"/>
+                    </m:oMathParaPr>
+                    <m:oMath xmlns:m="http://schemas.openxmlformats.org/officeDocument/2006/math">
+                      <m:sSub>
+                        <m:sSubPr>
+                          <m:ctrlPr>
+                            <a:rPr lang="ko-KR" altLang="en-US" sz="2400" i="1" dirty="0" smtClean="0">
+                              <a:solidFill>
+                                <a:schemeClr val="tx1"/>
+                              </a:solidFill>
+                              <a:latin typeface="Cambria Math" panose="02040503050406030204" pitchFamily="18" charset="0"/>
+                            </a:rPr>
+                          </m:ctrlPr>
+                        </m:sSubPr>
+                        <m:e>
+                          <m:acc>
+                            <m:accPr>
+                              <m:chr m:val="̂"/>
+                              <m:ctrlPr>
+                                <a:rPr lang="ko-KR" altLang="en-US" sz="2400" i="1" dirty="0">
+                                  <a:solidFill>
+                                    <a:schemeClr val="tx1"/>
+                                  </a:solidFill>
+                                  <a:latin typeface="Cambria Math" panose="02040503050406030204" pitchFamily="18" charset="0"/>
+                                </a:rPr>
+                              </m:ctrlPr>
+                            </m:accPr>
+                            <m:e>
+                              <m:r>
+                                <a:rPr lang="ko-KR" altLang="en-US" sz="2400" i="1" dirty="0">
+                                  <a:solidFill>
+                                    <a:schemeClr val="tx1"/>
+                                  </a:solidFill>
+                                  <a:latin typeface="Cambria Math" panose="02040503050406030204" pitchFamily="18" charset="0"/>
+                                </a:rPr>
+                                <m:t>𝑦</m:t>
+                              </m:r>
+                            </m:e>
+                          </m:acc>
+                        </m:e>
+                        <m:sub>
+                          <m:r>
+                            <a:rPr lang="ko-KR" altLang="en-US" sz="2400" i="1" dirty="0">
+                              <a:solidFill>
+                                <a:schemeClr val="tx1"/>
+                              </a:solidFill>
+                              <a:latin typeface="Cambria Math" panose="02040503050406030204" pitchFamily="18" charset="0"/>
+                            </a:rPr>
+                            <m:t>𝑖</m:t>
+                          </m:r>
+                        </m:sub>
+                      </m:sSub>
+                      <m:r>
+                        <a:rPr lang="ko-KR" altLang="en-US" sz="2400" i="0" dirty="0">
+                          <a:solidFill>
+                            <a:schemeClr val="tx1"/>
+                          </a:solidFill>
+                          <a:latin typeface="Cambria Math" panose="02040503050406030204" pitchFamily="18" charset="0"/>
+                        </a:rPr>
+                        <m:t>=</m:t>
+                      </m:r>
+                      <m:r>
+                        <a:rPr lang="ko-KR" altLang="en-US" sz="2400" i="1" dirty="0">
+                          <a:solidFill>
+                            <a:schemeClr val="tx1"/>
+                          </a:solidFill>
+                          <a:latin typeface="Cambria Math" panose="02040503050406030204" pitchFamily="18" charset="0"/>
+                        </a:rPr>
+                        <m:t>𝛼</m:t>
+                      </m:r>
+                      <m:r>
+                        <a:rPr lang="ko-KR" altLang="en-US" sz="2400" i="0" dirty="0">
+                          <a:solidFill>
+                            <a:schemeClr val="tx1"/>
+                          </a:solidFill>
+                          <a:latin typeface="Cambria Math" panose="02040503050406030204" pitchFamily="18" charset="0"/>
+                        </a:rPr>
+                        <m:t>+</m:t>
+                      </m:r>
+                      <m:r>
+                        <a:rPr lang="ko-KR" altLang="en-US" sz="2400" i="1" dirty="0">
+                          <a:solidFill>
+                            <a:schemeClr val="tx1"/>
+                          </a:solidFill>
+                          <a:latin typeface="Cambria Math" panose="02040503050406030204" pitchFamily="18" charset="0"/>
+                        </a:rPr>
+                        <m:t>𝛽</m:t>
+                      </m:r>
+                      <m:sSub>
+                        <m:sSubPr>
+                          <m:ctrlPr>
+                            <a:rPr lang="ko-KR" altLang="en-US" sz="2400" i="1" dirty="0">
+                              <a:solidFill>
+                                <a:schemeClr val="tx1"/>
+                              </a:solidFill>
+                              <a:latin typeface="Cambria Math" panose="02040503050406030204" pitchFamily="18" charset="0"/>
+                            </a:rPr>
+                          </m:ctrlPr>
+                        </m:sSubPr>
+                        <m:e>
+                          <m:r>
+                            <a:rPr lang="ko-KR" altLang="en-US" sz="2400" i="1" dirty="0">
+                              <a:solidFill>
+                                <a:schemeClr val="tx1"/>
+                              </a:solidFill>
+                              <a:latin typeface="Cambria Math" panose="02040503050406030204" pitchFamily="18" charset="0"/>
+                            </a:rPr>
+                            <m:t>𝑥</m:t>
+                          </m:r>
+                        </m:e>
+                        <m:sub>
+                          <m:r>
+                            <a:rPr lang="ko-KR" altLang="en-US" sz="2400" i="1" dirty="0">
+                              <a:solidFill>
+                                <a:schemeClr val="tx1"/>
+                              </a:solidFill>
+                              <a:latin typeface="Cambria Math" panose="02040503050406030204" pitchFamily="18" charset="0"/>
+                            </a:rPr>
+                            <m:t>𝑖</m:t>
+                          </m:r>
+                        </m:sub>
+                      </m:sSub>
+                    </m:oMath>
+                  </m:oMathPara>
+                </a14:m>
+                <a:endParaRPr lang="ko-KR" altLang="en-US" sz="2400" dirty="0">
+                  <a:solidFill>
+                    <a:schemeClr val="tx1"/>
+                  </a:solidFill>
+                </a:endParaRPr>
+              </a:p>
+            </p:txBody>
+          </p:sp>
+        </mc:Choice>
+        <mc:Fallback xmlns="">
+          <p:sp>
+            <p:nvSpPr>
+              <p:cNvPr id="6" name="TextBox 5">
+                <a:extLst>
+                  <a:ext uri="{FF2B5EF4-FFF2-40B4-BE49-F238E27FC236}">
+                    <a16:creationId xmlns:a16="http://schemas.microsoft.com/office/drawing/2014/main" id="{40CE937F-706C-6F21-F5A8-22B3129A5FE0}"/>
+                  </a:ext>
+                </a:extLst>
+              </p:cNvPr>
+              <p:cNvSpPr txBox="1">
+                <a:spLocks noRot="1" noChangeAspect="1" noMove="1" noResize="1" noEditPoints="1" noAdjustHandles="1" noChangeArrowheads="1" noChangeShapeType="1" noTextEdit="1"/>
+              </p:cNvSpPr>
+              <p:nvPr/>
+            </p:nvSpPr>
+            <p:spPr>
+              <a:xfrm>
+                <a:off x="8588426" y="4902855"/>
+                <a:ext cx="2308174" cy="461665"/>
+              </a:xfrm>
+              <a:prstGeom prst="rect">
+                <a:avLst/>
+              </a:prstGeom>
+              <a:blipFill>
+                <a:blip r:embed="rId5"/>
+                <a:stretch>
+                  <a:fillRect t="-3947" b="-17105"/>
+                </a:stretch>
+              </a:blipFill>
+            </p:spPr>
+            <p:txBody>
+              <a:bodyPr/>
+              <a:lstStyle/>
+              <a:p>
+                <a:r>
+                  <a:rPr lang="ko-KR" altLang="en-US">
+                    <a:noFill/>
+                  </a:rPr>
+                  <a:t> </a:t>
+                </a:r>
+              </a:p>
+            </p:txBody>
+          </p:sp>
+        </mc:Fallback>
+      </mc:AlternateContent>
+      <p:sp>
+        <p:nvSpPr>
+          <p:cNvPr id="11" name="제목 7">
+            <a:extLst>
+              <a:ext uri="{FF2B5EF4-FFF2-40B4-BE49-F238E27FC236}">
+                <a16:creationId xmlns:a16="http://schemas.microsoft.com/office/drawing/2014/main" id="{42FDDF0F-6EDA-C345-5E1E-A829656B493D}"/>
+              </a:ext>
+            </a:extLst>
+          </p:cNvPr>
+          <p:cNvSpPr>
+            <a:spLocks noGrp="1"/>
+          </p:cNvSpPr>
+          <p:nvPr>
+            <p:ph type="title"/>
+          </p:nvPr>
+        </p:nvSpPr>
+        <p:spPr>
+          <a:xfrm>
+            <a:off x="521207" y="448056"/>
+            <a:ext cx="8135613" cy="640080"/>
+          </a:xfrm>
+        </p:spPr>
+        <p:txBody>
+          <a:bodyPr rtlCol="0">
+            <a:noAutofit/>
+          </a:bodyPr>
+          <a:lstStyle/>
+          <a:p>
+            <a:r>
+              <a:rPr lang="en-US" altLang="ko-KR" sz="2800" dirty="0">
+                <a:solidFill>
+                  <a:schemeClr val="bg2">
+                    <a:lumMod val="25000"/>
+                  </a:schemeClr>
+                </a:solidFill>
+                <a:latin typeface="맑은 고딕" panose="020B0503020000020004" pitchFamily="50" charset="-127"/>
+                <a:ea typeface="맑은 고딕" panose="020B0503020000020004" pitchFamily="50" charset="-127"/>
+              </a:rPr>
+              <a:t>Linear</a:t>
+            </a:r>
+            <a:r>
+              <a:rPr lang="ko-KR" altLang="en-US" sz="2800" dirty="0">
+                <a:solidFill>
+                  <a:schemeClr val="bg2">
+                    <a:lumMod val="25000"/>
+                  </a:schemeClr>
+                </a:solidFill>
+                <a:latin typeface="맑은 고딕" panose="020B0503020000020004" pitchFamily="50" charset="-127"/>
+                <a:ea typeface="맑은 고딕" panose="020B0503020000020004" pitchFamily="50" charset="-127"/>
+              </a:rPr>
+              <a:t> </a:t>
+            </a:r>
+            <a:r>
+              <a:rPr lang="en-US" altLang="ko-KR" sz="2800" dirty="0">
+                <a:solidFill>
+                  <a:schemeClr val="bg2">
+                    <a:lumMod val="25000"/>
+                  </a:schemeClr>
+                </a:solidFill>
+                <a:latin typeface="맑은 고딕" panose="020B0503020000020004" pitchFamily="50" charset="-127"/>
+                <a:ea typeface="맑은 고딕" panose="020B0503020000020004" pitchFamily="50" charset="-127"/>
+              </a:rPr>
+              <a:t>Regression</a:t>
+            </a:r>
+            <a:endParaRPr lang="ko-KR" altLang="en-US" sz="2800" dirty="0">
+              <a:solidFill>
+                <a:schemeClr val="bg2">
+                  <a:lumMod val="25000"/>
+                </a:schemeClr>
+              </a:solidFill>
+              <a:latin typeface="맑은 고딕" panose="020B0503020000020004" pitchFamily="50" charset="-127"/>
+              <a:ea typeface="맑은 고딕" panose="020B0503020000020004" pitchFamily="50" charset="-127"/>
+            </a:endParaRPr>
+          </a:p>
+        </p:txBody>
+      </p:sp>
+    </p:spTree>
+    <p:extLst>
+      <p:ext uri="{BB962C8B-B14F-4D97-AF65-F5344CB8AC3E}">
+        <p14:creationId xmlns:p14="http://schemas.microsoft.com/office/powerpoint/2010/main" val="1340544458"/>
+      </p:ext>
+    </p:extLst>
+  </p:cSld>
+  <p:clrMapOvr>
+    <a:masterClrMapping/>
+  </p:clrMapOvr>
+</p:sld>
+</file>
+
+<file path=ppt/slides/slide30.xml><?xml version="1.0" encoding="utf-8"?>
 <p:sld xmlns:a="http://schemas.openxmlformats.org/drawingml/2006/main" xmlns:r="http://schemas.openxmlformats.org/officeDocument/2006/relationships" xmlns:p="http://schemas.openxmlformats.org/presentationml/2006/main">
   <p:cSld>
     <p:spTree>
@@ -13850,7 +16298,7 @@
             <a:fld id="{D57F1E4F-1CFF-5643-939E-217C01CDF565}" type="slidenum">
               <a:rPr lang="en-US" smtClean="0"/>
               <a:pPr/>
-              <a:t>28</a:t>
+              <a:t>30</a:t>
             </a:fld>
             <a:endParaRPr lang="en-US" dirty="0"/>
           </a:p>
@@ -14193,7 +16641,7 @@
 </p:sld>
 </file>
 
-<file path=ppt/slides/slide29.xml><?xml version="1.0" encoding="utf-8"?>
+<file path=ppt/slides/slide31.xml><?xml version="1.0" encoding="utf-8"?>
 <p:sld xmlns:a="http://schemas.openxmlformats.org/drawingml/2006/main" xmlns:r="http://schemas.openxmlformats.org/officeDocument/2006/relationships" xmlns:p="http://schemas.openxmlformats.org/presentationml/2006/main">
   <p:cSld>
     <p:spTree>
@@ -14245,7 +16693,7 @@
             <a:fld id="{D57F1E4F-1CFF-5643-939E-217C01CDF565}" type="slidenum">
               <a:rPr lang="en-US" smtClean="0"/>
               <a:pPr/>
-              <a:t>29</a:t>
+              <a:t>31</a:t>
             </a:fld>
             <a:endParaRPr lang="en-US" dirty="0"/>
           </a:p>
@@ -14968,947 +17416,7 @@
 </p:sld>
 </file>
 
-<file path=ppt/slides/slide3.xml><?xml version="1.0" encoding="utf-8"?>
-<p:sld xmlns:a="http://schemas.openxmlformats.org/drawingml/2006/main" xmlns:r="http://schemas.openxmlformats.org/officeDocument/2006/relationships" xmlns:p="http://schemas.openxmlformats.org/presentationml/2006/main">
-  <p:cSld>
-    <p:spTree>
-      <p:nvGrpSpPr>
-        <p:cNvPr id="1" name="">
-          <a:extLst>
-            <a:ext uri="{FF2B5EF4-FFF2-40B4-BE49-F238E27FC236}">
-              <a16:creationId xmlns:a16="http://schemas.microsoft.com/office/drawing/2014/main" id="{64D93EA5-99CC-6B44-83F5-540BF3A62E19}"/>
-            </a:ext>
-          </a:extLst>
-        </p:cNvPr>
-        <p:cNvGrpSpPr/>
-        <p:nvPr/>
-      </p:nvGrpSpPr>
-      <p:grpSpPr>
-        <a:xfrm>
-          <a:off x="0" y="0"/>
-          <a:ext cx="0" cy="0"/>
-          <a:chOff x="0" y="0"/>
-          <a:chExt cx="0" cy="0"/>
-        </a:xfrm>
-      </p:grpSpPr>
-      <p:sp>
-        <p:nvSpPr>
-          <p:cNvPr id="4" name="슬라이드 번호 개체 틀 3">
-            <a:extLst>
-              <a:ext uri="{FF2B5EF4-FFF2-40B4-BE49-F238E27FC236}">
-                <a16:creationId xmlns:a16="http://schemas.microsoft.com/office/drawing/2014/main" id="{1EC4210D-B484-A19F-8777-CF1AE1FF57E7}"/>
-              </a:ext>
-            </a:extLst>
-          </p:cNvPr>
-          <p:cNvSpPr>
-            <a:spLocks noGrp="1"/>
-          </p:cNvSpPr>
-          <p:nvPr>
-            <p:ph type="sldNum" sz="quarter" idx="12"/>
-          </p:nvPr>
-        </p:nvSpPr>
-        <p:spPr>
-          <a:xfrm>
-            <a:off x="10514011" y="6036261"/>
-            <a:ext cx="753545" cy="365125"/>
-          </a:xfrm>
-        </p:spPr>
-        <p:txBody>
-          <a:bodyPr/>
-          <a:lstStyle/>
-          <a:p>
-            <a:fld id="{D57F1E4F-1CFF-5643-939E-217C01CDF565}" type="slidenum">
-              <a:rPr lang="en-US" smtClean="0"/>
-              <a:pPr/>
-              <a:t>3</a:t>
-            </a:fld>
-            <a:endParaRPr lang="en-US" dirty="0"/>
-          </a:p>
-        </p:txBody>
-      </p:sp>
-      <p:sp>
-        <p:nvSpPr>
-          <p:cNvPr id="3" name="내용 개체 틀 2">
-            <a:extLst>
-              <a:ext uri="{FF2B5EF4-FFF2-40B4-BE49-F238E27FC236}">
-                <a16:creationId xmlns:a16="http://schemas.microsoft.com/office/drawing/2014/main" id="{0922F308-10D7-76DC-330D-AFCF4C314DBC}"/>
-              </a:ext>
-            </a:extLst>
-          </p:cNvPr>
-          <p:cNvSpPr>
-            <a:spLocks noGrp="1"/>
-          </p:cNvSpPr>
-          <p:nvPr>
-            <p:ph idx="1"/>
-          </p:nvPr>
-        </p:nvSpPr>
-        <p:spPr>
-          <a:xfrm>
-            <a:off x="589945" y="1994239"/>
-            <a:ext cx="4658330" cy="3762753"/>
-          </a:xfrm>
-        </p:spPr>
-        <p:txBody>
-          <a:bodyPr>
-            <a:normAutofit fontScale="92500" lnSpcReduction="10000"/>
-          </a:bodyPr>
-          <a:lstStyle/>
-          <a:p>
-            <a:pPr>
-              <a:lnSpc>
-                <a:spcPct val="150000"/>
-              </a:lnSpc>
-            </a:pPr>
-            <a:r>
-              <a:rPr lang="ko-KR" altLang="en-US" sz="1600" cap="none" dirty="0">
-                <a:effectLst/>
-                <a:latin typeface="맑은 고딕 Semilight" panose="020B0502040204020203" pitchFamily="50" charset="-127"/>
-                <a:ea typeface="맑은 고딕 Semilight" panose="020B0502040204020203" pitchFamily="50" charset="-127"/>
-                <a:cs typeface="맑은 고딕 Semilight" panose="020B0502040204020203" pitchFamily="50" charset="-127"/>
-              </a:rPr>
-              <a:t>알고리즘</a:t>
-            </a:r>
-            <a:r>
-              <a:rPr lang="en-US" altLang="ko-KR" sz="1600" cap="none" dirty="0">
-                <a:effectLst/>
-                <a:latin typeface="맑은 고딕 Semilight" panose="020B0502040204020203" pitchFamily="50" charset="-127"/>
-                <a:ea typeface="맑은 고딕 Semilight" panose="020B0502040204020203" pitchFamily="50" charset="-127"/>
-                <a:cs typeface="맑은 고딕 Semilight" panose="020B0502040204020203" pitchFamily="50" charset="-127"/>
-              </a:rPr>
-              <a:t>(</a:t>
-            </a:r>
-            <a:r>
-              <a:rPr lang="ko-KR" altLang="en-US" sz="1600" cap="none" dirty="0">
-                <a:effectLst/>
-                <a:latin typeface="맑은 고딕 Semilight" panose="020B0502040204020203" pitchFamily="50" charset="-127"/>
-                <a:ea typeface="맑은 고딕 Semilight" panose="020B0502040204020203" pitchFamily="50" charset="-127"/>
-                <a:cs typeface="맑은 고딕 Semilight" panose="020B0502040204020203" pitchFamily="50" charset="-127"/>
-              </a:rPr>
-              <a:t>함수</a:t>
-            </a:r>
-            <a:r>
-              <a:rPr lang="en-US" altLang="ko-KR" sz="1600" cap="none" dirty="0">
-                <a:effectLst/>
-                <a:latin typeface="맑은 고딕 Semilight" panose="020B0502040204020203" pitchFamily="50" charset="-127"/>
-                <a:ea typeface="맑은 고딕 Semilight" panose="020B0502040204020203" pitchFamily="50" charset="-127"/>
-                <a:cs typeface="맑은 고딕 Semilight" panose="020B0502040204020203" pitchFamily="50" charset="-127"/>
-              </a:rPr>
-              <a:t>)</a:t>
-            </a:r>
-          </a:p>
-          <a:p>
-            <a:pPr lvl="1">
-              <a:lnSpc>
-                <a:spcPct val="150000"/>
-              </a:lnSpc>
-              <a:buFont typeface="Wingdings" panose="05000000000000000000" pitchFamily="2" charset="2"/>
-              <a:buChar char="§"/>
-            </a:pPr>
-            <a:r>
-              <a:rPr lang="ko-KR" altLang="en-US" sz="1600" cap="none" dirty="0">
-                <a:latin typeface="맑은 고딕 Semilight" panose="020B0502040204020203" pitchFamily="50" charset="-127"/>
-                <a:ea typeface="맑은 고딕 Semilight" panose="020B0502040204020203" pitchFamily="50" charset="-127"/>
-                <a:cs typeface="맑은 고딕 Semilight" panose="020B0502040204020203" pitchFamily="50" charset="-127"/>
-              </a:rPr>
-              <a:t>실제 데이터와 선형회귀식의 예측 값과의 차이</a:t>
-            </a:r>
-            <a:r>
-              <a:rPr lang="en-US" altLang="ko-KR" sz="1600" cap="none" dirty="0">
-                <a:latin typeface="맑은 고딕 Semilight" panose="020B0502040204020203" pitchFamily="50" charset="-127"/>
-                <a:ea typeface="맑은 고딕 Semilight" panose="020B0502040204020203" pitchFamily="50" charset="-127"/>
-                <a:cs typeface="맑은 고딕 Semilight" panose="020B0502040204020203" pitchFamily="50" charset="-127"/>
-              </a:rPr>
-              <a:t>(Error)</a:t>
-            </a:r>
-            <a:r>
-              <a:rPr lang="ko-KR" altLang="en-US" sz="1600" cap="none" dirty="0">
-                <a:latin typeface="맑은 고딕 Semilight" panose="020B0502040204020203" pitchFamily="50" charset="-127"/>
-                <a:ea typeface="맑은 고딕 Semilight" panose="020B0502040204020203" pitchFamily="50" charset="-127"/>
-                <a:cs typeface="맑은 고딕 Semilight" panose="020B0502040204020203" pitchFamily="50" charset="-127"/>
-              </a:rPr>
-              <a:t>를 구하고，</a:t>
-            </a:r>
-            <a:endParaRPr lang="en-US" altLang="ko-KR" sz="1600" cap="none" dirty="0">
-              <a:latin typeface="맑은 고딕 Semilight" panose="020B0502040204020203" pitchFamily="50" charset="-127"/>
-              <a:ea typeface="맑은 고딕 Semilight" panose="020B0502040204020203" pitchFamily="50" charset="-127"/>
-              <a:cs typeface="맑은 고딕 Semilight" panose="020B0502040204020203" pitchFamily="50" charset="-127"/>
-            </a:endParaRPr>
-          </a:p>
-          <a:p>
-            <a:pPr lvl="1">
-              <a:lnSpc>
-                <a:spcPct val="150000"/>
-              </a:lnSpc>
-              <a:buFont typeface="Wingdings" panose="05000000000000000000" pitchFamily="2" charset="2"/>
-              <a:buChar char="§"/>
-            </a:pPr>
-            <a:r>
-              <a:rPr lang="ko-KR" altLang="en-US" sz="1600" cap="none" dirty="0">
-                <a:latin typeface="맑은 고딕 Semilight" panose="020B0502040204020203" pitchFamily="50" charset="-127"/>
-                <a:ea typeface="맑은 고딕 Semilight" panose="020B0502040204020203" pitchFamily="50" charset="-127"/>
-                <a:cs typeface="맑은 고딕 Semilight" panose="020B0502040204020203" pitchFamily="50" charset="-127"/>
-              </a:rPr>
-              <a:t>차이</a:t>
-            </a:r>
-            <a:r>
-              <a:rPr lang="en-US" altLang="ko-KR" sz="1600" cap="none" dirty="0">
-                <a:latin typeface="맑은 고딕 Semilight" panose="020B0502040204020203" pitchFamily="50" charset="-127"/>
-                <a:ea typeface="맑은 고딕 Semilight" panose="020B0502040204020203" pitchFamily="50" charset="-127"/>
-                <a:cs typeface="맑은 고딕 Semilight" panose="020B0502040204020203" pitchFamily="50" charset="-127"/>
-              </a:rPr>
-              <a:t>(Error)</a:t>
-            </a:r>
-            <a:r>
-              <a:rPr lang="ko-KR" altLang="en-US" sz="1600" cap="none" dirty="0">
-                <a:latin typeface="맑은 고딕 Semilight" panose="020B0502040204020203" pitchFamily="50" charset="-127"/>
-                <a:ea typeface="맑은 고딕 Semilight" panose="020B0502040204020203" pitchFamily="50" charset="-127"/>
-                <a:cs typeface="맑은 고딕 Semilight" panose="020B0502040204020203" pitchFamily="50" charset="-127"/>
-              </a:rPr>
-              <a:t>의</a:t>
-            </a:r>
-            <a:r>
-              <a:rPr lang="en-US" altLang="ko-KR" sz="1600" cap="none" dirty="0">
-                <a:latin typeface="맑은 고딕 Semilight" panose="020B0502040204020203" pitchFamily="50" charset="-127"/>
-                <a:ea typeface="맑은 고딕 Semilight" panose="020B0502040204020203" pitchFamily="50" charset="-127"/>
-                <a:cs typeface="맑은 고딕 Semilight" panose="020B0502040204020203" pitchFamily="50" charset="-127"/>
-              </a:rPr>
-              <a:t> </a:t>
-            </a:r>
-            <a:r>
-              <a:rPr lang="ko-KR" altLang="en-US" sz="1600" cap="none" dirty="0">
-                <a:latin typeface="맑은 고딕 Semilight" panose="020B0502040204020203" pitchFamily="50" charset="-127"/>
-                <a:ea typeface="맑은 고딕 Semilight" panose="020B0502040204020203" pitchFamily="50" charset="-127"/>
-                <a:cs typeface="맑은 고딕 Semilight" panose="020B0502040204020203" pitchFamily="50" charset="-127"/>
-              </a:rPr>
-              <a:t>제곱의 모든 합이 최소</a:t>
-            </a:r>
-            <a:r>
-              <a:rPr lang="en-US" altLang="ko-KR" sz="1600" cap="none" dirty="0">
-                <a:latin typeface="맑은 고딕 Semilight" panose="020B0502040204020203" pitchFamily="50" charset="-127"/>
-                <a:ea typeface="맑은 고딕 Semilight" panose="020B0502040204020203" pitchFamily="50" charset="-127"/>
-                <a:cs typeface="맑은 고딕 Semilight" panose="020B0502040204020203" pitchFamily="50" charset="-127"/>
-              </a:rPr>
-              <a:t>(Minimization)</a:t>
-            </a:r>
-            <a:r>
-              <a:rPr lang="ko-KR" altLang="en-US" sz="1600" cap="none" dirty="0">
-                <a:latin typeface="맑은 고딕 Semilight" panose="020B0502040204020203" pitchFamily="50" charset="-127"/>
-                <a:ea typeface="맑은 고딕 Semilight" panose="020B0502040204020203" pitchFamily="50" charset="-127"/>
-                <a:cs typeface="맑은 고딕 Semilight" panose="020B0502040204020203" pitchFamily="50" charset="-127"/>
-              </a:rPr>
-              <a:t>가 되는</a:t>
-            </a:r>
-            <a:endParaRPr lang="en-US" altLang="ko-KR" sz="1600" cap="none" dirty="0">
-              <a:latin typeface="맑은 고딕 Semilight" panose="020B0502040204020203" pitchFamily="50" charset="-127"/>
-              <a:ea typeface="맑은 고딕 Semilight" panose="020B0502040204020203" pitchFamily="50" charset="-127"/>
-              <a:cs typeface="맑은 고딕 Semilight" panose="020B0502040204020203" pitchFamily="50" charset="-127"/>
-            </a:endParaRPr>
-          </a:p>
-          <a:p>
-            <a:pPr lvl="1">
-              <a:lnSpc>
-                <a:spcPct val="150000"/>
-              </a:lnSpc>
-              <a:buFont typeface="Wingdings" panose="05000000000000000000" pitchFamily="2" charset="2"/>
-              <a:buChar char="§"/>
-            </a:pPr>
-            <a:r>
-              <a:rPr lang="ko-KR" altLang="en-US" sz="1600" cap="none" dirty="0">
-                <a:latin typeface="맑은 고딕 Semilight" panose="020B0502040204020203" pitchFamily="50" charset="-127"/>
-                <a:ea typeface="맑은 고딕 Semilight" panose="020B0502040204020203" pitchFamily="50" charset="-127"/>
-                <a:cs typeface="맑은 고딕 Semilight" panose="020B0502040204020203" pitchFamily="50" charset="-127"/>
-              </a:rPr>
-              <a:t>선형회귀식의 파라미터</a:t>
-            </a:r>
-            <a:r>
-              <a:rPr lang="en-US" altLang="ko-KR" sz="1600" cap="none" dirty="0">
-                <a:latin typeface="맑은 고딕 Semilight" panose="020B0502040204020203" pitchFamily="50" charset="-127"/>
-                <a:ea typeface="맑은 고딕 Semilight" panose="020B0502040204020203" pitchFamily="50" charset="-127"/>
-                <a:cs typeface="맑은 고딕 Semilight" panose="020B0502040204020203" pitchFamily="50" charset="-127"/>
-              </a:rPr>
-              <a:t>(Parameter), </a:t>
-            </a:r>
-            <a:r>
-              <a:rPr lang="ko-KR" altLang="en-US" sz="1600" cap="none" dirty="0">
-                <a:latin typeface="맑은 고딕 Semilight" panose="020B0502040204020203" pitchFamily="50" charset="-127"/>
-                <a:ea typeface="맑은 고딕 Semilight" panose="020B0502040204020203" pitchFamily="50" charset="-127"/>
-                <a:cs typeface="맑은 고딕 Semilight" panose="020B0502040204020203" pitchFamily="50" charset="-127"/>
-              </a:rPr>
-              <a:t>계수</a:t>
-            </a:r>
-            <a:r>
-              <a:rPr lang="en-US" altLang="ko-KR" sz="1600" cap="none" dirty="0">
-                <a:latin typeface="맑은 고딕 Semilight" panose="020B0502040204020203" pitchFamily="50" charset="-127"/>
-                <a:ea typeface="맑은 고딕 Semilight" panose="020B0502040204020203" pitchFamily="50" charset="-127"/>
-                <a:cs typeface="맑은 고딕 Semilight" panose="020B0502040204020203" pitchFamily="50" charset="-127"/>
-              </a:rPr>
-              <a:t>(coefficients)</a:t>
-            </a:r>
-            <a:r>
-              <a:rPr lang="ko-KR" altLang="en-US" sz="1600" cap="none" dirty="0">
-                <a:latin typeface="맑은 고딕 Semilight" panose="020B0502040204020203" pitchFamily="50" charset="-127"/>
-                <a:ea typeface="맑은 고딕 Semilight" panose="020B0502040204020203" pitchFamily="50" charset="-127"/>
-                <a:cs typeface="맑은 고딕 Semilight" panose="020B0502040204020203" pitchFamily="50" charset="-127"/>
-              </a:rPr>
-              <a:t>를 찾는 최적화 과정</a:t>
-            </a:r>
-            <a:endParaRPr lang="en-US" altLang="ko-KR" sz="1600" cap="none" dirty="0">
-              <a:latin typeface="맑은 고딕 Semilight" panose="020B0502040204020203" pitchFamily="50" charset="-127"/>
-              <a:ea typeface="맑은 고딕 Semilight" panose="020B0502040204020203" pitchFamily="50" charset="-127"/>
-              <a:cs typeface="맑은 고딕 Semilight" panose="020B0502040204020203" pitchFamily="50" charset="-127"/>
-            </a:endParaRPr>
-          </a:p>
-          <a:p>
-            <a:pPr lvl="1">
-              <a:lnSpc>
-                <a:spcPct val="150000"/>
-              </a:lnSpc>
-              <a:buFont typeface="Wingdings" panose="05000000000000000000" pitchFamily="2" charset="2"/>
-              <a:buChar char="§"/>
-            </a:pPr>
-            <a:r>
-              <a:rPr lang="ko-KR" altLang="en-US" sz="1600" cap="none" dirty="0">
-                <a:latin typeface="맑은 고딕 Semilight" panose="020B0502040204020203" pitchFamily="50" charset="-127"/>
-                <a:ea typeface="맑은 고딕 Semilight" panose="020B0502040204020203" pitchFamily="50" charset="-127"/>
-                <a:cs typeface="맑은 고딕 Semilight" panose="020B0502040204020203" pitchFamily="50" charset="-127"/>
-              </a:rPr>
-              <a:t>평균에 회귀하는 수식함수라 이상치에 민감</a:t>
-            </a:r>
-            <a:endParaRPr lang="en-US" altLang="ko-KR" sz="1600" cap="none" dirty="0">
-              <a:latin typeface="맑은 고딕 Semilight" panose="020B0502040204020203" pitchFamily="50" charset="-127"/>
-              <a:ea typeface="맑은 고딕 Semilight" panose="020B0502040204020203" pitchFamily="50" charset="-127"/>
-              <a:cs typeface="맑은 고딕 Semilight" panose="020B0502040204020203" pitchFamily="50" charset="-127"/>
-            </a:endParaRPr>
-          </a:p>
-        </p:txBody>
-      </p:sp>
-      <p:sp>
-        <p:nvSpPr>
-          <p:cNvPr id="8" name="TextBox 7">
-            <a:extLst>
-              <a:ext uri="{FF2B5EF4-FFF2-40B4-BE49-F238E27FC236}">
-                <a16:creationId xmlns:a16="http://schemas.microsoft.com/office/drawing/2014/main" id="{4E938662-2B68-DDB0-D5D4-BF2ADA739A97}"/>
-              </a:ext>
-            </a:extLst>
-          </p:cNvPr>
-          <p:cNvSpPr txBox="1"/>
-          <p:nvPr/>
-        </p:nvSpPr>
-        <p:spPr>
-          <a:xfrm>
-            <a:off x="5676900" y="6093649"/>
-            <a:ext cx="3629025" cy="276999"/>
-          </a:xfrm>
-          <a:prstGeom prst="rect">
-            <a:avLst/>
-          </a:prstGeom>
-          <a:noFill/>
-        </p:spPr>
-        <p:txBody>
-          <a:bodyPr wrap="square">
-            <a:spAutoFit/>
-          </a:bodyPr>
-          <a:lstStyle/>
-          <a:p>
-            <a:r>
-              <a:rPr lang="ko-KR" altLang="en-US" sz="1200" dirty="0">
-                <a:hlinkClick r:id="rId2">
-                  <a:extLst>
-                    <a:ext uri="{A12FA001-AC4F-418D-AE19-62706E023703}">
-                      <ahyp:hlinkClr xmlns:ahyp="http://schemas.microsoft.com/office/drawing/2018/hyperlinkcolor" val="tx"/>
-                    </a:ext>
-                  </a:extLst>
-                </a:hlinkClick>
-              </a:rPr>
-              <a:t>https://analytics17.blogspot.com/2017/08/2-1.html</a:t>
-            </a:r>
-            <a:r>
-              <a:rPr lang="ko-KR" altLang="en-US" sz="1200" dirty="0"/>
-              <a:t> </a:t>
-            </a:r>
-          </a:p>
-        </p:txBody>
-      </p:sp>
-      <p:grpSp>
-        <p:nvGrpSpPr>
-          <p:cNvPr id="7" name="그룹 6">
-            <a:extLst>
-              <a:ext uri="{FF2B5EF4-FFF2-40B4-BE49-F238E27FC236}">
-                <a16:creationId xmlns:a16="http://schemas.microsoft.com/office/drawing/2014/main" id="{E7A5554C-B588-F8E2-39C1-0661AA1724C3}"/>
-              </a:ext>
-            </a:extLst>
-          </p:cNvPr>
-          <p:cNvGrpSpPr/>
-          <p:nvPr/>
-        </p:nvGrpSpPr>
-        <p:grpSpPr>
-          <a:xfrm>
-            <a:off x="5781673" y="1924050"/>
-            <a:ext cx="5404487" cy="4112211"/>
-            <a:chOff x="5781673" y="1924050"/>
-            <a:chExt cx="5065245" cy="3762753"/>
-          </a:xfrm>
-        </p:grpSpPr>
-        <p:pic>
-          <p:nvPicPr>
-            <p:cNvPr id="5122" name="Picture 2">
-              <a:extLst>
-                <a:ext uri="{FF2B5EF4-FFF2-40B4-BE49-F238E27FC236}">
-                  <a16:creationId xmlns:a16="http://schemas.microsoft.com/office/drawing/2014/main" id="{77DF77E8-48D8-1C11-E742-2FF576CE1ED9}"/>
-                </a:ext>
-              </a:extLst>
-            </p:cNvPr>
-            <p:cNvPicPr>
-              <a:picLocks noChangeAspect="1" noChangeArrowheads="1"/>
-            </p:cNvPicPr>
-            <p:nvPr/>
-          </p:nvPicPr>
-          <p:blipFill>
-            <a:blip r:embed="rId3">
-              <a:extLst>
-                <a:ext uri="{28A0092B-C50C-407E-A947-70E740481C1C}">
-                  <a14:useLocalDpi xmlns:a14="http://schemas.microsoft.com/office/drawing/2010/main" val="0"/>
-                </a:ext>
-              </a:extLst>
-            </a:blip>
-            <a:srcRect/>
-            <a:stretch>
-              <a:fillRect/>
-            </a:stretch>
-          </p:blipFill>
-          <p:spPr bwMode="auto">
-            <a:xfrm>
-              <a:off x="5781673" y="1924050"/>
-              <a:ext cx="5065245" cy="3762753"/>
-            </a:xfrm>
-            <a:prstGeom prst="rect">
-              <a:avLst/>
-            </a:prstGeom>
-            <a:noFill/>
-            <a:extLst>
-              <a:ext uri="{909E8E84-426E-40DD-AFC4-6F175D3DCCD1}">
-                <a14:hiddenFill xmlns:a14="http://schemas.microsoft.com/office/drawing/2010/main">
-                  <a:solidFill>
-                    <a:srgbClr val="FFFFFF"/>
-                  </a:solidFill>
-                </a14:hiddenFill>
-              </a:ext>
-            </a:extLst>
-          </p:spPr>
-        </p:pic>
-        <p:sp>
-          <p:nvSpPr>
-            <p:cNvPr id="12" name="직사각형 11">
-              <a:extLst>
-                <a:ext uri="{FF2B5EF4-FFF2-40B4-BE49-F238E27FC236}">
-                  <a16:creationId xmlns:a16="http://schemas.microsoft.com/office/drawing/2014/main" id="{C4B76198-7BDB-2635-FFAD-9401FE5555EA}"/>
-                </a:ext>
-              </a:extLst>
-            </p:cNvPr>
-            <p:cNvSpPr/>
-            <p:nvPr/>
-          </p:nvSpPr>
-          <p:spPr>
-            <a:xfrm>
-              <a:off x="9305925" y="2638199"/>
-              <a:ext cx="386715" cy="344974"/>
-            </a:xfrm>
-            <a:prstGeom prst="rect">
-              <a:avLst/>
-            </a:prstGeom>
-            <a:solidFill>
-              <a:srgbClr val="FF0000"/>
-            </a:solidFill>
-            <a:ln>
-              <a:noFill/>
-            </a:ln>
-          </p:spPr>
-          <p:style>
-            <a:lnRef idx="2">
-              <a:schemeClr val="accent1">
-                <a:shade val="15000"/>
-              </a:schemeClr>
-            </a:lnRef>
-            <a:fillRef idx="1">
-              <a:schemeClr val="accent1"/>
-            </a:fillRef>
-            <a:effectRef idx="0">
-              <a:schemeClr val="accent1"/>
-            </a:effectRef>
-            <a:fontRef idx="minor">
-              <a:schemeClr val="lt1"/>
-            </a:fontRef>
-          </p:style>
-          <p:txBody>
-            <a:bodyPr rtlCol="0" anchor="ctr"/>
-            <a:lstStyle/>
-            <a:p>
-              <a:pPr algn="ctr"/>
-              <a:endParaRPr lang="ko-KR" altLang="en-US"/>
-            </a:p>
-          </p:txBody>
-        </p:sp>
-        <p:sp>
-          <p:nvSpPr>
-            <p:cNvPr id="16" name="직사각형 15">
-              <a:extLst>
-                <a:ext uri="{FF2B5EF4-FFF2-40B4-BE49-F238E27FC236}">
-                  <a16:creationId xmlns:a16="http://schemas.microsoft.com/office/drawing/2014/main" id="{67AC9867-39BD-55A1-3ED2-5B9D6DA02C32}"/>
-                </a:ext>
-              </a:extLst>
-            </p:cNvPr>
-            <p:cNvSpPr/>
-            <p:nvPr/>
-          </p:nvSpPr>
-          <p:spPr>
-            <a:xfrm>
-              <a:off x="8475345" y="3467390"/>
-              <a:ext cx="361315" cy="356461"/>
-            </a:xfrm>
-            <a:prstGeom prst="rect">
-              <a:avLst/>
-            </a:prstGeom>
-            <a:solidFill>
-              <a:srgbClr val="FF0000"/>
-            </a:solidFill>
-            <a:ln>
-              <a:noFill/>
-            </a:ln>
-          </p:spPr>
-          <p:style>
-            <a:lnRef idx="2">
-              <a:schemeClr val="accent1">
-                <a:shade val="15000"/>
-              </a:schemeClr>
-            </a:lnRef>
-            <a:fillRef idx="1">
-              <a:schemeClr val="accent1"/>
-            </a:fillRef>
-            <a:effectRef idx="0">
-              <a:schemeClr val="accent1"/>
-            </a:effectRef>
-            <a:fontRef idx="minor">
-              <a:schemeClr val="lt1"/>
-            </a:fontRef>
-          </p:style>
-          <p:txBody>
-            <a:bodyPr rtlCol="0" anchor="ctr"/>
-            <a:lstStyle/>
-            <a:p>
-              <a:pPr algn="ctr"/>
-              <a:endParaRPr lang="ko-KR" altLang="en-US"/>
-            </a:p>
-          </p:txBody>
-        </p:sp>
-        <p:sp>
-          <p:nvSpPr>
-            <p:cNvPr id="17" name="직사각형 16">
-              <a:extLst>
-                <a:ext uri="{FF2B5EF4-FFF2-40B4-BE49-F238E27FC236}">
-                  <a16:creationId xmlns:a16="http://schemas.microsoft.com/office/drawing/2014/main" id="{CA6954AB-B213-A17D-3C1F-85D7A5234449}"/>
-                </a:ext>
-              </a:extLst>
-            </p:cNvPr>
-            <p:cNvSpPr/>
-            <p:nvPr/>
-          </p:nvSpPr>
-          <p:spPr>
-            <a:xfrm>
-              <a:off x="7310754" y="3658405"/>
-              <a:ext cx="446406" cy="425915"/>
-            </a:xfrm>
-            <a:prstGeom prst="rect">
-              <a:avLst/>
-            </a:prstGeom>
-            <a:solidFill>
-              <a:srgbClr val="FF0000"/>
-            </a:solidFill>
-            <a:ln>
-              <a:noFill/>
-            </a:ln>
-          </p:spPr>
-          <p:style>
-            <a:lnRef idx="2">
-              <a:schemeClr val="accent1">
-                <a:shade val="15000"/>
-              </a:schemeClr>
-            </a:lnRef>
-            <a:fillRef idx="1">
-              <a:schemeClr val="accent1"/>
-            </a:fillRef>
-            <a:effectRef idx="0">
-              <a:schemeClr val="accent1"/>
-            </a:effectRef>
-            <a:fontRef idx="minor">
-              <a:schemeClr val="lt1"/>
-            </a:fontRef>
-          </p:style>
-          <p:txBody>
-            <a:bodyPr rtlCol="0" anchor="ctr"/>
-            <a:lstStyle/>
-            <a:p>
-              <a:pPr algn="ctr"/>
-              <a:endParaRPr lang="ko-KR" altLang="en-US"/>
-            </a:p>
-          </p:txBody>
-        </p:sp>
-      </p:grpSp>
-      <p:sp>
-        <p:nvSpPr>
-          <p:cNvPr id="5" name="TextBox 4">
-            <a:extLst>
-              <a:ext uri="{FF2B5EF4-FFF2-40B4-BE49-F238E27FC236}">
-                <a16:creationId xmlns:a16="http://schemas.microsoft.com/office/drawing/2014/main" id="{87B081DE-6B68-1E55-7B58-0C8FA896077E}"/>
-              </a:ext>
-            </a:extLst>
-          </p:cNvPr>
-          <p:cNvSpPr txBox="1"/>
-          <p:nvPr/>
-        </p:nvSpPr>
-        <p:spPr>
-          <a:xfrm>
-            <a:off x="6474470" y="1411845"/>
-            <a:ext cx="3586238" cy="369332"/>
-          </a:xfrm>
-          <a:prstGeom prst="rect">
-            <a:avLst/>
-          </a:prstGeom>
-          <a:noFill/>
-        </p:spPr>
-        <p:txBody>
-          <a:bodyPr wrap="none" rtlCol="0">
-            <a:spAutoFit/>
-          </a:bodyPr>
-          <a:lstStyle/>
-          <a:p>
-            <a:r>
-              <a:rPr lang="en-US" altLang="ko-KR" dirty="0">
-                <a:solidFill>
-                  <a:schemeClr val="accent1"/>
-                </a:solidFill>
-                <a:hlinkClick r:id="rId4">
-                  <a:extLst>
-                    <a:ext uri="{A12FA001-AC4F-418D-AE19-62706E023703}">
-                      <ahyp:hlinkClr xmlns:ahyp="http://schemas.microsoft.com/office/drawing/2018/hyperlinkcolor" val="tx"/>
-                    </a:ext>
-                  </a:extLst>
-                </a:hlinkClick>
-              </a:rPr>
-              <a:t>Understanding of linear-regression/</a:t>
-            </a:r>
-            <a:endParaRPr lang="ko-KR" altLang="en-US" dirty="0">
-              <a:solidFill>
-                <a:schemeClr val="accent1"/>
-              </a:solidFill>
-            </a:endParaRPr>
-          </a:p>
-        </p:txBody>
-      </p:sp>
-      <mc:AlternateContent xmlns:mc="http://schemas.openxmlformats.org/markup-compatibility/2006" xmlns:a14="http://schemas.microsoft.com/office/drawing/2010/main">
-        <mc:Choice Requires="a14">
-          <p:sp>
-            <p:nvSpPr>
-              <p:cNvPr id="6" name="TextBox 5">
-                <a:extLst>
-                  <a:ext uri="{FF2B5EF4-FFF2-40B4-BE49-F238E27FC236}">
-                    <a16:creationId xmlns:a16="http://schemas.microsoft.com/office/drawing/2014/main" id="{40CE937F-706C-6F21-F5A8-22B3129A5FE0}"/>
-                  </a:ext>
-                </a:extLst>
-              </p:cNvPr>
-              <p:cNvSpPr txBox="1"/>
-              <p:nvPr/>
-            </p:nvSpPr>
-            <p:spPr>
-              <a:xfrm>
-                <a:off x="8588426" y="4902855"/>
-                <a:ext cx="2308174" cy="461665"/>
-              </a:xfrm>
-              <a:prstGeom prst="rect">
-                <a:avLst/>
-              </a:prstGeom>
-              <a:solidFill>
-                <a:schemeClr val="bg1"/>
-              </a:solidFill>
-            </p:spPr>
-            <p:txBody>
-              <a:bodyPr wrap="square">
-                <a:spAutoFit/>
-              </a:bodyPr>
-              <a:lstStyle/>
-              <a:p>
-                <a:pPr/>
-                <a14:m>
-                  <m:oMathPara xmlns:m="http://schemas.openxmlformats.org/officeDocument/2006/math">
-                    <m:oMathParaPr>
-                      <m:jc m:val="centerGroup"/>
-                    </m:oMathParaPr>
-                    <m:oMath xmlns:m="http://schemas.openxmlformats.org/officeDocument/2006/math">
-                      <m:sSub>
-                        <m:sSubPr>
-                          <m:ctrlPr>
-                            <a:rPr lang="ko-KR" altLang="en-US" sz="2400" i="1" dirty="0" smtClean="0">
-                              <a:solidFill>
-                                <a:schemeClr val="tx1"/>
-                              </a:solidFill>
-                              <a:latin typeface="Cambria Math" panose="02040503050406030204" pitchFamily="18" charset="0"/>
-                            </a:rPr>
-                          </m:ctrlPr>
-                        </m:sSubPr>
-                        <m:e>
-                          <m:acc>
-                            <m:accPr>
-                              <m:chr m:val="̂"/>
-                              <m:ctrlPr>
-                                <a:rPr lang="ko-KR" altLang="en-US" sz="2400" i="1" dirty="0">
-                                  <a:solidFill>
-                                    <a:schemeClr val="tx1"/>
-                                  </a:solidFill>
-                                  <a:latin typeface="Cambria Math" panose="02040503050406030204" pitchFamily="18" charset="0"/>
-                                </a:rPr>
-                              </m:ctrlPr>
-                            </m:accPr>
-                            <m:e>
-                              <m:r>
-                                <a:rPr lang="ko-KR" altLang="en-US" sz="2400" i="1" dirty="0">
-                                  <a:solidFill>
-                                    <a:schemeClr val="tx1"/>
-                                  </a:solidFill>
-                                  <a:latin typeface="Cambria Math" panose="02040503050406030204" pitchFamily="18" charset="0"/>
-                                </a:rPr>
-                                <m:t>𝑦</m:t>
-                              </m:r>
-                            </m:e>
-                          </m:acc>
-                        </m:e>
-                        <m:sub>
-                          <m:r>
-                            <a:rPr lang="ko-KR" altLang="en-US" sz="2400" i="1" dirty="0">
-                              <a:solidFill>
-                                <a:schemeClr val="tx1"/>
-                              </a:solidFill>
-                              <a:latin typeface="Cambria Math" panose="02040503050406030204" pitchFamily="18" charset="0"/>
-                            </a:rPr>
-                            <m:t>𝑖</m:t>
-                          </m:r>
-                        </m:sub>
-                      </m:sSub>
-                      <m:r>
-                        <a:rPr lang="ko-KR" altLang="en-US" sz="2400" i="0" dirty="0">
-                          <a:solidFill>
-                            <a:schemeClr val="tx1"/>
-                          </a:solidFill>
-                          <a:latin typeface="Cambria Math" panose="02040503050406030204" pitchFamily="18" charset="0"/>
-                        </a:rPr>
-                        <m:t>=</m:t>
-                      </m:r>
-                      <m:r>
-                        <a:rPr lang="ko-KR" altLang="en-US" sz="2400" i="1" dirty="0">
-                          <a:solidFill>
-                            <a:schemeClr val="tx1"/>
-                          </a:solidFill>
-                          <a:latin typeface="Cambria Math" panose="02040503050406030204" pitchFamily="18" charset="0"/>
-                        </a:rPr>
-                        <m:t>𝛼</m:t>
-                      </m:r>
-                      <m:r>
-                        <a:rPr lang="ko-KR" altLang="en-US" sz="2400" i="0" dirty="0">
-                          <a:solidFill>
-                            <a:schemeClr val="tx1"/>
-                          </a:solidFill>
-                          <a:latin typeface="Cambria Math" panose="02040503050406030204" pitchFamily="18" charset="0"/>
-                        </a:rPr>
-                        <m:t>+</m:t>
-                      </m:r>
-                      <m:r>
-                        <a:rPr lang="ko-KR" altLang="en-US" sz="2400" i="1" dirty="0">
-                          <a:solidFill>
-                            <a:schemeClr val="tx1"/>
-                          </a:solidFill>
-                          <a:latin typeface="Cambria Math" panose="02040503050406030204" pitchFamily="18" charset="0"/>
-                        </a:rPr>
-                        <m:t>𝛽</m:t>
-                      </m:r>
-                      <m:sSub>
-                        <m:sSubPr>
-                          <m:ctrlPr>
-                            <a:rPr lang="ko-KR" altLang="en-US" sz="2400" i="1" dirty="0">
-                              <a:solidFill>
-                                <a:schemeClr val="tx1"/>
-                              </a:solidFill>
-                              <a:latin typeface="Cambria Math" panose="02040503050406030204" pitchFamily="18" charset="0"/>
-                            </a:rPr>
-                          </m:ctrlPr>
-                        </m:sSubPr>
-                        <m:e>
-                          <m:r>
-                            <a:rPr lang="ko-KR" altLang="en-US" sz="2400" i="1" dirty="0">
-                              <a:solidFill>
-                                <a:schemeClr val="tx1"/>
-                              </a:solidFill>
-                              <a:latin typeface="Cambria Math" panose="02040503050406030204" pitchFamily="18" charset="0"/>
-                            </a:rPr>
-                            <m:t>𝑥</m:t>
-                          </m:r>
-                        </m:e>
-                        <m:sub>
-                          <m:r>
-                            <a:rPr lang="ko-KR" altLang="en-US" sz="2400" i="1" dirty="0">
-                              <a:solidFill>
-                                <a:schemeClr val="tx1"/>
-                              </a:solidFill>
-                              <a:latin typeface="Cambria Math" panose="02040503050406030204" pitchFamily="18" charset="0"/>
-                            </a:rPr>
-                            <m:t>𝑖</m:t>
-                          </m:r>
-                        </m:sub>
-                      </m:sSub>
-                    </m:oMath>
-                  </m:oMathPara>
-                </a14:m>
-                <a:endParaRPr lang="ko-KR" altLang="en-US" sz="2400" dirty="0">
-                  <a:solidFill>
-                    <a:schemeClr val="tx1"/>
-                  </a:solidFill>
-                </a:endParaRPr>
-              </a:p>
-            </p:txBody>
-          </p:sp>
-        </mc:Choice>
-        <mc:Fallback xmlns="">
-          <p:sp>
-            <p:nvSpPr>
-              <p:cNvPr id="6" name="TextBox 5">
-                <a:extLst>
-                  <a:ext uri="{FF2B5EF4-FFF2-40B4-BE49-F238E27FC236}">
-                    <a16:creationId xmlns:a16="http://schemas.microsoft.com/office/drawing/2014/main" id="{40CE937F-706C-6F21-F5A8-22B3129A5FE0}"/>
-                  </a:ext>
-                </a:extLst>
-              </p:cNvPr>
-              <p:cNvSpPr txBox="1">
-                <a:spLocks noRot="1" noChangeAspect="1" noMove="1" noResize="1" noEditPoints="1" noAdjustHandles="1" noChangeArrowheads="1" noChangeShapeType="1" noTextEdit="1"/>
-              </p:cNvSpPr>
-              <p:nvPr/>
-            </p:nvSpPr>
-            <p:spPr>
-              <a:xfrm>
-                <a:off x="8588426" y="4902855"/>
-                <a:ext cx="2308174" cy="461665"/>
-              </a:xfrm>
-              <a:prstGeom prst="rect">
-                <a:avLst/>
-              </a:prstGeom>
-              <a:blipFill>
-                <a:blip r:embed="rId5"/>
-                <a:stretch>
-                  <a:fillRect t="-3947" b="-17105"/>
-                </a:stretch>
-              </a:blipFill>
-            </p:spPr>
-            <p:txBody>
-              <a:bodyPr/>
-              <a:lstStyle/>
-              <a:p>
-                <a:r>
-                  <a:rPr lang="ko-KR" altLang="en-US">
-                    <a:noFill/>
-                  </a:rPr>
-                  <a:t> </a:t>
-                </a:r>
-              </a:p>
-            </p:txBody>
-          </p:sp>
-        </mc:Fallback>
-      </mc:AlternateContent>
-      <p:sp>
-        <p:nvSpPr>
-          <p:cNvPr id="11" name="제목 7">
-            <a:extLst>
-              <a:ext uri="{FF2B5EF4-FFF2-40B4-BE49-F238E27FC236}">
-                <a16:creationId xmlns:a16="http://schemas.microsoft.com/office/drawing/2014/main" id="{42FDDF0F-6EDA-C345-5E1E-A829656B493D}"/>
-              </a:ext>
-            </a:extLst>
-          </p:cNvPr>
-          <p:cNvSpPr>
-            <a:spLocks noGrp="1"/>
-          </p:cNvSpPr>
-          <p:nvPr>
-            <p:ph type="title"/>
-          </p:nvPr>
-        </p:nvSpPr>
-        <p:spPr>
-          <a:xfrm>
-            <a:off x="521207" y="448056"/>
-            <a:ext cx="8135613" cy="640080"/>
-          </a:xfrm>
-        </p:spPr>
-        <p:txBody>
-          <a:bodyPr rtlCol="0">
-            <a:noAutofit/>
-          </a:bodyPr>
-          <a:lstStyle/>
-          <a:p>
-            <a:r>
-              <a:rPr lang="en-US" altLang="ko-KR" sz="2800" dirty="0">
-                <a:solidFill>
-                  <a:schemeClr val="bg2">
-                    <a:lumMod val="25000"/>
-                  </a:schemeClr>
-                </a:solidFill>
-                <a:latin typeface="맑은 고딕" panose="020B0503020000020004" pitchFamily="50" charset="-127"/>
-                <a:ea typeface="맑은 고딕" panose="020B0503020000020004" pitchFamily="50" charset="-127"/>
-              </a:rPr>
-              <a:t>Linear</a:t>
-            </a:r>
-            <a:r>
-              <a:rPr lang="ko-KR" altLang="en-US" sz="2800" dirty="0">
-                <a:solidFill>
-                  <a:schemeClr val="bg2">
-                    <a:lumMod val="25000"/>
-                  </a:schemeClr>
-                </a:solidFill>
-                <a:latin typeface="맑은 고딕" panose="020B0503020000020004" pitchFamily="50" charset="-127"/>
-                <a:ea typeface="맑은 고딕" panose="020B0503020000020004" pitchFamily="50" charset="-127"/>
-              </a:rPr>
-              <a:t> </a:t>
-            </a:r>
-            <a:r>
-              <a:rPr lang="en-US" altLang="ko-KR" sz="2800" dirty="0">
-                <a:solidFill>
-                  <a:schemeClr val="bg2">
-                    <a:lumMod val="25000"/>
-                  </a:schemeClr>
-                </a:solidFill>
-                <a:latin typeface="맑은 고딕" panose="020B0503020000020004" pitchFamily="50" charset="-127"/>
-                <a:ea typeface="맑은 고딕" panose="020B0503020000020004" pitchFamily="50" charset="-127"/>
-              </a:rPr>
-              <a:t>Regression</a:t>
-            </a:r>
-            <a:endParaRPr lang="ko-KR" altLang="en-US" sz="2800" dirty="0">
-              <a:solidFill>
-                <a:schemeClr val="bg2">
-                  <a:lumMod val="25000"/>
-                </a:schemeClr>
-              </a:solidFill>
-              <a:latin typeface="맑은 고딕" panose="020B0503020000020004" pitchFamily="50" charset="-127"/>
-              <a:ea typeface="맑은 고딕" panose="020B0503020000020004" pitchFamily="50" charset="-127"/>
-            </a:endParaRPr>
-          </a:p>
-        </p:txBody>
-      </p:sp>
-    </p:spTree>
-    <p:extLst>
-      <p:ext uri="{BB962C8B-B14F-4D97-AF65-F5344CB8AC3E}">
-        <p14:creationId xmlns:p14="http://schemas.microsoft.com/office/powerpoint/2010/main" val="1340544458"/>
-      </p:ext>
-    </p:extLst>
-  </p:cSld>
-  <p:clrMapOvr>
-    <a:masterClrMapping/>
-  </p:clrMapOvr>
-</p:sld>
-</file>
-
-<file path=ppt/slides/slide30.xml><?xml version="1.0" encoding="utf-8"?>
+<file path=ppt/slides/slide32.xml><?xml version="1.0" encoding="utf-8"?>
 <p:sld xmlns:a="http://schemas.openxmlformats.org/drawingml/2006/main" xmlns:r="http://schemas.openxmlformats.org/officeDocument/2006/relationships" xmlns:p="http://schemas.openxmlformats.org/presentationml/2006/main">
   <p:cSld>
     <p:spTree>
@@ -15960,7 +17468,7 @@
             <a:fld id="{D57F1E4F-1CFF-5643-939E-217C01CDF565}" type="slidenum">
               <a:rPr lang="en-US" smtClean="0"/>
               <a:pPr/>
-              <a:t>30</a:t>
+              <a:t>32</a:t>
             </a:fld>
             <a:endParaRPr lang="en-US" dirty="0"/>
           </a:p>
@@ -16227,7 +17735,7 @@
 </p:sld>
 </file>
 
-<file path=ppt/slides/slide31.xml><?xml version="1.0" encoding="utf-8"?>
+<file path=ppt/slides/slide33.xml><?xml version="1.0" encoding="utf-8"?>
 <p:sld xmlns:a="http://schemas.openxmlformats.org/drawingml/2006/main" xmlns:r="http://schemas.openxmlformats.org/officeDocument/2006/relationships" xmlns:p="http://schemas.openxmlformats.org/presentationml/2006/main">
   <p:cSld>
     <p:spTree>
@@ -16279,7 +17787,7 @@
             <a:fld id="{D57F1E4F-1CFF-5643-939E-217C01CDF565}" type="slidenum">
               <a:rPr lang="en-US" smtClean="0"/>
               <a:pPr/>
-              <a:t>31</a:t>
+              <a:t>33</a:t>
             </a:fld>
             <a:endParaRPr lang="en-US" dirty="0"/>
           </a:p>
@@ -16610,7 +18118,7 @@
 </p:sld>
 </file>
 
-<file path=ppt/slides/slide32.xml><?xml version="1.0" encoding="utf-8"?>
+<file path=ppt/slides/slide34.xml><?xml version="1.0" encoding="utf-8"?>
 <p:sld xmlns:a="http://schemas.openxmlformats.org/drawingml/2006/main" xmlns:r="http://schemas.openxmlformats.org/officeDocument/2006/relationships" xmlns:p="http://schemas.openxmlformats.org/presentationml/2006/main">
   <p:cSld>
     <p:spTree>
@@ -16662,7 +18170,7 @@
             <a:fld id="{D57F1E4F-1CFF-5643-939E-217C01CDF565}" type="slidenum">
               <a:rPr lang="en-US" smtClean="0"/>
               <a:pPr/>
-              <a:t>32</a:t>
+              <a:t>34</a:t>
             </a:fld>
             <a:endParaRPr lang="en-US" dirty="0"/>
           </a:p>
@@ -20920,7 +22428,7 @@
 </p:sld>
 </file>
 
-<file path=ppt/slides/slide33.xml><?xml version="1.0" encoding="utf-8"?>
+<file path=ppt/slides/slide35.xml><?xml version="1.0" encoding="utf-8"?>
 <p:sld xmlns:a="http://schemas.openxmlformats.org/drawingml/2006/main" xmlns:r="http://schemas.openxmlformats.org/officeDocument/2006/relationships" xmlns:p="http://schemas.openxmlformats.org/presentationml/2006/main">
   <p:cSld>
     <p:spTree>
@@ -20972,7 +22480,7 @@
             <a:fld id="{D57F1E4F-1CFF-5643-939E-217C01CDF565}" type="slidenum">
               <a:rPr lang="en-US" smtClean="0"/>
               <a:pPr/>
-              <a:t>33</a:t>
+              <a:t>35</a:t>
             </a:fld>
             <a:endParaRPr lang="en-US" dirty="0"/>
           </a:p>
@@ -21502,7 +23010,7 @@
 </p:sld>
 </file>
 
-<file path=ppt/slides/slide34.xml><?xml version="1.0" encoding="utf-8"?>
+<file path=ppt/slides/slide36.xml><?xml version="1.0" encoding="utf-8"?>
 <p:sld xmlns:a="http://schemas.openxmlformats.org/drawingml/2006/main" xmlns:r="http://schemas.openxmlformats.org/officeDocument/2006/relationships" xmlns:p="http://schemas.openxmlformats.org/presentationml/2006/main">
   <p:cSld>
     <p:spTree>
@@ -21554,7 +23062,7 @@
             <a:fld id="{D57F1E4F-1CFF-5643-939E-217C01CDF565}" type="slidenum">
               <a:rPr lang="en-US" smtClean="0"/>
               <a:pPr/>
-              <a:t>34</a:t>
+              <a:t>36</a:t>
             </a:fld>
             <a:endParaRPr lang="en-US" dirty="0"/>
           </a:p>
@@ -21936,7 +23444,7 @@
 </p:sld>
 </file>
 
-<file path=ppt/slides/slide35.xml><?xml version="1.0" encoding="utf-8"?>
+<file path=ppt/slides/slide37.xml><?xml version="1.0" encoding="utf-8"?>
 <p:sld xmlns:a="http://schemas.openxmlformats.org/drawingml/2006/main" xmlns:r="http://schemas.openxmlformats.org/officeDocument/2006/relationships" xmlns:p="http://schemas.openxmlformats.org/presentationml/2006/main">
   <p:cSld>
     <p:spTree>
@@ -22035,7 +23543,7 @@
             <a:fld id="{D57F1E4F-1CFF-5643-939E-217C01CDF565}" type="slidenum">
               <a:rPr lang="en-US" sz="2000" smtClean="0"/>
               <a:pPr/>
-              <a:t>35</a:t>
+              <a:t>37</a:t>
             </a:fld>
             <a:endParaRPr lang="en-US" sz="2000" dirty="0"/>
           </a:p>
@@ -22234,8 +23742,8 @@
           </a:p>
         </p:txBody>
       </p:sp>
-      <mc:AlternateContent xmlns:mc="http://schemas.openxmlformats.org/markup-compatibility/2006">
-        <mc:Choice xmlns:a14="http://schemas.microsoft.com/office/drawing/2010/main" Requires="a14">
+      <mc:AlternateContent xmlns:mc="http://schemas.openxmlformats.org/markup-compatibility/2006" xmlns:a14="http://schemas.microsoft.com/office/drawing/2010/main">
+        <mc:Choice Requires="a14">
           <p:sp>
             <p:nvSpPr>
               <p:cNvPr id="32" name="TextBox 31">
@@ -22302,7 +23810,7 @@
             </p:txBody>
           </p:sp>
         </mc:Choice>
-        <mc:Fallback>
+        <mc:Fallback xmlns="">
           <p:sp>
             <p:nvSpPr>
               <p:cNvPr id="32" name="TextBox 31">
@@ -22384,8 +23892,8 @@
           </a:p>
         </p:txBody>
       </p:sp>
-      <mc:AlternateContent xmlns:mc="http://schemas.openxmlformats.org/markup-compatibility/2006">
-        <mc:Choice xmlns:a14="http://schemas.microsoft.com/office/drawing/2010/main" Requires="a14">
+      <mc:AlternateContent xmlns:mc="http://schemas.openxmlformats.org/markup-compatibility/2006" xmlns:a14="http://schemas.microsoft.com/office/drawing/2010/main">
+        <mc:Choice Requires="a14">
           <p:sp>
             <p:nvSpPr>
               <p:cNvPr id="3" name="TextBox 2">
@@ -22452,7 +23960,7 @@
             </p:txBody>
           </p:sp>
         </mc:Choice>
-        <mc:Fallback>
+        <mc:Fallback xmlns="">
           <p:sp>
             <p:nvSpPr>
               <p:cNvPr id="3" name="TextBox 2">
@@ -22497,8 +24005,8 @@
           </p:sp>
         </mc:Fallback>
       </mc:AlternateContent>
-      <mc:AlternateContent xmlns:mc="http://schemas.openxmlformats.org/markup-compatibility/2006">
-        <mc:Choice xmlns:a14="http://schemas.microsoft.com/office/drawing/2010/main" Requires="a14">
+      <mc:AlternateContent xmlns:mc="http://schemas.openxmlformats.org/markup-compatibility/2006" xmlns:a14="http://schemas.microsoft.com/office/drawing/2010/main">
+        <mc:Choice Requires="a14">
           <p:sp>
             <p:nvSpPr>
               <p:cNvPr id="6" name="TextBox 5">
@@ -22553,7 +24061,7 @@
             </p:txBody>
           </p:sp>
         </mc:Choice>
-        <mc:Fallback>
+        <mc:Fallback xmlns="">
           <p:sp>
             <p:nvSpPr>
               <p:cNvPr id="6" name="TextBox 5">
@@ -22598,8 +24106,8 @@
           </p:sp>
         </mc:Fallback>
       </mc:AlternateContent>
-      <mc:AlternateContent xmlns:mc="http://schemas.openxmlformats.org/markup-compatibility/2006">
-        <mc:Choice xmlns:a14="http://schemas.microsoft.com/office/drawing/2010/main" Requires="a14">
+      <mc:AlternateContent xmlns:mc="http://schemas.openxmlformats.org/markup-compatibility/2006" xmlns:a14="http://schemas.microsoft.com/office/drawing/2010/main">
+        <mc:Choice Requires="a14">
           <p:sp>
             <p:nvSpPr>
               <p:cNvPr id="7" name="TextBox 6">
@@ -22672,7 +24180,7 @@
             </p:txBody>
           </p:sp>
         </mc:Choice>
-        <mc:Fallback>
+        <mc:Fallback xmlns="">
           <p:sp>
             <p:nvSpPr>
               <p:cNvPr id="7" name="TextBox 6">
@@ -22939,7 +24447,7 @@
 </p:sld>
 </file>
 
-<file path=ppt/slides/slide36.xml><?xml version="1.0" encoding="utf-8"?>
+<file path=ppt/slides/slide38.xml><?xml version="1.0" encoding="utf-8"?>
 <p:sld xmlns:a="http://schemas.openxmlformats.org/drawingml/2006/main" xmlns:r="http://schemas.openxmlformats.org/officeDocument/2006/relationships" xmlns:p="http://schemas.openxmlformats.org/presentationml/2006/main">
   <p:cSld>
     <p:spTree>
@@ -23099,7 +24607,7 @@
             <a:fld id="{D57F1E4F-1CFF-5643-939E-217C01CDF565}" type="slidenum">
               <a:rPr lang="en-US" smtClean="0"/>
               <a:pPr/>
-              <a:t>36</a:t>
+              <a:t>38</a:t>
             </a:fld>
             <a:endParaRPr lang="en-US" dirty="0"/>
           </a:p>
@@ -25614,7 +27122,7 @@
 </p:sld>
 </file>
 
-<file path=ppt/slides/slide37.xml><?xml version="1.0" encoding="utf-8"?>
+<file path=ppt/slides/slide39.xml><?xml version="1.0" encoding="utf-8"?>
 <p:sld xmlns:a="http://schemas.openxmlformats.org/drawingml/2006/main" xmlns:r="http://schemas.openxmlformats.org/officeDocument/2006/relationships" xmlns:p="http://schemas.openxmlformats.org/presentationml/2006/main">
   <p:cSld>
     <p:spTree>
@@ -25666,7 +27174,7 @@
             <a:fld id="{D57F1E4F-1CFF-5643-939E-217C01CDF565}" type="slidenum">
               <a:rPr lang="en-US" smtClean="0"/>
               <a:pPr/>
-              <a:t>37</a:t>
+              <a:t>39</a:t>
             </a:fld>
             <a:endParaRPr lang="en-US" dirty="0"/>
           </a:p>
@@ -26025,7 +27533,970 @@
 </p:sld>
 </file>
 
-<file path=ppt/slides/slide38.xml><?xml version="1.0" encoding="utf-8"?>
+<file path=ppt/slides/slide4.xml><?xml version="1.0" encoding="utf-8"?>
+<p:sld xmlns:a="http://schemas.openxmlformats.org/drawingml/2006/main" xmlns:r="http://schemas.openxmlformats.org/officeDocument/2006/relationships" xmlns:p="http://schemas.openxmlformats.org/presentationml/2006/main">
+  <p:cSld>
+    <p:spTree>
+      <p:nvGrpSpPr>
+        <p:cNvPr id="1" name="">
+          <a:extLst>
+            <a:ext uri="{FF2B5EF4-FFF2-40B4-BE49-F238E27FC236}">
+              <a16:creationId xmlns:a16="http://schemas.microsoft.com/office/drawing/2014/main" id="{FA35D531-9861-DC11-13C8-402FADE0AB3B}"/>
+            </a:ext>
+          </a:extLst>
+        </p:cNvPr>
+        <p:cNvGrpSpPr/>
+        <p:nvPr/>
+      </p:nvGrpSpPr>
+      <p:grpSpPr>
+        <a:xfrm>
+          <a:off x="0" y="0"/>
+          <a:ext cx="0" cy="0"/>
+          <a:chOff x="0" y="0"/>
+          <a:chExt cx="0" cy="0"/>
+        </a:xfrm>
+      </p:grpSpPr>
+      <p:sp>
+        <p:nvSpPr>
+          <p:cNvPr id="8" name="제목 7">
+            <a:extLst>
+              <a:ext uri="{FF2B5EF4-FFF2-40B4-BE49-F238E27FC236}">
+                <a16:creationId xmlns:a16="http://schemas.microsoft.com/office/drawing/2014/main" id="{B56C91DE-18A1-B898-12F7-3C530CFD81BA}"/>
+              </a:ext>
+            </a:extLst>
+          </p:cNvPr>
+          <p:cNvSpPr>
+            <a:spLocks noGrp="1"/>
+          </p:cNvSpPr>
+          <p:nvPr>
+            <p:ph type="title"/>
+          </p:nvPr>
+        </p:nvSpPr>
+        <p:spPr>
+          <a:xfrm>
+            <a:off x="521207" y="448056"/>
+            <a:ext cx="8135613" cy="640080"/>
+          </a:xfrm>
+        </p:spPr>
+        <p:txBody>
+          <a:bodyPr rtlCol="0">
+            <a:noAutofit/>
+          </a:bodyPr>
+          <a:lstStyle/>
+          <a:p>
+            <a:r>
+              <a:rPr lang="en-US" altLang="ko-KR" dirty="0"/>
+              <a:t>Linear</a:t>
+            </a:r>
+            <a:r>
+              <a:rPr lang="ko-KR" altLang="en-US" dirty="0"/>
+              <a:t> </a:t>
+            </a:r>
+            <a:r>
+              <a:rPr lang="en-US" altLang="ko-KR" dirty="0"/>
+              <a:t>Regression as dot product form</a:t>
+            </a:r>
+            <a:endParaRPr lang="ko-KR" altLang="en-US" dirty="0">
+              <a:cs typeface="Segoe UI Light" panose="020B0502040204020203" pitchFamily="34" charset="0"/>
+            </a:endParaRPr>
+          </a:p>
+        </p:txBody>
+      </p:sp>
+      <p:sp>
+        <p:nvSpPr>
+          <p:cNvPr id="12" name="슬라이드 번호 개체 틀 11">
+            <a:extLst>
+              <a:ext uri="{FF2B5EF4-FFF2-40B4-BE49-F238E27FC236}">
+                <a16:creationId xmlns:a16="http://schemas.microsoft.com/office/drawing/2014/main" id="{82336735-1E3E-3496-5FE8-5581A7323E60}"/>
+              </a:ext>
+            </a:extLst>
+          </p:cNvPr>
+          <p:cNvSpPr>
+            <a:spLocks noGrp="1"/>
+          </p:cNvSpPr>
+          <p:nvPr>
+            <p:ph type="sldNum" sz="quarter" idx="4"/>
+          </p:nvPr>
+        </p:nvSpPr>
+        <p:spPr/>
+        <p:txBody>
+          <a:bodyPr/>
+          <a:lstStyle/>
+          <a:p>
+            <a:fld id="{9860EDB8-5305-433F-BE41-D7A86D811DB3}" type="slidenum">
+              <a:rPr lang="en-US" altLang="ko-KR" noProof="0" smtClean="0"/>
+              <a:pPr/>
+              <a:t>4</a:t>
+            </a:fld>
+            <a:endParaRPr lang="ko-KR" altLang="en-US" noProof="0"/>
+          </a:p>
+        </p:txBody>
+      </p:sp>
+      <p:pic>
+        <p:nvPicPr>
+          <p:cNvPr id="4" name="그림 3">
+            <a:extLst>
+              <a:ext uri="{FF2B5EF4-FFF2-40B4-BE49-F238E27FC236}">
+                <a16:creationId xmlns:a16="http://schemas.microsoft.com/office/drawing/2014/main" id="{57775A8D-3762-E25F-3473-AB40BDD18842}"/>
+              </a:ext>
+            </a:extLst>
+          </p:cNvPr>
+          <p:cNvPicPr>
+            <a:picLocks noChangeAspect="1"/>
+          </p:cNvPicPr>
+          <p:nvPr/>
+        </p:nvPicPr>
+        <p:blipFill>
+          <a:blip r:embed="rId3"/>
+          <a:stretch>
+            <a:fillRect/>
+          </a:stretch>
+        </p:blipFill>
+        <p:spPr>
+          <a:xfrm>
+            <a:off x="2308124" y="2872233"/>
+            <a:ext cx="1761872" cy="1743228"/>
+          </a:xfrm>
+          <a:prstGeom prst="rect">
+            <a:avLst/>
+          </a:prstGeom>
+        </p:spPr>
+      </p:pic>
+      <p:pic>
+        <p:nvPicPr>
+          <p:cNvPr id="7" name="그림 6">
+            <a:extLst>
+              <a:ext uri="{FF2B5EF4-FFF2-40B4-BE49-F238E27FC236}">
+                <a16:creationId xmlns:a16="http://schemas.microsoft.com/office/drawing/2014/main" id="{34F422DD-B2F0-8C99-6185-6DEB3BEA0A43}"/>
+              </a:ext>
+            </a:extLst>
+          </p:cNvPr>
+          <p:cNvPicPr>
+            <a:picLocks noChangeAspect="1"/>
+          </p:cNvPicPr>
+          <p:nvPr/>
+        </p:nvPicPr>
+        <p:blipFill>
+          <a:blip r:embed="rId4"/>
+          <a:stretch>
+            <a:fillRect/>
+          </a:stretch>
+        </p:blipFill>
+        <p:spPr>
+          <a:xfrm>
+            <a:off x="528877" y="2906765"/>
+            <a:ext cx="1304183" cy="1674164"/>
+          </a:xfrm>
+          <a:prstGeom prst="rect">
+            <a:avLst/>
+          </a:prstGeom>
+        </p:spPr>
+      </p:pic>
+      <p:pic>
+        <p:nvPicPr>
+          <p:cNvPr id="10" name="그림 9">
+            <a:extLst>
+              <a:ext uri="{FF2B5EF4-FFF2-40B4-BE49-F238E27FC236}">
+                <a16:creationId xmlns:a16="http://schemas.microsoft.com/office/drawing/2014/main" id="{0ADD4715-E2CB-D944-BC5E-351C732644FE}"/>
+              </a:ext>
+            </a:extLst>
+          </p:cNvPr>
+          <p:cNvPicPr>
+            <a:picLocks noChangeAspect="1"/>
+          </p:cNvPicPr>
+          <p:nvPr/>
+        </p:nvPicPr>
+        <p:blipFill>
+          <a:blip r:embed="rId5"/>
+          <a:stretch>
+            <a:fillRect/>
+          </a:stretch>
+        </p:blipFill>
+        <p:spPr>
+          <a:xfrm>
+            <a:off x="4564110" y="2888406"/>
+            <a:ext cx="1207123" cy="1710882"/>
+          </a:xfrm>
+          <a:prstGeom prst="rect">
+            <a:avLst/>
+          </a:prstGeom>
+        </p:spPr>
+      </p:pic>
+      <p:sp>
+        <p:nvSpPr>
+          <p:cNvPr id="13" name="TextBox 12">
+            <a:extLst>
+              <a:ext uri="{FF2B5EF4-FFF2-40B4-BE49-F238E27FC236}">
+                <a16:creationId xmlns:a16="http://schemas.microsoft.com/office/drawing/2014/main" id="{8093461E-2E00-52B3-61E2-BC6F6AA15084}"/>
+              </a:ext>
+            </a:extLst>
+          </p:cNvPr>
+          <p:cNvSpPr txBox="1"/>
+          <p:nvPr/>
+        </p:nvSpPr>
+        <p:spPr>
+          <a:xfrm>
+            <a:off x="6118002" y="2906765"/>
+            <a:ext cx="5921598" cy="2999347"/>
+          </a:xfrm>
+          <a:prstGeom prst="rect">
+            <a:avLst/>
+          </a:prstGeom>
+          <a:solidFill>
+            <a:schemeClr val="accent1">
+              <a:lumMod val="20000"/>
+              <a:lumOff val="80000"/>
+            </a:schemeClr>
+          </a:solidFill>
+        </p:spPr>
+        <p:txBody>
+          <a:bodyPr wrap="square">
+            <a:spAutoFit/>
+          </a:bodyPr>
+          <a:lstStyle/>
+          <a:p>
+            <a:pPr>
+              <a:lnSpc>
+                <a:spcPct val="150000"/>
+              </a:lnSpc>
+            </a:pPr>
+            <a:r>
+              <a:rPr lang="en-US" altLang="ko-KR" sz="1600" dirty="0">
+                <a:latin typeface="맑은 고딕 Semilight" panose="020B0502040204020203" pitchFamily="50" charset="-127"/>
+                <a:ea typeface="맑은 고딕 Semilight" panose="020B0502040204020203" pitchFamily="50" charset="-127"/>
+                <a:cs typeface="맑은 고딕 Semilight" panose="020B0502040204020203" pitchFamily="50" charset="-127"/>
+              </a:rPr>
+              <a:t>import </a:t>
+            </a:r>
+            <a:r>
+              <a:rPr lang="en-US" altLang="ko-KR" sz="1600" dirty="0" err="1">
+                <a:latin typeface="맑은 고딕 Semilight" panose="020B0502040204020203" pitchFamily="50" charset="-127"/>
+                <a:ea typeface="맑은 고딕 Semilight" panose="020B0502040204020203" pitchFamily="50" charset="-127"/>
+                <a:cs typeface="맑은 고딕 Semilight" panose="020B0502040204020203" pitchFamily="50" charset="-127"/>
+              </a:rPr>
+              <a:t>numpy</a:t>
+            </a:r>
+            <a:r>
+              <a:rPr lang="en-US" altLang="ko-KR" sz="1600" dirty="0">
+                <a:latin typeface="맑은 고딕 Semilight" panose="020B0502040204020203" pitchFamily="50" charset="-127"/>
+                <a:ea typeface="맑은 고딕 Semilight" panose="020B0502040204020203" pitchFamily="50" charset="-127"/>
+                <a:cs typeface="맑은 고딕 Semilight" panose="020B0502040204020203" pitchFamily="50" charset="-127"/>
+              </a:rPr>
+              <a:t> as np </a:t>
+            </a:r>
+          </a:p>
+          <a:p>
+            <a:pPr>
+              <a:lnSpc>
+                <a:spcPct val="150000"/>
+              </a:lnSpc>
+            </a:pPr>
+            <a:r>
+              <a:rPr lang="en-US" altLang="ko-KR" sz="1600" dirty="0">
+                <a:latin typeface="맑은 고딕 Semilight" panose="020B0502040204020203" pitchFamily="50" charset="-127"/>
+                <a:ea typeface="맑은 고딕 Semilight" panose="020B0502040204020203" pitchFamily="50" charset="-127"/>
+                <a:cs typeface="맑은 고딕 Semilight" panose="020B0502040204020203" pitchFamily="50" charset="-127"/>
+              </a:rPr>
+              <a:t># 1. </a:t>
+            </a:r>
+            <a:r>
+              <a:rPr lang="ko-KR" altLang="en-US" sz="1600" dirty="0">
+                <a:latin typeface="맑은 고딕 Semilight" panose="020B0502040204020203" pitchFamily="50" charset="-127"/>
+                <a:ea typeface="맑은 고딕 Semilight" panose="020B0502040204020203" pitchFamily="50" charset="-127"/>
+                <a:cs typeface="맑은 고딕 Semilight" panose="020B0502040204020203" pitchFamily="50" charset="-127"/>
+              </a:rPr>
+              <a:t>랜덤 데이터 생성 </a:t>
+            </a:r>
+            <a:r>
+              <a:rPr lang="en-US" altLang="ko-KR" sz="1600" dirty="0">
+                <a:latin typeface="맑은 고딕 Semilight" panose="020B0502040204020203" pitchFamily="50" charset="-127"/>
+                <a:ea typeface="맑은 고딕 Semilight" panose="020B0502040204020203" pitchFamily="50" charset="-127"/>
+                <a:cs typeface="맑은 고딕 Semilight" panose="020B0502040204020203" pitchFamily="50" charset="-127"/>
+              </a:rPr>
+              <a:t>(100</a:t>
+            </a:r>
+            <a:r>
+              <a:rPr lang="ko-KR" altLang="en-US" sz="1600" dirty="0">
+                <a:latin typeface="맑은 고딕 Semilight" panose="020B0502040204020203" pitchFamily="50" charset="-127"/>
+                <a:ea typeface="맑은 고딕 Semilight" panose="020B0502040204020203" pitchFamily="50" charset="-127"/>
+                <a:cs typeface="맑은 고딕 Semilight" panose="020B0502040204020203" pitchFamily="50" charset="-127"/>
+              </a:rPr>
+              <a:t>개</a:t>
+            </a:r>
+            <a:r>
+              <a:rPr lang="en-US" altLang="ko-KR" sz="1600" dirty="0">
+                <a:latin typeface="맑은 고딕 Semilight" panose="020B0502040204020203" pitchFamily="50" charset="-127"/>
+                <a:ea typeface="맑은 고딕 Semilight" panose="020B0502040204020203" pitchFamily="50" charset="-127"/>
+                <a:cs typeface="맑은 고딕 Semilight" panose="020B0502040204020203" pitchFamily="50" charset="-127"/>
+              </a:rPr>
+              <a:t>) </a:t>
+            </a:r>
+          </a:p>
+          <a:p>
+            <a:pPr>
+              <a:lnSpc>
+                <a:spcPct val="150000"/>
+              </a:lnSpc>
+            </a:pPr>
+            <a:r>
+              <a:rPr lang="en-US" altLang="ko-KR" sz="1600" dirty="0" err="1">
+                <a:latin typeface="맑은 고딕 Semilight" panose="020B0502040204020203" pitchFamily="50" charset="-127"/>
+                <a:ea typeface="맑은 고딕 Semilight" panose="020B0502040204020203" pitchFamily="50" charset="-127"/>
+                <a:cs typeface="맑은 고딕 Semilight" panose="020B0502040204020203" pitchFamily="50" charset="-127"/>
+              </a:rPr>
+              <a:t>np.random.seed</a:t>
+            </a:r>
+            <a:r>
+              <a:rPr lang="en-US" altLang="ko-KR" sz="1600" dirty="0">
+                <a:latin typeface="맑은 고딕 Semilight" panose="020B0502040204020203" pitchFamily="50" charset="-127"/>
+                <a:ea typeface="맑은 고딕 Semilight" panose="020B0502040204020203" pitchFamily="50" charset="-127"/>
+                <a:cs typeface="맑은 고딕 Semilight" panose="020B0502040204020203" pitchFamily="50" charset="-127"/>
+              </a:rPr>
+              <a:t>(42) # </a:t>
+            </a:r>
+            <a:r>
+              <a:rPr lang="ko-KR" altLang="en-US" sz="1600" dirty="0">
+                <a:latin typeface="맑은 고딕 Semilight" panose="020B0502040204020203" pitchFamily="50" charset="-127"/>
+                <a:ea typeface="맑은 고딕 Semilight" panose="020B0502040204020203" pitchFamily="50" charset="-127"/>
+                <a:cs typeface="맑은 고딕 Semilight" panose="020B0502040204020203" pitchFamily="50" charset="-127"/>
+              </a:rPr>
+              <a:t>결과 재현을 위해 </a:t>
+            </a:r>
+            <a:r>
+              <a:rPr lang="ko-KR" altLang="en-US" sz="1600" dirty="0" err="1">
+                <a:latin typeface="맑은 고딕 Semilight" panose="020B0502040204020203" pitchFamily="50" charset="-127"/>
+                <a:ea typeface="맑은 고딕 Semilight" panose="020B0502040204020203" pitchFamily="50" charset="-127"/>
+                <a:cs typeface="맑은 고딕 Semilight" panose="020B0502040204020203" pitchFamily="50" charset="-127"/>
+              </a:rPr>
+              <a:t>시드</a:t>
+            </a:r>
+            <a:r>
+              <a:rPr lang="ko-KR" altLang="en-US" sz="1600" dirty="0">
+                <a:latin typeface="맑은 고딕 Semilight" panose="020B0502040204020203" pitchFamily="50" charset="-127"/>
+                <a:ea typeface="맑은 고딕 Semilight" panose="020B0502040204020203" pitchFamily="50" charset="-127"/>
+                <a:cs typeface="맑은 고딕 Semilight" panose="020B0502040204020203" pitchFamily="50" charset="-127"/>
+              </a:rPr>
+              <a:t> 고정 </a:t>
+            </a:r>
+            <a:endParaRPr lang="en-US" altLang="ko-KR" sz="1600" dirty="0">
+              <a:latin typeface="맑은 고딕 Semilight" panose="020B0502040204020203" pitchFamily="50" charset="-127"/>
+              <a:ea typeface="맑은 고딕 Semilight" panose="020B0502040204020203" pitchFamily="50" charset="-127"/>
+              <a:cs typeface="맑은 고딕 Semilight" panose="020B0502040204020203" pitchFamily="50" charset="-127"/>
+            </a:endParaRPr>
+          </a:p>
+          <a:p>
+            <a:pPr>
+              <a:lnSpc>
+                <a:spcPct val="150000"/>
+              </a:lnSpc>
+            </a:pPr>
+            <a:r>
+              <a:rPr lang="en-US" altLang="ko-KR" sz="1600" dirty="0">
+                <a:latin typeface="맑은 고딕 Semilight" panose="020B0502040204020203" pitchFamily="50" charset="-127"/>
+                <a:ea typeface="맑은 고딕 Semilight" panose="020B0502040204020203" pitchFamily="50" charset="-127"/>
+                <a:cs typeface="맑은 고딕 Semilight" panose="020B0502040204020203" pitchFamily="50" charset="-127"/>
+              </a:rPr>
+              <a:t>x = </a:t>
+            </a:r>
+            <a:r>
+              <a:rPr lang="en-US" altLang="ko-KR" sz="1600" dirty="0" err="1">
+                <a:latin typeface="맑은 고딕 Semilight" panose="020B0502040204020203" pitchFamily="50" charset="-127"/>
+                <a:ea typeface="맑은 고딕 Semilight" panose="020B0502040204020203" pitchFamily="50" charset="-127"/>
+                <a:cs typeface="맑은 고딕 Semilight" panose="020B0502040204020203" pitchFamily="50" charset="-127"/>
+              </a:rPr>
+              <a:t>np.random.uniform</a:t>
+            </a:r>
+            <a:r>
+              <a:rPr lang="en-US" altLang="ko-KR" sz="1600" dirty="0">
+                <a:latin typeface="맑은 고딕 Semilight" panose="020B0502040204020203" pitchFamily="50" charset="-127"/>
+                <a:ea typeface="맑은 고딕 Semilight" panose="020B0502040204020203" pitchFamily="50" charset="-127"/>
+                <a:cs typeface="맑은 고딕 Semilight" panose="020B0502040204020203" pitchFamily="50" charset="-127"/>
+              </a:rPr>
+              <a:t>(0, 10, 100) # 0~10 </a:t>
+            </a:r>
+            <a:r>
+              <a:rPr lang="ko-KR" altLang="en-US" sz="1600" dirty="0">
+                <a:latin typeface="맑은 고딕 Semilight" panose="020B0502040204020203" pitchFamily="50" charset="-127"/>
+                <a:ea typeface="맑은 고딕 Semilight" panose="020B0502040204020203" pitchFamily="50" charset="-127"/>
+                <a:cs typeface="맑은 고딕 Semilight" panose="020B0502040204020203" pitchFamily="50" charset="-127"/>
+              </a:rPr>
+              <a:t>사이의 난수 </a:t>
+            </a:r>
+            <a:r>
+              <a:rPr lang="en-US" altLang="ko-KR" sz="1600" dirty="0">
+                <a:latin typeface="맑은 고딕 Semilight" panose="020B0502040204020203" pitchFamily="50" charset="-127"/>
+                <a:ea typeface="맑은 고딕 Semilight" panose="020B0502040204020203" pitchFamily="50" charset="-127"/>
+                <a:cs typeface="맑은 고딕 Semilight" panose="020B0502040204020203" pitchFamily="50" charset="-127"/>
+              </a:rPr>
+              <a:t>100</a:t>
+            </a:r>
+            <a:r>
+              <a:rPr lang="ko-KR" altLang="en-US" sz="1600" dirty="0">
+                <a:latin typeface="맑은 고딕 Semilight" panose="020B0502040204020203" pitchFamily="50" charset="-127"/>
+                <a:ea typeface="맑은 고딕 Semilight" panose="020B0502040204020203" pitchFamily="50" charset="-127"/>
+                <a:cs typeface="맑은 고딕 Semilight" panose="020B0502040204020203" pitchFamily="50" charset="-127"/>
+              </a:rPr>
+              <a:t>개 </a:t>
+            </a:r>
+            <a:endParaRPr lang="en-US" altLang="ko-KR" sz="1600" dirty="0">
+              <a:latin typeface="맑은 고딕 Semilight" panose="020B0502040204020203" pitchFamily="50" charset="-127"/>
+              <a:ea typeface="맑은 고딕 Semilight" panose="020B0502040204020203" pitchFamily="50" charset="-127"/>
+              <a:cs typeface="맑은 고딕 Semilight" panose="020B0502040204020203" pitchFamily="50" charset="-127"/>
+            </a:endParaRPr>
+          </a:p>
+          <a:p>
+            <a:pPr>
+              <a:lnSpc>
+                <a:spcPct val="150000"/>
+              </a:lnSpc>
+            </a:pPr>
+            <a:r>
+              <a:rPr lang="en-US" altLang="ko-KR" sz="1600" dirty="0">
+                <a:latin typeface="맑은 고딕 Semilight" panose="020B0502040204020203" pitchFamily="50" charset="-127"/>
+                <a:ea typeface="맑은 고딕 Semilight" panose="020B0502040204020203" pitchFamily="50" charset="-127"/>
+                <a:cs typeface="맑은 고딕 Semilight" panose="020B0502040204020203" pitchFamily="50" charset="-127"/>
+              </a:rPr>
+              <a:t># </a:t>
+            </a:r>
+            <a:r>
+              <a:rPr lang="ko-KR" altLang="en-US" sz="1600" dirty="0">
+                <a:latin typeface="맑은 고딕 Semilight" panose="020B0502040204020203" pitchFamily="50" charset="-127"/>
+                <a:ea typeface="맑은 고딕 Semilight" panose="020B0502040204020203" pitchFamily="50" charset="-127"/>
+                <a:cs typeface="맑은 고딕 Semilight" panose="020B0502040204020203" pitchFamily="50" charset="-127"/>
+              </a:rPr>
+              <a:t>실제 관계식</a:t>
+            </a:r>
+            <a:r>
+              <a:rPr lang="en-US" altLang="ko-KR" sz="1600" dirty="0">
+                <a:latin typeface="맑은 고딕 Semilight" panose="020B0502040204020203" pitchFamily="50" charset="-127"/>
+                <a:ea typeface="맑은 고딕 Semilight" panose="020B0502040204020203" pitchFamily="50" charset="-127"/>
+                <a:cs typeface="맑은 고딕 Semilight" panose="020B0502040204020203" pitchFamily="50" charset="-127"/>
+              </a:rPr>
+              <a:t>: y = 3x + 5 (</a:t>
+            </a:r>
+            <a:r>
+              <a:rPr lang="ko-KR" altLang="en-US" sz="1600" dirty="0">
+                <a:latin typeface="맑은 고딕 Semilight" panose="020B0502040204020203" pitchFamily="50" charset="-127"/>
+                <a:ea typeface="맑은 고딕 Semilight" panose="020B0502040204020203" pitchFamily="50" charset="-127"/>
+                <a:cs typeface="맑은 고딕 Semilight" panose="020B0502040204020203" pitchFamily="50" charset="-127"/>
+              </a:rPr>
+              <a:t>여기에 노이즈 추가</a:t>
+            </a:r>
+            <a:r>
+              <a:rPr lang="en-US" altLang="ko-KR" sz="1600" dirty="0">
+                <a:latin typeface="맑은 고딕 Semilight" panose="020B0502040204020203" pitchFamily="50" charset="-127"/>
+                <a:ea typeface="맑은 고딕 Semilight" panose="020B0502040204020203" pitchFamily="50" charset="-127"/>
+                <a:cs typeface="맑은 고딕 Semilight" panose="020B0502040204020203" pitchFamily="50" charset="-127"/>
+              </a:rPr>
+              <a:t>) </a:t>
+            </a:r>
+          </a:p>
+          <a:p>
+            <a:pPr>
+              <a:lnSpc>
+                <a:spcPct val="150000"/>
+              </a:lnSpc>
+            </a:pPr>
+            <a:r>
+              <a:rPr lang="en-US" altLang="ko-KR" sz="1600" dirty="0">
+                <a:latin typeface="맑은 고딕 Semilight" panose="020B0502040204020203" pitchFamily="50" charset="-127"/>
+                <a:ea typeface="맑은 고딕 Semilight" panose="020B0502040204020203" pitchFamily="50" charset="-127"/>
+                <a:cs typeface="맑은 고딕 Semilight" panose="020B0502040204020203" pitchFamily="50" charset="-127"/>
+              </a:rPr>
+              <a:t># </a:t>
+            </a:r>
+            <a:r>
+              <a:rPr lang="ko-KR" altLang="en-US" sz="1600" dirty="0">
+                <a:latin typeface="맑은 고딕 Semilight" panose="020B0502040204020203" pitchFamily="50" charset="-127"/>
+                <a:ea typeface="맑은 고딕 Semilight" panose="020B0502040204020203" pitchFamily="50" charset="-127"/>
+                <a:cs typeface="맑은 고딕 Semilight" panose="020B0502040204020203" pitchFamily="50" charset="-127"/>
+              </a:rPr>
+              <a:t>평균 </a:t>
+            </a:r>
+            <a:r>
+              <a:rPr lang="en-US" altLang="ko-KR" sz="1600" dirty="0">
+                <a:latin typeface="맑은 고딕 Semilight" panose="020B0502040204020203" pitchFamily="50" charset="-127"/>
+                <a:ea typeface="맑은 고딕 Semilight" panose="020B0502040204020203" pitchFamily="50" charset="-127"/>
+                <a:cs typeface="맑은 고딕 Semilight" panose="020B0502040204020203" pitchFamily="50" charset="-127"/>
+              </a:rPr>
+              <a:t>0, </a:t>
+            </a:r>
+            <a:r>
+              <a:rPr lang="ko-KR" altLang="en-US" sz="1600" dirty="0">
+                <a:latin typeface="맑은 고딕 Semilight" panose="020B0502040204020203" pitchFamily="50" charset="-127"/>
+                <a:ea typeface="맑은 고딕 Semilight" panose="020B0502040204020203" pitchFamily="50" charset="-127"/>
+                <a:cs typeface="맑은 고딕 Semilight" panose="020B0502040204020203" pitchFamily="50" charset="-127"/>
+              </a:rPr>
+              <a:t>표준편차 </a:t>
+            </a:r>
+            <a:r>
+              <a:rPr lang="en-US" altLang="ko-KR" sz="1600" dirty="0">
+                <a:latin typeface="맑은 고딕 Semilight" panose="020B0502040204020203" pitchFamily="50" charset="-127"/>
+                <a:ea typeface="맑은 고딕 Semilight" panose="020B0502040204020203" pitchFamily="50" charset="-127"/>
+                <a:cs typeface="맑은 고딕 Semilight" panose="020B0502040204020203" pitchFamily="50" charset="-127"/>
+              </a:rPr>
+              <a:t>2</a:t>
+            </a:r>
+            <a:r>
+              <a:rPr lang="ko-KR" altLang="en-US" sz="1600" dirty="0">
+                <a:latin typeface="맑은 고딕 Semilight" panose="020B0502040204020203" pitchFamily="50" charset="-127"/>
+                <a:ea typeface="맑은 고딕 Semilight" panose="020B0502040204020203" pitchFamily="50" charset="-127"/>
+                <a:cs typeface="맑은 고딕 Semilight" panose="020B0502040204020203" pitchFamily="50" charset="-127"/>
+              </a:rPr>
+              <a:t>인 정규분포 노이즈 </a:t>
+            </a:r>
+            <a:endParaRPr lang="en-US" altLang="ko-KR" sz="1600" dirty="0">
+              <a:latin typeface="맑은 고딕 Semilight" panose="020B0502040204020203" pitchFamily="50" charset="-127"/>
+              <a:ea typeface="맑은 고딕 Semilight" panose="020B0502040204020203" pitchFamily="50" charset="-127"/>
+              <a:cs typeface="맑은 고딕 Semilight" panose="020B0502040204020203" pitchFamily="50" charset="-127"/>
+            </a:endParaRPr>
+          </a:p>
+          <a:p>
+            <a:pPr>
+              <a:lnSpc>
+                <a:spcPct val="150000"/>
+              </a:lnSpc>
+            </a:pPr>
+            <a:r>
+              <a:rPr lang="en-US" altLang="ko-KR" sz="1600" dirty="0">
+                <a:latin typeface="맑은 고딕 Semilight" panose="020B0502040204020203" pitchFamily="50" charset="-127"/>
+                <a:ea typeface="맑은 고딕 Semilight" panose="020B0502040204020203" pitchFamily="50" charset="-127"/>
+                <a:cs typeface="맑은 고딕 Semilight" panose="020B0502040204020203" pitchFamily="50" charset="-127"/>
+              </a:rPr>
+              <a:t>noise = </a:t>
+            </a:r>
+            <a:r>
+              <a:rPr lang="en-US" altLang="ko-KR" sz="1600" dirty="0" err="1">
+                <a:latin typeface="맑은 고딕 Semilight" panose="020B0502040204020203" pitchFamily="50" charset="-127"/>
+                <a:ea typeface="맑은 고딕 Semilight" panose="020B0502040204020203" pitchFamily="50" charset="-127"/>
+                <a:cs typeface="맑은 고딕 Semilight" panose="020B0502040204020203" pitchFamily="50" charset="-127"/>
+              </a:rPr>
+              <a:t>np.random.normal</a:t>
+            </a:r>
+            <a:r>
+              <a:rPr lang="en-US" altLang="ko-KR" sz="1600" dirty="0">
+                <a:latin typeface="맑은 고딕 Semilight" panose="020B0502040204020203" pitchFamily="50" charset="-127"/>
+                <a:ea typeface="맑은 고딕 Semilight" panose="020B0502040204020203" pitchFamily="50" charset="-127"/>
+                <a:cs typeface="맑은 고딕 Semilight" panose="020B0502040204020203" pitchFamily="50" charset="-127"/>
+              </a:rPr>
+              <a:t>(0, 2, 100) </a:t>
+            </a:r>
+          </a:p>
+          <a:p>
+            <a:pPr>
+              <a:lnSpc>
+                <a:spcPct val="150000"/>
+              </a:lnSpc>
+            </a:pPr>
+            <a:r>
+              <a:rPr lang="en-US" altLang="ko-KR" sz="1600" dirty="0">
+                <a:latin typeface="맑은 고딕 Semilight" panose="020B0502040204020203" pitchFamily="50" charset="-127"/>
+                <a:ea typeface="맑은 고딕 Semilight" panose="020B0502040204020203" pitchFamily="50" charset="-127"/>
+                <a:cs typeface="맑은 고딕 Semilight" panose="020B0502040204020203" pitchFamily="50" charset="-127"/>
+              </a:rPr>
+              <a:t>y = 3 * x + 5 + noise</a:t>
+            </a:r>
+            <a:endParaRPr lang="ko-KR" altLang="en-US" sz="1600" dirty="0">
+              <a:latin typeface="맑은 고딕 Semilight" panose="020B0502040204020203" pitchFamily="50" charset="-127"/>
+              <a:ea typeface="맑은 고딕 Semilight" panose="020B0502040204020203" pitchFamily="50" charset="-127"/>
+              <a:cs typeface="맑은 고딕 Semilight" panose="020B0502040204020203" pitchFamily="50" charset="-127"/>
+            </a:endParaRPr>
+          </a:p>
+        </p:txBody>
+      </p:sp>
+      <p:pic>
+        <p:nvPicPr>
+          <p:cNvPr id="14" name="Picture 4" descr="도자기 작업장. 성인과 어린이의 손이 도자기를 만들고 젖은 점토 근접 촬영으로 작업합니다. 더러운 손으로 바퀴에 점토로 그릇을 만드는 과정. 여름 공원의 수제 축제">
+            <a:extLst>
+              <a:ext uri="{FF2B5EF4-FFF2-40B4-BE49-F238E27FC236}">
+                <a16:creationId xmlns:a16="http://schemas.microsoft.com/office/drawing/2014/main" id="{154F4078-D4B4-44FA-0A92-D15D7F7E8CBB}"/>
+              </a:ext>
+            </a:extLst>
+          </p:cNvPr>
+          <p:cNvPicPr>
+            <a:picLocks noChangeAspect="1" noChangeArrowheads="1"/>
+          </p:cNvPicPr>
+          <p:nvPr/>
+        </p:nvPicPr>
+        <p:blipFill>
+          <a:blip r:embed="rId6">
+            <a:extLst>
+              <a:ext uri="{28A0092B-C50C-407E-A947-70E740481C1C}">
+                <a14:useLocalDpi xmlns:a14="http://schemas.microsoft.com/office/drawing/2010/main" val="0"/>
+              </a:ext>
+            </a:extLst>
+          </a:blip>
+          <a:srcRect/>
+          <a:stretch>
+            <a:fillRect/>
+          </a:stretch>
+        </p:blipFill>
+        <p:spPr bwMode="auto">
+          <a:xfrm>
+            <a:off x="10502899" y="55419"/>
+            <a:ext cx="1633682" cy="1089121"/>
+          </a:xfrm>
+          <a:prstGeom prst="rect">
+            <a:avLst/>
+          </a:prstGeom>
+          <a:noFill/>
+          <a:extLst>
+            <a:ext uri="{909E8E84-426E-40DD-AFC4-6F175D3DCCD1}">
+              <a14:hiddenFill xmlns:a14="http://schemas.microsoft.com/office/drawing/2010/main">
+                <a:solidFill>
+                  <a:srgbClr val="FFFFFF"/>
+                </a:solidFill>
+              </a14:hiddenFill>
+            </a:ext>
+          </a:extLst>
+        </p:spPr>
+      </p:pic>
+      <mc:AlternateContent xmlns:mc="http://schemas.openxmlformats.org/markup-compatibility/2006">
+        <mc:Choice xmlns:a14="http://schemas.microsoft.com/office/drawing/2010/main" Requires="a14">
+          <p:sp>
+            <p:nvSpPr>
+              <p:cNvPr id="2" name="TextBox 1">
+                <a:extLst>
+                  <a:ext uri="{FF2B5EF4-FFF2-40B4-BE49-F238E27FC236}">
+                    <a16:creationId xmlns:a16="http://schemas.microsoft.com/office/drawing/2014/main" id="{E5B94F69-17BC-7EE0-39C5-3DA92FF72EE2}"/>
+                  </a:ext>
+                </a:extLst>
+              </p:cNvPr>
+              <p:cNvSpPr txBox="1"/>
+              <p:nvPr/>
+            </p:nvSpPr>
+            <p:spPr>
+              <a:xfrm>
+                <a:off x="521206" y="1324916"/>
+                <a:ext cx="11127319" cy="869790"/>
+              </a:xfrm>
+              <a:prstGeom prst="rect">
+                <a:avLst/>
+              </a:prstGeom>
+              <a:noFill/>
+            </p:spPr>
+            <p:txBody>
+              <a:bodyPr wrap="square">
+                <a:spAutoFit/>
+              </a:bodyPr>
+              <a:lstStyle/>
+              <a:p>
+                <a:pPr>
+                  <a:lnSpc>
+                    <a:spcPct val="150000"/>
+                  </a:lnSpc>
+                </a:pPr>
+                <a14:m>
+                  <m:oMath xmlns:m="http://schemas.openxmlformats.org/officeDocument/2006/math">
+                    <m:r>
+                      <a:rPr lang="en-US" altLang="ko-KR" i="1" dirty="0">
+                        <a:latin typeface="Cambria Math" panose="02040503050406030204" pitchFamily="18" charset="0"/>
+                      </a:rPr>
+                      <m:t>𝑌</m:t>
+                    </m:r>
+                  </m:oMath>
+                </a14:m>
+                <a:r>
+                  <a:rPr lang="ko-KR" altLang="en-US" dirty="0">
+                    <a:latin typeface="맑은 고딕 Semilight" panose="020B0502040204020203" pitchFamily="50" charset="-127"/>
+                    <a:ea typeface="맑은 고딕 Semilight" panose="020B0502040204020203" pitchFamily="50" charset="-127"/>
+                    <a:cs typeface="맑은 고딕 Semilight" panose="020B0502040204020203" pitchFamily="50" charset="-127"/>
+                  </a:rPr>
+                  <a:t>는 </a:t>
+                </a:r>
+                <a14:m>
+                  <m:oMath xmlns:m="http://schemas.openxmlformats.org/officeDocument/2006/math">
+                    <m:r>
+                      <a:rPr lang="en-US" altLang="ko-KR" i="1" dirty="0">
+                        <a:latin typeface="Cambria Math" panose="02040503050406030204" pitchFamily="18" charset="0"/>
+                      </a:rPr>
+                      <m:t>𝑋</m:t>
+                    </m:r>
+                  </m:oMath>
+                </a14:m>
+                <a:r>
+                  <a:rPr lang="ko-KR" altLang="en-US" dirty="0">
+                    <a:latin typeface="맑은 고딕 Semilight" panose="020B0502040204020203" pitchFamily="50" charset="-127"/>
+                    <a:ea typeface="맑은 고딕 Semilight" panose="020B0502040204020203" pitchFamily="50" charset="-127"/>
+                    <a:cs typeface="맑은 고딕 Semilight" panose="020B0502040204020203" pitchFamily="50" charset="-127"/>
+                  </a:rPr>
+                  <a:t>의 선형결합과</a:t>
+                </a:r>
+                <a:r>
+                  <a:rPr lang="en-US" altLang="ko-KR" dirty="0">
+                    <a:latin typeface="맑은 고딕 Semilight" panose="020B0502040204020203" pitchFamily="50" charset="-127"/>
+                    <a:ea typeface="맑은 고딕 Semilight" panose="020B0502040204020203" pitchFamily="50" charset="-127"/>
+                    <a:cs typeface="맑은 고딕 Semilight" panose="020B0502040204020203" pitchFamily="50" charset="-127"/>
+                  </a:rPr>
+                  <a:t> Error</a:t>
+                </a:r>
+                <a:r>
+                  <a:rPr lang="ko-KR" altLang="en-US" dirty="0">
+                    <a:latin typeface="맑은 고딕 Semilight" panose="020B0502040204020203" pitchFamily="50" charset="-127"/>
+                    <a:ea typeface="맑은 고딕 Semilight" panose="020B0502040204020203" pitchFamily="50" charset="-127"/>
+                    <a:cs typeface="맑은 고딕 Semilight" panose="020B0502040204020203" pitchFamily="50" charset="-127"/>
+                  </a:rPr>
+                  <a:t>로 이루어진 가상 데이터를 생성하여 </a:t>
+                </a:r>
+                <a:r>
+                  <a:rPr lang="en-US" altLang="ko-KR" dirty="0" err="1">
+                    <a:latin typeface="맑은 고딕 Semilight" panose="020B0502040204020203" pitchFamily="50" charset="-127"/>
+                    <a:ea typeface="맑은 고딕 Semilight" panose="020B0502040204020203" pitchFamily="50" charset="-127"/>
+                    <a:cs typeface="맑은 고딕 Semilight" panose="020B0502040204020203" pitchFamily="50" charset="-127"/>
+                  </a:rPr>
+                  <a:t>numpy</a:t>
+                </a:r>
+                <a:r>
+                  <a:rPr lang="ko-KR" altLang="en-US" dirty="0">
+                    <a:latin typeface="맑은 고딕 Semilight" panose="020B0502040204020203" pitchFamily="50" charset="-127"/>
+                    <a:ea typeface="맑은 고딕 Semilight" panose="020B0502040204020203" pitchFamily="50" charset="-127"/>
+                    <a:cs typeface="맑은 고딕 Semilight" panose="020B0502040204020203" pitchFamily="50" charset="-127"/>
+                  </a:rPr>
+                  <a:t>의 사용하여</a:t>
+                </a:r>
+                <a:r>
+                  <a:rPr lang="en-US" altLang="ko-KR" dirty="0">
+                    <a:latin typeface="맑은 고딕 Semilight" panose="020B0502040204020203" pitchFamily="50" charset="-127"/>
+                    <a:ea typeface="맑은 고딕 Semilight" panose="020B0502040204020203" pitchFamily="50" charset="-127"/>
+                    <a:cs typeface="맑은 고딕 Semilight" panose="020B0502040204020203" pitchFamily="50" charset="-127"/>
+                  </a:rPr>
+                  <a:t> </a:t>
+                </a:r>
+                <a:r>
+                  <a:rPr lang="ko-KR" altLang="en-US" dirty="0">
+                    <a:latin typeface="맑은 고딕 Semilight" panose="020B0502040204020203" pitchFamily="50" charset="-127"/>
+                    <a:ea typeface="맑은 고딕 Semilight" panose="020B0502040204020203" pitchFamily="50" charset="-127"/>
+                    <a:cs typeface="맑은 고딕 Semilight" panose="020B0502040204020203" pitchFamily="50" charset="-127"/>
+                  </a:rPr>
+                  <a:t> 단순</a:t>
+                </a:r>
+                <a:r>
+                  <a:rPr lang="en-US" altLang="ko-KR" dirty="0">
+                    <a:latin typeface="맑은 고딕 Semilight" panose="020B0502040204020203" pitchFamily="50" charset="-127"/>
+                    <a:ea typeface="맑은 고딕 Semilight" panose="020B0502040204020203" pitchFamily="50" charset="-127"/>
+                    <a:cs typeface="맑은 고딕 Semilight" panose="020B0502040204020203" pitchFamily="50" charset="-127"/>
+                  </a:rPr>
+                  <a:t> </a:t>
+                </a:r>
+                <a:r>
+                  <a:rPr lang="ko-KR" altLang="en-US" dirty="0">
+                    <a:latin typeface="맑은 고딕 Semilight" panose="020B0502040204020203" pitchFamily="50" charset="-127"/>
+                    <a:ea typeface="맑은 고딕 Semilight" panose="020B0502040204020203" pitchFamily="50" charset="-127"/>
+                    <a:cs typeface="맑은 고딕 Semilight" panose="020B0502040204020203" pitchFamily="50" charset="-127"/>
+                  </a:rPr>
+                  <a:t>회귀분석식</a:t>
+                </a:r>
+                <a:r>
+                  <a:rPr lang="en-US" altLang="ko-KR" dirty="0">
+                    <a:latin typeface="맑은 고딕 Semilight" panose="020B0502040204020203" pitchFamily="50" charset="-127"/>
+                    <a:ea typeface="맑은 고딕 Semilight" panose="020B0502040204020203" pitchFamily="50" charset="-127"/>
+                    <a:cs typeface="맑은 고딕 Semilight" panose="020B0502040204020203" pitchFamily="50" charset="-127"/>
+                  </a:rPr>
+                  <a:t>(</a:t>
+                </a:r>
+                <a:r>
+                  <a:rPr lang="ko-KR" altLang="en-US" dirty="0">
+                    <a:latin typeface="맑은 고딕 Semilight" panose="020B0502040204020203" pitchFamily="50" charset="-127"/>
+                    <a:ea typeface="맑은 고딕 Semilight" panose="020B0502040204020203" pitchFamily="50" charset="-127"/>
+                    <a:cs typeface="맑은 고딕 Semilight" panose="020B0502040204020203" pitchFamily="50" charset="-127"/>
+                  </a:rPr>
+                  <a:t>모델</a:t>
+                </a:r>
+                <a:r>
+                  <a:rPr lang="en-US" altLang="ko-KR" dirty="0">
+                    <a:latin typeface="맑은 고딕 Semilight" panose="020B0502040204020203" pitchFamily="50" charset="-127"/>
+                    <a:ea typeface="맑은 고딕 Semilight" panose="020B0502040204020203" pitchFamily="50" charset="-127"/>
+                    <a:cs typeface="맑은 고딕 Semilight" panose="020B0502040204020203" pitchFamily="50" charset="-127"/>
+                  </a:rPr>
+                  <a:t>, </a:t>
+                </a:r>
+                <a:r>
+                  <a:rPr lang="ko-KR" altLang="en-US" dirty="0">
+                    <a:latin typeface="맑은 고딕 Semilight" panose="020B0502040204020203" pitchFamily="50" charset="-127"/>
+                    <a:ea typeface="맑은 고딕 Semilight" panose="020B0502040204020203" pitchFamily="50" charset="-127"/>
+                    <a:cs typeface="맑은 고딕 Semilight" panose="020B0502040204020203" pitchFamily="50" charset="-127"/>
+                  </a:rPr>
+                  <a:t>함수</a:t>
+                </a:r>
+                <a:r>
+                  <a:rPr lang="en-US" altLang="ko-KR" dirty="0">
+                    <a:latin typeface="맑은 고딕 Semilight" panose="020B0502040204020203" pitchFamily="50" charset="-127"/>
+                    <a:ea typeface="맑은 고딕 Semilight" panose="020B0502040204020203" pitchFamily="50" charset="-127"/>
+                    <a:cs typeface="맑은 고딕 Semilight" panose="020B0502040204020203" pitchFamily="50" charset="-127"/>
+                  </a:rPr>
+                  <a:t>)</a:t>
+                </a:r>
+                <a:r>
+                  <a:rPr lang="ko-KR" altLang="en-US" dirty="0">
+                    <a:latin typeface="맑은 고딕 Semilight" panose="020B0502040204020203" pitchFamily="50" charset="-127"/>
+                    <a:ea typeface="맑은 고딕 Semilight" panose="020B0502040204020203" pitchFamily="50" charset="-127"/>
+                    <a:cs typeface="맑은 고딕 Semilight" panose="020B0502040204020203" pitchFamily="50" charset="-127"/>
+                  </a:rPr>
+                  <a:t>의 계수를 구하라</a:t>
+                </a:r>
+              </a:p>
+            </p:txBody>
+          </p:sp>
+        </mc:Choice>
+        <mc:Fallback>
+          <p:sp>
+            <p:nvSpPr>
+              <p:cNvPr id="2" name="TextBox 1">
+                <a:extLst>
+                  <a:ext uri="{FF2B5EF4-FFF2-40B4-BE49-F238E27FC236}">
+                    <a16:creationId xmlns:a16="http://schemas.microsoft.com/office/drawing/2014/main" id="{E5B94F69-17BC-7EE0-39C5-3DA92FF72EE2}"/>
+                  </a:ext>
+                </a:extLst>
+              </p:cNvPr>
+              <p:cNvSpPr txBox="1">
+                <a:spLocks noRot="1" noChangeAspect="1" noMove="1" noResize="1" noEditPoints="1" noAdjustHandles="1" noChangeArrowheads="1" noChangeShapeType="1" noTextEdit="1"/>
+              </p:cNvSpPr>
+              <p:nvPr/>
+            </p:nvSpPr>
+            <p:spPr>
+              <a:xfrm>
+                <a:off x="521206" y="1324916"/>
+                <a:ext cx="11127319" cy="869790"/>
+              </a:xfrm>
+              <a:prstGeom prst="rect">
+                <a:avLst/>
+              </a:prstGeom>
+              <a:blipFill>
+                <a:blip r:embed="rId7"/>
+                <a:stretch>
+                  <a:fillRect l="-438" b="-9790"/>
+                </a:stretch>
+              </a:blipFill>
+            </p:spPr>
+            <p:txBody>
+              <a:bodyPr/>
+              <a:lstStyle/>
+              <a:p>
+                <a:r>
+                  <a:rPr lang="ko-KR" altLang="en-US">
+                    <a:noFill/>
+                  </a:rPr>
+                  <a:t> </a:t>
+                </a:r>
+              </a:p>
+            </p:txBody>
+          </p:sp>
+        </mc:Fallback>
+      </mc:AlternateContent>
+      <p:pic>
+        <p:nvPicPr>
+          <p:cNvPr id="3" name="그래픽 2" descr="추가">
+            <a:extLst>
+              <a:ext uri="{FF2B5EF4-FFF2-40B4-BE49-F238E27FC236}">
+                <a16:creationId xmlns:a16="http://schemas.microsoft.com/office/drawing/2014/main" id="{6B812D5D-EEF2-FAF0-B77C-DF1C0B8F7C0A}"/>
+              </a:ext>
+            </a:extLst>
+          </p:cNvPr>
+          <p:cNvPicPr>
+            <a:picLocks noChangeAspect="1"/>
+          </p:cNvPicPr>
+          <p:nvPr/>
+        </p:nvPicPr>
+        <p:blipFill>
+          <a:blip r:embed="rId8">
+            <a:extLst>
+              <a:ext uri="{96DAC541-7B7A-43D3-8B79-37D633B846F1}">
+                <asvg:svgBlip xmlns:asvg="http://schemas.microsoft.com/office/drawing/2016/SVG/main" r:embed="rId9"/>
+              </a:ext>
+            </a:extLst>
+          </a:blip>
+          <a:stretch>
+            <a:fillRect/>
+          </a:stretch>
+        </p:blipFill>
+        <p:spPr>
+          <a:xfrm>
+            <a:off x="4070680" y="3553839"/>
+            <a:ext cx="346086" cy="346086"/>
+          </a:xfrm>
+          <a:prstGeom prst="rect">
+            <a:avLst/>
+          </a:prstGeom>
+        </p:spPr>
+      </p:pic>
+      <p:sp>
+        <p:nvSpPr>
+          <p:cNvPr id="5" name="같음 기호 4">
+            <a:extLst>
+              <a:ext uri="{FF2B5EF4-FFF2-40B4-BE49-F238E27FC236}">
+                <a16:creationId xmlns:a16="http://schemas.microsoft.com/office/drawing/2014/main" id="{48578BC6-55FA-1264-F6B2-EC9EA18841C1}"/>
+              </a:ext>
+            </a:extLst>
+          </p:cNvPr>
+          <p:cNvSpPr/>
+          <p:nvPr/>
+        </p:nvSpPr>
+        <p:spPr>
+          <a:xfrm>
+            <a:off x="1781104" y="3621927"/>
+            <a:ext cx="375869" cy="176591"/>
+          </a:xfrm>
+          <a:prstGeom prst="mathEqual">
+            <a:avLst>
+              <a:gd name="adj1" fmla="val 12582"/>
+              <a:gd name="adj2" fmla="val 32536"/>
+            </a:avLst>
+          </a:prstGeom>
+          <a:solidFill>
+            <a:schemeClr val="tx1"/>
+          </a:solidFill>
+        </p:spPr>
+        <p:style>
+          <a:lnRef idx="2">
+            <a:schemeClr val="accent1">
+              <a:shade val="15000"/>
+            </a:schemeClr>
+          </a:lnRef>
+          <a:fillRef idx="1">
+            <a:schemeClr val="accent1"/>
+          </a:fillRef>
+          <a:effectRef idx="0">
+            <a:schemeClr val="accent1"/>
+          </a:effectRef>
+          <a:fontRef idx="minor">
+            <a:schemeClr val="lt1"/>
+          </a:fontRef>
+        </p:style>
+        <p:txBody>
+          <a:bodyPr rtlCol="0" anchor="ctr"/>
+          <a:lstStyle/>
+          <a:p>
+            <a:pPr algn="ctr"/>
+            <a:endParaRPr lang="ko-KR" altLang="en-US">
+              <a:solidFill>
+                <a:schemeClr val="tx1"/>
+              </a:solidFill>
+            </a:endParaRPr>
+          </a:p>
+        </p:txBody>
+      </p:sp>
+    </p:spTree>
+    <p:extLst>
+      <p:ext uri="{BB962C8B-B14F-4D97-AF65-F5344CB8AC3E}">
+        <p14:creationId xmlns:p14="http://schemas.microsoft.com/office/powerpoint/2010/main" val="1779693934"/>
+      </p:ext>
+    </p:extLst>
+  </p:cSld>
+  <p:clrMapOvr>
+    <a:masterClrMapping/>
+  </p:clrMapOvr>
+  <mc:AlternateContent xmlns:mc="http://schemas.openxmlformats.org/markup-compatibility/2006" xmlns:p14="http://schemas.microsoft.com/office/powerpoint/2010/main">
+    <mc:Choice Requires="p14">
+      <p:transition p14:dur="10"/>
+    </mc:Choice>
+    <mc:Fallback xmlns="">
+      <p:transition/>
+    </mc:Fallback>
+  </mc:AlternateContent>
+</p:sld>
+</file>
+
+<file path=ppt/slides/slide40.xml><?xml version="1.0" encoding="utf-8"?>
 <p:sld xmlns:a="http://schemas.openxmlformats.org/drawingml/2006/main" xmlns:r="http://schemas.openxmlformats.org/officeDocument/2006/relationships" xmlns:p="http://schemas.openxmlformats.org/presentationml/2006/main">
   <p:cSld>
     <p:spTree>
@@ -26077,7 +28548,7 @@
             <a:fld id="{D57F1E4F-1CFF-5643-939E-217C01CDF565}" type="slidenum">
               <a:rPr lang="en-US" smtClean="0"/>
               <a:pPr/>
-              <a:t>38</a:t>
+              <a:t>40</a:t>
             </a:fld>
             <a:endParaRPr lang="en-US" dirty="0"/>
           </a:p>
@@ -26395,7 +28866,7 @@
 </p:sld>
 </file>
 
-<file path=ppt/slides/slide39.xml><?xml version="1.0" encoding="utf-8"?>
+<file path=ppt/slides/slide41.xml><?xml version="1.0" encoding="utf-8"?>
 <p:sld xmlns:a="http://schemas.openxmlformats.org/drawingml/2006/main" xmlns:r="http://schemas.openxmlformats.org/officeDocument/2006/relationships" xmlns:p="http://schemas.openxmlformats.org/presentationml/2006/main">
   <p:cSld>
     <p:spTree>
@@ -26519,7 +28990,7 @@
             <a:fld id="{9860EDB8-5305-433F-BE41-D7A86D811DB3}" type="slidenum">
               <a:rPr lang="en-US" altLang="ko-KR" noProof="0" smtClean="0"/>
               <a:pPr/>
-              <a:t>39</a:t>
+              <a:t>41</a:t>
             </a:fld>
             <a:endParaRPr lang="ko-KR" altLang="en-US" noProof="0"/>
           </a:p>
@@ -26620,631 +29091,7 @@
 </p:sld>
 </file>
 
-<file path=ppt/slides/slide4.xml><?xml version="1.0" encoding="utf-8"?>
-<p:sld xmlns:a="http://schemas.openxmlformats.org/drawingml/2006/main" xmlns:r="http://schemas.openxmlformats.org/officeDocument/2006/relationships" xmlns:p="http://schemas.openxmlformats.org/presentationml/2006/main">
-  <p:cSld>
-    <p:spTree>
-      <p:nvGrpSpPr>
-        <p:cNvPr id="1" name="">
-          <a:extLst>
-            <a:ext uri="{FF2B5EF4-FFF2-40B4-BE49-F238E27FC236}">
-              <a16:creationId xmlns:a16="http://schemas.microsoft.com/office/drawing/2014/main" id="{FA35D531-9861-DC11-13C8-402FADE0AB3B}"/>
-            </a:ext>
-          </a:extLst>
-        </p:cNvPr>
-        <p:cNvGrpSpPr/>
-        <p:nvPr/>
-      </p:nvGrpSpPr>
-      <p:grpSpPr>
-        <a:xfrm>
-          <a:off x="0" y="0"/>
-          <a:ext cx="0" cy="0"/>
-          <a:chOff x="0" y="0"/>
-          <a:chExt cx="0" cy="0"/>
-        </a:xfrm>
-      </p:grpSpPr>
-      <p:sp>
-        <p:nvSpPr>
-          <p:cNvPr id="8" name="제목 7">
-            <a:extLst>
-              <a:ext uri="{FF2B5EF4-FFF2-40B4-BE49-F238E27FC236}">
-                <a16:creationId xmlns:a16="http://schemas.microsoft.com/office/drawing/2014/main" id="{B56C91DE-18A1-B898-12F7-3C530CFD81BA}"/>
-              </a:ext>
-            </a:extLst>
-          </p:cNvPr>
-          <p:cNvSpPr>
-            <a:spLocks noGrp="1"/>
-          </p:cNvSpPr>
-          <p:nvPr>
-            <p:ph type="title"/>
-          </p:nvPr>
-        </p:nvSpPr>
-        <p:spPr>
-          <a:xfrm>
-            <a:off x="521207" y="448056"/>
-            <a:ext cx="8135613" cy="640080"/>
-          </a:xfrm>
-        </p:spPr>
-        <p:txBody>
-          <a:bodyPr rtlCol="0">
-            <a:noAutofit/>
-          </a:bodyPr>
-          <a:lstStyle/>
-          <a:p>
-            <a:r>
-              <a:rPr lang="en-US" altLang="ko-KR" dirty="0"/>
-              <a:t>Linear</a:t>
-            </a:r>
-            <a:r>
-              <a:rPr lang="ko-KR" altLang="en-US" dirty="0"/>
-              <a:t> </a:t>
-            </a:r>
-            <a:r>
-              <a:rPr lang="en-US" altLang="ko-KR" dirty="0"/>
-              <a:t>Regression as dot product form</a:t>
-            </a:r>
-            <a:endParaRPr lang="ko-KR" altLang="en-US" dirty="0">
-              <a:cs typeface="Segoe UI Light" panose="020B0502040204020203" pitchFamily="34" charset="0"/>
-            </a:endParaRPr>
-          </a:p>
-        </p:txBody>
-      </p:sp>
-      <p:sp>
-        <p:nvSpPr>
-          <p:cNvPr id="12" name="슬라이드 번호 개체 틀 11">
-            <a:extLst>
-              <a:ext uri="{FF2B5EF4-FFF2-40B4-BE49-F238E27FC236}">
-                <a16:creationId xmlns:a16="http://schemas.microsoft.com/office/drawing/2014/main" id="{82336735-1E3E-3496-5FE8-5581A7323E60}"/>
-              </a:ext>
-            </a:extLst>
-          </p:cNvPr>
-          <p:cNvSpPr>
-            <a:spLocks noGrp="1"/>
-          </p:cNvSpPr>
-          <p:nvPr>
-            <p:ph type="sldNum" sz="quarter" idx="4"/>
-          </p:nvPr>
-        </p:nvSpPr>
-        <p:spPr/>
-        <p:txBody>
-          <a:bodyPr/>
-          <a:lstStyle/>
-          <a:p>
-            <a:fld id="{9860EDB8-5305-433F-BE41-D7A86D811DB3}" type="slidenum">
-              <a:rPr lang="en-US" altLang="ko-KR" noProof="0" smtClean="0"/>
-              <a:pPr/>
-              <a:t>4</a:t>
-            </a:fld>
-            <a:endParaRPr lang="ko-KR" altLang="en-US" noProof="0"/>
-          </a:p>
-        </p:txBody>
-      </p:sp>
-      <p:pic>
-        <p:nvPicPr>
-          <p:cNvPr id="4" name="그림 3">
-            <a:extLst>
-              <a:ext uri="{FF2B5EF4-FFF2-40B4-BE49-F238E27FC236}">
-                <a16:creationId xmlns:a16="http://schemas.microsoft.com/office/drawing/2014/main" id="{57775A8D-3762-E25F-3473-AB40BDD18842}"/>
-              </a:ext>
-            </a:extLst>
-          </p:cNvPr>
-          <p:cNvPicPr>
-            <a:picLocks noChangeAspect="1"/>
-          </p:cNvPicPr>
-          <p:nvPr/>
-        </p:nvPicPr>
-        <p:blipFill>
-          <a:blip r:embed="rId3"/>
-          <a:stretch>
-            <a:fillRect/>
-          </a:stretch>
-        </p:blipFill>
-        <p:spPr>
-          <a:xfrm>
-            <a:off x="759570" y="4289517"/>
-            <a:ext cx="1800476" cy="1781424"/>
-          </a:xfrm>
-          <a:prstGeom prst="rect">
-            <a:avLst/>
-          </a:prstGeom>
-        </p:spPr>
-      </p:pic>
-      <p:pic>
-        <p:nvPicPr>
-          <p:cNvPr id="7" name="그림 6">
-            <a:extLst>
-              <a:ext uri="{FF2B5EF4-FFF2-40B4-BE49-F238E27FC236}">
-                <a16:creationId xmlns:a16="http://schemas.microsoft.com/office/drawing/2014/main" id="{34F422DD-B2F0-8C99-6185-6DEB3BEA0A43}"/>
-              </a:ext>
-            </a:extLst>
-          </p:cNvPr>
-          <p:cNvPicPr>
-            <a:picLocks noChangeAspect="1"/>
-          </p:cNvPicPr>
-          <p:nvPr/>
-        </p:nvPicPr>
-        <p:blipFill>
-          <a:blip r:embed="rId4"/>
-          <a:stretch>
-            <a:fillRect/>
-          </a:stretch>
-        </p:blipFill>
-        <p:spPr>
-          <a:xfrm>
-            <a:off x="5830042" y="4289517"/>
-            <a:ext cx="1332758" cy="1710846"/>
-          </a:xfrm>
-          <a:prstGeom prst="rect">
-            <a:avLst/>
-          </a:prstGeom>
-        </p:spPr>
-      </p:pic>
-      <p:pic>
-        <p:nvPicPr>
-          <p:cNvPr id="10" name="그림 9">
-            <a:extLst>
-              <a:ext uri="{FF2B5EF4-FFF2-40B4-BE49-F238E27FC236}">
-                <a16:creationId xmlns:a16="http://schemas.microsoft.com/office/drawing/2014/main" id="{0ADD4715-E2CB-D944-BC5E-351C732644FE}"/>
-              </a:ext>
-            </a:extLst>
-          </p:cNvPr>
-          <p:cNvPicPr>
-            <a:picLocks noChangeAspect="1"/>
-          </p:cNvPicPr>
-          <p:nvPr/>
-        </p:nvPicPr>
-        <p:blipFill>
-          <a:blip r:embed="rId5"/>
-          <a:stretch>
-            <a:fillRect/>
-          </a:stretch>
-        </p:blipFill>
-        <p:spPr>
-          <a:xfrm>
-            <a:off x="3355441" y="4289517"/>
-            <a:ext cx="1233572" cy="1748369"/>
-          </a:xfrm>
-          <a:prstGeom prst="rect">
-            <a:avLst/>
-          </a:prstGeom>
-        </p:spPr>
-      </p:pic>
-      <p:sp>
-        <p:nvSpPr>
-          <p:cNvPr id="13" name="TextBox 12">
-            <a:extLst>
-              <a:ext uri="{FF2B5EF4-FFF2-40B4-BE49-F238E27FC236}">
-                <a16:creationId xmlns:a16="http://schemas.microsoft.com/office/drawing/2014/main" id="{8093461E-2E00-52B3-61E2-BC6F6AA15084}"/>
-              </a:ext>
-            </a:extLst>
-          </p:cNvPr>
-          <p:cNvSpPr txBox="1"/>
-          <p:nvPr/>
-        </p:nvSpPr>
-        <p:spPr>
-          <a:xfrm>
-            <a:off x="616457" y="1451425"/>
-            <a:ext cx="10746868" cy="2630015"/>
-          </a:xfrm>
-          <a:prstGeom prst="rect">
-            <a:avLst/>
-          </a:prstGeom>
-          <a:solidFill>
-            <a:schemeClr val="accent1">
-              <a:lumMod val="20000"/>
-              <a:lumOff val="80000"/>
-            </a:schemeClr>
-          </a:solidFill>
-        </p:spPr>
-        <p:txBody>
-          <a:bodyPr wrap="square">
-            <a:spAutoFit/>
-          </a:bodyPr>
-          <a:lstStyle/>
-          <a:p>
-            <a:pPr>
-              <a:lnSpc>
-                <a:spcPct val="150000"/>
-              </a:lnSpc>
-            </a:pPr>
-            <a:r>
-              <a:rPr lang="en-US" altLang="ko-KR" sz="1600" dirty="0">
-                <a:latin typeface="맑은 고딕 Semilight" panose="020B0502040204020203" pitchFamily="50" charset="-127"/>
-                <a:ea typeface="맑은 고딕 Semilight" panose="020B0502040204020203" pitchFamily="50" charset="-127"/>
-                <a:cs typeface="맑은 고딕 Semilight" panose="020B0502040204020203" pitchFamily="50" charset="-127"/>
-              </a:rPr>
-              <a:t>import </a:t>
-            </a:r>
-            <a:r>
-              <a:rPr lang="en-US" altLang="ko-KR" sz="1600" dirty="0" err="1">
-                <a:latin typeface="맑은 고딕 Semilight" panose="020B0502040204020203" pitchFamily="50" charset="-127"/>
-                <a:ea typeface="맑은 고딕 Semilight" panose="020B0502040204020203" pitchFamily="50" charset="-127"/>
-                <a:cs typeface="맑은 고딕 Semilight" panose="020B0502040204020203" pitchFamily="50" charset="-127"/>
-              </a:rPr>
-              <a:t>numpy</a:t>
-            </a:r>
-            <a:r>
-              <a:rPr lang="en-US" altLang="ko-KR" sz="1600" dirty="0">
-                <a:latin typeface="맑은 고딕 Semilight" panose="020B0502040204020203" pitchFamily="50" charset="-127"/>
-                <a:ea typeface="맑은 고딕 Semilight" panose="020B0502040204020203" pitchFamily="50" charset="-127"/>
-                <a:cs typeface="맑은 고딕 Semilight" panose="020B0502040204020203" pitchFamily="50" charset="-127"/>
-              </a:rPr>
-              <a:t> as np </a:t>
-            </a:r>
-          </a:p>
-          <a:p>
-            <a:pPr>
-              <a:lnSpc>
-                <a:spcPct val="150000"/>
-              </a:lnSpc>
-            </a:pPr>
-            <a:r>
-              <a:rPr lang="en-US" altLang="ko-KR" sz="1600" dirty="0">
-                <a:latin typeface="맑은 고딕 Semilight" panose="020B0502040204020203" pitchFamily="50" charset="-127"/>
-                <a:ea typeface="맑은 고딕 Semilight" panose="020B0502040204020203" pitchFamily="50" charset="-127"/>
-                <a:cs typeface="맑은 고딕 Semilight" panose="020B0502040204020203" pitchFamily="50" charset="-127"/>
-              </a:rPr>
-              <a:t># 1. </a:t>
-            </a:r>
-            <a:r>
-              <a:rPr lang="ko-KR" altLang="en-US" sz="1600" dirty="0">
-                <a:latin typeface="맑은 고딕 Semilight" panose="020B0502040204020203" pitchFamily="50" charset="-127"/>
-                <a:ea typeface="맑은 고딕 Semilight" panose="020B0502040204020203" pitchFamily="50" charset="-127"/>
-                <a:cs typeface="맑은 고딕 Semilight" panose="020B0502040204020203" pitchFamily="50" charset="-127"/>
-              </a:rPr>
-              <a:t>랜덤 데이터 생성 </a:t>
-            </a:r>
-            <a:r>
-              <a:rPr lang="en-US" altLang="ko-KR" sz="1600" dirty="0">
-                <a:latin typeface="맑은 고딕 Semilight" panose="020B0502040204020203" pitchFamily="50" charset="-127"/>
-                <a:ea typeface="맑은 고딕 Semilight" panose="020B0502040204020203" pitchFamily="50" charset="-127"/>
-                <a:cs typeface="맑은 고딕 Semilight" panose="020B0502040204020203" pitchFamily="50" charset="-127"/>
-              </a:rPr>
-              <a:t>(100</a:t>
-            </a:r>
-            <a:r>
-              <a:rPr lang="ko-KR" altLang="en-US" sz="1600" dirty="0">
-                <a:latin typeface="맑은 고딕 Semilight" panose="020B0502040204020203" pitchFamily="50" charset="-127"/>
-                <a:ea typeface="맑은 고딕 Semilight" panose="020B0502040204020203" pitchFamily="50" charset="-127"/>
-                <a:cs typeface="맑은 고딕 Semilight" panose="020B0502040204020203" pitchFamily="50" charset="-127"/>
-              </a:rPr>
-              <a:t>개</a:t>
-            </a:r>
-            <a:r>
-              <a:rPr lang="en-US" altLang="ko-KR" sz="1600" dirty="0">
-                <a:latin typeface="맑은 고딕 Semilight" panose="020B0502040204020203" pitchFamily="50" charset="-127"/>
-                <a:ea typeface="맑은 고딕 Semilight" panose="020B0502040204020203" pitchFamily="50" charset="-127"/>
-                <a:cs typeface="맑은 고딕 Semilight" panose="020B0502040204020203" pitchFamily="50" charset="-127"/>
-              </a:rPr>
-              <a:t>) </a:t>
-            </a:r>
-          </a:p>
-          <a:p>
-            <a:pPr>
-              <a:lnSpc>
-                <a:spcPct val="150000"/>
-              </a:lnSpc>
-            </a:pPr>
-            <a:r>
-              <a:rPr lang="en-US" altLang="ko-KR" sz="1600" dirty="0" err="1">
-                <a:latin typeface="맑은 고딕 Semilight" panose="020B0502040204020203" pitchFamily="50" charset="-127"/>
-                <a:ea typeface="맑은 고딕 Semilight" panose="020B0502040204020203" pitchFamily="50" charset="-127"/>
-                <a:cs typeface="맑은 고딕 Semilight" panose="020B0502040204020203" pitchFamily="50" charset="-127"/>
-              </a:rPr>
-              <a:t>np.random.seed</a:t>
-            </a:r>
-            <a:r>
-              <a:rPr lang="en-US" altLang="ko-KR" sz="1600" dirty="0">
-                <a:latin typeface="맑은 고딕 Semilight" panose="020B0502040204020203" pitchFamily="50" charset="-127"/>
-                <a:ea typeface="맑은 고딕 Semilight" panose="020B0502040204020203" pitchFamily="50" charset="-127"/>
-                <a:cs typeface="맑은 고딕 Semilight" panose="020B0502040204020203" pitchFamily="50" charset="-127"/>
-              </a:rPr>
-              <a:t>(42) # </a:t>
-            </a:r>
-            <a:r>
-              <a:rPr lang="ko-KR" altLang="en-US" sz="1600" dirty="0">
-                <a:latin typeface="맑은 고딕 Semilight" panose="020B0502040204020203" pitchFamily="50" charset="-127"/>
-                <a:ea typeface="맑은 고딕 Semilight" panose="020B0502040204020203" pitchFamily="50" charset="-127"/>
-                <a:cs typeface="맑은 고딕 Semilight" panose="020B0502040204020203" pitchFamily="50" charset="-127"/>
-              </a:rPr>
-              <a:t>결과 재현을 위해 </a:t>
-            </a:r>
-            <a:r>
-              <a:rPr lang="ko-KR" altLang="en-US" sz="1600" dirty="0" err="1">
-                <a:latin typeface="맑은 고딕 Semilight" panose="020B0502040204020203" pitchFamily="50" charset="-127"/>
-                <a:ea typeface="맑은 고딕 Semilight" panose="020B0502040204020203" pitchFamily="50" charset="-127"/>
-                <a:cs typeface="맑은 고딕 Semilight" panose="020B0502040204020203" pitchFamily="50" charset="-127"/>
-              </a:rPr>
-              <a:t>시드</a:t>
-            </a:r>
-            <a:r>
-              <a:rPr lang="ko-KR" altLang="en-US" sz="1600" dirty="0">
-                <a:latin typeface="맑은 고딕 Semilight" panose="020B0502040204020203" pitchFamily="50" charset="-127"/>
-                <a:ea typeface="맑은 고딕 Semilight" panose="020B0502040204020203" pitchFamily="50" charset="-127"/>
-                <a:cs typeface="맑은 고딕 Semilight" panose="020B0502040204020203" pitchFamily="50" charset="-127"/>
-              </a:rPr>
-              <a:t> 고정 </a:t>
-            </a:r>
-            <a:endParaRPr lang="en-US" altLang="ko-KR" sz="1600" dirty="0">
-              <a:latin typeface="맑은 고딕 Semilight" panose="020B0502040204020203" pitchFamily="50" charset="-127"/>
-              <a:ea typeface="맑은 고딕 Semilight" panose="020B0502040204020203" pitchFamily="50" charset="-127"/>
-              <a:cs typeface="맑은 고딕 Semilight" panose="020B0502040204020203" pitchFamily="50" charset="-127"/>
-            </a:endParaRPr>
-          </a:p>
-          <a:p>
-            <a:pPr>
-              <a:lnSpc>
-                <a:spcPct val="150000"/>
-              </a:lnSpc>
-            </a:pPr>
-            <a:r>
-              <a:rPr lang="en-US" altLang="ko-KR" sz="1600" dirty="0">
-                <a:latin typeface="맑은 고딕 Semilight" panose="020B0502040204020203" pitchFamily="50" charset="-127"/>
-                <a:ea typeface="맑은 고딕 Semilight" panose="020B0502040204020203" pitchFamily="50" charset="-127"/>
-                <a:cs typeface="맑은 고딕 Semilight" panose="020B0502040204020203" pitchFamily="50" charset="-127"/>
-              </a:rPr>
-              <a:t>x = </a:t>
-            </a:r>
-            <a:r>
-              <a:rPr lang="en-US" altLang="ko-KR" sz="1600" dirty="0" err="1">
-                <a:latin typeface="맑은 고딕 Semilight" panose="020B0502040204020203" pitchFamily="50" charset="-127"/>
-                <a:ea typeface="맑은 고딕 Semilight" panose="020B0502040204020203" pitchFamily="50" charset="-127"/>
-                <a:cs typeface="맑은 고딕 Semilight" panose="020B0502040204020203" pitchFamily="50" charset="-127"/>
-              </a:rPr>
-              <a:t>np.random.uniform</a:t>
-            </a:r>
-            <a:r>
-              <a:rPr lang="en-US" altLang="ko-KR" sz="1600" dirty="0">
-                <a:latin typeface="맑은 고딕 Semilight" panose="020B0502040204020203" pitchFamily="50" charset="-127"/>
-                <a:ea typeface="맑은 고딕 Semilight" panose="020B0502040204020203" pitchFamily="50" charset="-127"/>
-                <a:cs typeface="맑은 고딕 Semilight" panose="020B0502040204020203" pitchFamily="50" charset="-127"/>
-              </a:rPr>
-              <a:t>(0, 10, 100) # 0~10 </a:t>
-            </a:r>
-            <a:r>
-              <a:rPr lang="ko-KR" altLang="en-US" sz="1600" dirty="0">
-                <a:latin typeface="맑은 고딕 Semilight" panose="020B0502040204020203" pitchFamily="50" charset="-127"/>
-                <a:ea typeface="맑은 고딕 Semilight" panose="020B0502040204020203" pitchFamily="50" charset="-127"/>
-                <a:cs typeface="맑은 고딕 Semilight" panose="020B0502040204020203" pitchFamily="50" charset="-127"/>
-              </a:rPr>
-              <a:t>사이의 난수 </a:t>
-            </a:r>
-            <a:r>
-              <a:rPr lang="en-US" altLang="ko-KR" sz="1600" dirty="0">
-                <a:latin typeface="맑은 고딕 Semilight" panose="020B0502040204020203" pitchFamily="50" charset="-127"/>
-                <a:ea typeface="맑은 고딕 Semilight" panose="020B0502040204020203" pitchFamily="50" charset="-127"/>
-                <a:cs typeface="맑은 고딕 Semilight" panose="020B0502040204020203" pitchFamily="50" charset="-127"/>
-              </a:rPr>
-              <a:t>100</a:t>
-            </a:r>
-            <a:r>
-              <a:rPr lang="ko-KR" altLang="en-US" sz="1600" dirty="0">
-                <a:latin typeface="맑은 고딕 Semilight" panose="020B0502040204020203" pitchFamily="50" charset="-127"/>
-                <a:ea typeface="맑은 고딕 Semilight" panose="020B0502040204020203" pitchFamily="50" charset="-127"/>
-                <a:cs typeface="맑은 고딕 Semilight" panose="020B0502040204020203" pitchFamily="50" charset="-127"/>
-              </a:rPr>
-              <a:t>개 </a:t>
-            </a:r>
-            <a:endParaRPr lang="en-US" altLang="ko-KR" sz="1600" dirty="0">
-              <a:latin typeface="맑은 고딕 Semilight" panose="020B0502040204020203" pitchFamily="50" charset="-127"/>
-              <a:ea typeface="맑은 고딕 Semilight" panose="020B0502040204020203" pitchFamily="50" charset="-127"/>
-              <a:cs typeface="맑은 고딕 Semilight" panose="020B0502040204020203" pitchFamily="50" charset="-127"/>
-            </a:endParaRPr>
-          </a:p>
-          <a:p>
-            <a:pPr>
-              <a:lnSpc>
-                <a:spcPct val="150000"/>
-              </a:lnSpc>
-            </a:pPr>
-            <a:r>
-              <a:rPr lang="en-US" altLang="ko-KR" sz="1600" dirty="0">
-                <a:latin typeface="맑은 고딕 Semilight" panose="020B0502040204020203" pitchFamily="50" charset="-127"/>
-                <a:ea typeface="맑은 고딕 Semilight" panose="020B0502040204020203" pitchFamily="50" charset="-127"/>
-                <a:cs typeface="맑은 고딕 Semilight" panose="020B0502040204020203" pitchFamily="50" charset="-127"/>
-              </a:rPr>
-              <a:t># </a:t>
-            </a:r>
-            <a:r>
-              <a:rPr lang="ko-KR" altLang="en-US" sz="1600" dirty="0">
-                <a:latin typeface="맑은 고딕 Semilight" panose="020B0502040204020203" pitchFamily="50" charset="-127"/>
-                <a:ea typeface="맑은 고딕 Semilight" panose="020B0502040204020203" pitchFamily="50" charset="-127"/>
-                <a:cs typeface="맑은 고딕 Semilight" panose="020B0502040204020203" pitchFamily="50" charset="-127"/>
-              </a:rPr>
-              <a:t>실제 관계식</a:t>
-            </a:r>
-            <a:r>
-              <a:rPr lang="en-US" altLang="ko-KR" sz="1600" dirty="0">
-                <a:latin typeface="맑은 고딕 Semilight" panose="020B0502040204020203" pitchFamily="50" charset="-127"/>
-                <a:ea typeface="맑은 고딕 Semilight" panose="020B0502040204020203" pitchFamily="50" charset="-127"/>
-                <a:cs typeface="맑은 고딕 Semilight" panose="020B0502040204020203" pitchFamily="50" charset="-127"/>
-              </a:rPr>
-              <a:t>: y = 3x + 5 (</a:t>
-            </a:r>
-            <a:r>
-              <a:rPr lang="ko-KR" altLang="en-US" sz="1600" dirty="0">
-                <a:latin typeface="맑은 고딕 Semilight" panose="020B0502040204020203" pitchFamily="50" charset="-127"/>
-                <a:ea typeface="맑은 고딕 Semilight" panose="020B0502040204020203" pitchFamily="50" charset="-127"/>
-                <a:cs typeface="맑은 고딕 Semilight" panose="020B0502040204020203" pitchFamily="50" charset="-127"/>
-              </a:rPr>
-              <a:t>여기에 노이즈 추가</a:t>
-            </a:r>
-            <a:r>
-              <a:rPr lang="en-US" altLang="ko-KR" sz="1600" dirty="0">
-                <a:latin typeface="맑은 고딕 Semilight" panose="020B0502040204020203" pitchFamily="50" charset="-127"/>
-                <a:ea typeface="맑은 고딕 Semilight" panose="020B0502040204020203" pitchFamily="50" charset="-127"/>
-                <a:cs typeface="맑은 고딕 Semilight" panose="020B0502040204020203" pitchFamily="50" charset="-127"/>
-              </a:rPr>
-              <a:t>) </a:t>
-            </a:r>
-          </a:p>
-          <a:p>
-            <a:pPr>
-              <a:lnSpc>
-                <a:spcPct val="150000"/>
-              </a:lnSpc>
-            </a:pPr>
-            <a:r>
-              <a:rPr lang="en-US" altLang="ko-KR" sz="1600" dirty="0">
-                <a:latin typeface="맑은 고딕 Semilight" panose="020B0502040204020203" pitchFamily="50" charset="-127"/>
-                <a:ea typeface="맑은 고딕 Semilight" panose="020B0502040204020203" pitchFamily="50" charset="-127"/>
-                <a:cs typeface="맑은 고딕 Semilight" panose="020B0502040204020203" pitchFamily="50" charset="-127"/>
-              </a:rPr>
-              <a:t>noise = </a:t>
-            </a:r>
-            <a:r>
-              <a:rPr lang="en-US" altLang="ko-KR" sz="1600" dirty="0" err="1">
-                <a:latin typeface="맑은 고딕 Semilight" panose="020B0502040204020203" pitchFamily="50" charset="-127"/>
-                <a:ea typeface="맑은 고딕 Semilight" panose="020B0502040204020203" pitchFamily="50" charset="-127"/>
-                <a:cs typeface="맑은 고딕 Semilight" panose="020B0502040204020203" pitchFamily="50" charset="-127"/>
-              </a:rPr>
-              <a:t>np.random.normal</a:t>
-            </a:r>
-            <a:r>
-              <a:rPr lang="en-US" altLang="ko-KR" sz="1600" dirty="0">
-                <a:latin typeface="맑은 고딕 Semilight" panose="020B0502040204020203" pitchFamily="50" charset="-127"/>
-                <a:ea typeface="맑은 고딕 Semilight" panose="020B0502040204020203" pitchFamily="50" charset="-127"/>
-                <a:cs typeface="맑은 고딕 Semilight" panose="020B0502040204020203" pitchFamily="50" charset="-127"/>
-              </a:rPr>
-              <a:t>(0, 2, 100) # </a:t>
-            </a:r>
-            <a:r>
-              <a:rPr lang="ko-KR" altLang="en-US" sz="1600" dirty="0">
-                <a:latin typeface="맑은 고딕 Semilight" panose="020B0502040204020203" pitchFamily="50" charset="-127"/>
-                <a:ea typeface="맑은 고딕 Semilight" panose="020B0502040204020203" pitchFamily="50" charset="-127"/>
-                <a:cs typeface="맑은 고딕 Semilight" panose="020B0502040204020203" pitchFamily="50" charset="-127"/>
-              </a:rPr>
-              <a:t>평균 </a:t>
-            </a:r>
-            <a:r>
-              <a:rPr lang="en-US" altLang="ko-KR" sz="1600" dirty="0">
-                <a:latin typeface="맑은 고딕 Semilight" panose="020B0502040204020203" pitchFamily="50" charset="-127"/>
-                <a:ea typeface="맑은 고딕 Semilight" panose="020B0502040204020203" pitchFamily="50" charset="-127"/>
-                <a:cs typeface="맑은 고딕 Semilight" panose="020B0502040204020203" pitchFamily="50" charset="-127"/>
-              </a:rPr>
-              <a:t>0, </a:t>
-            </a:r>
-            <a:r>
-              <a:rPr lang="ko-KR" altLang="en-US" sz="1600" dirty="0">
-                <a:latin typeface="맑은 고딕 Semilight" panose="020B0502040204020203" pitchFamily="50" charset="-127"/>
-                <a:ea typeface="맑은 고딕 Semilight" panose="020B0502040204020203" pitchFamily="50" charset="-127"/>
-                <a:cs typeface="맑은 고딕 Semilight" panose="020B0502040204020203" pitchFamily="50" charset="-127"/>
-              </a:rPr>
-              <a:t>표준편차 </a:t>
-            </a:r>
-            <a:r>
-              <a:rPr lang="en-US" altLang="ko-KR" sz="1600" dirty="0">
-                <a:latin typeface="맑은 고딕 Semilight" panose="020B0502040204020203" pitchFamily="50" charset="-127"/>
-                <a:ea typeface="맑은 고딕 Semilight" panose="020B0502040204020203" pitchFamily="50" charset="-127"/>
-                <a:cs typeface="맑은 고딕 Semilight" panose="020B0502040204020203" pitchFamily="50" charset="-127"/>
-              </a:rPr>
-              <a:t>2</a:t>
-            </a:r>
-            <a:r>
-              <a:rPr lang="ko-KR" altLang="en-US" sz="1600" dirty="0">
-                <a:latin typeface="맑은 고딕 Semilight" panose="020B0502040204020203" pitchFamily="50" charset="-127"/>
-                <a:ea typeface="맑은 고딕 Semilight" panose="020B0502040204020203" pitchFamily="50" charset="-127"/>
-                <a:cs typeface="맑은 고딕 Semilight" panose="020B0502040204020203" pitchFamily="50" charset="-127"/>
-              </a:rPr>
-              <a:t>인 정규분포 노이즈 </a:t>
-            </a:r>
-            <a:endParaRPr lang="en-US" altLang="ko-KR" sz="1600" dirty="0">
-              <a:latin typeface="맑은 고딕 Semilight" panose="020B0502040204020203" pitchFamily="50" charset="-127"/>
-              <a:ea typeface="맑은 고딕 Semilight" panose="020B0502040204020203" pitchFamily="50" charset="-127"/>
-              <a:cs typeface="맑은 고딕 Semilight" panose="020B0502040204020203" pitchFamily="50" charset="-127"/>
-            </a:endParaRPr>
-          </a:p>
-          <a:p>
-            <a:pPr>
-              <a:lnSpc>
-                <a:spcPct val="150000"/>
-              </a:lnSpc>
-            </a:pPr>
-            <a:r>
-              <a:rPr lang="en-US" altLang="ko-KR" sz="1600" dirty="0">
-                <a:latin typeface="맑은 고딕 Semilight" panose="020B0502040204020203" pitchFamily="50" charset="-127"/>
-                <a:ea typeface="맑은 고딕 Semilight" panose="020B0502040204020203" pitchFamily="50" charset="-127"/>
-                <a:cs typeface="맑은 고딕 Semilight" panose="020B0502040204020203" pitchFamily="50" charset="-127"/>
-              </a:rPr>
-              <a:t>y = 3 * x + 5 + noise</a:t>
-            </a:r>
-            <a:endParaRPr lang="ko-KR" altLang="en-US" sz="1600" dirty="0">
-              <a:latin typeface="맑은 고딕 Semilight" panose="020B0502040204020203" pitchFamily="50" charset="-127"/>
-              <a:ea typeface="맑은 고딕 Semilight" panose="020B0502040204020203" pitchFamily="50" charset="-127"/>
-              <a:cs typeface="맑은 고딕 Semilight" panose="020B0502040204020203" pitchFamily="50" charset="-127"/>
-            </a:endParaRPr>
-          </a:p>
-        </p:txBody>
-      </p:sp>
-      <p:pic>
-        <p:nvPicPr>
-          <p:cNvPr id="14" name="Picture 4" descr="도자기 작업장. 성인과 어린이의 손이 도자기를 만들고 젖은 점토 근접 촬영으로 작업합니다. 더러운 손으로 바퀴에 점토로 그릇을 만드는 과정. 여름 공원의 수제 축제">
-            <a:extLst>
-              <a:ext uri="{FF2B5EF4-FFF2-40B4-BE49-F238E27FC236}">
-                <a16:creationId xmlns:a16="http://schemas.microsoft.com/office/drawing/2014/main" id="{154F4078-D4B4-44FA-0A92-D15D7F7E8CBB}"/>
-              </a:ext>
-            </a:extLst>
-          </p:cNvPr>
-          <p:cNvPicPr>
-            <a:picLocks noChangeAspect="1" noChangeArrowheads="1"/>
-          </p:cNvPicPr>
-          <p:nvPr/>
-        </p:nvPicPr>
-        <p:blipFill>
-          <a:blip r:embed="rId6">
-            <a:extLst>
-              <a:ext uri="{28A0092B-C50C-407E-A947-70E740481C1C}">
-                <a14:useLocalDpi xmlns:a14="http://schemas.microsoft.com/office/drawing/2010/main" val="0"/>
-              </a:ext>
-            </a:extLst>
-          </a:blip>
-          <a:srcRect/>
-          <a:stretch>
-            <a:fillRect/>
-          </a:stretch>
-        </p:blipFill>
-        <p:spPr bwMode="auto">
-          <a:xfrm>
-            <a:off x="10502899" y="55419"/>
-            <a:ext cx="1633682" cy="1089121"/>
-          </a:xfrm>
-          <a:prstGeom prst="rect">
-            <a:avLst/>
-          </a:prstGeom>
-          <a:noFill/>
-          <a:extLst>
-            <a:ext uri="{909E8E84-426E-40DD-AFC4-6F175D3DCCD1}">
-              <a14:hiddenFill xmlns:a14="http://schemas.microsoft.com/office/drawing/2010/main">
-                <a:solidFill>
-                  <a:srgbClr val="FFFFFF"/>
-                </a:solidFill>
-              </a14:hiddenFill>
-            </a:ext>
-          </a:extLst>
-        </p:spPr>
-      </p:pic>
-    </p:spTree>
-    <p:extLst>
-      <p:ext uri="{BB962C8B-B14F-4D97-AF65-F5344CB8AC3E}">
-        <p14:creationId xmlns:p14="http://schemas.microsoft.com/office/powerpoint/2010/main" val="1779693934"/>
-      </p:ext>
-    </p:extLst>
-  </p:cSld>
-  <p:clrMapOvr>
-    <a:masterClrMapping/>
-  </p:clrMapOvr>
-  <mc:AlternateContent xmlns:mc="http://schemas.openxmlformats.org/markup-compatibility/2006" xmlns:p14="http://schemas.microsoft.com/office/powerpoint/2010/main">
-    <mc:Choice Requires="p14">
-      <p:transition p14:dur="10"/>
-    </mc:Choice>
-    <mc:Fallback xmlns="">
-      <p:transition/>
-    </mc:Fallback>
-  </mc:AlternateContent>
-</p:sld>
-</file>
-
-<file path=ppt/slides/slide40.xml><?xml version="1.0" encoding="utf-8"?>
+<file path=ppt/slides/slide42.xml><?xml version="1.0" encoding="utf-8"?>
 <p:sld xmlns:a="http://schemas.openxmlformats.org/drawingml/2006/main" xmlns:r="http://schemas.openxmlformats.org/officeDocument/2006/relationships" xmlns:p="http://schemas.openxmlformats.org/presentationml/2006/main">
   <p:cSld>
     <p:spTree>
@@ -27374,7 +29221,7 @@
             <a:fld id="{9860EDB8-5305-433F-BE41-D7A86D811DB3}" type="slidenum">
               <a:rPr lang="en-US" altLang="ko-KR" noProof="0" smtClean="0"/>
               <a:pPr/>
-              <a:t>40</a:t>
+              <a:t>42</a:t>
             </a:fld>
             <a:endParaRPr lang="ko-KR" altLang="en-US" noProof="0"/>
           </a:p>
@@ -27574,7 +29421,7 @@
         </p:blipFill>
         <p:spPr bwMode="auto">
           <a:xfrm>
-            <a:off x="657225" y="1698717"/>
+            <a:off x="657225" y="2251167"/>
             <a:ext cx="5543550" cy="4250055"/>
           </a:xfrm>
           <a:prstGeom prst="rect">
@@ -27717,10 +29564,10 @@
       </p:pic>
       <p:grpSp>
         <p:nvGrpSpPr>
-          <p:cNvPr id="22" name="그룹 21">
+          <p:cNvPr id="5" name="그룹 4">
             <a:extLst>
               <a:ext uri="{FF2B5EF4-FFF2-40B4-BE49-F238E27FC236}">
-                <a16:creationId xmlns:a16="http://schemas.microsoft.com/office/drawing/2014/main" id="{DBA76C6E-1F8F-2FCC-1329-F9B961492D3F}"/>
+                <a16:creationId xmlns:a16="http://schemas.microsoft.com/office/drawing/2014/main" id="{9F55B951-104E-336D-C30D-45AF9E71E7B5}"/>
               </a:ext>
             </a:extLst>
           </p:cNvPr>
@@ -27729,18 +29576,129 @@
         </p:nvGrpSpPr>
         <p:grpSpPr>
           <a:xfrm>
-            <a:off x="6488811" y="1766690"/>
+            <a:off x="6488811" y="2319140"/>
             <a:ext cx="5225140" cy="1387726"/>
             <a:chOff x="6488811" y="1766690"/>
             <a:chExt cx="5225140" cy="1387726"/>
           </a:xfrm>
         </p:grpSpPr>
+        <p:grpSp>
+          <p:nvGrpSpPr>
+            <p:cNvPr id="6" name="그룹 5">
+              <a:extLst>
+                <a:ext uri="{FF2B5EF4-FFF2-40B4-BE49-F238E27FC236}">
+                  <a16:creationId xmlns:a16="http://schemas.microsoft.com/office/drawing/2014/main" id="{A38011E3-B515-2CCE-363E-5147FC5085BD}"/>
+                </a:ext>
+              </a:extLst>
+            </p:cNvPr>
+            <p:cNvGrpSpPr/>
+            <p:nvPr/>
+          </p:nvGrpSpPr>
+          <p:grpSpPr>
+            <a:xfrm>
+              <a:off x="6488811" y="1766690"/>
+              <a:ext cx="5225140" cy="1387726"/>
+              <a:chOff x="6488811" y="1766690"/>
+              <a:chExt cx="5225140" cy="1387726"/>
+            </a:xfrm>
+          </p:grpSpPr>
+          <p:pic>
+            <p:nvPicPr>
+              <p:cNvPr id="13" name="그림 12">
+                <a:extLst>
+                  <a:ext uri="{FF2B5EF4-FFF2-40B4-BE49-F238E27FC236}">
+                    <a16:creationId xmlns:a16="http://schemas.microsoft.com/office/drawing/2014/main" id="{517EC781-6124-1D77-0C72-998610A1A32F}"/>
+                  </a:ext>
+                </a:extLst>
+              </p:cNvPr>
+              <p:cNvPicPr>
+                <a:picLocks noChangeAspect="1"/>
+              </p:cNvPicPr>
+              <p:nvPr/>
+            </p:nvPicPr>
+            <p:blipFill>
+              <a:blip r:embed="rId5"/>
+              <a:stretch>
+                <a:fillRect/>
+              </a:stretch>
+            </p:blipFill>
+            <p:spPr>
+              <a:xfrm>
+                <a:off x="8461171" y="1766690"/>
+                <a:ext cx="1402567" cy="1387726"/>
+              </a:xfrm>
+              <a:prstGeom prst="rect">
+                <a:avLst/>
+              </a:prstGeom>
+            </p:spPr>
+          </p:pic>
+          <p:pic>
+            <p:nvPicPr>
+              <p:cNvPr id="15" name="그림 14">
+                <a:extLst>
+                  <a:ext uri="{FF2B5EF4-FFF2-40B4-BE49-F238E27FC236}">
+                    <a16:creationId xmlns:a16="http://schemas.microsoft.com/office/drawing/2014/main" id="{88F0FCAC-8148-3C00-7310-5338EC3A6142}"/>
+                  </a:ext>
+                </a:extLst>
+              </p:cNvPr>
+              <p:cNvPicPr>
+                <a:picLocks noChangeAspect="1"/>
+              </p:cNvPicPr>
+              <p:nvPr/>
+            </p:nvPicPr>
+            <p:blipFill>
+              <a:blip r:embed="rId6"/>
+              <a:stretch>
+                <a:fillRect/>
+              </a:stretch>
+            </p:blipFill>
+            <p:spPr>
+              <a:xfrm>
+                <a:off x="6488811" y="1766690"/>
+                <a:ext cx="1038214" cy="1332743"/>
+              </a:xfrm>
+              <a:prstGeom prst="rect">
+                <a:avLst/>
+              </a:prstGeom>
+            </p:spPr>
+          </p:pic>
+          <p:pic>
+            <p:nvPicPr>
+              <p:cNvPr id="16" name="그림 15">
+                <a:extLst>
+                  <a:ext uri="{FF2B5EF4-FFF2-40B4-BE49-F238E27FC236}">
+                    <a16:creationId xmlns:a16="http://schemas.microsoft.com/office/drawing/2014/main" id="{6D9582FD-87A6-B33A-8EC4-06463F7C51C7}"/>
+                  </a:ext>
+                </a:extLst>
+              </p:cNvPr>
+              <p:cNvPicPr>
+                <a:picLocks noChangeAspect="1"/>
+              </p:cNvPicPr>
+              <p:nvPr/>
+            </p:nvPicPr>
+            <p:blipFill>
+              <a:blip r:embed="rId7"/>
+              <a:stretch>
+                <a:fillRect/>
+              </a:stretch>
+            </p:blipFill>
+            <p:spPr>
+              <a:xfrm>
+                <a:off x="10753002" y="1766691"/>
+                <a:ext cx="960949" cy="1361974"/>
+              </a:xfrm>
+              <a:prstGeom prst="rect">
+                <a:avLst/>
+              </a:prstGeom>
+            </p:spPr>
+          </p:pic>
+        </p:grpSp>
         <p:pic>
           <p:nvPicPr>
-            <p:cNvPr id="4" name="그림 3">
+            <p:cNvPr id="9" name="그래픽 8" descr="추가">
               <a:extLst>
                 <a:ext uri="{FF2B5EF4-FFF2-40B4-BE49-F238E27FC236}">
-                  <a16:creationId xmlns:a16="http://schemas.microsoft.com/office/drawing/2014/main" id="{60FA9058-137F-B412-135A-F9029829926B}"/>
+                  <a16:creationId xmlns:a16="http://schemas.microsoft.com/office/drawing/2014/main" id="{FE4E8BD3-23DB-F844-55B4-602CBC4FC677}"/>
                 </a:ext>
               </a:extLst>
             </p:cNvPr>
@@ -27750,75 +29708,21 @@
             <p:nvPr/>
           </p:nvPicPr>
           <p:blipFill>
-            <a:blip r:embed="rId5"/>
+            <a:blip r:embed="rId8">
+              <a:extLst>
+                <a:ext uri="{96DAC541-7B7A-43D3-8B79-37D633B846F1}">
+                  <asvg:svgBlip xmlns:asvg="http://schemas.microsoft.com/office/drawing/2016/SVG/main" r:embed="rId9"/>
+                </a:ext>
+              </a:extLst>
+            </a:blip>
             <a:stretch>
               <a:fillRect/>
             </a:stretch>
           </p:blipFill>
           <p:spPr>
             <a:xfrm>
-              <a:off x="8461171" y="1766690"/>
-              <a:ext cx="1402567" cy="1387726"/>
-            </a:xfrm>
-            <a:prstGeom prst="rect">
-              <a:avLst/>
-            </a:prstGeom>
-          </p:spPr>
-        </p:pic>
-        <p:pic>
-          <p:nvPicPr>
-            <p:cNvPr id="7" name="그림 6">
-              <a:extLst>
-                <a:ext uri="{FF2B5EF4-FFF2-40B4-BE49-F238E27FC236}">
-                  <a16:creationId xmlns:a16="http://schemas.microsoft.com/office/drawing/2014/main" id="{E5060343-C130-643A-4F4E-26898B126666}"/>
-                </a:ext>
-              </a:extLst>
-            </p:cNvPr>
-            <p:cNvPicPr>
-              <a:picLocks noChangeAspect="1"/>
-            </p:cNvPicPr>
-            <p:nvPr/>
-          </p:nvPicPr>
-          <p:blipFill>
-            <a:blip r:embed="rId6"/>
-            <a:stretch>
-              <a:fillRect/>
-            </a:stretch>
-          </p:blipFill>
-          <p:spPr>
-            <a:xfrm>
-              <a:off x="6488811" y="1766690"/>
-              <a:ext cx="1038214" cy="1332743"/>
-            </a:xfrm>
-            <a:prstGeom prst="rect">
-              <a:avLst/>
-            </a:prstGeom>
-          </p:spPr>
-        </p:pic>
-        <p:pic>
-          <p:nvPicPr>
-            <p:cNvPr id="10" name="그림 9">
-              <a:extLst>
-                <a:ext uri="{FF2B5EF4-FFF2-40B4-BE49-F238E27FC236}">
-                  <a16:creationId xmlns:a16="http://schemas.microsoft.com/office/drawing/2014/main" id="{F458F2B3-F05E-E6C9-7549-65BCD4D1A7FC}"/>
-                </a:ext>
-              </a:extLst>
-            </p:cNvPr>
-            <p:cNvPicPr>
-              <a:picLocks noChangeAspect="1"/>
-            </p:cNvPicPr>
-            <p:nvPr/>
-          </p:nvPicPr>
-          <p:blipFill>
-            <a:blip r:embed="rId7"/>
-            <a:stretch>
-              <a:fillRect/>
-            </a:stretch>
-          </p:blipFill>
-          <p:spPr>
-            <a:xfrm>
-              <a:off x="10753002" y="1766691"/>
-              <a:ext cx="960949" cy="1361974"/>
+              <a:off x="10126050" y="2247133"/>
+              <a:ext cx="380017" cy="380017"/>
             </a:xfrm>
             <a:prstGeom prst="rect">
               <a:avLst/>
@@ -27827,10 +29731,10 @@
         </p:pic>
         <p:sp>
           <p:nvSpPr>
-            <p:cNvPr id="2" name="같음 기호 1">
+            <p:cNvPr id="11" name="같음 기호 10">
               <a:extLst>
                 <a:ext uri="{FF2B5EF4-FFF2-40B4-BE49-F238E27FC236}">
-                  <a16:creationId xmlns:a16="http://schemas.microsoft.com/office/drawing/2014/main" id="{818D04B7-3485-B99A-9173-C2DCCE8628D5}"/>
+                  <a16:creationId xmlns:a16="http://schemas.microsoft.com/office/drawing/2014/main" id="{9BD147E2-E058-4C5C-2EFB-44EA55B32B56}"/>
                 </a:ext>
               </a:extLst>
             </p:cNvPr>
@@ -27839,11 +29743,14 @@
           </p:nvSpPr>
           <p:spPr>
             <a:xfrm>
-              <a:off x="7837916" y="2405062"/>
-              <a:ext cx="256785" cy="153429"/>
+              <a:off x="7762875" y="2305050"/>
+              <a:ext cx="412720" cy="243840"/>
             </a:xfrm>
             <a:prstGeom prst="mathEqual">
-              <a:avLst/>
+              <a:avLst>
+                <a:gd name="adj1" fmla="val 12582"/>
+                <a:gd name="adj2" fmla="val 32536"/>
+              </a:avLst>
             </a:prstGeom>
             <a:solidFill>
               <a:schemeClr val="tx1"/>
@@ -27878,56 +29785,173 @@
             </a:p>
           </p:txBody>
         </p:sp>
-        <p:sp>
-          <p:nvSpPr>
-            <p:cNvPr id="3" name="더하기 기호 2">
-              <a:extLst>
-                <a:ext uri="{FF2B5EF4-FFF2-40B4-BE49-F238E27FC236}">
-                  <a16:creationId xmlns:a16="http://schemas.microsoft.com/office/drawing/2014/main" id="{BF4E33F2-5881-9AA4-0DE4-7EB7DE930520}"/>
-                </a:ext>
-              </a:extLst>
-            </p:cNvPr>
-            <p:cNvSpPr/>
-            <p:nvPr/>
-          </p:nvSpPr>
-          <p:spPr>
-            <a:xfrm>
-              <a:off x="10210801" y="2371725"/>
-              <a:ext cx="238628" cy="209955"/>
-            </a:xfrm>
-            <a:prstGeom prst="mathPlus">
-              <a:avLst/>
-            </a:prstGeom>
-            <a:solidFill>
-              <a:schemeClr val="tx1"/>
-            </a:solidFill>
-          </p:spPr>
-          <p:style>
-            <a:lnRef idx="2">
-              <a:schemeClr val="accent1">
-                <a:shade val="15000"/>
+      </p:grpSp>
+      <mc:AlternateContent xmlns:mc="http://schemas.openxmlformats.org/markup-compatibility/2006">
+        <mc:Choice xmlns:a14="http://schemas.microsoft.com/office/drawing/2010/main" Requires="a14">
+          <p:sp>
+            <p:nvSpPr>
+              <p:cNvPr id="18" name="TextBox 17">
+                <a:extLst>
+                  <a:ext uri="{FF2B5EF4-FFF2-40B4-BE49-F238E27FC236}">
+                    <a16:creationId xmlns:a16="http://schemas.microsoft.com/office/drawing/2014/main" id="{35470A2D-8B93-1AD9-28F7-946111333D5C}"/>
+                  </a:ext>
+                </a:extLst>
+              </p:cNvPr>
+              <p:cNvSpPr txBox="1"/>
+              <p:nvPr/>
+            </p:nvSpPr>
+            <p:spPr>
+              <a:xfrm>
+                <a:off x="521207" y="1450999"/>
+                <a:ext cx="9489568" cy="369332"/>
+              </a:xfrm>
+              <a:prstGeom prst="rect">
+                <a:avLst/>
+              </a:prstGeom>
+              <a:noFill/>
+            </p:spPr>
+            <p:txBody>
+              <a:bodyPr wrap="square">
+                <a:spAutoFit/>
+              </a:bodyPr>
+              <a:lstStyle/>
+              <a:p>
+                <a14:m>
+                  <m:oMath xmlns:m="http://schemas.openxmlformats.org/officeDocument/2006/math">
+                    <m:r>
+                      <a:rPr lang="en-US" altLang="ko-KR" i="1" dirty="0">
+                        <a:latin typeface="Cambria Math" panose="02040503050406030204" pitchFamily="18" charset="0"/>
+                      </a:rPr>
+                      <m:t>𝑌</m:t>
+                    </m:r>
+                  </m:oMath>
+                </a14:m>
+                <a:r>
+                  <a:rPr lang="ko-KR" altLang="en-US" dirty="0">
+                    <a:latin typeface="맑은 고딕 Semilight" panose="020B0502040204020203" pitchFamily="50" charset="-127"/>
+                    <a:ea typeface="맑은 고딕 Semilight" panose="020B0502040204020203" pitchFamily="50" charset="-127"/>
+                    <a:cs typeface="맑은 고딕 Semilight" panose="020B0502040204020203" pitchFamily="50" charset="-127"/>
+                  </a:rPr>
+                  <a:t>는 </a:t>
+                </a:r>
+                <a14:m>
+                  <m:oMath xmlns:m="http://schemas.openxmlformats.org/officeDocument/2006/math">
+                    <m:r>
+                      <a:rPr lang="en-US" altLang="ko-KR" i="1" dirty="0">
+                        <a:latin typeface="Cambria Math" panose="02040503050406030204" pitchFamily="18" charset="0"/>
+                      </a:rPr>
+                      <m:t>𝑋</m:t>
+                    </m:r>
+                  </m:oMath>
+                </a14:m>
+                <a:r>
+                  <a:rPr lang="ko-KR" altLang="en-US" dirty="0">
+                    <a:latin typeface="맑은 고딕 Semilight" panose="020B0502040204020203" pitchFamily="50" charset="-127"/>
+                    <a:ea typeface="맑은 고딕 Semilight" panose="020B0502040204020203" pitchFamily="50" charset="-127"/>
+                    <a:cs typeface="맑은 고딕 Semilight" panose="020B0502040204020203" pitchFamily="50" charset="-127"/>
+                  </a:rPr>
+                  <a:t>의 선형결합 형태로 이루어졌다고 가정하여 행렬식을 구성한다</a:t>
+                </a:r>
+                <a:r>
+                  <a:rPr lang="en-US" altLang="ko-KR">
+                    <a:latin typeface="맑은 고딕 Semilight" panose="020B0502040204020203" pitchFamily="50" charset="-127"/>
+                    <a:ea typeface="맑은 고딕 Semilight" panose="020B0502040204020203" pitchFamily="50" charset="-127"/>
+                    <a:cs typeface="맑은 고딕 Semilight" panose="020B0502040204020203" pitchFamily="50" charset="-127"/>
+                  </a:rPr>
+                  <a:t>.</a:t>
+                </a:r>
+                <a:endParaRPr lang="ko-KR" altLang="en-US" dirty="0">
+                  <a:latin typeface="맑은 고딕 Semilight" panose="020B0502040204020203" pitchFamily="50" charset="-127"/>
+                  <a:ea typeface="맑은 고딕 Semilight" panose="020B0502040204020203" pitchFamily="50" charset="-127"/>
+                  <a:cs typeface="맑은 고딕 Semilight" panose="020B0502040204020203" pitchFamily="50" charset="-127"/>
+                </a:endParaRPr>
+              </a:p>
+            </p:txBody>
+          </p:sp>
+        </mc:Choice>
+        <mc:Fallback>
+          <p:sp>
+            <p:nvSpPr>
+              <p:cNvPr id="18" name="TextBox 17">
+                <a:extLst>
+                  <a:ext uri="{FF2B5EF4-FFF2-40B4-BE49-F238E27FC236}">
+                    <a16:creationId xmlns:a16="http://schemas.microsoft.com/office/drawing/2014/main" id="{35470A2D-8B93-1AD9-28F7-946111333D5C}"/>
+                  </a:ext>
+                </a:extLst>
+              </p:cNvPr>
+              <p:cNvSpPr txBox="1">
+                <a:spLocks noRot="1" noChangeAspect="1" noMove="1" noResize="1" noEditPoints="1" noAdjustHandles="1" noChangeArrowheads="1" noChangeShapeType="1" noTextEdit="1"/>
+              </p:cNvSpPr>
+              <p:nvPr/>
+            </p:nvSpPr>
+            <p:spPr>
+              <a:xfrm>
+                <a:off x="521207" y="1450999"/>
+                <a:ext cx="9489568" cy="369332"/>
+              </a:xfrm>
+              <a:prstGeom prst="rect">
+                <a:avLst/>
+              </a:prstGeom>
+              <a:blipFill>
+                <a:blip r:embed="rId10"/>
+                <a:stretch>
+                  <a:fillRect t="-8197" b="-24590"/>
+                </a:stretch>
+              </a:blipFill>
+            </p:spPr>
+            <p:txBody>
+              <a:bodyPr/>
+              <a:lstStyle/>
+              <a:p>
+                <a:r>
+                  <a:rPr lang="ko-KR" altLang="en-US">
+                    <a:noFill/>
+                  </a:rPr>
+                  <a:t> </a:t>
+                </a:r>
+              </a:p>
+            </p:txBody>
+          </p:sp>
+        </mc:Fallback>
+      </mc:AlternateContent>
+      <p:pic>
+        <p:nvPicPr>
+          <p:cNvPr id="20" name="그림 19">
+            <a:extLst>
+              <a:ext uri="{FF2B5EF4-FFF2-40B4-BE49-F238E27FC236}">
+                <a16:creationId xmlns:a16="http://schemas.microsoft.com/office/drawing/2014/main" id="{471266D2-F197-012A-212A-7BB8412600A4}"/>
+              </a:ext>
+            </a:extLst>
+          </p:cNvPr>
+          <p:cNvPicPr>
+            <a:picLocks noChangeAspect="1"/>
+          </p:cNvPicPr>
+          <p:nvPr/>
+        </p:nvPicPr>
+        <p:blipFill>
+          <a:blip r:embed="rId11">
+            <a:duotone>
+              <a:schemeClr val="accent3">
+                <a:shade val="45000"/>
+                <a:satMod val="135000"/>
               </a:schemeClr>
-            </a:lnRef>
-            <a:fillRef idx="1">
-              <a:schemeClr val="accent1"/>
-            </a:fillRef>
-            <a:effectRef idx="0">
-              <a:schemeClr val="accent1"/>
-            </a:effectRef>
-            <a:fontRef idx="minor">
-              <a:schemeClr val="lt1"/>
-            </a:fontRef>
-          </p:style>
-          <p:txBody>
-            <a:bodyPr rtlCol="0" anchor="ctr"/>
-            <a:lstStyle/>
-            <a:p>
-              <a:pPr algn="ctr"/>
-              <a:endParaRPr lang="ko-KR" altLang="en-US" dirty="0"/>
-            </a:p>
-          </p:txBody>
-        </p:sp>
-      </p:grpSp>
+              <a:prstClr val="white"/>
+            </a:duotone>
+          </a:blip>
+          <a:stretch>
+            <a:fillRect/>
+          </a:stretch>
+        </p:blipFill>
+        <p:spPr>
+          <a:xfrm>
+            <a:off x="6488810" y="3681115"/>
+            <a:ext cx="2012973" cy="2820107"/>
+          </a:xfrm>
+          <a:prstGeom prst="rect">
+            <a:avLst/>
+          </a:prstGeom>
+        </p:spPr>
+      </p:pic>
     </p:spTree>
     <p:extLst>
       <p:ext uri="{BB962C8B-B14F-4D97-AF65-F5344CB8AC3E}">
@@ -28097,219 +30121,6 @@
       </p:pic>
       <p:grpSp>
         <p:nvGrpSpPr>
-          <p:cNvPr id="22" name="그룹 21">
-            <a:extLst>
-              <a:ext uri="{FF2B5EF4-FFF2-40B4-BE49-F238E27FC236}">
-                <a16:creationId xmlns:a16="http://schemas.microsoft.com/office/drawing/2014/main" id="{E891B776-788F-983C-3372-3C1FFE26C810}"/>
-              </a:ext>
-            </a:extLst>
-          </p:cNvPr>
-          <p:cNvGrpSpPr/>
-          <p:nvPr/>
-        </p:nvGrpSpPr>
-        <p:grpSpPr>
-          <a:xfrm>
-            <a:off x="6488811" y="1766690"/>
-            <a:ext cx="5225140" cy="1387726"/>
-            <a:chOff x="6488811" y="1766690"/>
-            <a:chExt cx="5225140" cy="1387726"/>
-          </a:xfrm>
-        </p:grpSpPr>
-        <p:pic>
-          <p:nvPicPr>
-            <p:cNvPr id="4" name="그림 3">
-              <a:extLst>
-                <a:ext uri="{FF2B5EF4-FFF2-40B4-BE49-F238E27FC236}">
-                  <a16:creationId xmlns:a16="http://schemas.microsoft.com/office/drawing/2014/main" id="{3AC2FBC8-0659-E600-0F6A-6615329BB2FB}"/>
-                </a:ext>
-              </a:extLst>
-            </p:cNvPr>
-            <p:cNvPicPr>
-              <a:picLocks noChangeAspect="1"/>
-            </p:cNvPicPr>
-            <p:nvPr/>
-          </p:nvPicPr>
-          <p:blipFill>
-            <a:blip r:embed="rId4"/>
-            <a:stretch>
-              <a:fillRect/>
-            </a:stretch>
-          </p:blipFill>
-          <p:spPr>
-            <a:xfrm>
-              <a:off x="8461171" y="1766690"/>
-              <a:ext cx="1402567" cy="1387726"/>
-            </a:xfrm>
-            <a:prstGeom prst="rect">
-              <a:avLst/>
-            </a:prstGeom>
-          </p:spPr>
-        </p:pic>
-        <p:pic>
-          <p:nvPicPr>
-            <p:cNvPr id="7" name="그림 6">
-              <a:extLst>
-                <a:ext uri="{FF2B5EF4-FFF2-40B4-BE49-F238E27FC236}">
-                  <a16:creationId xmlns:a16="http://schemas.microsoft.com/office/drawing/2014/main" id="{2107E47C-A069-F155-14B8-C2EB6D2DBF02}"/>
-                </a:ext>
-              </a:extLst>
-            </p:cNvPr>
-            <p:cNvPicPr>
-              <a:picLocks noChangeAspect="1"/>
-            </p:cNvPicPr>
-            <p:nvPr/>
-          </p:nvPicPr>
-          <p:blipFill>
-            <a:blip r:embed="rId5"/>
-            <a:stretch>
-              <a:fillRect/>
-            </a:stretch>
-          </p:blipFill>
-          <p:spPr>
-            <a:xfrm>
-              <a:off x="6488811" y="1766690"/>
-              <a:ext cx="1038214" cy="1332743"/>
-            </a:xfrm>
-            <a:prstGeom prst="rect">
-              <a:avLst/>
-            </a:prstGeom>
-          </p:spPr>
-        </p:pic>
-        <p:pic>
-          <p:nvPicPr>
-            <p:cNvPr id="10" name="그림 9">
-              <a:extLst>
-                <a:ext uri="{FF2B5EF4-FFF2-40B4-BE49-F238E27FC236}">
-                  <a16:creationId xmlns:a16="http://schemas.microsoft.com/office/drawing/2014/main" id="{09370505-6899-00F3-2FD3-4E507FFDCF4D}"/>
-                </a:ext>
-              </a:extLst>
-            </p:cNvPr>
-            <p:cNvPicPr>
-              <a:picLocks noChangeAspect="1"/>
-            </p:cNvPicPr>
-            <p:nvPr/>
-          </p:nvPicPr>
-          <p:blipFill>
-            <a:blip r:embed="rId6"/>
-            <a:stretch>
-              <a:fillRect/>
-            </a:stretch>
-          </p:blipFill>
-          <p:spPr>
-            <a:xfrm>
-              <a:off x="10753002" y="1766691"/>
-              <a:ext cx="960949" cy="1361974"/>
-            </a:xfrm>
-            <a:prstGeom prst="rect">
-              <a:avLst/>
-            </a:prstGeom>
-          </p:spPr>
-        </p:pic>
-        <p:sp>
-          <p:nvSpPr>
-            <p:cNvPr id="2" name="같음 기호 1">
-              <a:extLst>
-                <a:ext uri="{FF2B5EF4-FFF2-40B4-BE49-F238E27FC236}">
-                  <a16:creationId xmlns:a16="http://schemas.microsoft.com/office/drawing/2014/main" id="{4928C1D8-D31B-C11A-799E-0C0D276A57E8}"/>
-                </a:ext>
-              </a:extLst>
-            </p:cNvPr>
-            <p:cNvSpPr/>
-            <p:nvPr/>
-          </p:nvSpPr>
-          <p:spPr>
-            <a:xfrm>
-              <a:off x="7837916" y="2405062"/>
-              <a:ext cx="256785" cy="153429"/>
-            </a:xfrm>
-            <a:prstGeom prst="mathEqual">
-              <a:avLst/>
-            </a:prstGeom>
-            <a:solidFill>
-              <a:schemeClr val="tx1"/>
-            </a:solidFill>
-          </p:spPr>
-          <p:style>
-            <a:lnRef idx="2">
-              <a:schemeClr val="accent1">
-                <a:shade val="15000"/>
-              </a:schemeClr>
-            </a:lnRef>
-            <a:fillRef idx="1">
-              <a:schemeClr val="accent1"/>
-            </a:fillRef>
-            <a:effectRef idx="0">
-              <a:schemeClr val="accent1"/>
-            </a:effectRef>
-            <a:fontRef idx="minor">
-              <a:schemeClr val="lt1"/>
-            </a:fontRef>
-          </p:style>
-          <p:txBody>
-            <a:bodyPr rtlCol="0" anchor="ctr"/>
-            <a:lstStyle/>
-            <a:p>
-              <a:pPr algn="ctr"/>
-              <a:endParaRPr lang="ko-KR" altLang="en-US">
-                <a:solidFill>
-                  <a:schemeClr val="tx1"/>
-                </a:solidFill>
-              </a:endParaRPr>
-            </a:p>
-          </p:txBody>
-        </p:sp>
-        <p:sp>
-          <p:nvSpPr>
-            <p:cNvPr id="3" name="더하기 기호 2">
-              <a:extLst>
-                <a:ext uri="{FF2B5EF4-FFF2-40B4-BE49-F238E27FC236}">
-                  <a16:creationId xmlns:a16="http://schemas.microsoft.com/office/drawing/2014/main" id="{C4680470-73AD-F8AD-91F2-5D806F4B0131}"/>
-                </a:ext>
-              </a:extLst>
-            </p:cNvPr>
-            <p:cNvSpPr/>
-            <p:nvPr/>
-          </p:nvSpPr>
-          <p:spPr>
-            <a:xfrm>
-              <a:off x="10210801" y="2371725"/>
-              <a:ext cx="238628" cy="209955"/>
-            </a:xfrm>
-            <a:prstGeom prst="mathPlus">
-              <a:avLst/>
-            </a:prstGeom>
-            <a:solidFill>
-              <a:schemeClr val="tx1"/>
-            </a:solidFill>
-          </p:spPr>
-          <p:style>
-            <a:lnRef idx="2">
-              <a:schemeClr val="accent1">
-                <a:shade val="15000"/>
-              </a:schemeClr>
-            </a:lnRef>
-            <a:fillRef idx="1">
-              <a:schemeClr val="accent1"/>
-            </a:fillRef>
-            <a:effectRef idx="0">
-              <a:schemeClr val="accent1"/>
-            </a:effectRef>
-            <a:fontRef idx="minor">
-              <a:schemeClr val="lt1"/>
-            </a:fontRef>
-          </p:style>
-          <p:txBody>
-            <a:bodyPr rtlCol="0" anchor="ctr"/>
-            <a:lstStyle/>
-            <a:p>
-              <a:pPr algn="ctr"/>
-              <a:endParaRPr lang="ko-KR" altLang="en-US" dirty="0"/>
-            </a:p>
-          </p:txBody>
-        </p:sp>
-      </p:grpSp>
-      <p:grpSp>
-        <p:nvGrpSpPr>
           <p:cNvPr id="23" name="그룹 22">
             <a:extLst>
               <a:ext uri="{FF2B5EF4-FFF2-40B4-BE49-F238E27FC236}">
@@ -28322,7 +30133,7 @@
         </p:nvGrpSpPr>
         <p:grpSpPr>
           <a:xfrm>
-            <a:off x="6593586" y="3598550"/>
+            <a:off x="6593586" y="4008125"/>
             <a:ext cx="3454269" cy="1428684"/>
             <a:chOff x="6488811" y="3941141"/>
             <a:chExt cx="3454269" cy="1428684"/>
@@ -28343,7 +30154,7 @@
             <p:nvPr/>
           </p:nvPicPr>
           <p:blipFill>
-            <a:blip r:embed="rId5"/>
+            <a:blip r:embed="rId4"/>
             <a:stretch>
               <a:fillRect/>
             </a:stretch>
@@ -28373,7 +30184,7 @@
             <p:nvPr/>
           </p:nvPicPr>
           <p:blipFill>
-            <a:blip r:embed="rId7"/>
+            <a:blip r:embed="rId5"/>
             <a:stretch>
               <a:fillRect/>
             </a:stretch>
@@ -28403,7 +30214,7 @@
             <p:nvPr/>
           </p:nvPicPr>
           <p:blipFill>
-            <a:blip r:embed="rId8"/>
+            <a:blip r:embed="rId6"/>
             <a:stretch>
               <a:fillRect/>
             </a:stretch>
@@ -28433,7 +30244,7 @@
             <p:nvPr/>
           </p:nvPicPr>
           <p:blipFill>
-            <a:blip r:embed="rId9"/>
+            <a:blip r:embed="rId7"/>
             <a:stretch>
               <a:fillRect/>
             </a:stretch>
@@ -28448,59 +30259,6 @@
             </a:prstGeom>
           </p:spPr>
         </p:pic>
-        <p:sp>
-          <p:nvSpPr>
-            <p:cNvPr id="21" name="같음 기호 20">
-              <a:extLst>
-                <a:ext uri="{FF2B5EF4-FFF2-40B4-BE49-F238E27FC236}">
-                  <a16:creationId xmlns:a16="http://schemas.microsoft.com/office/drawing/2014/main" id="{E9F21161-7C22-BA86-8BD5-6D80AC5F2AC5}"/>
-                </a:ext>
-              </a:extLst>
-            </p:cNvPr>
-            <p:cNvSpPr/>
-            <p:nvPr/>
-          </p:nvSpPr>
-          <p:spPr>
-            <a:xfrm>
-              <a:off x="7887006" y="4622299"/>
-              <a:ext cx="256785" cy="153429"/>
-            </a:xfrm>
-            <a:prstGeom prst="mathEqual">
-              <a:avLst/>
-            </a:prstGeom>
-            <a:solidFill>
-              <a:schemeClr val="tx1"/>
-            </a:solidFill>
-          </p:spPr>
-          <p:style>
-            <a:lnRef idx="2">
-              <a:schemeClr val="accent1">
-                <a:shade val="15000"/>
-              </a:schemeClr>
-            </a:lnRef>
-            <a:fillRef idx="1">
-              <a:schemeClr val="accent1"/>
-            </a:fillRef>
-            <a:effectRef idx="0">
-              <a:schemeClr val="accent1"/>
-            </a:effectRef>
-            <a:fontRef idx="minor">
-              <a:schemeClr val="lt1"/>
-            </a:fontRef>
-          </p:style>
-          <p:txBody>
-            <a:bodyPr rtlCol="0" anchor="ctr"/>
-            <a:lstStyle/>
-            <a:p>
-              <a:pPr algn="ctr"/>
-              <a:endParaRPr lang="ko-KR" altLang="en-US">
-                <a:solidFill>
-                  <a:schemeClr val="tx1"/>
-                </a:solidFill>
-              </a:endParaRPr>
-            </a:p>
-          </p:txBody>
-        </p:sp>
       </p:grpSp>
       <p:pic>
         <p:nvPicPr>
@@ -28517,7 +30275,7 @@
           <p:nvPr/>
         </p:nvPicPr>
         <p:blipFill>
-          <a:blip r:embed="rId10">
+          <a:blip r:embed="rId8">
             <a:extLst>
               <a:ext uri="{28A0092B-C50C-407E-A947-70E740481C1C}">
                 <a14:useLocalDpi xmlns:a14="http://schemas.microsoft.com/office/drawing/2010/main" val="0"/>
@@ -28531,7 +30289,7 @@
         </p:blipFill>
         <p:spPr bwMode="auto">
           <a:xfrm>
-            <a:off x="749841" y="1742236"/>
+            <a:off x="749841" y="2151811"/>
             <a:ext cx="5496682" cy="4405312"/>
           </a:xfrm>
           <a:prstGeom prst="rect">
@@ -28563,7 +30321,7 @@
         </p:nvSpPr>
         <p:spPr>
           <a:xfrm>
-            <a:off x="6460236" y="3514725"/>
+            <a:off x="6460236" y="3924300"/>
             <a:ext cx="3855843" cy="1638616"/>
           </a:xfrm>
           <a:prstGeom prst="rect">
@@ -28601,6 +30359,447 @@
           </a:p>
         </p:txBody>
       </p:sp>
+      <p:grpSp>
+        <p:nvGrpSpPr>
+          <p:cNvPr id="15" name="그룹 14">
+            <a:extLst>
+              <a:ext uri="{FF2B5EF4-FFF2-40B4-BE49-F238E27FC236}">
+                <a16:creationId xmlns:a16="http://schemas.microsoft.com/office/drawing/2014/main" id="{63964133-9091-9FFC-8C84-1A406F5B7F7A}"/>
+              </a:ext>
+            </a:extLst>
+          </p:cNvPr>
+          <p:cNvGrpSpPr/>
+          <p:nvPr/>
+        </p:nvGrpSpPr>
+        <p:grpSpPr>
+          <a:xfrm>
+            <a:off x="6488811" y="2176265"/>
+            <a:ext cx="5225140" cy="1387726"/>
+            <a:chOff x="6488811" y="1766690"/>
+            <a:chExt cx="5225140" cy="1387726"/>
+          </a:xfrm>
+        </p:grpSpPr>
+        <p:grpSp>
+          <p:nvGrpSpPr>
+            <p:cNvPr id="22" name="그룹 21">
+              <a:extLst>
+                <a:ext uri="{FF2B5EF4-FFF2-40B4-BE49-F238E27FC236}">
+                  <a16:creationId xmlns:a16="http://schemas.microsoft.com/office/drawing/2014/main" id="{E891B776-788F-983C-3372-3C1FFE26C810}"/>
+                </a:ext>
+              </a:extLst>
+            </p:cNvPr>
+            <p:cNvGrpSpPr/>
+            <p:nvPr/>
+          </p:nvGrpSpPr>
+          <p:grpSpPr>
+            <a:xfrm>
+              <a:off x="6488811" y="1766690"/>
+              <a:ext cx="5225140" cy="1387726"/>
+              <a:chOff x="6488811" y="1766690"/>
+              <a:chExt cx="5225140" cy="1387726"/>
+            </a:xfrm>
+          </p:grpSpPr>
+          <p:pic>
+            <p:nvPicPr>
+              <p:cNvPr id="4" name="그림 3">
+                <a:extLst>
+                  <a:ext uri="{FF2B5EF4-FFF2-40B4-BE49-F238E27FC236}">
+                    <a16:creationId xmlns:a16="http://schemas.microsoft.com/office/drawing/2014/main" id="{3AC2FBC8-0659-E600-0F6A-6615329BB2FB}"/>
+                  </a:ext>
+                </a:extLst>
+              </p:cNvPr>
+              <p:cNvPicPr>
+                <a:picLocks noChangeAspect="1"/>
+              </p:cNvPicPr>
+              <p:nvPr/>
+            </p:nvPicPr>
+            <p:blipFill>
+              <a:blip r:embed="rId9"/>
+              <a:stretch>
+                <a:fillRect/>
+              </a:stretch>
+            </p:blipFill>
+            <p:spPr>
+              <a:xfrm>
+                <a:off x="8461171" y="1766690"/>
+                <a:ext cx="1402567" cy="1387726"/>
+              </a:xfrm>
+              <a:prstGeom prst="rect">
+                <a:avLst/>
+              </a:prstGeom>
+            </p:spPr>
+          </p:pic>
+          <p:pic>
+            <p:nvPicPr>
+              <p:cNvPr id="7" name="그림 6">
+                <a:extLst>
+                  <a:ext uri="{FF2B5EF4-FFF2-40B4-BE49-F238E27FC236}">
+                    <a16:creationId xmlns:a16="http://schemas.microsoft.com/office/drawing/2014/main" id="{2107E47C-A069-F155-14B8-C2EB6D2DBF02}"/>
+                  </a:ext>
+                </a:extLst>
+              </p:cNvPr>
+              <p:cNvPicPr>
+                <a:picLocks noChangeAspect="1"/>
+              </p:cNvPicPr>
+              <p:nvPr/>
+            </p:nvPicPr>
+            <p:blipFill>
+              <a:blip r:embed="rId4"/>
+              <a:stretch>
+                <a:fillRect/>
+              </a:stretch>
+            </p:blipFill>
+            <p:spPr>
+              <a:xfrm>
+                <a:off x="6488811" y="1766690"/>
+                <a:ext cx="1038214" cy="1332743"/>
+              </a:xfrm>
+              <a:prstGeom prst="rect">
+                <a:avLst/>
+              </a:prstGeom>
+            </p:spPr>
+          </p:pic>
+          <p:pic>
+            <p:nvPicPr>
+              <p:cNvPr id="10" name="그림 9">
+                <a:extLst>
+                  <a:ext uri="{FF2B5EF4-FFF2-40B4-BE49-F238E27FC236}">
+                    <a16:creationId xmlns:a16="http://schemas.microsoft.com/office/drawing/2014/main" id="{09370505-6899-00F3-2FD3-4E507FFDCF4D}"/>
+                  </a:ext>
+                </a:extLst>
+              </p:cNvPr>
+              <p:cNvPicPr>
+                <a:picLocks noChangeAspect="1"/>
+              </p:cNvPicPr>
+              <p:nvPr/>
+            </p:nvPicPr>
+            <p:blipFill>
+              <a:blip r:embed="rId10"/>
+              <a:stretch>
+                <a:fillRect/>
+              </a:stretch>
+            </p:blipFill>
+            <p:spPr>
+              <a:xfrm>
+                <a:off x="10753002" y="1766691"/>
+                <a:ext cx="960949" cy="1361974"/>
+              </a:xfrm>
+              <a:prstGeom prst="rect">
+                <a:avLst/>
+              </a:prstGeom>
+            </p:spPr>
+          </p:pic>
+        </p:grpSp>
+        <p:pic>
+          <p:nvPicPr>
+            <p:cNvPr id="6" name="그래픽 5" descr="추가">
+              <a:extLst>
+                <a:ext uri="{FF2B5EF4-FFF2-40B4-BE49-F238E27FC236}">
+                  <a16:creationId xmlns:a16="http://schemas.microsoft.com/office/drawing/2014/main" id="{B054A926-1F30-F2AD-F13A-E24922C857B2}"/>
+                </a:ext>
+              </a:extLst>
+            </p:cNvPr>
+            <p:cNvPicPr>
+              <a:picLocks noChangeAspect="1"/>
+            </p:cNvPicPr>
+            <p:nvPr/>
+          </p:nvPicPr>
+          <p:blipFill>
+            <a:blip r:embed="rId11">
+              <a:extLst>
+                <a:ext uri="{96DAC541-7B7A-43D3-8B79-37D633B846F1}">
+                  <asvg:svgBlip xmlns:asvg="http://schemas.microsoft.com/office/drawing/2016/SVG/main" r:embed="rId12"/>
+                </a:ext>
+              </a:extLst>
+            </a:blip>
+            <a:stretch>
+              <a:fillRect/>
+            </a:stretch>
+          </p:blipFill>
+          <p:spPr>
+            <a:xfrm>
+              <a:off x="10126050" y="2247133"/>
+              <a:ext cx="380017" cy="380017"/>
+            </a:xfrm>
+            <a:prstGeom prst="rect">
+              <a:avLst/>
+            </a:prstGeom>
+          </p:spPr>
+        </p:pic>
+        <p:sp>
+          <p:nvSpPr>
+            <p:cNvPr id="9" name="같음 기호 8">
+              <a:extLst>
+                <a:ext uri="{FF2B5EF4-FFF2-40B4-BE49-F238E27FC236}">
+                  <a16:creationId xmlns:a16="http://schemas.microsoft.com/office/drawing/2014/main" id="{B64A20E0-5E75-798A-A032-F1E1B5DC5B67}"/>
+                </a:ext>
+              </a:extLst>
+            </p:cNvPr>
+            <p:cNvSpPr/>
+            <p:nvPr/>
+          </p:nvSpPr>
+          <p:spPr>
+            <a:xfrm>
+              <a:off x="7762875" y="2305050"/>
+              <a:ext cx="412720" cy="243840"/>
+            </a:xfrm>
+            <a:prstGeom prst="mathEqual">
+              <a:avLst>
+                <a:gd name="adj1" fmla="val 12582"/>
+                <a:gd name="adj2" fmla="val 32536"/>
+              </a:avLst>
+            </a:prstGeom>
+            <a:solidFill>
+              <a:schemeClr val="tx1"/>
+            </a:solidFill>
+          </p:spPr>
+          <p:style>
+            <a:lnRef idx="2">
+              <a:schemeClr val="accent1">
+                <a:shade val="15000"/>
+              </a:schemeClr>
+            </a:lnRef>
+            <a:fillRef idx="1">
+              <a:schemeClr val="accent1"/>
+            </a:fillRef>
+            <a:effectRef idx="0">
+              <a:schemeClr val="accent1"/>
+            </a:effectRef>
+            <a:fontRef idx="minor">
+              <a:schemeClr val="lt1"/>
+            </a:fontRef>
+          </p:style>
+          <p:txBody>
+            <a:bodyPr rtlCol="0" anchor="ctr"/>
+            <a:lstStyle/>
+            <a:p>
+              <a:pPr algn="ctr"/>
+              <a:endParaRPr lang="ko-KR" altLang="en-US">
+                <a:solidFill>
+                  <a:schemeClr val="tx1"/>
+                </a:solidFill>
+              </a:endParaRPr>
+            </a:p>
+          </p:txBody>
+        </p:sp>
+      </p:grpSp>
+      <p:sp>
+        <p:nvSpPr>
+          <p:cNvPr id="11" name="같음 기호 10">
+            <a:extLst>
+              <a:ext uri="{FF2B5EF4-FFF2-40B4-BE49-F238E27FC236}">
+                <a16:creationId xmlns:a16="http://schemas.microsoft.com/office/drawing/2014/main" id="{F66A715A-D90F-6CCE-EE71-125F6D9BF5B6}"/>
+              </a:ext>
+            </a:extLst>
+          </p:cNvPr>
+          <p:cNvSpPr/>
+          <p:nvPr/>
+        </p:nvSpPr>
+        <p:spPr>
+          <a:xfrm>
+            <a:off x="7762875" y="4627469"/>
+            <a:ext cx="412720" cy="243840"/>
+          </a:xfrm>
+          <a:prstGeom prst="mathEqual">
+            <a:avLst>
+              <a:gd name="adj1" fmla="val 12582"/>
+              <a:gd name="adj2" fmla="val 32536"/>
+            </a:avLst>
+          </a:prstGeom>
+          <a:solidFill>
+            <a:schemeClr val="tx1"/>
+          </a:solidFill>
+        </p:spPr>
+        <p:style>
+          <a:lnRef idx="2">
+            <a:schemeClr val="accent1">
+              <a:shade val="15000"/>
+            </a:schemeClr>
+          </a:lnRef>
+          <a:fillRef idx="1">
+            <a:schemeClr val="accent1"/>
+          </a:fillRef>
+          <a:effectRef idx="0">
+            <a:schemeClr val="accent1"/>
+          </a:effectRef>
+          <a:fontRef idx="minor">
+            <a:schemeClr val="lt1"/>
+          </a:fontRef>
+        </p:style>
+        <p:txBody>
+          <a:bodyPr rtlCol="0" anchor="ctr"/>
+          <a:lstStyle/>
+          <a:p>
+            <a:pPr algn="ctr"/>
+            <a:endParaRPr lang="ko-KR" altLang="en-US">
+              <a:solidFill>
+                <a:schemeClr val="tx1"/>
+              </a:solidFill>
+            </a:endParaRPr>
+          </a:p>
+        </p:txBody>
+      </p:sp>
+      <mc:AlternateContent xmlns:mc="http://schemas.openxmlformats.org/markup-compatibility/2006">
+        <mc:Choice xmlns:a14="http://schemas.microsoft.com/office/drawing/2010/main" Requires="a14">
+          <p:sp>
+            <p:nvSpPr>
+              <p:cNvPr id="17" name="TextBox 16">
+                <a:extLst>
+                  <a:ext uri="{FF2B5EF4-FFF2-40B4-BE49-F238E27FC236}">
+                    <a16:creationId xmlns:a16="http://schemas.microsoft.com/office/drawing/2014/main" id="{5B9E4ECA-50FB-6AE8-E340-8D9D8F262459}"/>
+                  </a:ext>
+                </a:extLst>
+              </p:cNvPr>
+              <p:cNvSpPr txBox="1"/>
+              <p:nvPr/>
+            </p:nvSpPr>
+            <p:spPr>
+              <a:xfrm>
+                <a:off x="521206" y="1450999"/>
+                <a:ext cx="11127319" cy="376770"/>
+              </a:xfrm>
+              <a:prstGeom prst="rect">
+                <a:avLst/>
+              </a:prstGeom>
+              <a:noFill/>
+            </p:spPr>
+            <p:txBody>
+              <a:bodyPr wrap="square">
+                <a:spAutoFit/>
+              </a:bodyPr>
+              <a:lstStyle/>
+              <a:p>
+                <a14:m>
+                  <m:oMath xmlns:m="http://schemas.openxmlformats.org/officeDocument/2006/math">
+                    <m:r>
+                      <a:rPr lang="en-US" altLang="ko-KR" i="1" dirty="0">
+                        <a:latin typeface="Cambria Math" panose="02040503050406030204" pitchFamily="18" charset="0"/>
+                      </a:rPr>
+                      <m:t>𝑌</m:t>
+                    </m:r>
+                  </m:oMath>
+                </a14:m>
+                <a:r>
+                  <a:rPr lang="ko-KR" altLang="en-US" dirty="0">
+                    <a:latin typeface="맑은 고딕 Semilight" panose="020B0502040204020203" pitchFamily="50" charset="-127"/>
+                    <a:ea typeface="맑은 고딕 Semilight" panose="020B0502040204020203" pitchFamily="50" charset="-127"/>
+                    <a:cs typeface="맑은 고딕 Semilight" panose="020B0502040204020203" pitchFamily="50" charset="-127"/>
+                  </a:rPr>
+                  <a:t>는 </a:t>
+                </a:r>
+                <a14:m>
+                  <m:oMath xmlns:m="http://schemas.openxmlformats.org/officeDocument/2006/math">
+                    <m:r>
+                      <a:rPr lang="en-US" altLang="ko-KR" i="1" dirty="0">
+                        <a:latin typeface="Cambria Math" panose="02040503050406030204" pitchFamily="18" charset="0"/>
+                      </a:rPr>
+                      <m:t>𝑋</m:t>
+                    </m:r>
+                  </m:oMath>
+                </a14:m>
+                <a:r>
+                  <a:rPr lang="ko-KR" altLang="en-US" dirty="0">
+                    <a:latin typeface="맑은 고딕 Semilight" panose="020B0502040204020203" pitchFamily="50" charset="-127"/>
+                    <a:ea typeface="맑은 고딕 Semilight" panose="020B0502040204020203" pitchFamily="50" charset="-127"/>
+                    <a:cs typeface="맑은 고딕 Semilight" panose="020B0502040204020203" pitchFamily="50" charset="-127"/>
+                  </a:rPr>
+                  <a:t>의 선형결합형태로 이루어졌다고 가정하여 행렬식을 만들고 </a:t>
+                </a:r>
+                <a14:m>
+                  <m:oMath xmlns:m="http://schemas.openxmlformats.org/officeDocument/2006/math">
+                    <m:acc>
+                      <m:accPr>
+                        <m:chr m:val="̂"/>
+                        <m:ctrlPr>
+                          <a:rPr lang="en-US" altLang="ko-KR" i="1" dirty="0" err="1" smtClean="0">
+                            <a:latin typeface="Cambria Math" panose="02040503050406030204" pitchFamily="18" charset="0"/>
+                          </a:rPr>
+                        </m:ctrlPr>
+                      </m:accPr>
+                      <m:e>
+                        <m:r>
+                          <a:rPr lang="en-US" altLang="ko-KR" i="1" dirty="0" err="1" smtClean="0">
+                            <a:latin typeface="Cambria Math" panose="02040503050406030204" pitchFamily="18" charset="0"/>
+                          </a:rPr>
+                          <m:t>𝑌</m:t>
+                        </m:r>
+                      </m:e>
+                    </m:acc>
+                  </m:oMath>
+                </a14:m>
+                <a:r>
+                  <a:rPr lang="ko-KR" altLang="en-US" dirty="0">
+                    <a:latin typeface="맑은 고딕 Semilight" panose="020B0502040204020203" pitchFamily="50" charset="-127"/>
+                    <a:ea typeface="맑은 고딕 Semilight" panose="020B0502040204020203" pitchFamily="50" charset="-127"/>
+                    <a:cs typeface="맑은 고딕 Semilight" panose="020B0502040204020203" pitchFamily="50" charset="-127"/>
+                  </a:rPr>
+                  <a:t>의 </a:t>
+                </a:r>
+                <a:r>
+                  <a:rPr lang="ko-KR" altLang="en-US" dirty="0" err="1">
+                    <a:latin typeface="맑은 고딕 Semilight" panose="020B0502040204020203" pitchFamily="50" charset="-127"/>
+                    <a:ea typeface="맑은 고딕 Semilight" panose="020B0502040204020203" pitchFamily="50" charset="-127"/>
+                    <a:cs typeface="맑은 고딕 Semilight" panose="020B0502040204020203" pitchFamily="50" charset="-127"/>
+                  </a:rPr>
+                  <a:t>선형연립</a:t>
+                </a:r>
+                <a:r>
+                  <a:rPr lang="ko-KR" altLang="en-US" dirty="0">
+                    <a:latin typeface="맑은 고딕 Semilight" panose="020B0502040204020203" pitchFamily="50" charset="-127"/>
+                    <a:ea typeface="맑은 고딕 Semilight" panose="020B0502040204020203" pitchFamily="50" charset="-127"/>
+                    <a:cs typeface="맑은 고딕 Semilight" panose="020B0502040204020203" pitchFamily="50" charset="-127"/>
+                  </a:rPr>
+                  <a:t> 방정식을 만들기 </a:t>
+                </a:r>
+              </a:p>
+            </p:txBody>
+          </p:sp>
+        </mc:Choice>
+        <mc:Fallback>
+          <p:sp>
+            <p:nvSpPr>
+              <p:cNvPr id="17" name="TextBox 16">
+                <a:extLst>
+                  <a:ext uri="{FF2B5EF4-FFF2-40B4-BE49-F238E27FC236}">
+                    <a16:creationId xmlns:a16="http://schemas.microsoft.com/office/drawing/2014/main" id="{5B9E4ECA-50FB-6AE8-E340-8D9D8F262459}"/>
+                  </a:ext>
+                </a:extLst>
+              </p:cNvPr>
+              <p:cNvSpPr txBox="1">
+                <a:spLocks noRot="1" noChangeAspect="1" noMove="1" noResize="1" noEditPoints="1" noAdjustHandles="1" noChangeArrowheads="1" noChangeShapeType="1" noTextEdit="1"/>
+              </p:cNvSpPr>
+              <p:nvPr/>
+            </p:nvSpPr>
+            <p:spPr>
+              <a:xfrm>
+                <a:off x="521206" y="1450999"/>
+                <a:ext cx="11127319" cy="376770"/>
+              </a:xfrm>
+              <a:prstGeom prst="rect">
+                <a:avLst/>
+              </a:prstGeom>
+              <a:blipFill>
+                <a:blip r:embed="rId13"/>
+                <a:stretch>
+                  <a:fillRect t="-6452" b="-24194"/>
+                </a:stretch>
+              </a:blipFill>
+            </p:spPr>
+            <p:txBody>
+              <a:bodyPr/>
+              <a:lstStyle/>
+              <a:p>
+                <a:r>
+                  <a:rPr lang="ko-KR" altLang="en-US">
+                    <a:noFill/>
+                  </a:rPr>
+                  <a:t> </a:t>
+                </a:r>
+              </a:p>
+            </p:txBody>
+          </p:sp>
+        </mc:Fallback>
+      </mc:AlternateContent>
     </p:spTree>
     <p:extLst>
       <p:ext uri="{BB962C8B-B14F-4D97-AF65-F5344CB8AC3E}">
@@ -28797,7 +30996,7 @@
         </p:blipFill>
         <p:spPr bwMode="auto">
           <a:xfrm>
-            <a:off x="749841" y="1742236"/>
+            <a:off x="749841" y="2180386"/>
             <a:ext cx="5496682" cy="4405312"/>
           </a:xfrm>
           <a:prstGeom prst="rect">
@@ -28837,7 +31036,7 @@
         </p:blipFill>
         <p:spPr>
           <a:xfrm>
-            <a:off x="6627584" y="2057357"/>
+            <a:off x="6627584" y="2495507"/>
             <a:ext cx="2449526" cy="485355"/>
           </a:xfrm>
           <a:prstGeom prst="rect">
@@ -28867,7 +31066,7 @@
         </p:blipFill>
         <p:spPr>
           <a:xfrm>
-            <a:off x="6627584" y="3042868"/>
+            <a:off x="6627584" y="3481018"/>
             <a:ext cx="4686711" cy="1607739"/>
           </a:xfrm>
           <a:prstGeom prst="rect">
@@ -28897,7 +31096,7 @@
         </p:blipFill>
         <p:spPr>
           <a:xfrm>
-            <a:off x="6672842" y="4946194"/>
+            <a:off x="6672842" y="5384344"/>
             <a:ext cx="1708943" cy="792658"/>
           </a:xfrm>
           <a:prstGeom prst="rect">
@@ -28927,7 +31126,7 @@
         </p:blipFill>
         <p:spPr>
           <a:xfrm>
-            <a:off x="8381785" y="4946194"/>
+            <a:off x="8381785" y="5407001"/>
             <a:ext cx="1085111" cy="740231"/>
           </a:xfrm>
           <a:prstGeom prst="rect">
@@ -28935,6 +31134,191 @@
           </a:prstGeom>
         </p:spPr>
       </p:pic>
+      <mc:AlternateContent xmlns:mc="http://schemas.openxmlformats.org/markup-compatibility/2006">
+        <mc:Choice xmlns:a14="http://schemas.microsoft.com/office/drawing/2010/main" Requires="a14">
+          <p:sp>
+            <p:nvSpPr>
+              <p:cNvPr id="2" name="TextBox 1">
+                <a:extLst>
+                  <a:ext uri="{FF2B5EF4-FFF2-40B4-BE49-F238E27FC236}">
+                    <a16:creationId xmlns:a16="http://schemas.microsoft.com/office/drawing/2014/main" id="{FDB0F49E-C747-980E-D3D9-F9E6511EF968}"/>
+                  </a:ext>
+                </a:extLst>
+              </p:cNvPr>
+              <p:cNvSpPr txBox="1"/>
+              <p:nvPr/>
+            </p:nvSpPr>
+            <p:spPr>
+              <a:xfrm>
+                <a:off x="521206" y="1450999"/>
+                <a:ext cx="11127319" cy="369332"/>
+              </a:xfrm>
+              <a:prstGeom prst="rect">
+                <a:avLst/>
+              </a:prstGeom>
+              <a:noFill/>
+            </p:spPr>
+            <p:txBody>
+              <a:bodyPr wrap="square">
+                <a:spAutoFit/>
+              </a:bodyPr>
+              <a:lstStyle/>
+              <a:p>
+                <a:r>
+                  <a:rPr lang="ko-KR" altLang="en-US" dirty="0">
+                    <a:latin typeface="맑은 고딕 Semilight" panose="020B0502040204020203" pitchFamily="50" charset="-127"/>
+                    <a:ea typeface="맑은 고딕 Semilight" panose="020B0502040204020203" pitchFamily="50" charset="-127"/>
+                    <a:cs typeface="맑은 고딕 Semilight" panose="020B0502040204020203" pitchFamily="50" charset="-127"/>
+                  </a:rPr>
+                  <a:t>실제 값과 </a:t>
+                </a:r>
+                <a:r>
+                  <a:rPr lang="ko-KR" altLang="en-US" dirty="0" err="1">
+                    <a:latin typeface="맑은 고딕 Semilight" panose="020B0502040204020203" pitchFamily="50" charset="-127"/>
+                    <a:ea typeface="맑은 고딕 Semilight" panose="020B0502040204020203" pitchFamily="50" charset="-127"/>
+                    <a:cs typeface="맑은 고딕 Semilight" panose="020B0502040204020203" pitchFamily="50" charset="-127"/>
+                  </a:rPr>
+                  <a:t>예측값의</a:t>
+                </a:r>
+                <a:r>
+                  <a:rPr lang="ko-KR" altLang="en-US" dirty="0">
+                    <a:latin typeface="맑은 고딕 Semilight" panose="020B0502040204020203" pitchFamily="50" charset="-127"/>
+                    <a:ea typeface="맑은 고딕 Semilight" panose="020B0502040204020203" pitchFamily="50" charset="-127"/>
+                    <a:cs typeface="맑은 고딕 Semilight" panose="020B0502040204020203" pitchFamily="50" charset="-127"/>
+                  </a:rPr>
+                  <a:t> 차이</a:t>
+                </a:r>
+                <a:r>
+                  <a:rPr lang="en-US" altLang="ko-KR" dirty="0">
+                    <a:latin typeface="맑은 고딕 Semilight" panose="020B0502040204020203" pitchFamily="50" charset="-127"/>
+                    <a:ea typeface="맑은 고딕 Semilight" panose="020B0502040204020203" pitchFamily="50" charset="-127"/>
+                    <a:cs typeface="맑은 고딕 Semilight" panose="020B0502040204020203" pitchFamily="50" charset="-127"/>
+                  </a:rPr>
+                  <a:t>,</a:t>
+                </a:r>
+                <a:r>
+                  <a:rPr lang="ko-KR" altLang="en-US" dirty="0">
+                    <a:latin typeface="맑은 고딕 Semilight" panose="020B0502040204020203" pitchFamily="50" charset="-127"/>
+                    <a:ea typeface="맑은 고딕 Semilight" panose="020B0502040204020203" pitchFamily="50" charset="-127"/>
+                    <a:cs typeface="맑은 고딕 Semilight" panose="020B0502040204020203" pitchFamily="50" charset="-127"/>
+                  </a:rPr>
+                  <a:t> </a:t>
+                </a:r>
+                <a14:m>
+                  <m:oMath xmlns:m="http://schemas.openxmlformats.org/officeDocument/2006/math">
+                    <m:r>
+                      <a:rPr lang="ko-KR" altLang="en-US" dirty="0">
+                        <a:latin typeface="Cambria Math" panose="02040503050406030204" pitchFamily="18" charset="0"/>
+                      </a:rPr>
+                      <m:t>ⅇ</m:t>
+                    </m:r>
+                  </m:oMath>
+                </a14:m>
+                <a:r>
+                  <a:rPr lang="ko-KR" altLang="en-US" dirty="0">
+                    <a:latin typeface="맑은 고딕 Semilight" panose="020B0502040204020203" pitchFamily="50" charset="-127"/>
+                    <a:ea typeface="맑은 고딕 Semilight" panose="020B0502040204020203" pitchFamily="50" charset="-127"/>
+                    <a:cs typeface="맑은 고딕 Semilight" panose="020B0502040204020203" pitchFamily="50" charset="-127"/>
+                  </a:rPr>
+                  <a:t> 의 제곱 합의 평균인 </a:t>
+                </a:r>
+                <a:r>
+                  <a:rPr lang="en-US" altLang="ko-KR" dirty="0">
+                    <a:latin typeface="맑은 고딕 Semilight" panose="020B0502040204020203" pitchFamily="50" charset="-127"/>
+                    <a:ea typeface="맑은 고딕 Semilight" panose="020B0502040204020203" pitchFamily="50" charset="-127"/>
+                    <a:cs typeface="맑은 고딕 Semilight" panose="020B0502040204020203" pitchFamily="50" charset="-127"/>
+                  </a:rPr>
+                  <a:t>MSE(Mean Squared Error), </a:t>
+                </a:r>
+                <a:r>
+                  <a:rPr lang="ko-KR" altLang="en-US" dirty="0">
+                    <a:latin typeface="맑은 고딕 Semilight" panose="020B0502040204020203" pitchFamily="50" charset="-127"/>
+                    <a:ea typeface="맑은 고딕 Semilight" panose="020B0502040204020203" pitchFamily="50" charset="-127"/>
+                    <a:cs typeface="맑은 고딕 Semilight" panose="020B0502040204020203" pitchFamily="50" charset="-127"/>
+                  </a:rPr>
+                  <a:t>손실함수</a:t>
+                </a:r>
+                <a:r>
+                  <a:rPr lang="en-US" altLang="ko-KR" dirty="0">
+                    <a:latin typeface="맑은 고딕 Semilight" panose="020B0502040204020203" pitchFamily="50" charset="-127"/>
+                    <a:ea typeface="맑은 고딕 Semilight" panose="020B0502040204020203" pitchFamily="50" charset="-127"/>
+                    <a:cs typeface="맑은 고딕 Semilight" panose="020B0502040204020203" pitchFamily="50" charset="-127"/>
+                  </a:rPr>
+                  <a:t>(</a:t>
+                </a:r>
+                <a:r>
+                  <a:rPr lang="en-US" altLang="ko-KR" dirty="0" err="1">
+                    <a:latin typeface="맑은 고딕 Semilight" panose="020B0502040204020203" pitchFamily="50" charset="-127"/>
+                    <a:ea typeface="맑은 고딕 Semilight" panose="020B0502040204020203" pitchFamily="50" charset="-127"/>
+                    <a:cs typeface="맑은 고딕 Semilight" panose="020B0502040204020203" pitchFamily="50" charset="-127"/>
+                  </a:rPr>
+                  <a:t>LossFunction</a:t>
+                </a:r>
+                <a:r>
+                  <a:rPr lang="en-US" altLang="ko-KR" dirty="0">
+                    <a:latin typeface="맑은 고딕 Semilight" panose="020B0502040204020203" pitchFamily="50" charset="-127"/>
+                    <a:ea typeface="맑은 고딕 Semilight" panose="020B0502040204020203" pitchFamily="50" charset="-127"/>
+                    <a:cs typeface="맑은 고딕 Semilight" panose="020B0502040204020203" pitchFamily="50" charset="-127"/>
+                  </a:rPr>
+                  <a:t>)</a:t>
+                </a:r>
+                <a:r>
+                  <a:rPr lang="ko-KR" altLang="en-US" dirty="0">
+                    <a:latin typeface="맑은 고딕 Semilight" panose="020B0502040204020203" pitchFamily="50" charset="-127"/>
+                    <a:ea typeface="맑은 고딕 Semilight" panose="020B0502040204020203" pitchFamily="50" charset="-127"/>
+                    <a:cs typeface="맑은 고딕 Semilight" panose="020B0502040204020203" pitchFamily="50" charset="-127"/>
+                  </a:rPr>
+                  <a:t>을 설정</a:t>
+                </a:r>
+              </a:p>
+            </p:txBody>
+          </p:sp>
+        </mc:Choice>
+        <mc:Fallback>
+          <p:sp>
+            <p:nvSpPr>
+              <p:cNvPr id="2" name="TextBox 1">
+                <a:extLst>
+                  <a:ext uri="{FF2B5EF4-FFF2-40B4-BE49-F238E27FC236}">
+                    <a16:creationId xmlns:a16="http://schemas.microsoft.com/office/drawing/2014/main" id="{FDB0F49E-C747-980E-D3D9-F9E6511EF968}"/>
+                  </a:ext>
+                </a:extLst>
+              </p:cNvPr>
+              <p:cNvSpPr txBox="1">
+                <a:spLocks noRot="1" noChangeAspect="1" noMove="1" noResize="1" noEditPoints="1" noAdjustHandles="1" noChangeArrowheads="1" noChangeShapeType="1" noTextEdit="1"/>
+              </p:cNvSpPr>
+              <p:nvPr/>
+            </p:nvSpPr>
+            <p:spPr>
+              <a:xfrm>
+                <a:off x="521206" y="1450999"/>
+                <a:ext cx="11127319" cy="369332"/>
+              </a:xfrm>
+              <a:prstGeom prst="rect">
+                <a:avLst/>
+              </a:prstGeom>
+              <a:blipFill>
+                <a:blip r:embed="rId9"/>
+                <a:stretch>
+                  <a:fillRect l="-438" t="-8197" b="-24590"/>
+                </a:stretch>
+              </a:blipFill>
+            </p:spPr>
+            <p:txBody>
+              <a:bodyPr/>
+              <a:lstStyle/>
+              <a:p>
+                <a:r>
+                  <a:rPr lang="ko-KR" altLang="en-US">
+                    <a:noFill/>
+                  </a:rPr>
+                  <a:t> </a:t>
+                </a:r>
+              </a:p>
+            </p:txBody>
+          </p:sp>
+        </mc:Fallback>
+      </mc:AlternateContent>
     </p:spTree>
     <p:extLst>
       <p:ext uri="{BB962C8B-B14F-4D97-AF65-F5344CB8AC3E}">
@@ -29081,7 +31465,15 @@
           <p:nvPr/>
         </p:nvPicPr>
         <p:blipFill>
-          <a:blip r:embed="rId2"/>
+          <a:blip r:embed="rId2">
+            <a:duotone>
+              <a:prstClr val="black"/>
+              <a:schemeClr val="accent5">
+                <a:tint val="45000"/>
+                <a:satMod val="400000"/>
+              </a:schemeClr>
+            </a:duotone>
+          </a:blip>
           <a:stretch>
             <a:fillRect/>
           </a:stretch>
@@ -29151,11 +31543,11 @@
         <p:blipFill>
           <a:blip r:embed="rId4">
             <a:duotone>
-              <a:schemeClr val="accent5">
-                <a:shade val="45000"/>
-                <a:satMod val="135000"/>
+              <a:prstClr val="black"/>
+              <a:schemeClr val="accent2">
+                <a:tint val="45000"/>
+                <a:satMod val="400000"/>
               </a:schemeClr>
-              <a:prstClr val="white"/>
             </a:duotone>
             <a:extLst>
               <a:ext uri="{BEBA8EAE-BF5A-486C-A8C5-ECC9F3942E4B}">
@@ -29528,7 +31920,7 @@
         </p:nvGrpSpPr>
         <p:grpSpPr>
           <a:xfrm>
-            <a:off x="7924800" y="4106543"/>
+            <a:off x="7372350" y="4106543"/>
             <a:ext cx="2824480" cy="1189493"/>
             <a:chOff x="8575040" y="3851111"/>
             <a:chExt cx="2824480" cy="1189493"/>
@@ -29552,7 +31944,7 @@
             <a:blip r:embed="rId7">
               <a:duotone>
                 <a:prstClr val="black"/>
-                <a:schemeClr val="accent4">
+                <a:schemeClr val="accent3">
                   <a:tint val="45000"/>
                   <a:satMod val="400000"/>
                 </a:schemeClr>
@@ -29639,10 +32031,10 @@
         </p:nvGrpSpPr>
         <p:grpSpPr>
           <a:xfrm>
-            <a:off x="8020243" y="5462958"/>
-            <a:ext cx="2824480" cy="1001698"/>
-            <a:chOff x="8650279" y="5116220"/>
-            <a:chExt cx="2824480" cy="1001698"/>
+            <a:off x="7467792" y="5462958"/>
+            <a:ext cx="4619433" cy="1001698"/>
+            <a:chOff x="8650278" y="5116220"/>
+            <a:chExt cx="4619433" cy="1001698"/>
           </a:xfrm>
         </p:grpSpPr>
         <p:pic>
@@ -29663,7 +32055,7 @@
             <a:blip r:embed="rId8">
               <a:duotone>
                 <a:prstClr val="black"/>
-                <a:schemeClr val="accent4">
+                <a:schemeClr val="accent3">
                   <a:tint val="45000"/>
                   <a:satMod val="400000"/>
                 </a:schemeClr>
@@ -29683,77 +32075,174 @@
             </a:prstGeom>
           </p:spPr>
         </p:pic>
-        <p:sp>
-          <p:nvSpPr>
-            <p:cNvPr id="51" name="TextBox 50">
-              <a:extLst>
-                <a:ext uri="{FF2B5EF4-FFF2-40B4-BE49-F238E27FC236}">
-                  <a16:creationId xmlns:a16="http://schemas.microsoft.com/office/drawing/2014/main" id="{B0E2E1CB-8BD0-9CBA-C134-C3EA19017FC6}"/>
-                </a:ext>
-              </a:extLst>
-            </p:cNvPr>
-            <p:cNvSpPr txBox="1"/>
-            <p:nvPr/>
-          </p:nvSpPr>
-          <p:spPr>
-            <a:xfrm>
-              <a:off x="8650279" y="5116220"/>
-              <a:ext cx="2824480" cy="353943"/>
-            </a:xfrm>
-            <a:prstGeom prst="rect">
-              <a:avLst/>
-            </a:prstGeom>
-            <a:noFill/>
-          </p:spPr>
-          <p:txBody>
-            <a:bodyPr wrap="square">
-              <a:spAutoFit/>
-            </a:bodyPr>
-            <a:lstStyle/>
-            <a:p>
-              <a:r>
-                <a:rPr lang="ko-KR" altLang="en-US" sz="1700" dirty="0">
-                  <a:latin typeface="맑은 고딕 Semilight" panose="020B0502040204020203" pitchFamily="50" charset="-127"/>
-                  <a:ea typeface="맑은 고딕 Semilight" panose="020B0502040204020203" pitchFamily="50" charset="-127"/>
-                  <a:cs typeface="맑은 고딕 Semilight" panose="020B0502040204020203" pitchFamily="50" charset="-127"/>
-                </a:rPr>
-                <a:t>분산</a:t>
-              </a:r>
-              <a:r>
-                <a:rPr lang="en-US" altLang="ko-KR" sz="1700" dirty="0">
-                  <a:latin typeface="맑은 고딕 Semilight" panose="020B0502040204020203" pitchFamily="50" charset="-127"/>
-                  <a:ea typeface="맑은 고딕 Semilight" panose="020B0502040204020203" pitchFamily="50" charset="-127"/>
-                  <a:cs typeface="맑은 고딕 Semilight" panose="020B0502040204020203" pitchFamily="50" charset="-127"/>
-                </a:rPr>
-                <a:t>, </a:t>
-              </a:r>
-              <a:r>
-                <a:rPr lang="ko-KR" altLang="en-US" sz="1700" dirty="0">
-                  <a:latin typeface="맑은 고딕 Semilight" panose="020B0502040204020203" pitchFamily="50" charset="-127"/>
-                  <a:ea typeface="맑은 고딕 Semilight" panose="020B0502040204020203" pitchFamily="50" charset="-127"/>
-                  <a:cs typeface="맑은 고딕 Semilight" panose="020B0502040204020203" pitchFamily="50" charset="-127"/>
-                </a:rPr>
-                <a:t>내적</a:t>
-              </a:r>
-              <a:r>
-                <a:rPr lang="en-US" altLang="ko-KR" sz="1700" dirty="0">
-                  <a:latin typeface="맑은 고딕 Semilight" panose="020B0502040204020203" pitchFamily="50" charset="-127"/>
-                  <a:ea typeface="맑은 고딕 Semilight" panose="020B0502040204020203" pitchFamily="50" charset="-127"/>
-                  <a:cs typeface="맑은 고딕 Semilight" panose="020B0502040204020203" pitchFamily="50" charset="-127"/>
-                </a:rPr>
-                <a:t>, </a:t>
-              </a:r>
-              <a:r>
-                <a:rPr lang="ko-KR" altLang="en-US" sz="1700" dirty="0">
-                  <a:latin typeface="맑은 고딕 Semilight" panose="020B0502040204020203" pitchFamily="50" charset="-127"/>
-                  <a:ea typeface="맑은 고딕 Semilight" panose="020B0502040204020203" pitchFamily="50" charset="-127"/>
-                  <a:cs typeface="맑은 고딕 Semilight" panose="020B0502040204020203" pitchFamily="50" charset="-127"/>
-                </a:rPr>
-                <a:t>유클리드 거리</a:t>
-              </a:r>
-            </a:p>
-          </p:txBody>
-        </p:sp>
+        <mc:AlternateContent xmlns:mc="http://schemas.openxmlformats.org/markup-compatibility/2006">
+          <mc:Choice xmlns:a14="http://schemas.microsoft.com/office/drawing/2010/main" Requires="a14">
+            <p:sp>
+              <p:nvSpPr>
+                <p:cNvPr id="51" name="TextBox 50">
+                  <a:extLst>
+                    <a:ext uri="{FF2B5EF4-FFF2-40B4-BE49-F238E27FC236}">
+                      <a16:creationId xmlns:a16="http://schemas.microsoft.com/office/drawing/2014/main" id="{B0E2E1CB-8BD0-9CBA-C134-C3EA19017FC6}"/>
+                    </a:ext>
+                  </a:extLst>
+                </p:cNvPr>
+                <p:cNvSpPr txBox="1"/>
+                <p:nvPr/>
+              </p:nvSpPr>
+              <p:spPr>
+                <a:xfrm>
+                  <a:off x="8650278" y="5116220"/>
+                  <a:ext cx="4619433" cy="353943"/>
+                </a:xfrm>
+                <a:prstGeom prst="rect">
+                  <a:avLst/>
+                </a:prstGeom>
+                <a:noFill/>
+              </p:spPr>
+              <p:txBody>
+                <a:bodyPr wrap="square">
+                  <a:spAutoFit/>
+                </a:bodyPr>
+                <a:lstStyle/>
+                <a:p>
+                  <a14:m>
+                    <m:oMath xmlns:m="http://schemas.openxmlformats.org/officeDocument/2006/math">
+                      <m:r>
+                        <a:rPr lang="ko-KR" altLang="en-US" sz="1700">
+                          <a:latin typeface="Cambria Math" panose="02040503050406030204" pitchFamily="18" charset="0"/>
+                          <a:ea typeface="맑은 고딕 Semilight" panose="020B0502040204020203" pitchFamily="50" charset="-127"/>
+                          <a:cs typeface="맑은 고딕 Semilight" panose="020B0502040204020203" pitchFamily="50" charset="-127"/>
+                        </a:rPr>
+                        <m:t>𝜖</m:t>
+                      </m:r>
+                    </m:oMath>
+                  </a14:m>
+                  <a:r>
+                    <a:rPr lang="ko-KR" altLang="en-US" sz="1700" dirty="0">
+                      <a:latin typeface="맑은 고딕 Semilight" panose="020B0502040204020203" pitchFamily="50" charset="-127"/>
+                      <a:ea typeface="맑은 고딕 Semilight" panose="020B0502040204020203" pitchFamily="50" charset="-127"/>
+                      <a:cs typeface="맑은 고딕 Semilight" panose="020B0502040204020203" pitchFamily="50" charset="-127"/>
+                    </a:rPr>
+                    <a:t>벡터의 </a:t>
+                  </a:r>
+                  <a:r>
+                    <a:rPr lang="en-US" altLang="ko-KR" sz="1700" dirty="0">
+                      <a:latin typeface="맑은 고딕 Semilight" panose="020B0502040204020203" pitchFamily="50" charset="-127"/>
+                      <a:ea typeface="맑은 고딕 Semilight" panose="020B0502040204020203" pitchFamily="50" charset="-127"/>
+                      <a:cs typeface="맑은 고딕 Semilight" panose="020B0502040204020203" pitchFamily="50" charset="-127"/>
+                    </a:rPr>
+                    <a:t>Norm</a:t>
+                  </a:r>
+                  <a:r>
+                    <a:rPr lang="ko-KR" altLang="en-US" sz="1700" dirty="0">
+                      <a:latin typeface="맑은 고딕 Semilight" panose="020B0502040204020203" pitchFamily="50" charset="-127"/>
+                      <a:ea typeface="맑은 고딕 Semilight" panose="020B0502040204020203" pitchFamily="50" charset="-127"/>
+                      <a:cs typeface="맑은 고딕 Semilight" panose="020B0502040204020203" pitchFamily="50" charset="-127"/>
+                    </a:rPr>
+                    <a:t>의 제곱 </a:t>
+                  </a:r>
+                  <a:r>
+                    <a:rPr lang="en-US" altLang="ko-KR" sz="1700" dirty="0">
+                      <a:latin typeface="맑은 고딕 Semilight" panose="020B0502040204020203" pitchFamily="50" charset="-127"/>
+                      <a:ea typeface="맑은 고딕 Semilight" panose="020B0502040204020203" pitchFamily="50" charset="-127"/>
+                      <a:cs typeface="맑은 고딕 Semilight" panose="020B0502040204020203" pitchFamily="50" charset="-127"/>
+                    </a:rPr>
+                    <a:t>: </a:t>
+                  </a:r>
+                  <a:r>
+                    <a:rPr lang="ko-KR" altLang="en-US" sz="1400" dirty="0">
+                      <a:latin typeface="맑은 고딕 Semilight" panose="020B0502040204020203" pitchFamily="50" charset="-127"/>
+                      <a:ea typeface="맑은 고딕 Semilight" panose="020B0502040204020203" pitchFamily="50" charset="-127"/>
+                      <a:cs typeface="맑은 고딕 Semilight" panose="020B0502040204020203" pitchFamily="50" charset="-127"/>
+                    </a:rPr>
+                    <a:t>분산</a:t>
+                  </a:r>
+                  <a:r>
+                    <a:rPr lang="en-US" altLang="ko-KR" sz="1400" dirty="0">
+                      <a:latin typeface="맑은 고딕 Semilight" panose="020B0502040204020203" pitchFamily="50" charset="-127"/>
+                      <a:ea typeface="맑은 고딕 Semilight" panose="020B0502040204020203" pitchFamily="50" charset="-127"/>
+                      <a:cs typeface="맑은 고딕 Semilight" panose="020B0502040204020203" pitchFamily="50" charset="-127"/>
+                    </a:rPr>
+                    <a:t>, </a:t>
+                  </a:r>
+                  <a:r>
+                    <a:rPr lang="ko-KR" altLang="en-US" sz="1400" dirty="0">
+                      <a:latin typeface="맑은 고딕 Semilight" panose="020B0502040204020203" pitchFamily="50" charset="-127"/>
+                      <a:ea typeface="맑은 고딕 Semilight" panose="020B0502040204020203" pitchFamily="50" charset="-127"/>
+                      <a:cs typeface="맑은 고딕 Semilight" panose="020B0502040204020203" pitchFamily="50" charset="-127"/>
+                    </a:rPr>
+                    <a:t>내적</a:t>
+                  </a:r>
+                  <a:r>
+                    <a:rPr lang="en-US" altLang="ko-KR" sz="1400" dirty="0">
+                      <a:latin typeface="맑은 고딕 Semilight" panose="020B0502040204020203" pitchFamily="50" charset="-127"/>
+                      <a:ea typeface="맑은 고딕 Semilight" panose="020B0502040204020203" pitchFamily="50" charset="-127"/>
+                      <a:cs typeface="맑은 고딕 Semilight" panose="020B0502040204020203" pitchFamily="50" charset="-127"/>
+                    </a:rPr>
+                    <a:t>, L2</a:t>
+                  </a:r>
+                  <a:r>
+                    <a:rPr lang="ko-KR" altLang="en-US" sz="1400" dirty="0">
+                      <a:latin typeface="맑은 고딕 Semilight" panose="020B0502040204020203" pitchFamily="50" charset="-127"/>
+                      <a:ea typeface="맑은 고딕 Semilight" panose="020B0502040204020203" pitchFamily="50" charset="-127"/>
+                      <a:cs typeface="맑은 고딕 Semilight" panose="020B0502040204020203" pitchFamily="50" charset="-127"/>
+                    </a:rPr>
+                    <a:t> 거리</a:t>
+                  </a:r>
+                  <a:endParaRPr lang="ko-KR" altLang="en-US" sz="1700" dirty="0">
+                    <a:latin typeface="맑은 고딕 Semilight" panose="020B0502040204020203" pitchFamily="50" charset="-127"/>
+                    <a:ea typeface="맑은 고딕 Semilight" panose="020B0502040204020203" pitchFamily="50" charset="-127"/>
+                    <a:cs typeface="맑은 고딕 Semilight" panose="020B0502040204020203" pitchFamily="50" charset="-127"/>
+                  </a:endParaRPr>
+                </a:p>
+              </p:txBody>
+            </p:sp>
+          </mc:Choice>
+          <mc:Fallback>
+            <p:sp>
+              <p:nvSpPr>
+                <p:cNvPr id="51" name="TextBox 50">
+                  <a:extLst>
+                    <a:ext uri="{FF2B5EF4-FFF2-40B4-BE49-F238E27FC236}">
+                      <a16:creationId xmlns:a16="http://schemas.microsoft.com/office/drawing/2014/main" id="{B0E2E1CB-8BD0-9CBA-C134-C3EA19017FC6}"/>
+                    </a:ext>
+                  </a:extLst>
+                </p:cNvPr>
+                <p:cNvSpPr txBox="1">
+                  <a:spLocks noRot="1" noChangeAspect="1" noMove="1" noResize="1" noEditPoints="1" noAdjustHandles="1" noChangeArrowheads="1" noChangeShapeType="1" noTextEdit="1"/>
+                </p:cNvSpPr>
+                <p:nvPr/>
+              </p:nvSpPr>
+              <p:spPr>
+                <a:xfrm>
+                  <a:off x="8650278" y="5116220"/>
+                  <a:ext cx="4619433" cy="353943"/>
+                </a:xfrm>
+                <a:prstGeom prst="rect">
+                  <a:avLst/>
+                </a:prstGeom>
+                <a:blipFill>
+                  <a:blip r:embed="rId9"/>
+                  <a:stretch>
+                    <a:fillRect t="-5172" b="-22414"/>
+                  </a:stretch>
+                </a:blipFill>
+              </p:spPr>
+              <p:txBody>
+                <a:bodyPr/>
+                <a:lstStyle/>
+                <a:p>
+                  <a:r>
+                    <a:rPr lang="ko-KR" altLang="en-US">
+                      <a:noFill/>
+                    </a:rPr>
+                    <a:t> </a:t>
+                  </a:r>
+                </a:p>
+              </p:txBody>
+            </p:sp>
+          </mc:Fallback>
+        </mc:AlternateContent>
       </p:grpSp>
     </p:spTree>
     <p:extLst>
@@ -30326,7 +32815,7 @@
         </p:blipFill>
         <p:spPr bwMode="auto">
           <a:xfrm>
-            <a:off x="2090795" y="1952244"/>
+            <a:off x="2090795" y="2752344"/>
             <a:ext cx="6451093" cy="3521612"/>
           </a:xfrm>
           <a:prstGeom prst="rect">
@@ -30358,7 +32847,7 @@
         </p:nvSpPr>
         <p:spPr>
           <a:xfrm>
-            <a:off x="2090795" y="5561904"/>
+            <a:off x="2005070" y="6203952"/>
             <a:ext cx="2498218" cy="276999"/>
           </a:xfrm>
           <a:prstGeom prst="rect">
@@ -30373,7 +32862,7 @@
           <a:lstStyle/>
           <a:p>
             <a:r>
-              <a:rPr lang="ko-KR" altLang="en-US" sz="1200" dirty="0">
+              <a:rPr lang="ko-KR" altLang="en-US" sz="1200">
                 <a:hlinkClick r:id="rId4">
                   <a:extLst>
                     <a:ext uri="{A12FA001-AC4F-418D-AE19-62706E023703}">
@@ -30385,12 +32874,339 @@
               <a:t>https://medium.com/</a:t>
             </a:r>
             <a:r>
-              <a:rPr lang="ko-KR" altLang="en-US" sz="1200" dirty="0"/>
+              <a:rPr lang="ko-KR" altLang="en-US" sz="1200"/>
               <a:t> </a:t>
             </a:r>
+            <a:endParaRPr lang="ko-KR" altLang="en-US" sz="1200" dirty="0"/>
           </a:p>
         </p:txBody>
       </p:sp>
+      <mc:AlternateContent xmlns:mc="http://schemas.openxmlformats.org/markup-compatibility/2006">
+        <mc:Choice xmlns:a14="http://schemas.microsoft.com/office/drawing/2010/main" Requires="a14">
+          <p:sp>
+            <p:nvSpPr>
+              <p:cNvPr id="4" name="TextBox 3">
+                <a:extLst>
+                  <a:ext uri="{FF2B5EF4-FFF2-40B4-BE49-F238E27FC236}">
+                    <a16:creationId xmlns:a16="http://schemas.microsoft.com/office/drawing/2014/main" id="{8BAB8783-03DD-7D12-9357-AE219CAA886F}"/>
+                  </a:ext>
+                </a:extLst>
+              </p:cNvPr>
+              <p:cNvSpPr txBox="1"/>
+              <p:nvPr/>
+            </p:nvSpPr>
+            <p:spPr>
+              <a:xfrm>
+                <a:off x="616456" y="1286560"/>
+                <a:ext cx="10508743" cy="957378"/>
+              </a:xfrm>
+              <a:prstGeom prst="rect">
+                <a:avLst/>
+              </a:prstGeom>
+              <a:noFill/>
+            </p:spPr>
+            <p:txBody>
+              <a:bodyPr wrap="square">
+                <a:spAutoFit/>
+              </a:bodyPr>
+              <a:lstStyle/>
+              <a:p>
+                <a:pPr>
+                  <a:lnSpc>
+                    <a:spcPct val="150000"/>
+                  </a:lnSpc>
+                </a:pPr>
+                <a14:m>
+                  <m:oMath xmlns:m="http://schemas.openxmlformats.org/officeDocument/2006/math">
+                    <m:r>
+                      <a:rPr lang="ko-KR" altLang="en-US" sz="2000" dirty="0" smtClean="0">
+                        <a:latin typeface="Cambria Math" panose="02040503050406030204" pitchFamily="18" charset="0"/>
+                      </a:rPr>
+                      <m:t>ⅇ</m:t>
+                    </m:r>
+                  </m:oMath>
+                </a14:m>
+                <a:r>
+                  <a:rPr lang="ko-KR" altLang="en-US" sz="2000" dirty="0">
+                    <a:latin typeface="맑은 고딕 Semilight" panose="020B0502040204020203" pitchFamily="50" charset="-127"/>
+                    <a:ea typeface="맑은 고딕 Semilight" panose="020B0502040204020203" pitchFamily="50" charset="-127"/>
+                    <a:cs typeface="맑은 고딕 Semilight" panose="020B0502040204020203" pitchFamily="50" charset="-127"/>
+                  </a:rPr>
+                  <a:t> 의 제곱 합의 평균인 </a:t>
+                </a:r>
+                <a:r>
+                  <a:rPr lang="en-US" altLang="ko-KR" sz="2000" dirty="0">
+                    <a:latin typeface="맑은 고딕 Semilight" panose="020B0502040204020203" pitchFamily="50" charset="-127"/>
+                    <a:ea typeface="맑은 고딕 Semilight" panose="020B0502040204020203" pitchFamily="50" charset="-127"/>
+                    <a:cs typeface="맑은 고딕 Semilight" panose="020B0502040204020203" pitchFamily="50" charset="-127"/>
+                  </a:rPr>
+                  <a:t>MSE(Mean Squared Error), </a:t>
+                </a:r>
+                <a:r>
+                  <a:rPr lang="ko-KR" altLang="en-US" sz="2000" dirty="0">
+                    <a:latin typeface="맑은 고딕 Semilight" panose="020B0502040204020203" pitchFamily="50" charset="-127"/>
+                    <a:ea typeface="맑은 고딕 Semilight" panose="020B0502040204020203" pitchFamily="50" charset="-127"/>
+                    <a:cs typeface="맑은 고딕 Semilight" panose="020B0502040204020203" pitchFamily="50" charset="-127"/>
+                  </a:rPr>
+                  <a:t>손실함수</a:t>
+                </a:r>
+                <a:r>
+                  <a:rPr lang="en-US" altLang="ko-KR" sz="2000" dirty="0">
+                    <a:latin typeface="맑은 고딕 Semilight" panose="020B0502040204020203" pitchFamily="50" charset="-127"/>
+                    <a:ea typeface="맑은 고딕 Semilight" panose="020B0502040204020203" pitchFamily="50" charset="-127"/>
+                    <a:cs typeface="맑은 고딕 Semilight" panose="020B0502040204020203" pitchFamily="50" charset="-127"/>
+                  </a:rPr>
+                  <a:t>(Loss Function)</a:t>
+                </a:r>
+                <a:r>
+                  <a:rPr lang="ko-KR" altLang="en-US" sz="2000" dirty="0">
+                    <a:latin typeface="맑은 고딕 Semilight" panose="020B0502040204020203" pitchFamily="50" charset="-127"/>
+                    <a:ea typeface="맑은 고딕 Semilight" panose="020B0502040204020203" pitchFamily="50" charset="-127"/>
+                    <a:cs typeface="맑은 고딕 Semilight" panose="020B0502040204020203" pitchFamily="50" charset="-127"/>
+                  </a:rPr>
+                  <a:t>을 최소화</a:t>
+                </a:r>
+                <a:r>
+                  <a:rPr lang="en-US" altLang="ko-KR" sz="2000" dirty="0">
+                    <a:latin typeface="맑은 고딕 Semilight" panose="020B0502040204020203" pitchFamily="50" charset="-127"/>
+                    <a:ea typeface="맑은 고딕 Semilight" panose="020B0502040204020203" pitchFamily="50" charset="-127"/>
+                    <a:cs typeface="맑은 고딕 Semilight" panose="020B0502040204020203" pitchFamily="50" charset="-127"/>
+                  </a:rPr>
+                  <a:t>(Optimization)</a:t>
+                </a:r>
+                <a:r>
+                  <a:rPr lang="ko-KR" altLang="en-US" sz="2000" dirty="0">
+                    <a:latin typeface="맑은 고딕 Semilight" panose="020B0502040204020203" pitchFamily="50" charset="-127"/>
+                    <a:ea typeface="맑은 고딕 Semilight" panose="020B0502040204020203" pitchFamily="50" charset="-127"/>
+                    <a:cs typeface="맑은 고딕 Semilight" panose="020B0502040204020203" pitchFamily="50" charset="-127"/>
+                  </a:rPr>
+                  <a:t>하는 계수</a:t>
+                </a:r>
+                <a:r>
+                  <a:rPr lang="en-US" altLang="ko-KR" sz="2000" dirty="0">
+                    <a:latin typeface="맑은 고딕 Semilight" panose="020B0502040204020203" pitchFamily="50" charset="-127"/>
+                    <a:ea typeface="맑은 고딕 Semilight" panose="020B0502040204020203" pitchFamily="50" charset="-127"/>
+                    <a:cs typeface="맑은 고딕 Semilight" panose="020B0502040204020203" pitchFamily="50" charset="-127"/>
+                  </a:rPr>
+                  <a:t>(Coefficients)</a:t>
+                </a:r>
+                <a:r>
+                  <a:rPr lang="ko-KR" altLang="en-US" sz="2000" dirty="0">
+                    <a:latin typeface="맑은 고딕 Semilight" panose="020B0502040204020203" pitchFamily="50" charset="-127"/>
+                    <a:ea typeface="맑은 고딕 Semilight" panose="020B0502040204020203" pitchFamily="50" charset="-127"/>
+                    <a:cs typeface="맑은 고딕 Semilight" panose="020B0502040204020203" pitchFamily="50" charset="-127"/>
+                  </a:rPr>
+                  <a:t>인 </a:t>
+                </a:r>
+                <a14:m>
+                  <m:oMath xmlns:m="http://schemas.openxmlformats.org/officeDocument/2006/math">
+                    <m:r>
+                      <a:rPr lang="ko-KR" altLang="en-US" sz="2000" i="1" dirty="0" smtClean="0">
+                        <a:latin typeface="Cambria Math" panose="02040503050406030204" pitchFamily="18" charset="0"/>
+                      </a:rPr>
+                      <m:t>𝜃</m:t>
+                    </m:r>
+                    <m:r>
+                      <a:rPr lang="ko-KR" altLang="en-US" sz="2000" i="0" dirty="0">
+                        <a:latin typeface="Cambria Math" panose="02040503050406030204" pitchFamily="18" charset="0"/>
+                      </a:rPr>
+                      <m:t>=</m:t>
+                    </m:r>
+                    <m:r>
+                      <a:rPr lang="en-US" altLang="ko-KR" sz="2000" b="0" i="0" dirty="0" smtClean="0">
+                        <a:latin typeface="Cambria Math" panose="02040503050406030204" pitchFamily="18" charset="0"/>
+                      </a:rPr>
+                      <m:t>[</m:t>
+                    </m:r>
+                    <m:sSub>
+                      <m:sSubPr>
+                        <m:ctrlPr>
+                          <a:rPr lang="ko-KR" altLang="en-US" sz="2000" i="1" dirty="0">
+                            <a:latin typeface="Cambria Math" panose="02040503050406030204" pitchFamily="18" charset="0"/>
+                          </a:rPr>
+                        </m:ctrlPr>
+                      </m:sSubPr>
+                      <m:e>
+                        <m:r>
+                          <a:rPr lang="ko-KR" altLang="en-US" sz="2000" i="1" dirty="0">
+                            <a:latin typeface="Cambria Math" panose="02040503050406030204" pitchFamily="18" charset="0"/>
+                          </a:rPr>
+                          <m:t>𝛽</m:t>
+                        </m:r>
+                      </m:e>
+                      <m:sub>
+                        <m:r>
+                          <a:rPr lang="ko-KR" altLang="en-US" sz="2000" i="0" dirty="0">
+                            <a:latin typeface="Cambria Math" panose="02040503050406030204" pitchFamily="18" charset="0"/>
+                          </a:rPr>
+                          <m:t>0</m:t>
+                        </m:r>
+                      </m:sub>
+                    </m:sSub>
+                    <m:r>
+                      <a:rPr lang="en-US" altLang="ko-KR" sz="2000" b="0" i="1" dirty="0" smtClean="0">
+                        <a:latin typeface="Cambria Math" panose="02040503050406030204" pitchFamily="18" charset="0"/>
+                      </a:rPr>
+                      <m:t>,  </m:t>
+                    </m:r>
+                    <m:sSub>
+                      <m:sSubPr>
+                        <m:ctrlPr>
+                          <a:rPr lang="ko-KR" altLang="en-US" sz="2000" i="1" dirty="0">
+                            <a:latin typeface="Cambria Math" panose="02040503050406030204" pitchFamily="18" charset="0"/>
+                          </a:rPr>
+                        </m:ctrlPr>
+                      </m:sSubPr>
+                      <m:e>
+                        <m:r>
+                          <a:rPr lang="ko-KR" altLang="en-US" sz="2000" i="1" dirty="0">
+                            <a:latin typeface="Cambria Math" panose="02040503050406030204" pitchFamily="18" charset="0"/>
+                          </a:rPr>
+                          <m:t>𝛽</m:t>
+                        </m:r>
+                      </m:e>
+                      <m:sub>
+                        <m:r>
+                          <a:rPr lang="ko-KR" altLang="en-US" sz="2000" i="0" dirty="0">
+                            <a:latin typeface="Cambria Math" panose="02040503050406030204" pitchFamily="18" charset="0"/>
+                          </a:rPr>
+                          <m:t>1</m:t>
+                        </m:r>
+                      </m:sub>
+                    </m:sSub>
+                    <m:r>
+                      <a:rPr lang="en-US" altLang="ko-KR" sz="2000" b="0" i="1" dirty="0" smtClean="0">
+                        <a:latin typeface="Cambria Math" panose="02040503050406030204" pitchFamily="18" charset="0"/>
+                      </a:rPr>
+                      <m:t>,  </m:t>
+                    </m:r>
+                    <m:sSub>
+                      <m:sSubPr>
+                        <m:ctrlPr>
+                          <a:rPr lang="ko-KR" altLang="en-US" sz="2000" i="1" dirty="0">
+                            <a:latin typeface="Cambria Math" panose="02040503050406030204" pitchFamily="18" charset="0"/>
+                          </a:rPr>
+                        </m:ctrlPr>
+                      </m:sSubPr>
+                      <m:e>
+                        <m:r>
+                          <a:rPr lang="ko-KR" altLang="en-US" sz="2000" i="1" dirty="0">
+                            <a:latin typeface="Cambria Math" panose="02040503050406030204" pitchFamily="18" charset="0"/>
+                          </a:rPr>
+                          <m:t>𝛽</m:t>
+                        </m:r>
+                      </m:e>
+                      <m:sub>
+                        <m:r>
+                          <a:rPr lang="ko-KR" altLang="en-US" sz="2000" i="0" dirty="0">
+                            <a:latin typeface="Cambria Math" panose="02040503050406030204" pitchFamily="18" charset="0"/>
+                          </a:rPr>
+                          <m:t>2</m:t>
+                        </m:r>
+                      </m:sub>
+                    </m:sSub>
+                    <m:r>
+                      <a:rPr lang="en-US" altLang="ko-KR" sz="2000" b="0" i="1" dirty="0" smtClean="0">
+                        <a:latin typeface="Cambria Math" panose="02040503050406030204" pitchFamily="18" charset="0"/>
+                      </a:rPr>
+                      <m:t>,  …...</m:t>
+                    </m:r>
+                    <m:r>
+                      <a:rPr lang="ko-KR" altLang="en-US" sz="2000" i="0" dirty="0">
+                        <a:latin typeface="Cambria Math" panose="02040503050406030204" pitchFamily="18" charset="0"/>
+                      </a:rPr>
+                      <m:t>⋅</m:t>
+                    </m:r>
+                    <m:sSub>
+                      <m:sSubPr>
+                        <m:ctrlPr>
+                          <a:rPr lang="ko-KR" altLang="en-US" sz="2000" i="1" dirty="0">
+                            <a:latin typeface="Cambria Math" panose="02040503050406030204" pitchFamily="18" charset="0"/>
+                          </a:rPr>
+                        </m:ctrlPr>
+                      </m:sSubPr>
+                      <m:e>
+                        <m:r>
+                          <a:rPr lang="ko-KR" altLang="en-US" sz="2000" i="1" dirty="0">
+                            <a:latin typeface="Cambria Math" panose="02040503050406030204" pitchFamily="18" charset="0"/>
+                          </a:rPr>
+                          <m:t>𝛽</m:t>
+                        </m:r>
+                      </m:e>
+                      <m:sub>
+                        <m:r>
+                          <a:rPr lang="ko-KR" altLang="en-US" sz="2000" i="1" dirty="0">
+                            <a:latin typeface="Cambria Math" panose="02040503050406030204" pitchFamily="18" charset="0"/>
+                          </a:rPr>
+                          <m:t>𝑛</m:t>
+                        </m:r>
+                      </m:sub>
+                    </m:sSub>
+                    <m:r>
+                      <a:rPr lang="en-US" altLang="ko-KR" sz="2000" b="0" i="1" dirty="0" smtClean="0">
+                        <a:latin typeface="Cambria Math" panose="02040503050406030204" pitchFamily="18" charset="0"/>
+                      </a:rPr>
+                      <m:t>]</m:t>
+                    </m:r>
+                  </m:oMath>
+                </a14:m>
+                <a:r>
+                  <a:rPr lang="ko-KR" altLang="en-US" sz="2000" dirty="0">
+                    <a:latin typeface="맑은 고딕 Semilight" panose="020B0502040204020203" pitchFamily="50" charset="-127"/>
+                    <a:ea typeface="맑은 고딕 Semilight" panose="020B0502040204020203" pitchFamily="50" charset="-127"/>
+                    <a:cs typeface="맑은 고딕 Semilight" panose="020B0502040204020203" pitchFamily="50" charset="-127"/>
+                  </a:rPr>
+                  <a:t> 을 찾아내라</a:t>
+                </a:r>
+              </a:p>
+            </p:txBody>
+          </p:sp>
+        </mc:Choice>
+        <mc:Fallback>
+          <p:sp>
+            <p:nvSpPr>
+              <p:cNvPr id="4" name="TextBox 3">
+                <a:extLst>
+                  <a:ext uri="{FF2B5EF4-FFF2-40B4-BE49-F238E27FC236}">
+                    <a16:creationId xmlns:a16="http://schemas.microsoft.com/office/drawing/2014/main" id="{8BAB8783-03DD-7D12-9357-AE219CAA886F}"/>
+                  </a:ext>
+                </a:extLst>
+              </p:cNvPr>
+              <p:cNvSpPr txBox="1">
+                <a:spLocks noRot="1" noChangeAspect="1" noMove="1" noResize="1" noEditPoints="1" noAdjustHandles="1" noChangeArrowheads="1" noChangeShapeType="1" noTextEdit="1"/>
+              </p:cNvSpPr>
+              <p:nvPr/>
+            </p:nvSpPr>
+            <p:spPr>
+              <a:xfrm>
+                <a:off x="616456" y="1286560"/>
+                <a:ext cx="10508743" cy="957378"/>
+              </a:xfrm>
+              <a:prstGeom prst="rect">
+                <a:avLst/>
+              </a:prstGeom>
+              <a:blipFill>
+                <a:blip r:embed="rId5"/>
+                <a:stretch>
+                  <a:fillRect l="-580" b="-10191"/>
+                </a:stretch>
+              </a:blipFill>
+            </p:spPr>
+            <p:txBody>
+              <a:bodyPr/>
+              <a:lstStyle/>
+              <a:p>
+                <a:r>
+                  <a:rPr lang="ko-KR" altLang="en-US">
+                    <a:noFill/>
+                  </a:rPr>
+                  <a:t> </a:t>
+                </a:r>
+              </a:p>
+            </p:txBody>
+          </p:sp>
+        </mc:Fallback>
+      </mc:AlternateContent>
     </p:spTree>
     <p:extLst>
       <p:ext uri="{BB962C8B-B14F-4D97-AF65-F5344CB8AC3E}">
